--- a/docs/plots/carbo/jx_carbo_linsubhr_egfrdisc_anemia2.pptx
+++ b/docs/plots/carbo/jx_carbo_linsubhr_egfrdisc_anemia2.pptx
@@ -3003,515 +3003,521 @@
           <p:spPr>
             <a:xfrm>
               <a:off x="1172049" y="2073503"/>
-              <a:ext cx="7090630" cy="3240563"/>
+              <a:ext cx="7090630" cy="3223040"/>
             </a:xfrm>
             <a:custGeom>
               <a:avLst/>
               <a:pathLst>
-                <a:path w="7090630" h="3240563">
+                <a:path w="7090630" h="3223040">
                   <a:moveTo>
-                    <a:pt x="2337504" y="0"/>
+                    <a:pt x="2183453" y="0"/>
                   </a:moveTo>
                   <a:lnTo>
-                    <a:pt x="2363543" y="51074"/>
-                  </a:lnTo>
-                  <a:lnTo>
-                    <a:pt x="2435165" y="186034"/>
-                  </a:lnTo>
-                  <a:lnTo>
-                    <a:pt x="2506788" y="315689"/>
-                  </a:lnTo>
-                  <a:lnTo>
-                    <a:pt x="2578410" y="440246"/>
-                  </a:lnTo>
-                  <a:lnTo>
-                    <a:pt x="2650033" y="559906"/>
-                  </a:lnTo>
-                  <a:lnTo>
-                    <a:pt x="2721655" y="674861"/>
-                  </a:lnTo>
-                  <a:lnTo>
-                    <a:pt x="2793278" y="785296"/>
-                  </a:lnTo>
-                  <a:lnTo>
-                    <a:pt x="2864901" y="891390"/>
-                  </a:lnTo>
-                  <a:lnTo>
-                    <a:pt x="2936523" y="993312"/>
-                  </a:lnTo>
-                  <a:lnTo>
-                    <a:pt x="3008146" y="1091227"/>
-                  </a:lnTo>
-                  <a:lnTo>
-                    <a:pt x="3079768" y="1185293"/>
-                  </a:lnTo>
-                  <a:lnTo>
-                    <a:pt x="3151391" y="1275660"/>
-                  </a:lnTo>
-                  <a:lnTo>
-                    <a:pt x="3223013" y="1362474"/>
-                  </a:lnTo>
-                  <a:lnTo>
-                    <a:pt x="3294636" y="1445875"/>
-                  </a:lnTo>
-                  <a:lnTo>
-                    <a:pt x="3366258" y="1525997"/>
-                  </a:lnTo>
-                  <a:lnTo>
-                    <a:pt x="3437881" y="1602969"/>
-                  </a:lnTo>
-                  <a:lnTo>
-                    <a:pt x="3509503" y="1676915"/>
-                  </a:lnTo>
-                  <a:lnTo>
-                    <a:pt x="3581126" y="1747953"/>
-                  </a:lnTo>
-                  <a:lnTo>
-                    <a:pt x="3652748" y="1816198"/>
-                  </a:lnTo>
-                  <a:lnTo>
-                    <a:pt x="3724371" y="1881760"/>
-                  </a:lnTo>
-                  <a:lnTo>
-                    <a:pt x="3795993" y="1944745"/>
-                  </a:lnTo>
-                  <a:lnTo>
-                    <a:pt x="3867616" y="2005253"/>
-                  </a:lnTo>
-                  <a:lnTo>
-                    <a:pt x="3939238" y="2063382"/>
-                  </a:lnTo>
-                  <a:lnTo>
-                    <a:pt x="4010861" y="2119226"/>
-                  </a:lnTo>
-                  <a:lnTo>
-                    <a:pt x="4082483" y="2172874"/>
-                  </a:lnTo>
-                  <a:lnTo>
-                    <a:pt x="4154106" y="2224413"/>
-                  </a:lnTo>
-                  <a:lnTo>
-                    <a:pt x="4225729" y="2273926"/>
-                  </a:lnTo>
-                  <a:lnTo>
-                    <a:pt x="4297351" y="2321492"/>
-                  </a:lnTo>
-                  <a:lnTo>
-                    <a:pt x="4368974" y="2367187"/>
-                  </a:lnTo>
-                  <a:lnTo>
-                    <a:pt x="4440596" y="2411087"/>
-                  </a:lnTo>
-                  <a:lnTo>
-                    <a:pt x="4512219" y="2453260"/>
-                  </a:lnTo>
-                  <a:lnTo>
-                    <a:pt x="4583841" y="2493775"/>
-                  </a:lnTo>
-                  <a:lnTo>
-                    <a:pt x="4655464" y="2532697"/>
-                  </a:lnTo>
-                  <a:lnTo>
-                    <a:pt x="4727086" y="2570089"/>
-                  </a:lnTo>
-                  <a:lnTo>
-                    <a:pt x="4798709" y="2606011"/>
-                  </a:lnTo>
-                  <a:lnTo>
-                    <a:pt x="4870331" y="2640520"/>
-                  </a:lnTo>
-                  <a:lnTo>
-                    <a:pt x="4941954" y="2654372"/>
-                  </a:lnTo>
-                  <a:lnTo>
-                    <a:pt x="5013576" y="2654524"/>
-                  </a:lnTo>
-                  <a:lnTo>
-                    <a:pt x="5085199" y="2654675"/>
-                  </a:lnTo>
-                  <a:lnTo>
-                    <a:pt x="5156821" y="2654826"/>
-                  </a:lnTo>
-                  <a:lnTo>
-                    <a:pt x="5228444" y="2654978"/>
-                  </a:lnTo>
-                  <a:lnTo>
-                    <a:pt x="5300066" y="2655129"/>
-                  </a:lnTo>
-                  <a:lnTo>
-                    <a:pt x="5371689" y="2655280"/>
-                  </a:lnTo>
-                  <a:lnTo>
-                    <a:pt x="5443311" y="2655432"/>
-                  </a:lnTo>
-                  <a:lnTo>
-                    <a:pt x="5514934" y="2655583"/>
-                  </a:lnTo>
-                  <a:lnTo>
-                    <a:pt x="5586557" y="2655734"/>
-                  </a:lnTo>
-                  <a:lnTo>
-                    <a:pt x="5658179" y="2655885"/>
-                  </a:lnTo>
-                  <a:lnTo>
-                    <a:pt x="5729802" y="2656037"/>
-                  </a:lnTo>
-                  <a:lnTo>
-                    <a:pt x="5801424" y="2656188"/>
-                  </a:lnTo>
-                  <a:lnTo>
-                    <a:pt x="5873047" y="2656339"/>
-                  </a:lnTo>
-                  <a:lnTo>
-                    <a:pt x="5944669" y="2656490"/>
-                  </a:lnTo>
-                  <a:lnTo>
-                    <a:pt x="6016292" y="2656641"/>
-                  </a:lnTo>
-                  <a:lnTo>
-                    <a:pt x="6087914" y="2656792"/>
-                  </a:lnTo>
-                  <a:lnTo>
-                    <a:pt x="6159537" y="2656943"/>
-                  </a:lnTo>
-                  <a:lnTo>
-                    <a:pt x="6231159" y="2657094"/>
-                  </a:lnTo>
-                  <a:lnTo>
-                    <a:pt x="6302782" y="2657245"/>
-                  </a:lnTo>
-                  <a:lnTo>
-                    <a:pt x="6374404" y="2657396"/>
-                  </a:lnTo>
-                  <a:lnTo>
-                    <a:pt x="6446027" y="2657547"/>
-                  </a:lnTo>
-                  <a:lnTo>
-                    <a:pt x="6517649" y="2657698"/>
-                  </a:lnTo>
-                  <a:lnTo>
-                    <a:pt x="6589272" y="2657848"/>
-                  </a:lnTo>
-                  <a:lnTo>
-                    <a:pt x="6660894" y="2657999"/>
-                  </a:lnTo>
-                  <a:lnTo>
-                    <a:pt x="6732517" y="2658150"/>
-                  </a:lnTo>
-                  <a:lnTo>
-                    <a:pt x="6804139" y="2658301"/>
-                  </a:lnTo>
-                  <a:lnTo>
-                    <a:pt x="6875762" y="2658451"/>
-                  </a:lnTo>
-                  <a:lnTo>
-                    <a:pt x="6947385" y="2658602"/>
-                  </a:lnTo>
-                  <a:lnTo>
-                    <a:pt x="7019007" y="2658753"/>
-                  </a:lnTo>
-                  <a:lnTo>
-                    <a:pt x="7090630" y="2658903"/>
-                  </a:lnTo>
-                  <a:lnTo>
-                    <a:pt x="7090630" y="3240563"/>
-                  </a:lnTo>
-                  <a:lnTo>
-                    <a:pt x="7019007" y="3230610"/>
-                  </a:lnTo>
-                  <a:lnTo>
-                    <a:pt x="6947385" y="3220251"/>
-                  </a:lnTo>
-                  <a:lnTo>
-                    <a:pt x="6875762" y="3209467"/>
-                  </a:lnTo>
-                  <a:lnTo>
-                    <a:pt x="6804139" y="3198242"/>
-                  </a:lnTo>
-                  <a:lnTo>
-                    <a:pt x="6732517" y="3186557"/>
-                  </a:lnTo>
-                  <a:lnTo>
-                    <a:pt x="6660894" y="3174395"/>
-                  </a:lnTo>
-                  <a:lnTo>
-                    <a:pt x="6589272" y="3161734"/>
-                  </a:lnTo>
-                  <a:lnTo>
-                    <a:pt x="6517649" y="3148556"/>
-                  </a:lnTo>
-                  <a:lnTo>
-                    <a:pt x="6446027" y="3134838"/>
-                  </a:lnTo>
-                  <a:lnTo>
-                    <a:pt x="6374404" y="3120559"/>
-                  </a:lnTo>
-                  <a:lnTo>
-                    <a:pt x="6302782" y="3105695"/>
-                  </a:lnTo>
-                  <a:lnTo>
-                    <a:pt x="6231159" y="3090223"/>
-                  </a:lnTo>
-                  <a:lnTo>
-                    <a:pt x="6159537" y="3074118"/>
-                  </a:lnTo>
-                  <a:lnTo>
-                    <a:pt x="6087914" y="3057354"/>
-                  </a:lnTo>
-                  <a:lnTo>
-                    <a:pt x="6016292" y="3039903"/>
-                  </a:lnTo>
-                  <a:lnTo>
-                    <a:pt x="5944669" y="3021739"/>
-                  </a:lnTo>
-                  <a:lnTo>
-                    <a:pt x="5873047" y="3002831"/>
-                  </a:lnTo>
-                  <a:lnTo>
-                    <a:pt x="5801424" y="2983149"/>
-                  </a:lnTo>
-                  <a:lnTo>
-                    <a:pt x="5729802" y="2962662"/>
-                  </a:lnTo>
-                  <a:lnTo>
-                    <a:pt x="5658179" y="2941336"/>
-                  </a:lnTo>
-                  <a:lnTo>
-                    <a:pt x="5586557" y="2919138"/>
-                  </a:lnTo>
-                  <a:lnTo>
-                    <a:pt x="5514934" y="2896031"/>
-                  </a:lnTo>
-                  <a:lnTo>
-                    <a:pt x="5443311" y="2871979"/>
-                  </a:lnTo>
-                  <a:lnTo>
-                    <a:pt x="5371689" y="2846942"/>
-                  </a:lnTo>
-                  <a:lnTo>
-                    <a:pt x="5300066" y="2820880"/>
-                  </a:lnTo>
-                  <a:lnTo>
-                    <a:pt x="5228444" y="2793752"/>
-                  </a:lnTo>
-                  <a:lnTo>
-                    <a:pt x="5156821" y="2765513"/>
-                  </a:lnTo>
-                  <a:lnTo>
-                    <a:pt x="5085199" y="2736119"/>
-                  </a:lnTo>
-                  <a:lnTo>
-                    <a:pt x="5013576" y="2705522"/>
-                  </a:lnTo>
-                  <a:lnTo>
-                    <a:pt x="4941954" y="2673673"/>
-                  </a:lnTo>
-                  <a:lnTo>
-                    <a:pt x="4870331" y="2654221"/>
-                  </a:lnTo>
-                  <a:lnTo>
-                    <a:pt x="4798709" y="2654069"/>
-                  </a:lnTo>
-                  <a:lnTo>
-                    <a:pt x="4727086" y="2653918"/>
-                  </a:lnTo>
-                  <a:lnTo>
-                    <a:pt x="4655464" y="2653766"/>
-                  </a:lnTo>
-                  <a:lnTo>
-                    <a:pt x="4583841" y="2653615"/>
-                  </a:lnTo>
-                  <a:lnTo>
-                    <a:pt x="4512219" y="2653463"/>
-                  </a:lnTo>
-                  <a:lnTo>
-                    <a:pt x="4440596" y="2653311"/>
-                  </a:lnTo>
-                  <a:lnTo>
-                    <a:pt x="4368974" y="2653160"/>
-                  </a:lnTo>
-                  <a:lnTo>
-                    <a:pt x="4297351" y="2653008"/>
-                  </a:lnTo>
-                  <a:lnTo>
-                    <a:pt x="4225729" y="2652856"/>
-                  </a:lnTo>
-                  <a:lnTo>
-                    <a:pt x="4154106" y="2652704"/>
-                  </a:lnTo>
-                  <a:lnTo>
-                    <a:pt x="4082483" y="2652553"/>
-                  </a:lnTo>
-                  <a:lnTo>
-                    <a:pt x="4010861" y="2652401"/>
-                  </a:lnTo>
-                  <a:lnTo>
-                    <a:pt x="3939238" y="2652249"/>
-                  </a:lnTo>
-                  <a:lnTo>
-                    <a:pt x="3867616" y="2652097"/>
-                  </a:lnTo>
-                  <a:lnTo>
-                    <a:pt x="3795993" y="2651945"/>
-                  </a:lnTo>
-                  <a:lnTo>
-                    <a:pt x="3724371" y="2651793"/>
-                  </a:lnTo>
-                  <a:lnTo>
-                    <a:pt x="3652748" y="2651642"/>
-                  </a:lnTo>
-                  <a:lnTo>
-                    <a:pt x="3581126" y="2651490"/>
-                  </a:lnTo>
-                  <a:lnTo>
-                    <a:pt x="3509503" y="2651338"/>
-                  </a:lnTo>
-                  <a:lnTo>
-                    <a:pt x="3437881" y="2651186"/>
-                  </a:lnTo>
-                  <a:lnTo>
-                    <a:pt x="3366258" y="2651033"/>
-                  </a:lnTo>
-                  <a:lnTo>
-                    <a:pt x="3294636" y="2650881"/>
-                  </a:lnTo>
-                  <a:lnTo>
-                    <a:pt x="3223013" y="2650729"/>
-                  </a:lnTo>
-                  <a:lnTo>
-                    <a:pt x="3151391" y="2650577"/>
-                  </a:lnTo>
-                  <a:lnTo>
-                    <a:pt x="3079768" y="2650425"/>
-                  </a:lnTo>
-                  <a:lnTo>
-                    <a:pt x="3008146" y="2650273"/>
-                  </a:lnTo>
-                  <a:lnTo>
-                    <a:pt x="2936523" y="2650121"/>
-                  </a:lnTo>
-                  <a:lnTo>
-                    <a:pt x="2864901" y="2649968"/>
-                  </a:lnTo>
-                  <a:lnTo>
-                    <a:pt x="2793278" y="2649816"/>
-                  </a:lnTo>
-                  <a:lnTo>
-                    <a:pt x="2721655" y="2649664"/>
-                  </a:lnTo>
-                  <a:lnTo>
-                    <a:pt x="2650033" y="2649511"/>
-                  </a:lnTo>
-                  <a:lnTo>
-                    <a:pt x="2578410" y="2649359"/>
-                  </a:lnTo>
-                  <a:lnTo>
-                    <a:pt x="2506788" y="2649207"/>
-                  </a:lnTo>
-                  <a:lnTo>
-                    <a:pt x="2435165" y="2649054"/>
-                  </a:lnTo>
-                  <a:lnTo>
-                    <a:pt x="2363543" y="2648902"/>
-                  </a:lnTo>
-                  <a:lnTo>
-                    <a:pt x="2291920" y="2648749"/>
-                  </a:lnTo>
-                  <a:lnTo>
-                    <a:pt x="2220298" y="2648597"/>
-                  </a:lnTo>
-                  <a:lnTo>
-                    <a:pt x="2148675" y="2648444"/>
-                  </a:lnTo>
-                  <a:lnTo>
-                    <a:pt x="2077053" y="2648292"/>
-                  </a:lnTo>
-                  <a:lnTo>
-                    <a:pt x="2005430" y="2648139"/>
-                  </a:lnTo>
-                  <a:lnTo>
-                    <a:pt x="1933808" y="2647987"/>
-                  </a:lnTo>
-                  <a:lnTo>
-                    <a:pt x="1862185" y="2647834"/>
-                  </a:lnTo>
-                  <a:lnTo>
-                    <a:pt x="1790563" y="2647681"/>
-                  </a:lnTo>
-                  <a:lnTo>
-                    <a:pt x="1718940" y="2647529"/>
-                  </a:lnTo>
-                  <a:lnTo>
-                    <a:pt x="1647318" y="2647376"/>
-                  </a:lnTo>
-                  <a:lnTo>
-                    <a:pt x="1575695" y="2647223"/>
-                  </a:lnTo>
-                  <a:lnTo>
-                    <a:pt x="1504073" y="2647070"/>
-                  </a:lnTo>
-                  <a:lnTo>
-                    <a:pt x="1432450" y="2646918"/>
-                  </a:lnTo>
-                  <a:lnTo>
-                    <a:pt x="1360827" y="2646765"/>
-                  </a:lnTo>
-                  <a:lnTo>
-                    <a:pt x="1289205" y="2646612"/>
-                  </a:lnTo>
-                  <a:lnTo>
-                    <a:pt x="1217582" y="2646459"/>
-                  </a:lnTo>
-                  <a:lnTo>
-                    <a:pt x="1145960" y="2646306"/>
-                  </a:lnTo>
-                  <a:lnTo>
-                    <a:pt x="1074337" y="2646153"/>
-                  </a:lnTo>
-                  <a:lnTo>
-                    <a:pt x="1002715" y="2646000"/>
-                  </a:lnTo>
-                  <a:lnTo>
-                    <a:pt x="931092" y="2645847"/>
-                  </a:lnTo>
-                  <a:lnTo>
-                    <a:pt x="859470" y="2645694"/>
-                  </a:lnTo>
-                  <a:lnTo>
-                    <a:pt x="787847" y="2645541"/>
-                  </a:lnTo>
-                  <a:lnTo>
-                    <a:pt x="716225" y="2645388"/>
-                  </a:lnTo>
-                  <a:lnTo>
-                    <a:pt x="644602" y="2645235"/>
-                  </a:lnTo>
-                  <a:lnTo>
-                    <a:pt x="572980" y="2645082"/>
-                  </a:lnTo>
-                  <a:lnTo>
-                    <a:pt x="501357" y="2644929"/>
-                  </a:lnTo>
-                  <a:lnTo>
-                    <a:pt x="429735" y="2644775"/>
-                  </a:lnTo>
-                  <a:lnTo>
-                    <a:pt x="358112" y="2644622"/>
-                  </a:lnTo>
-                  <a:lnTo>
-                    <a:pt x="286490" y="2644469"/>
-                  </a:lnTo>
-                  <a:lnTo>
-                    <a:pt x="214867" y="2644316"/>
-                  </a:lnTo>
-                  <a:lnTo>
-                    <a:pt x="143245" y="2644162"/>
-                  </a:lnTo>
-                  <a:lnTo>
-                    <a:pt x="71622" y="2644009"/>
-                  </a:lnTo>
-                  <a:lnTo>
-                    <a:pt x="0" y="2643856"/>
+                    <a:pt x="2220298" y="67762"/>
+                  </a:lnTo>
+                  <a:lnTo>
+                    <a:pt x="2291920" y="194594"/>
+                  </a:lnTo>
+                  <a:lnTo>
+                    <a:pt x="2363543" y="316716"/>
+                  </a:lnTo>
+                  <a:lnTo>
+                    <a:pt x="2435165" y="434304"/>
+                  </a:lnTo>
+                  <a:lnTo>
+                    <a:pt x="2506788" y="547526"/>
+                  </a:lnTo>
+                  <a:lnTo>
+                    <a:pt x="2578410" y="656545"/>
+                  </a:lnTo>
+                  <a:lnTo>
+                    <a:pt x="2650033" y="761515"/>
+                  </a:lnTo>
+                  <a:lnTo>
+                    <a:pt x="2721655" y="862589"/>
+                  </a:lnTo>
+                  <a:lnTo>
+                    <a:pt x="2793278" y="959909"/>
+                  </a:lnTo>
+                  <a:lnTo>
+                    <a:pt x="2864901" y="1053616"/>
+                  </a:lnTo>
+                  <a:lnTo>
+                    <a:pt x="2936523" y="1143844"/>
+                  </a:lnTo>
+                  <a:lnTo>
+                    <a:pt x="3008146" y="1230722"/>
+                  </a:lnTo>
+                  <a:lnTo>
+                    <a:pt x="3079768" y="1314374"/>
+                  </a:lnTo>
+                  <a:lnTo>
+                    <a:pt x="3151391" y="1394920"/>
+                  </a:lnTo>
+                  <a:lnTo>
+                    <a:pt x="3223013" y="1472476"/>
+                  </a:lnTo>
+                  <a:lnTo>
+                    <a:pt x="3294636" y="1547152"/>
+                  </a:lnTo>
+                  <a:lnTo>
+                    <a:pt x="3366258" y="1619056"/>
+                  </a:lnTo>
+                  <a:lnTo>
+                    <a:pt x="3437881" y="1688289"/>
+                  </a:lnTo>
+                  <a:lnTo>
+                    <a:pt x="3509503" y="1754953"/>
+                  </a:lnTo>
+                  <a:lnTo>
+                    <a:pt x="3581126" y="1819141"/>
+                  </a:lnTo>
+                  <a:lnTo>
+                    <a:pt x="3652748" y="1880946"/>
+                  </a:lnTo>
+                  <a:lnTo>
+                    <a:pt x="3724371" y="1940456"/>
+                  </a:lnTo>
+                  <a:lnTo>
+                    <a:pt x="3795993" y="1997756"/>
+                  </a:lnTo>
+                  <a:lnTo>
+                    <a:pt x="3867616" y="2052929"/>
+                  </a:lnTo>
+                  <a:lnTo>
+                    <a:pt x="3939238" y="2106054"/>
+                  </a:lnTo>
+                  <a:lnTo>
+                    <a:pt x="4010861" y="2157206"/>
+                  </a:lnTo>
+                  <a:lnTo>
+                    <a:pt x="4082483" y="2206459"/>
+                  </a:lnTo>
+                  <a:lnTo>
+                    <a:pt x="4154106" y="2253883"/>
+                  </a:lnTo>
+                  <a:lnTo>
+                    <a:pt x="4225729" y="2299546"/>
+                  </a:lnTo>
+                  <a:lnTo>
+                    <a:pt x="4297351" y="2343514"/>
+                  </a:lnTo>
+                  <a:lnTo>
+                    <a:pt x="4368974" y="2385850"/>
+                  </a:lnTo>
+                  <a:lnTo>
+                    <a:pt x="4440596" y="2426613"/>
+                  </a:lnTo>
+                  <a:lnTo>
+                    <a:pt x="4512219" y="2465864"/>
+                  </a:lnTo>
+                  <a:lnTo>
+                    <a:pt x="4583841" y="2503656"/>
+                  </a:lnTo>
+                  <a:lnTo>
+                    <a:pt x="4655464" y="2540046"/>
+                  </a:lnTo>
+                  <a:lnTo>
+                    <a:pt x="4727086" y="2575084"/>
+                  </a:lnTo>
+                  <a:lnTo>
+                    <a:pt x="4798709" y="2608822"/>
+                  </a:lnTo>
+                  <a:lnTo>
+                    <a:pt x="4870331" y="2641307"/>
+                  </a:lnTo>
+                  <a:lnTo>
+                    <a:pt x="4941954" y="2650725"/>
+                  </a:lnTo>
+                  <a:lnTo>
+                    <a:pt x="5013576" y="2644658"/>
+                  </a:lnTo>
+                  <a:lnTo>
+                    <a:pt x="5085199" y="2638546"/>
+                  </a:lnTo>
+                  <a:lnTo>
+                    <a:pt x="5156821" y="2632390"/>
+                  </a:lnTo>
+                  <a:lnTo>
+                    <a:pt x="5228444" y="2626189"/>
+                  </a:lnTo>
+                  <a:lnTo>
+                    <a:pt x="5300066" y="2619943"/>
+                  </a:lnTo>
+                  <a:lnTo>
+                    <a:pt x="5371689" y="2613652"/>
+                  </a:lnTo>
+                  <a:lnTo>
+                    <a:pt x="5443311" y="2607314"/>
+                  </a:lnTo>
+                  <a:lnTo>
+                    <a:pt x="5514934" y="2600931"/>
+                  </a:lnTo>
+                  <a:lnTo>
+                    <a:pt x="5586557" y="2594501"/>
+                  </a:lnTo>
+                  <a:lnTo>
+                    <a:pt x="5658179" y="2588024"/>
+                  </a:lnTo>
+                  <a:lnTo>
+                    <a:pt x="5729802" y="2581500"/>
+                  </a:lnTo>
+                  <a:lnTo>
+                    <a:pt x="5801424" y="2574928"/>
+                  </a:lnTo>
+                  <a:lnTo>
+                    <a:pt x="5873047" y="2568309"/>
+                  </a:lnTo>
+                  <a:lnTo>
+                    <a:pt x="5944669" y="2561641"/>
+                  </a:lnTo>
+                  <a:lnTo>
+                    <a:pt x="6016292" y="2554925"/>
+                  </a:lnTo>
+                  <a:lnTo>
+                    <a:pt x="6087914" y="2548160"/>
+                  </a:lnTo>
+                  <a:lnTo>
+                    <a:pt x="6159537" y="2541345"/>
+                  </a:lnTo>
+                  <a:lnTo>
+                    <a:pt x="6231159" y="2534481"/>
+                  </a:lnTo>
+                  <a:lnTo>
+                    <a:pt x="6302782" y="2527567"/>
+                  </a:lnTo>
+                  <a:lnTo>
+                    <a:pt x="6374404" y="2520603"/>
+                  </a:lnTo>
+                  <a:lnTo>
+                    <a:pt x="6446027" y="2513588"/>
+                  </a:lnTo>
+                  <a:lnTo>
+                    <a:pt x="6517649" y="2506521"/>
+                  </a:lnTo>
+                  <a:lnTo>
+                    <a:pt x="6589272" y="2499404"/>
+                  </a:lnTo>
+                  <a:lnTo>
+                    <a:pt x="6660894" y="2492234"/>
+                  </a:lnTo>
+                  <a:lnTo>
+                    <a:pt x="6732517" y="2485012"/>
+                  </a:lnTo>
+                  <a:lnTo>
+                    <a:pt x="6804139" y="2477738"/>
+                  </a:lnTo>
+                  <a:lnTo>
+                    <a:pt x="6875762" y="2470411"/>
+                  </a:lnTo>
+                  <a:lnTo>
+                    <a:pt x="6947385" y="2463030"/>
+                  </a:lnTo>
+                  <a:lnTo>
+                    <a:pt x="7019007" y="2455595"/>
+                  </a:lnTo>
+                  <a:lnTo>
+                    <a:pt x="7090630" y="2448107"/>
+                  </a:lnTo>
+                  <a:lnTo>
+                    <a:pt x="7090630" y="3223040"/>
+                  </a:lnTo>
+                  <a:lnTo>
+                    <a:pt x="7019007" y="3212987"/>
+                  </a:lnTo>
+                  <a:lnTo>
+                    <a:pt x="6947385" y="3202546"/>
+                  </a:lnTo>
+                  <a:lnTo>
+                    <a:pt x="6875762" y="3191703"/>
+                  </a:lnTo>
+                  <a:lnTo>
+                    <a:pt x="6804139" y="3180441"/>
+                  </a:lnTo>
+                  <a:lnTo>
+                    <a:pt x="6732517" y="3168746"/>
+                  </a:lnTo>
+                  <a:lnTo>
+                    <a:pt x="6660894" y="3156599"/>
+                  </a:lnTo>
+                  <a:lnTo>
+                    <a:pt x="6589272" y="3143984"/>
+                  </a:lnTo>
+                  <a:lnTo>
+                    <a:pt x="6517649" y="3130883"/>
+                  </a:lnTo>
+                  <a:lnTo>
+                    <a:pt x="6446027" y="3117276"/>
+                  </a:lnTo>
+                  <a:lnTo>
+                    <a:pt x="6374404" y="3103145"/>
+                  </a:lnTo>
+                  <a:lnTo>
+                    <a:pt x="6302782" y="3088469"/>
+                  </a:lnTo>
+                  <a:lnTo>
+                    <a:pt x="6231159" y="3073226"/>
+                  </a:lnTo>
+                  <a:lnTo>
+                    <a:pt x="6159537" y="3057397"/>
+                  </a:lnTo>
+                  <a:lnTo>
+                    <a:pt x="6087914" y="3040956"/>
+                  </a:lnTo>
+                  <a:lnTo>
+                    <a:pt x="6016292" y="3023882"/>
+                  </a:lnTo>
+                  <a:lnTo>
+                    <a:pt x="5944669" y="3006149"/>
+                  </a:lnTo>
+                  <a:lnTo>
+                    <a:pt x="5873047" y="2987733"/>
+                  </a:lnTo>
+                  <a:lnTo>
+                    <a:pt x="5801424" y="2968607"/>
+                  </a:lnTo>
+                  <a:lnTo>
+                    <a:pt x="5729802" y="2948743"/>
+                  </a:lnTo>
+                  <a:lnTo>
+                    <a:pt x="5658179" y="2928112"/>
+                  </a:lnTo>
+                  <a:lnTo>
+                    <a:pt x="5586557" y="2906687"/>
+                  </a:lnTo>
+                  <a:lnTo>
+                    <a:pt x="5514934" y="2884435"/>
+                  </a:lnTo>
+                  <a:lnTo>
+                    <a:pt x="5443311" y="2861325"/>
+                  </a:lnTo>
+                  <a:lnTo>
+                    <a:pt x="5371689" y="2837325"/>
+                  </a:lnTo>
+                  <a:lnTo>
+                    <a:pt x="5300066" y="2812398"/>
+                  </a:lnTo>
+                  <a:lnTo>
+                    <a:pt x="5228444" y="2786511"/>
+                  </a:lnTo>
+                  <a:lnTo>
+                    <a:pt x="5156821" y="2759625"/>
+                  </a:lnTo>
+                  <a:lnTo>
+                    <a:pt x="5085199" y="2731702"/>
+                  </a:lnTo>
+                  <a:lnTo>
+                    <a:pt x="5013576" y="2702703"/>
+                  </a:lnTo>
+                  <a:lnTo>
+                    <a:pt x="4941954" y="2672586"/>
+                  </a:lnTo>
+                  <a:lnTo>
+                    <a:pt x="4870331" y="2656749"/>
+                  </a:lnTo>
+                  <a:lnTo>
+                    <a:pt x="4798709" y="2662729"/>
+                  </a:lnTo>
+                  <a:lnTo>
+                    <a:pt x="4727086" y="2668665"/>
+                  </a:lnTo>
+                  <a:lnTo>
+                    <a:pt x="4655464" y="2674559"/>
+                  </a:lnTo>
+                  <a:lnTo>
+                    <a:pt x="4583841" y="2680410"/>
+                  </a:lnTo>
+                  <a:lnTo>
+                    <a:pt x="4512219" y="2686219"/>
+                  </a:lnTo>
+                  <a:lnTo>
+                    <a:pt x="4440596" y="2691986"/>
+                  </a:lnTo>
+                  <a:lnTo>
+                    <a:pt x="4368974" y="2697711"/>
+                  </a:lnTo>
+                  <a:lnTo>
+                    <a:pt x="4297351" y="2703395"/>
+                  </a:lnTo>
+                  <a:lnTo>
+                    <a:pt x="4225729" y="2709038"/>
+                  </a:lnTo>
+                  <a:lnTo>
+                    <a:pt x="4154106" y="2714640"/>
+                  </a:lnTo>
+                  <a:lnTo>
+                    <a:pt x="4082483" y="2720201"/>
+                  </a:lnTo>
+                  <a:lnTo>
+                    <a:pt x="4010861" y="2725722"/>
+                  </a:lnTo>
+                  <a:lnTo>
+                    <a:pt x="3939238" y="2731203"/>
+                  </a:lnTo>
+                  <a:lnTo>
+                    <a:pt x="3867616" y="2736645"/>
+                  </a:lnTo>
+                  <a:lnTo>
+                    <a:pt x="3795993" y="2742047"/>
+                  </a:lnTo>
+                  <a:lnTo>
+                    <a:pt x="3724371" y="2747410"/>
+                  </a:lnTo>
+                  <a:lnTo>
+                    <a:pt x="3652748" y="2752735"/>
+                  </a:lnTo>
+                  <a:lnTo>
+                    <a:pt x="3581126" y="2758020"/>
+                  </a:lnTo>
+                  <a:lnTo>
+                    <a:pt x="3509503" y="2763268"/>
+                  </a:lnTo>
+                  <a:lnTo>
+                    <a:pt x="3437881" y="2768478"/>
+                  </a:lnTo>
+                  <a:lnTo>
+                    <a:pt x="3366258" y="2773650"/>
+                  </a:lnTo>
+                  <a:lnTo>
+                    <a:pt x="3294636" y="2778785"/>
+                  </a:lnTo>
+                  <a:lnTo>
+                    <a:pt x="3223013" y="2783882"/>
+                  </a:lnTo>
+                  <a:lnTo>
+                    <a:pt x="3151391" y="2788943"/>
+                  </a:lnTo>
+                  <a:lnTo>
+                    <a:pt x="3079768" y="2793967"/>
+                  </a:lnTo>
+                  <a:lnTo>
+                    <a:pt x="3008146" y="2798954"/>
+                  </a:lnTo>
+                  <a:lnTo>
+                    <a:pt x="2936523" y="2803906"/>
+                  </a:lnTo>
+                  <a:lnTo>
+                    <a:pt x="2864901" y="2808822"/>
+                  </a:lnTo>
+                  <a:lnTo>
+                    <a:pt x="2793278" y="2813702"/>
+                  </a:lnTo>
+                  <a:lnTo>
+                    <a:pt x="2721655" y="2818547"/>
+                  </a:lnTo>
+                  <a:lnTo>
+                    <a:pt x="2650033" y="2823357"/>
+                  </a:lnTo>
+                  <a:lnTo>
+                    <a:pt x="2578410" y="2828133"/>
+                  </a:lnTo>
+                  <a:lnTo>
+                    <a:pt x="2506788" y="2832873"/>
+                  </a:lnTo>
+                  <a:lnTo>
+                    <a:pt x="2435165" y="2837580"/>
+                  </a:lnTo>
+                  <a:lnTo>
+                    <a:pt x="2363543" y="2842252"/>
+                  </a:lnTo>
+                  <a:lnTo>
+                    <a:pt x="2291920" y="2846891"/>
+                  </a:lnTo>
+                  <a:lnTo>
+                    <a:pt x="2220298" y="2851496"/>
+                  </a:lnTo>
+                  <a:lnTo>
+                    <a:pt x="2148675" y="2856067"/>
+                  </a:lnTo>
+                  <a:lnTo>
+                    <a:pt x="2077053" y="2860606"/>
+                  </a:lnTo>
+                  <a:lnTo>
+                    <a:pt x="2005430" y="2865112"/>
+                  </a:lnTo>
+                  <a:lnTo>
+                    <a:pt x="1933808" y="2869585"/>
+                  </a:lnTo>
+                  <a:lnTo>
+                    <a:pt x="1862185" y="2874026"/>
+                  </a:lnTo>
+                  <a:lnTo>
+                    <a:pt x="1790563" y="2878435"/>
+                  </a:lnTo>
+                  <a:lnTo>
+                    <a:pt x="1718940" y="2882812"/>
+                  </a:lnTo>
+                  <a:lnTo>
+                    <a:pt x="1647318" y="2887157"/>
+                  </a:lnTo>
+                  <a:lnTo>
+                    <a:pt x="1575695" y="2891471"/>
+                  </a:lnTo>
+                  <a:lnTo>
+                    <a:pt x="1504073" y="2895754"/>
+                  </a:lnTo>
+                  <a:lnTo>
+                    <a:pt x="1432450" y="2900006"/>
+                  </a:lnTo>
+                  <a:lnTo>
+                    <a:pt x="1360827" y="2904227"/>
+                  </a:lnTo>
+                  <a:lnTo>
+                    <a:pt x="1289205" y="2908417"/>
+                  </a:lnTo>
+                  <a:lnTo>
+                    <a:pt x="1217582" y="2912577"/>
+                  </a:lnTo>
+                  <a:lnTo>
+                    <a:pt x="1145960" y="2916707"/>
+                  </a:lnTo>
+                  <a:lnTo>
+                    <a:pt x="1074337" y="2920808"/>
+                  </a:lnTo>
+                  <a:lnTo>
+                    <a:pt x="1002715" y="2924878"/>
+                  </a:lnTo>
+                  <a:lnTo>
+                    <a:pt x="931092" y="2928919"/>
+                  </a:lnTo>
+                  <a:lnTo>
+                    <a:pt x="859470" y="2932931"/>
+                  </a:lnTo>
+                  <a:lnTo>
+                    <a:pt x="787847" y="2936914"/>
+                  </a:lnTo>
+                  <a:lnTo>
+                    <a:pt x="716225" y="2940868"/>
+                  </a:lnTo>
+                  <a:lnTo>
+                    <a:pt x="644602" y="2944794"/>
+                  </a:lnTo>
+                  <a:lnTo>
+                    <a:pt x="572980" y="2948691"/>
+                  </a:lnTo>
+                  <a:lnTo>
+                    <a:pt x="501357" y="2952560"/>
+                  </a:lnTo>
+                  <a:lnTo>
+                    <a:pt x="429735" y="2956401"/>
+                  </a:lnTo>
+                  <a:lnTo>
+                    <a:pt x="358112" y="2960214"/>
+                  </a:lnTo>
+                  <a:lnTo>
+                    <a:pt x="286490" y="2963999"/>
+                  </a:lnTo>
+                  <a:lnTo>
+                    <a:pt x="214867" y="2967758"/>
+                  </a:lnTo>
+                  <a:lnTo>
+                    <a:pt x="143245" y="2971489"/>
+                  </a:lnTo>
+                  <a:lnTo>
+                    <a:pt x="71622" y="2975193"/>
+                  </a:lnTo>
+                  <a:lnTo>
+                    <a:pt x="0" y="2978870"/>
                   </a:lnTo>
                   <a:close/>
                 </a:path>
@@ -3537,216 +3543,222 @@
           </p:nvSpPr>
           <p:spPr>
             <a:xfrm>
-              <a:off x="3509553" y="2073503"/>
-              <a:ext cx="4753125" cy="2658903"/>
+              <a:off x="3355502" y="2073503"/>
+              <a:ext cx="4907176" cy="2650725"/>
             </a:xfrm>
             <a:custGeom>
               <a:avLst/>
               <a:pathLst>
-                <a:path w="4753125" h="2658903">
+                <a:path w="4907176" h="2650725">
                   <a:moveTo>
                     <a:pt x="0" y="0"/>
                   </a:moveTo>
                   <a:lnTo>
-                    <a:pt x="26038" y="51074"/>
-                  </a:lnTo>
-                  <a:lnTo>
-                    <a:pt x="97661" y="186034"/>
-                  </a:lnTo>
-                  <a:lnTo>
-                    <a:pt x="169283" y="315689"/>
-                  </a:lnTo>
-                  <a:lnTo>
-                    <a:pt x="240906" y="440246"/>
-                  </a:lnTo>
-                  <a:lnTo>
-                    <a:pt x="312529" y="559906"/>
-                  </a:lnTo>
-                  <a:lnTo>
-                    <a:pt x="384151" y="674861"/>
-                  </a:lnTo>
-                  <a:lnTo>
-                    <a:pt x="455774" y="785296"/>
-                  </a:lnTo>
-                  <a:lnTo>
-                    <a:pt x="527396" y="891390"/>
-                  </a:lnTo>
-                  <a:lnTo>
-                    <a:pt x="599019" y="993312"/>
-                  </a:lnTo>
-                  <a:lnTo>
-                    <a:pt x="670641" y="1091227"/>
-                  </a:lnTo>
-                  <a:lnTo>
-                    <a:pt x="742264" y="1185293"/>
-                  </a:lnTo>
-                  <a:lnTo>
-                    <a:pt x="813886" y="1275660"/>
-                  </a:lnTo>
-                  <a:lnTo>
-                    <a:pt x="885509" y="1362474"/>
-                  </a:lnTo>
-                  <a:lnTo>
-                    <a:pt x="957131" y="1445875"/>
-                  </a:lnTo>
-                  <a:lnTo>
-                    <a:pt x="1028754" y="1525997"/>
-                  </a:lnTo>
-                  <a:lnTo>
-                    <a:pt x="1100376" y="1602969"/>
-                  </a:lnTo>
-                  <a:lnTo>
-                    <a:pt x="1171999" y="1676915"/>
-                  </a:lnTo>
-                  <a:lnTo>
-                    <a:pt x="1243621" y="1747953"/>
-                  </a:lnTo>
-                  <a:lnTo>
-                    <a:pt x="1315244" y="1816198"/>
-                  </a:lnTo>
-                  <a:lnTo>
-                    <a:pt x="1386866" y="1881760"/>
-                  </a:lnTo>
-                  <a:lnTo>
-                    <a:pt x="1458489" y="1944745"/>
-                  </a:lnTo>
-                  <a:lnTo>
-                    <a:pt x="1530111" y="2005253"/>
-                  </a:lnTo>
-                  <a:lnTo>
-                    <a:pt x="1601734" y="2063382"/>
-                  </a:lnTo>
-                  <a:lnTo>
-                    <a:pt x="1673357" y="2119226"/>
-                  </a:lnTo>
-                  <a:lnTo>
-                    <a:pt x="1744979" y="2172874"/>
-                  </a:lnTo>
-                  <a:lnTo>
-                    <a:pt x="1816602" y="2224413"/>
-                  </a:lnTo>
-                  <a:lnTo>
-                    <a:pt x="1888224" y="2273926"/>
-                  </a:lnTo>
-                  <a:lnTo>
-                    <a:pt x="1959847" y="2321492"/>
-                  </a:lnTo>
-                  <a:lnTo>
-                    <a:pt x="2031469" y="2367187"/>
-                  </a:lnTo>
-                  <a:lnTo>
-                    <a:pt x="2103092" y="2411087"/>
-                  </a:lnTo>
-                  <a:lnTo>
-                    <a:pt x="2174714" y="2453260"/>
-                  </a:lnTo>
-                  <a:lnTo>
-                    <a:pt x="2246337" y="2493775"/>
-                  </a:lnTo>
-                  <a:lnTo>
-                    <a:pt x="2317959" y="2532697"/>
-                  </a:lnTo>
-                  <a:lnTo>
-                    <a:pt x="2389582" y="2570089"/>
-                  </a:lnTo>
-                  <a:lnTo>
-                    <a:pt x="2461204" y="2606011"/>
-                  </a:lnTo>
-                  <a:lnTo>
-                    <a:pt x="2532827" y="2640520"/>
-                  </a:lnTo>
-                  <a:lnTo>
-                    <a:pt x="2604449" y="2654372"/>
-                  </a:lnTo>
-                  <a:lnTo>
-                    <a:pt x="2676072" y="2654524"/>
-                  </a:lnTo>
-                  <a:lnTo>
-                    <a:pt x="2747694" y="2654675"/>
-                  </a:lnTo>
-                  <a:lnTo>
-                    <a:pt x="2819317" y="2654826"/>
-                  </a:lnTo>
-                  <a:lnTo>
-                    <a:pt x="2890939" y="2654978"/>
-                  </a:lnTo>
-                  <a:lnTo>
-                    <a:pt x="2962562" y="2655129"/>
-                  </a:lnTo>
-                  <a:lnTo>
-                    <a:pt x="3034185" y="2655280"/>
-                  </a:lnTo>
-                  <a:lnTo>
-                    <a:pt x="3105807" y="2655432"/>
-                  </a:lnTo>
-                  <a:lnTo>
-                    <a:pt x="3177430" y="2655583"/>
-                  </a:lnTo>
-                  <a:lnTo>
-                    <a:pt x="3249052" y="2655734"/>
-                  </a:lnTo>
-                  <a:lnTo>
-                    <a:pt x="3320675" y="2655885"/>
-                  </a:lnTo>
-                  <a:lnTo>
-                    <a:pt x="3392297" y="2656037"/>
-                  </a:lnTo>
-                  <a:lnTo>
-                    <a:pt x="3463920" y="2656188"/>
-                  </a:lnTo>
-                  <a:lnTo>
-                    <a:pt x="3535542" y="2656339"/>
-                  </a:lnTo>
-                  <a:lnTo>
-                    <a:pt x="3607165" y="2656490"/>
-                  </a:lnTo>
-                  <a:lnTo>
-                    <a:pt x="3678787" y="2656641"/>
-                  </a:lnTo>
-                  <a:lnTo>
-                    <a:pt x="3750410" y="2656792"/>
-                  </a:lnTo>
-                  <a:lnTo>
-                    <a:pt x="3822032" y="2656943"/>
-                  </a:lnTo>
-                  <a:lnTo>
-                    <a:pt x="3893655" y="2657094"/>
-                  </a:lnTo>
-                  <a:lnTo>
-                    <a:pt x="3965277" y="2657245"/>
-                  </a:lnTo>
-                  <a:lnTo>
-                    <a:pt x="4036900" y="2657396"/>
-                  </a:lnTo>
-                  <a:lnTo>
-                    <a:pt x="4108522" y="2657547"/>
-                  </a:lnTo>
-                  <a:lnTo>
-                    <a:pt x="4180145" y="2657698"/>
-                  </a:lnTo>
-                  <a:lnTo>
-                    <a:pt x="4251767" y="2657848"/>
-                  </a:lnTo>
-                  <a:lnTo>
-                    <a:pt x="4323390" y="2657999"/>
-                  </a:lnTo>
-                  <a:lnTo>
-                    <a:pt x="4395013" y="2658150"/>
-                  </a:lnTo>
-                  <a:lnTo>
-                    <a:pt x="4466635" y="2658301"/>
-                  </a:lnTo>
-                  <a:lnTo>
-                    <a:pt x="4538258" y="2658451"/>
-                  </a:lnTo>
-                  <a:lnTo>
-                    <a:pt x="4609880" y="2658602"/>
-                  </a:lnTo>
-                  <a:lnTo>
-                    <a:pt x="4681503" y="2658753"/>
-                  </a:lnTo>
-                  <a:lnTo>
-                    <a:pt x="4753125" y="2658903"/>
+                    <a:pt x="36845" y="67762"/>
+                  </a:lnTo>
+                  <a:lnTo>
+                    <a:pt x="108467" y="194594"/>
+                  </a:lnTo>
+                  <a:lnTo>
+                    <a:pt x="180090" y="316716"/>
+                  </a:lnTo>
+                  <a:lnTo>
+                    <a:pt x="251712" y="434304"/>
+                  </a:lnTo>
+                  <a:lnTo>
+                    <a:pt x="323335" y="547526"/>
+                  </a:lnTo>
+                  <a:lnTo>
+                    <a:pt x="394957" y="656545"/>
+                  </a:lnTo>
+                  <a:lnTo>
+                    <a:pt x="466580" y="761515"/>
+                  </a:lnTo>
+                  <a:lnTo>
+                    <a:pt x="538202" y="862589"/>
+                  </a:lnTo>
+                  <a:lnTo>
+                    <a:pt x="609825" y="959909"/>
+                  </a:lnTo>
+                  <a:lnTo>
+                    <a:pt x="681447" y="1053616"/>
+                  </a:lnTo>
+                  <a:lnTo>
+                    <a:pt x="753070" y="1143844"/>
+                  </a:lnTo>
+                  <a:lnTo>
+                    <a:pt x="824692" y="1230722"/>
+                  </a:lnTo>
+                  <a:lnTo>
+                    <a:pt x="896315" y="1314374"/>
+                  </a:lnTo>
+                  <a:lnTo>
+                    <a:pt x="967938" y="1394920"/>
+                  </a:lnTo>
+                  <a:lnTo>
+                    <a:pt x="1039560" y="1472476"/>
+                  </a:lnTo>
+                  <a:lnTo>
+                    <a:pt x="1111183" y="1547152"/>
+                  </a:lnTo>
+                  <a:lnTo>
+                    <a:pt x="1182805" y="1619056"/>
+                  </a:lnTo>
+                  <a:lnTo>
+                    <a:pt x="1254428" y="1688289"/>
+                  </a:lnTo>
+                  <a:lnTo>
+                    <a:pt x="1326050" y="1754953"/>
+                  </a:lnTo>
+                  <a:lnTo>
+                    <a:pt x="1397673" y="1819141"/>
+                  </a:lnTo>
+                  <a:lnTo>
+                    <a:pt x="1469295" y="1880946"/>
+                  </a:lnTo>
+                  <a:lnTo>
+                    <a:pt x="1540918" y="1940456"/>
+                  </a:lnTo>
+                  <a:lnTo>
+                    <a:pt x="1612540" y="1997756"/>
+                  </a:lnTo>
+                  <a:lnTo>
+                    <a:pt x="1684163" y="2052929"/>
+                  </a:lnTo>
+                  <a:lnTo>
+                    <a:pt x="1755785" y="2106054"/>
+                  </a:lnTo>
+                  <a:lnTo>
+                    <a:pt x="1827408" y="2157206"/>
+                  </a:lnTo>
+                  <a:lnTo>
+                    <a:pt x="1899030" y="2206459"/>
+                  </a:lnTo>
+                  <a:lnTo>
+                    <a:pt x="1970653" y="2253883"/>
+                  </a:lnTo>
+                  <a:lnTo>
+                    <a:pt x="2042275" y="2299546"/>
+                  </a:lnTo>
+                  <a:lnTo>
+                    <a:pt x="2113898" y="2343514"/>
+                  </a:lnTo>
+                  <a:lnTo>
+                    <a:pt x="2185520" y="2385850"/>
+                  </a:lnTo>
+                  <a:lnTo>
+                    <a:pt x="2257143" y="2426613"/>
+                  </a:lnTo>
+                  <a:lnTo>
+                    <a:pt x="2328766" y="2465864"/>
+                  </a:lnTo>
+                  <a:lnTo>
+                    <a:pt x="2400388" y="2503656"/>
+                  </a:lnTo>
+                  <a:lnTo>
+                    <a:pt x="2472011" y="2540046"/>
+                  </a:lnTo>
+                  <a:lnTo>
+                    <a:pt x="2543633" y="2575084"/>
+                  </a:lnTo>
+                  <a:lnTo>
+                    <a:pt x="2615256" y="2608822"/>
+                  </a:lnTo>
+                  <a:lnTo>
+                    <a:pt x="2686878" y="2641307"/>
+                  </a:lnTo>
+                  <a:lnTo>
+                    <a:pt x="2758501" y="2650725"/>
+                  </a:lnTo>
+                  <a:lnTo>
+                    <a:pt x="2830123" y="2644658"/>
+                  </a:lnTo>
+                  <a:lnTo>
+                    <a:pt x="2901746" y="2638546"/>
+                  </a:lnTo>
+                  <a:lnTo>
+                    <a:pt x="2973368" y="2632390"/>
+                  </a:lnTo>
+                  <a:lnTo>
+                    <a:pt x="3044991" y="2626189"/>
+                  </a:lnTo>
+                  <a:lnTo>
+                    <a:pt x="3116613" y="2619943"/>
+                  </a:lnTo>
+                  <a:lnTo>
+                    <a:pt x="3188236" y="2613652"/>
+                  </a:lnTo>
+                  <a:lnTo>
+                    <a:pt x="3259858" y="2607314"/>
+                  </a:lnTo>
+                  <a:lnTo>
+                    <a:pt x="3331481" y="2600931"/>
+                  </a:lnTo>
+                  <a:lnTo>
+                    <a:pt x="3403103" y="2594501"/>
+                  </a:lnTo>
+                  <a:lnTo>
+                    <a:pt x="3474726" y="2588024"/>
+                  </a:lnTo>
+                  <a:lnTo>
+                    <a:pt x="3546348" y="2581500"/>
+                  </a:lnTo>
+                  <a:lnTo>
+                    <a:pt x="3617971" y="2574928"/>
+                  </a:lnTo>
+                  <a:lnTo>
+                    <a:pt x="3689594" y="2568309"/>
+                  </a:lnTo>
+                  <a:lnTo>
+                    <a:pt x="3761216" y="2561641"/>
+                  </a:lnTo>
+                  <a:lnTo>
+                    <a:pt x="3832839" y="2554925"/>
+                  </a:lnTo>
+                  <a:lnTo>
+                    <a:pt x="3904461" y="2548160"/>
+                  </a:lnTo>
+                  <a:lnTo>
+                    <a:pt x="3976084" y="2541345"/>
+                  </a:lnTo>
+                  <a:lnTo>
+                    <a:pt x="4047706" y="2534481"/>
+                  </a:lnTo>
+                  <a:lnTo>
+                    <a:pt x="4119329" y="2527567"/>
+                  </a:lnTo>
+                  <a:lnTo>
+                    <a:pt x="4190951" y="2520603"/>
+                  </a:lnTo>
+                  <a:lnTo>
+                    <a:pt x="4262574" y="2513588"/>
+                  </a:lnTo>
+                  <a:lnTo>
+                    <a:pt x="4334196" y="2506521"/>
+                  </a:lnTo>
+                  <a:lnTo>
+                    <a:pt x="4405819" y="2499404"/>
+                  </a:lnTo>
+                  <a:lnTo>
+                    <a:pt x="4477441" y="2492234"/>
+                  </a:lnTo>
+                  <a:lnTo>
+                    <a:pt x="4549064" y="2485012"/>
+                  </a:lnTo>
+                  <a:lnTo>
+                    <a:pt x="4620686" y="2477738"/>
+                  </a:lnTo>
+                  <a:lnTo>
+                    <a:pt x="4692309" y="2470411"/>
+                  </a:lnTo>
+                  <a:lnTo>
+                    <a:pt x="4763931" y="2463030"/>
+                  </a:lnTo>
+                  <a:lnTo>
+                    <a:pt x="4835554" y="2455595"/>
+                  </a:lnTo>
+                  <a:lnTo>
+                    <a:pt x="4907176" y="2448107"/>
                   </a:lnTo>
                 </a:path>
               </a:pathLst>
@@ -3766,312 +3778,312 @@
           </p:nvSpPr>
           <p:spPr>
             <a:xfrm>
-              <a:off x="1172049" y="4717359"/>
-              <a:ext cx="7090630" cy="596707"/>
+              <a:off x="1172049" y="4730252"/>
+              <a:ext cx="7090630" cy="566290"/>
             </a:xfrm>
             <a:custGeom>
               <a:avLst/>
               <a:pathLst>
-                <a:path w="7090630" h="596707">
+                <a:path w="7090630" h="566290">
                   <a:moveTo>
-                    <a:pt x="7090630" y="596707"/>
+                    <a:pt x="7090630" y="566290"/>
                   </a:moveTo>
                   <a:lnTo>
-                    <a:pt x="7019007" y="586754"/>
-                  </a:lnTo>
-                  <a:lnTo>
-                    <a:pt x="6947385" y="576395"/>
-                  </a:lnTo>
-                  <a:lnTo>
-                    <a:pt x="6875762" y="565611"/>
-                  </a:lnTo>
-                  <a:lnTo>
-                    <a:pt x="6804139" y="554386"/>
-                  </a:lnTo>
-                  <a:lnTo>
-                    <a:pt x="6732517" y="542701"/>
-                  </a:lnTo>
-                  <a:lnTo>
-                    <a:pt x="6660894" y="530539"/>
-                  </a:lnTo>
-                  <a:lnTo>
-                    <a:pt x="6589272" y="517878"/>
-                  </a:lnTo>
-                  <a:lnTo>
-                    <a:pt x="6517649" y="504700"/>
-                  </a:lnTo>
-                  <a:lnTo>
-                    <a:pt x="6446027" y="490982"/>
-                  </a:lnTo>
-                  <a:lnTo>
-                    <a:pt x="6374404" y="476703"/>
-                  </a:lnTo>
-                  <a:lnTo>
-                    <a:pt x="6302782" y="461839"/>
-                  </a:lnTo>
-                  <a:lnTo>
-                    <a:pt x="6231159" y="446367"/>
-                  </a:lnTo>
-                  <a:lnTo>
-                    <a:pt x="6159537" y="430262"/>
-                  </a:lnTo>
-                  <a:lnTo>
-                    <a:pt x="6087914" y="413498"/>
-                  </a:lnTo>
-                  <a:lnTo>
-                    <a:pt x="6016292" y="396047"/>
-                  </a:lnTo>
-                  <a:lnTo>
-                    <a:pt x="5944669" y="377883"/>
-                  </a:lnTo>
-                  <a:lnTo>
-                    <a:pt x="5873047" y="358975"/>
-                  </a:lnTo>
-                  <a:lnTo>
-                    <a:pt x="5801424" y="339293"/>
-                  </a:lnTo>
-                  <a:lnTo>
-                    <a:pt x="5729802" y="318806"/>
-                  </a:lnTo>
-                  <a:lnTo>
-                    <a:pt x="5658179" y="297480"/>
-                  </a:lnTo>
-                  <a:lnTo>
-                    <a:pt x="5586557" y="275282"/>
-                  </a:lnTo>
-                  <a:lnTo>
-                    <a:pt x="5514934" y="252175"/>
-                  </a:lnTo>
-                  <a:lnTo>
-                    <a:pt x="5443311" y="228122"/>
-                  </a:lnTo>
-                  <a:lnTo>
-                    <a:pt x="5371689" y="203085"/>
-                  </a:lnTo>
-                  <a:lnTo>
-                    <a:pt x="5300066" y="177024"/>
-                  </a:lnTo>
-                  <a:lnTo>
-                    <a:pt x="5228444" y="149896"/>
-                  </a:lnTo>
-                  <a:lnTo>
-                    <a:pt x="5156821" y="121657"/>
-                  </a:lnTo>
-                  <a:lnTo>
-                    <a:pt x="5085199" y="92263"/>
-                  </a:lnTo>
-                  <a:lnTo>
-                    <a:pt x="5013576" y="61666"/>
-                  </a:lnTo>
-                  <a:lnTo>
-                    <a:pt x="4941954" y="29817"/>
-                  </a:lnTo>
-                  <a:lnTo>
-                    <a:pt x="4870331" y="10365"/>
-                  </a:lnTo>
-                  <a:lnTo>
-                    <a:pt x="4798709" y="10213"/>
-                  </a:lnTo>
-                  <a:lnTo>
-                    <a:pt x="4727086" y="10062"/>
-                  </a:lnTo>
-                  <a:lnTo>
-                    <a:pt x="4655464" y="9910"/>
-                  </a:lnTo>
-                  <a:lnTo>
-                    <a:pt x="4583841" y="9758"/>
-                  </a:lnTo>
-                  <a:lnTo>
-                    <a:pt x="4512219" y="9607"/>
-                  </a:lnTo>
-                  <a:lnTo>
-                    <a:pt x="4440596" y="9455"/>
-                  </a:lnTo>
-                  <a:lnTo>
-                    <a:pt x="4368974" y="9304"/>
-                  </a:lnTo>
-                  <a:lnTo>
-                    <a:pt x="4297351" y="9152"/>
-                  </a:lnTo>
-                  <a:lnTo>
-                    <a:pt x="4225729" y="9000"/>
-                  </a:lnTo>
-                  <a:lnTo>
-                    <a:pt x="4154106" y="8848"/>
-                  </a:lnTo>
-                  <a:lnTo>
-                    <a:pt x="4082483" y="8697"/>
-                  </a:lnTo>
-                  <a:lnTo>
-                    <a:pt x="4010861" y="8545"/>
-                  </a:lnTo>
-                  <a:lnTo>
-                    <a:pt x="3939238" y="8393"/>
-                  </a:lnTo>
-                  <a:lnTo>
-                    <a:pt x="3867616" y="8241"/>
-                  </a:lnTo>
-                  <a:lnTo>
-                    <a:pt x="3795993" y="8089"/>
-                  </a:lnTo>
-                  <a:lnTo>
-                    <a:pt x="3724371" y="7937"/>
-                  </a:lnTo>
-                  <a:lnTo>
-                    <a:pt x="3652748" y="7785"/>
-                  </a:lnTo>
-                  <a:lnTo>
-                    <a:pt x="3581126" y="7633"/>
-                  </a:lnTo>
-                  <a:lnTo>
-                    <a:pt x="3509503" y="7481"/>
-                  </a:lnTo>
-                  <a:lnTo>
-                    <a:pt x="3437881" y="7329"/>
-                  </a:lnTo>
-                  <a:lnTo>
-                    <a:pt x="3366258" y="7177"/>
-                  </a:lnTo>
-                  <a:lnTo>
-                    <a:pt x="3294636" y="7025"/>
-                  </a:lnTo>
-                  <a:lnTo>
-                    <a:pt x="3223013" y="6873"/>
-                  </a:lnTo>
-                  <a:lnTo>
-                    <a:pt x="3151391" y="6721"/>
-                  </a:lnTo>
-                  <a:lnTo>
-                    <a:pt x="3079768" y="6569"/>
-                  </a:lnTo>
-                  <a:lnTo>
-                    <a:pt x="3008146" y="6417"/>
-                  </a:lnTo>
-                  <a:lnTo>
-                    <a:pt x="2936523" y="6264"/>
-                  </a:lnTo>
-                  <a:lnTo>
-                    <a:pt x="2864901" y="6112"/>
-                  </a:lnTo>
-                  <a:lnTo>
-                    <a:pt x="2793278" y="5960"/>
-                  </a:lnTo>
-                  <a:lnTo>
-                    <a:pt x="2721655" y="5808"/>
-                  </a:lnTo>
-                  <a:lnTo>
-                    <a:pt x="2650033" y="5655"/>
-                  </a:lnTo>
-                  <a:lnTo>
-                    <a:pt x="2578410" y="5503"/>
-                  </a:lnTo>
-                  <a:lnTo>
-                    <a:pt x="2506788" y="5351"/>
-                  </a:lnTo>
-                  <a:lnTo>
-                    <a:pt x="2435165" y="5198"/>
-                  </a:lnTo>
-                  <a:lnTo>
-                    <a:pt x="2363543" y="5046"/>
-                  </a:lnTo>
-                  <a:lnTo>
-                    <a:pt x="2291920" y="4893"/>
-                  </a:lnTo>
-                  <a:lnTo>
-                    <a:pt x="2220298" y="4741"/>
-                  </a:lnTo>
-                  <a:lnTo>
-                    <a:pt x="2148675" y="4588"/>
-                  </a:lnTo>
-                  <a:lnTo>
-                    <a:pt x="2077053" y="4436"/>
-                  </a:lnTo>
-                  <a:lnTo>
-                    <a:pt x="2005430" y="4283"/>
-                  </a:lnTo>
-                  <a:lnTo>
-                    <a:pt x="1933808" y="4130"/>
-                  </a:lnTo>
-                  <a:lnTo>
-                    <a:pt x="1862185" y="3978"/>
-                  </a:lnTo>
-                  <a:lnTo>
-                    <a:pt x="1790563" y="3825"/>
-                  </a:lnTo>
-                  <a:lnTo>
-                    <a:pt x="1718940" y="3672"/>
-                  </a:lnTo>
-                  <a:lnTo>
-                    <a:pt x="1647318" y="3520"/>
-                  </a:lnTo>
-                  <a:lnTo>
-                    <a:pt x="1575695" y="3367"/>
-                  </a:lnTo>
-                  <a:lnTo>
-                    <a:pt x="1504073" y="3214"/>
-                  </a:lnTo>
-                  <a:lnTo>
-                    <a:pt x="1432450" y="3061"/>
-                  </a:lnTo>
-                  <a:lnTo>
-                    <a:pt x="1360827" y="2909"/>
-                  </a:lnTo>
-                  <a:lnTo>
-                    <a:pt x="1289205" y="2756"/>
-                  </a:lnTo>
-                  <a:lnTo>
-                    <a:pt x="1217582" y="2603"/>
-                  </a:lnTo>
-                  <a:lnTo>
-                    <a:pt x="1145960" y="2450"/>
-                  </a:lnTo>
-                  <a:lnTo>
-                    <a:pt x="1074337" y="2297"/>
-                  </a:lnTo>
-                  <a:lnTo>
-                    <a:pt x="1002715" y="2144"/>
-                  </a:lnTo>
-                  <a:lnTo>
-                    <a:pt x="931092" y="1991"/>
-                  </a:lnTo>
-                  <a:lnTo>
-                    <a:pt x="859470" y="1838"/>
-                  </a:lnTo>
-                  <a:lnTo>
-                    <a:pt x="787847" y="1685"/>
-                  </a:lnTo>
-                  <a:lnTo>
-                    <a:pt x="716225" y="1532"/>
-                  </a:lnTo>
-                  <a:lnTo>
-                    <a:pt x="644602" y="1379"/>
-                  </a:lnTo>
-                  <a:lnTo>
-                    <a:pt x="572980" y="1226"/>
-                  </a:lnTo>
-                  <a:lnTo>
-                    <a:pt x="501357" y="1072"/>
-                  </a:lnTo>
-                  <a:lnTo>
-                    <a:pt x="429735" y="919"/>
-                  </a:lnTo>
-                  <a:lnTo>
-                    <a:pt x="358112" y="766"/>
-                  </a:lnTo>
-                  <a:lnTo>
-                    <a:pt x="286490" y="613"/>
-                  </a:lnTo>
-                  <a:lnTo>
-                    <a:pt x="214867" y="460"/>
-                  </a:lnTo>
-                  <a:lnTo>
-                    <a:pt x="143245" y="306"/>
-                  </a:lnTo>
-                  <a:lnTo>
-                    <a:pt x="71622" y="153"/>
-                  </a:lnTo>
-                  <a:lnTo>
-                    <a:pt x="0" y="0"/>
+                    <a:pt x="7019007" y="556237"/>
+                  </a:lnTo>
+                  <a:lnTo>
+                    <a:pt x="6947385" y="545797"/>
+                  </a:lnTo>
+                  <a:lnTo>
+                    <a:pt x="6875762" y="534953"/>
+                  </a:lnTo>
+                  <a:lnTo>
+                    <a:pt x="6804139" y="523692"/>
+                  </a:lnTo>
+                  <a:lnTo>
+                    <a:pt x="6732517" y="511996"/>
+                  </a:lnTo>
+                  <a:lnTo>
+                    <a:pt x="6660894" y="499850"/>
+                  </a:lnTo>
+                  <a:lnTo>
+                    <a:pt x="6589272" y="487235"/>
+                  </a:lnTo>
+                  <a:lnTo>
+                    <a:pt x="6517649" y="474133"/>
+                  </a:lnTo>
+                  <a:lnTo>
+                    <a:pt x="6446027" y="460527"/>
+                  </a:lnTo>
+                  <a:lnTo>
+                    <a:pt x="6374404" y="446395"/>
+                  </a:lnTo>
+                  <a:lnTo>
+                    <a:pt x="6302782" y="431719"/>
+                  </a:lnTo>
+                  <a:lnTo>
+                    <a:pt x="6231159" y="416477"/>
+                  </a:lnTo>
+                  <a:lnTo>
+                    <a:pt x="6159537" y="400647"/>
+                  </a:lnTo>
+                  <a:lnTo>
+                    <a:pt x="6087914" y="384207"/>
+                  </a:lnTo>
+                  <a:lnTo>
+                    <a:pt x="6016292" y="367133"/>
+                  </a:lnTo>
+                  <a:lnTo>
+                    <a:pt x="5944669" y="349400"/>
+                  </a:lnTo>
+                  <a:lnTo>
+                    <a:pt x="5873047" y="330984"/>
+                  </a:lnTo>
+                  <a:lnTo>
+                    <a:pt x="5801424" y="311857"/>
+                  </a:lnTo>
+                  <a:lnTo>
+                    <a:pt x="5729802" y="291993"/>
+                  </a:lnTo>
+                  <a:lnTo>
+                    <a:pt x="5658179" y="271363"/>
+                  </a:lnTo>
+                  <a:lnTo>
+                    <a:pt x="5586557" y="249938"/>
+                  </a:lnTo>
+                  <a:lnTo>
+                    <a:pt x="5514934" y="227686"/>
+                  </a:lnTo>
+                  <a:lnTo>
+                    <a:pt x="5443311" y="204576"/>
+                  </a:lnTo>
+                  <a:lnTo>
+                    <a:pt x="5371689" y="180575"/>
+                  </a:lnTo>
+                  <a:lnTo>
+                    <a:pt x="5300066" y="155649"/>
+                  </a:lnTo>
+                  <a:lnTo>
+                    <a:pt x="5228444" y="129761"/>
+                  </a:lnTo>
+                  <a:lnTo>
+                    <a:pt x="5156821" y="102876"/>
+                  </a:lnTo>
+                  <a:lnTo>
+                    <a:pt x="5085199" y="74953"/>
+                  </a:lnTo>
+                  <a:lnTo>
+                    <a:pt x="5013576" y="45954"/>
+                  </a:lnTo>
+                  <a:lnTo>
+                    <a:pt x="4941954" y="15836"/>
+                  </a:lnTo>
+                  <a:lnTo>
+                    <a:pt x="4870331" y="0"/>
+                  </a:lnTo>
+                  <a:lnTo>
+                    <a:pt x="4798709" y="5979"/>
+                  </a:lnTo>
+                  <a:lnTo>
+                    <a:pt x="4727086" y="11916"/>
+                  </a:lnTo>
+                  <a:lnTo>
+                    <a:pt x="4655464" y="17810"/>
+                  </a:lnTo>
+                  <a:lnTo>
+                    <a:pt x="4583841" y="23661"/>
+                  </a:lnTo>
+                  <a:lnTo>
+                    <a:pt x="4512219" y="29470"/>
+                  </a:lnTo>
+                  <a:lnTo>
+                    <a:pt x="4440596" y="35237"/>
+                  </a:lnTo>
+                  <a:lnTo>
+                    <a:pt x="4368974" y="40962"/>
+                  </a:lnTo>
+                  <a:lnTo>
+                    <a:pt x="4297351" y="46646"/>
+                  </a:lnTo>
+                  <a:lnTo>
+                    <a:pt x="4225729" y="52288"/>
+                  </a:lnTo>
+                  <a:lnTo>
+                    <a:pt x="4154106" y="57890"/>
+                  </a:lnTo>
+                  <a:lnTo>
+                    <a:pt x="4082483" y="63452"/>
+                  </a:lnTo>
+                  <a:lnTo>
+                    <a:pt x="4010861" y="68973"/>
+                  </a:lnTo>
+                  <a:lnTo>
+                    <a:pt x="3939238" y="74454"/>
+                  </a:lnTo>
+                  <a:lnTo>
+                    <a:pt x="3867616" y="79895"/>
+                  </a:lnTo>
+                  <a:lnTo>
+                    <a:pt x="3795993" y="85298"/>
+                  </a:lnTo>
+                  <a:lnTo>
+                    <a:pt x="3724371" y="90661"/>
+                  </a:lnTo>
+                  <a:lnTo>
+                    <a:pt x="3652748" y="95985"/>
+                  </a:lnTo>
+                  <a:lnTo>
+                    <a:pt x="3581126" y="101271"/>
+                  </a:lnTo>
+                  <a:lnTo>
+                    <a:pt x="3509503" y="106519"/>
+                  </a:lnTo>
+                  <a:lnTo>
+                    <a:pt x="3437881" y="111729"/>
+                  </a:lnTo>
+                  <a:lnTo>
+                    <a:pt x="3366258" y="116901"/>
+                  </a:lnTo>
+                  <a:lnTo>
+                    <a:pt x="3294636" y="122035"/>
+                  </a:lnTo>
+                  <a:lnTo>
+                    <a:pt x="3223013" y="127133"/>
+                  </a:lnTo>
+                  <a:lnTo>
+                    <a:pt x="3151391" y="132193"/>
+                  </a:lnTo>
+                  <a:lnTo>
+                    <a:pt x="3079768" y="137217"/>
+                  </a:lnTo>
+                  <a:lnTo>
+                    <a:pt x="3008146" y="142205"/>
+                  </a:lnTo>
+                  <a:lnTo>
+                    <a:pt x="2936523" y="147157"/>
+                  </a:lnTo>
+                  <a:lnTo>
+                    <a:pt x="2864901" y="152073"/>
+                  </a:lnTo>
+                  <a:lnTo>
+                    <a:pt x="2793278" y="156953"/>
+                  </a:lnTo>
+                  <a:lnTo>
+                    <a:pt x="2721655" y="161798"/>
+                  </a:lnTo>
+                  <a:lnTo>
+                    <a:pt x="2650033" y="166608"/>
+                  </a:lnTo>
+                  <a:lnTo>
+                    <a:pt x="2578410" y="171383"/>
+                  </a:lnTo>
+                  <a:lnTo>
+                    <a:pt x="2506788" y="176124"/>
+                  </a:lnTo>
+                  <a:lnTo>
+                    <a:pt x="2435165" y="180830"/>
+                  </a:lnTo>
+                  <a:lnTo>
+                    <a:pt x="2363543" y="185503"/>
+                  </a:lnTo>
+                  <a:lnTo>
+                    <a:pt x="2291920" y="190141"/>
+                  </a:lnTo>
+                  <a:lnTo>
+                    <a:pt x="2220298" y="194746"/>
+                  </a:lnTo>
+                  <a:lnTo>
+                    <a:pt x="2148675" y="199318"/>
+                  </a:lnTo>
+                  <a:lnTo>
+                    <a:pt x="2077053" y="203857"/>
+                  </a:lnTo>
+                  <a:lnTo>
+                    <a:pt x="2005430" y="208363"/>
+                  </a:lnTo>
+                  <a:lnTo>
+                    <a:pt x="1933808" y="212836"/>
+                  </a:lnTo>
+                  <a:lnTo>
+                    <a:pt x="1862185" y="217277"/>
+                  </a:lnTo>
+                  <a:lnTo>
+                    <a:pt x="1790563" y="221686"/>
+                  </a:lnTo>
+                  <a:lnTo>
+                    <a:pt x="1718940" y="226063"/>
+                  </a:lnTo>
+                  <a:lnTo>
+                    <a:pt x="1647318" y="230408"/>
+                  </a:lnTo>
+                  <a:lnTo>
+                    <a:pt x="1575695" y="234722"/>
+                  </a:lnTo>
+                  <a:lnTo>
+                    <a:pt x="1504073" y="239005"/>
+                  </a:lnTo>
+                  <a:lnTo>
+                    <a:pt x="1432450" y="243256"/>
+                  </a:lnTo>
+                  <a:lnTo>
+                    <a:pt x="1360827" y="247477"/>
+                  </a:lnTo>
+                  <a:lnTo>
+                    <a:pt x="1289205" y="251668"/>
+                  </a:lnTo>
+                  <a:lnTo>
+                    <a:pt x="1217582" y="255828"/>
+                  </a:lnTo>
+                  <a:lnTo>
+                    <a:pt x="1145960" y="259958"/>
+                  </a:lnTo>
+                  <a:lnTo>
+                    <a:pt x="1074337" y="264058"/>
+                  </a:lnTo>
+                  <a:lnTo>
+                    <a:pt x="1002715" y="268129"/>
+                  </a:lnTo>
+                  <a:lnTo>
+                    <a:pt x="931092" y="272170"/>
+                  </a:lnTo>
+                  <a:lnTo>
+                    <a:pt x="859470" y="276182"/>
+                  </a:lnTo>
+                  <a:lnTo>
+                    <a:pt x="787847" y="280165"/>
+                  </a:lnTo>
+                  <a:lnTo>
+                    <a:pt x="716225" y="284119"/>
+                  </a:lnTo>
+                  <a:lnTo>
+                    <a:pt x="644602" y="288044"/>
+                  </a:lnTo>
+                  <a:lnTo>
+                    <a:pt x="572980" y="291941"/>
+                  </a:lnTo>
+                  <a:lnTo>
+                    <a:pt x="501357" y="295810"/>
+                  </a:lnTo>
+                  <a:lnTo>
+                    <a:pt x="429735" y="299651"/>
+                  </a:lnTo>
+                  <a:lnTo>
+                    <a:pt x="358112" y="303465"/>
+                  </a:lnTo>
+                  <a:lnTo>
+                    <a:pt x="286490" y="307250"/>
+                  </a:lnTo>
+                  <a:lnTo>
+                    <a:pt x="214867" y="311008"/>
+                  </a:lnTo>
+                  <a:lnTo>
+                    <a:pt x="143245" y="314739"/>
+                  </a:lnTo>
+                  <a:lnTo>
+                    <a:pt x="71622" y="318444"/>
+                  </a:lnTo>
+                  <a:lnTo>
+                    <a:pt x="0" y="322121"/>
                   </a:lnTo>
                 </a:path>
               </a:pathLst>
@@ -4091,312 +4103,312 @@
           </p:nvSpPr>
           <p:spPr>
             <a:xfrm>
-              <a:off x="1172049" y="2266066"/>
-              <a:ext cx="7090630" cy="2843312"/>
+              <a:off x="1172049" y="3196535"/>
+              <a:ext cx="7090630" cy="1841101"/>
             </a:xfrm>
             <a:custGeom>
               <a:avLst/>
               <a:pathLst>
-                <a:path w="7090630" h="2843312">
+                <a:path w="7090630" h="1841101">
                   <a:moveTo>
                     <a:pt x="0" y="0"/>
                   </a:moveTo>
                   <a:lnTo>
-                    <a:pt x="71622" y="65642"/>
-                  </a:lnTo>
-                  <a:lnTo>
-                    <a:pt x="143245" y="129975"/>
-                  </a:lnTo>
-                  <a:lnTo>
-                    <a:pt x="214867" y="193025"/>
-                  </a:lnTo>
-                  <a:lnTo>
-                    <a:pt x="286490" y="254817"/>
-                  </a:lnTo>
-                  <a:lnTo>
-                    <a:pt x="358112" y="315377"/>
-                  </a:lnTo>
-                  <a:lnTo>
-                    <a:pt x="429735" y="374729"/>
-                  </a:lnTo>
-                  <a:lnTo>
-                    <a:pt x="501357" y="432897"/>
-                  </a:lnTo>
-                  <a:lnTo>
-                    <a:pt x="572980" y="489905"/>
-                  </a:lnTo>
-                  <a:lnTo>
-                    <a:pt x="644602" y="545776"/>
-                  </a:lnTo>
-                  <a:lnTo>
-                    <a:pt x="716225" y="600533"/>
-                  </a:lnTo>
-                  <a:lnTo>
-                    <a:pt x="787847" y="654198"/>
-                  </a:lnTo>
-                  <a:lnTo>
-                    <a:pt x="859470" y="706792"/>
-                  </a:lnTo>
-                  <a:lnTo>
-                    <a:pt x="931092" y="758337"/>
-                  </a:lnTo>
-                  <a:lnTo>
-                    <a:pt x="1002715" y="808855"/>
-                  </a:lnTo>
-                  <a:lnTo>
-                    <a:pt x="1074337" y="858364"/>
-                  </a:lnTo>
-                  <a:lnTo>
-                    <a:pt x="1145960" y="906886"/>
-                  </a:lnTo>
-                  <a:lnTo>
-                    <a:pt x="1217582" y="954441"/>
-                  </a:lnTo>
-                  <a:lnTo>
-                    <a:pt x="1289205" y="1001047"/>
-                  </a:lnTo>
-                  <a:lnTo>
-                    <a:pt x="1360827" y="1046723"/>
-                  </a:lnTo>
-                  <a:lnTo>
-                    <a:pt x="1432450" y="1091489"/>
-                  </a:lnTo>
-                  <a:lnTo>
-                    <a:pt x="1504073" y="1135361"/>
-                  </a:lnTo>
-                  <a:lnTo>
-                    <a:pt x="1575695" y="1178359"/>
-                  </a:lnTo>
-                  <a:lnTo>
-                    <a:pt x="1647318" y="1220499"/>
-                  </a:lnTo>
-                  <a:lnTo>
-                    <a:pt x="1718940" y="1261798"/>
-                  </a:lnTo>
-                  <a:lnTo>
-                    <a:pt x="1790563" y="1302274"/>
-                  </a:lnTo>
-                  <a:lnTo>
-                    <a:pt x="1862185" y="1341943"/>
-                  </a:lnTo>
-                  <a:lnTo>
-                    <a:pt x="1933808" y="1380820"/>
-                  </a:lnTo>
-                  <a:lnTo>
-                    <a:pt x="2005430" y="1418922"/>
-                  </a:lnTo>
-                  <a:lnTo>
-                    <a:pt x="2077053" y="1456264"/>
-                  </a:lnTo>
-                  <a:lnTo>
-                    <a:pt x="2148675" y="1492861"/>
-                  </a:lnTo>
-                  <a:lnTo>
-                    <a:pt x="2220298" y="1528728"/>
-                  </a:lnTo>
-                  <a:lnTo>
-                    <a:pt x="2291920" y="1563880"/>
-                  </a:lnTo>
-                  <a:lnTo>
-                    <a:pt x="2363543" y="1598331"/>
-                  </a:lnTo>
-                  <a:lnTo>
-                    <a:pt x="2435165" y="1632095"/>
-                  </a:lnTo>
-                  <a:lnTo>
-                    <a:pt x="2506788" y="1665185"/>
-                  </a:lnTo>
-                  <a:lnTo>
-                    <a:pt x="2578410" y="1697615"/>
-                  </a:lnTo>
-                  <a:lnTo>
-                    <a:pt x="2650033" y="1729399"/>
-                  </a:lnTo>
-                  <a:lnTo>
-                    <a:pt x="2721655" y="1760549"/>
-                  </a:lnTo>
-                  <a:lnTo>
-                    <a:pt x="2793278" y="1791077"/>
-                  </a:lnTo>
-                  <a:lnTo>
-                    <a:pt x="2864901" y="1820996"/>
-                  </a:lnTo>
-                  <a:lnTo>
-                    <a:pt x="2936523" y="1850319"/>
-                  </a:lnTo>
-                  <a:lnTo>
-                    <a:pt x="3008146" y="1879057"/>
-                  </a:lnTo>
-                  <a:lnTo>
-                    <a:pt x="3079768" y="1907221"/>
-                  </a:lnTo>
-                  <a:lnTo>
-                    <a:pt x="3151391" y="1934824"/>
-                  </a:lnTo>
-                  <a:lnTo>
-                    <a:pt x="3223013" y="1961877"/>
-                  </a:lnTo>
-                  <a:lnTo>
-                    <a:pt x="3294636" y="1988390"/>
-                  </a:lnTo>
-                  <a:lnTo>
-                    <a:pt x="3366258" y="2014374"/>
-                  </a:lnTo>
-                  <a:lnTo>
-                    <a:pt x="3437881" y="2039839"/>
-                  </a:lnTo>
-                  <a:lnTo>
-                    <a:pt x="3509503" y="2064797"/>
-                  </a:lnTo>
-                  <a:lnTo>
-                    <a:pt x="3581126" y="2089257"/>
-                  </a:lnTo>
-                  <a:lnTo>
-                    <a:pt x="3652748" y="2113230"/>
-                  </a:lnTo>
-                  <a:lnTo>
-                    <a:pt x="3724371" y="2136724"/>
-                  </a:lnTo>
-                  <a:lnTo>
-                    <a:pt x="3795993" y="2159749"/>
-                  </a:lnTo>
-                  <a:lnTo>
-                    <a:pt x="3867616" y="2182316"/>
-                  </a:lnTo>
-                  <a:lnTo>
-                    <a:pt x="3939238" y="2204432"/>
-                  </a:lnTo>
-                  <a:lnTo>
-                    <a:pt x="4010861" y="2226107"/>
-                  </a:lnTo>
-                  <a:lnTo>
-                    <a:pt x="4082483" y="2247350"/>
-                  </a:lnTo>
-                  <a:lnTo>
-                    <a:pt x="4154106" y="2268169"/>
-                  </a:lnTo>
-                  <a:lnTo>
-                    <a:pt x="4225729" y="2288573"/>
-                  </a:lnTo>
-                  <a:lnTo>
-                    <a:pt x="4297351" y="2308570"/>
-                  </a:lnTo>
-                  <a:lnTo>
-                    <a:pt x="4368974" y="2328168"/>
-                  </a:lnTo>
-                  <a:lnTo>
-                    <a:pt x="4440596" y="2347375"/>
-                  </a:lnTo>
-                  <a:lnTo>
-                    <a:pt x="4512219" y="2366199"/>
-                  </a:lnTo>
-                  <a:lnTo>
-                    <a:pt x="4583841" y="2384648"/>
-                  </a:lnTo>
-                  <a:lnTo>
-                    <a:pt x="4655464" y="2402728"/>
-                  </a:lnTo>
-                  <a:lnTo>
-                    <a:pt x="4727086" y="2420449"/>
-                  </a:lnTo>
-                  <a:lnTo>
-                    <a:pt x="4798709" y="2437815"/>
-                  </a:lnTo>
-                  <a:lnTo>
-                    <a:pt x="4870331" y="2454836"/>
-                  </a:lnTo>
-                  <a:lnTo>
-                    <a:pt x="4941954" y="2471516"/>
-                  </a:lnTo>
-                  <a:lnTo>
-                    <a:pt x="5013576" y="2487864"/>
-                  </a:lnTo>
-                  <a:lnTo>
-                    <a:pt x="5085199" y="2503887"/>
-                  </a:lnTo>
-                  <a:lnTo>
-                    <a:pt x="5156821" y="2519589"/>
-                  </a:lnTo>
-                  <a:lnTo>
-                    <a:pt x="5228444" y="2534978"/>
-                  </a:lnTo>
-                  <a:lnTo>
-                    <a:pt x="5300066" y="2550061"/>
-                  </a:lnTo>
-                  <a:lnTo>
-                    <a:pt x="5371689" y="2564842"/>
-                  </a:lnTo>
-                  <a:lnTo>
-                    <a:pt x="5443311" y="2579329"/>
-                  </a:lnTo>
-                  <a:lnTo>
-                    <a:pt x="5514934" y="2593527"/>
-                  </a:lnTo>
-                  <a:lnTo>
-                    <a:pt x="5586557" y="2607442"/>
-                  </a:lnTo>
-                  <a:lnTo>
-                    <a:pt x="5658179" y="2621079"/>
-                  </a:lnTo>
-                  <a:lnTo>
-                    <a:pt x="5729802" y="2634444"/>
-                  </a:lnTo>
-                  <a:lnTo>
-                    <a:pt x="5801424" y="2647543"/>
-                  </a:lnTo>
-                  <a:lnTo>
-                    <a:pt x="5873047" y="2660380"/>
-                  </a:lnTo>
-                  <a:lnTo>
-                    <a:pt x="5944669" y="2672961"/>
-                  </a:lnTo>
-                  <a:lnTo>
-                    <a:pt x="6016292" y="2685291"/>
-                  </a:lnTo>
-                  <a:lnTo>
-                    <a:pt x="6087914" y="2697376"/>
-                  </a:lnTo>
-                  <a:lnTo>
-                    <a:pt x="6159537" y="2709219"/>
-                  </a:lnTo>
-                  <a:lnTo>
-                    <a:pt x="6231159" y="2720826"/>
-                  </a:lnTo>
-                  <a:lnTo>
-                    <a:pt x="6302782" y="2732202"/>
-                  </a:lnTo>
-                  <a:lnTo>
-                    <a:pt x="6374404" y="2743351"/>
-                  </a:lnTo>
-                  <a:lnTo>
-                    <a:pt x="6446027" y="2754277"/>
-                  </a:lnTo>
-                  <a:lnTo>
-                    <a:pt x="6517649" y="2764986"/>
-                  </a:lnTo>
-                  <a:lnTo>
-                    <a:pt x="6589272" y="2775481"/>
-                  </a:lnTo>
-                  <a:lnTo>
-                    <a:pt x="6660894" y="2785766"/>
-                  </a:lnTo>
-                  <a:lnTo>
-                    <a:pt x="6732517" y="2795847"/>
-                  </a:lnTo>
-                  <a:lnTo>
-                    <a:pt x="6804139" y="2805726"/>
-                  </a:lnTo>
-                  <a:lnTo>
-                    <a:pt x="6875762" y="2815409"/>
-                  </a:lnTo>
-                  <a:lnTo>
-                    <a:pt x="6947385" y="2824898"/>
-                  </a:lnTo>
-                  <a:lnTo>
-                    <a:pt x="7019007" y="2834198"/>
-                  </a:lnTo>
-                  <a:lnTo>
-                    <a:pt x="7090630" y="2843312"/>
+                    <a:pt x="71622" y="35819"/>
+                  </a:lnTo>
+                  <a:lnTo>
+                    <a:pt x="143245" y="71094"/>
+                  </a:lnTo>
+                  <a:lnTo>
+                    <a:pt x="214867" y="105834"/>
+                  </a:lnTo>
+                  <a:lnTo>
+                    <a:pt x="286490" y="140047"/>
+                  </a:lnTo>
+                  <a:lnTo>
+                    <a:pt x="358112" y="173742"/>
+                  </a:lnTo>
+                  <a:lnTo>
+                    <a:pt x="429735" y="206924"/>
+                  </a:lnTo>
+                  <a:lnTo>
+                    <a:pt x="501357" y="239604"/>
+                  </a:lnTo>
+                  <a:lnTo>
+                    <a:pt x="572980" y="271787"/>
+                  </a:lnTo>
+                  <a:lnTo>
+                    <a:pt x="644602" y="303482"/>
+                  </a:lnTo>
+                  <a:lnTo>
+                    <a:pt x="716225" y="334697"/>
+                  </a:lnTo>
+                  <a:lnTo>
+                    <a:pt x="787847" y="365437"/>
+                  </a:lnTo>
+                  <a:lnTo>
+                    <a:pt x="859470" y="395712"/>
+                  </a:lnTo>
+                  <a:lnTo>
+                    <a:pt x="931092" y="425526"/>
+                  </a:lnTo>
+                  <a:lnTo>
+                    <a:pt x="1002715" y="454889"/>
+                  </a:lnTo>
+                  <a:lnTo>
+                    <a:pt x="1074337" y="483806"/>
+                  </a:lnTo>
+                  <a:lnTo>
+                    <a:pt x="1145960" y="512284"/>
+                  </a:lnTo>
+                  <a:lnTo>
+                    <a:pt x="1217582" y="540330"/>
+                  </a:lnTo>
+                  <a:lnTo>
+                    <a:pt x="1289205" y="567951"/>
+                  </a:lnTo>
+                  <a:lnTo>
+                    <a:pt x="1360827" y="595152"/>
+                  </a:lnTo>
+                  <a:lnTo>
+                    <a:pt x="1432450" y="621941"/>
+                  </a:lnTo>
+                  <a:lnTo>
+                    <a:pt x="1504073" y="648323"/>
+                  </a:lnTo>
+                  <a:lnTo>
+                    <a:pt x="1575695" y="674306"/>
+                  </a:lnTo>
+                  <a:lnTo>
+                    <a:pt x="1647318" y="699893"/>
+                  </a:lnTo>
+                  <a:lnTo>
+                    <a:pt x="1718940" y="725093"/>
+                  </a:lnTo>
+                  <a:lnTo>
+                    <a:pt x="1790563" y="749910"/>
+                  </a:lnTo>
+                  <a:lnTo>
+                    <a:pt x="1862185" y="774351"/>
+                  </a:lnTo>
+                  <a:lnTo>
+                    <a:pt x="1933808" y="798421"/>
+                  </a:lnTo>
+                  <a:lnTo>
+                    <a:pt x="2005430" y="822125"/>
+                  </a:lnTo>
+                  <a:lnTo>
+                    <a:pt x="2077053" y="845470"/>
+                  </a:lnTo>
+                  <a:lnTo>
+                    <a:pt x="2148675" y="868461"/>
+                  </a:lnTo>
+                  <a:lnTo>
+                    <a:pt x="2220298" y="891103"/>
+                  </a:lnTo>
+                  <a:lnTo>
+                    <a:pt x="2291920" y="913401"/>
+                  </a:lnTo>
+                  <a:lnTo>
+                    <a:pt x="2363543" y="935361"/>
+                  </a:lnTo>
+                  <a:lnTo>
+                    <a:pt x="2435165" y="956988"/>
+                  </a:lnTo>
+                  <a:lnTo>
+                    <a:pt x="2506788" y="978286"/>
+                  </a:lnTo>
+                  <a:lnTo>
+                    <a:pt x="2578410" y="999262"/>
+                  </a:lnTo>
+                  <a:lnTo>
+                    <a:pt x="2650033" y="1019919"/>
+                  </a:lnTo>
+                  <a:lnTo>
+                    <a:pt x="2721655" y="1040263"/>
+                  </a:lnTo>
+                  <a:lnTo>
+                    <a:pt x="2793278" y="1060298"/>
+                  </a:lnTo>
+                  <a:lnTo>
+                    <a:pt x="2864901" y="1080029"/>
+                  </a:lnTo>
+                  <a:lnTo>
+                    <a:pt x="2936523" y="1099461"/>
+                  </a:lnTo>
+                  <a:lnTo>
+                    <a:pt x="3008146" y="1118598"/>
+                  </a:lnTo>
+                  <a:lnTo>
+                    <a:pt x="3079768" y="1137445"/>
+                  </a:lnTo>
+                  <a:lnTo>
+                    <a:pt x="3151391" y="1156005"/>
+                  </a:lnTo>
+                  <a:lnTo>
+                    <a:pt x="3223013" y="1174284"/>
+                  </a:lnTo>
+                  <a:lnTo>
+                    <a:pt x="3294636" y="1192286"/>
+                  </a:lnTo>
+                  <a:lnTo>
+                    <a:pt x="3366258" y="1210014"/>
+                  </a:lnTo>
+                  <a:lnTo>
+                    <a:pt x="3437881" y="1227474"/>
+                  </a:lnTo>
+                  <a:lnTo>
+                    <a:pt x="3509503" y="1244668"/>
+                  </a:lnTo>
+                  <a:lnTo>
+                    <a:pt x="3581126" y="1261602"/>
+                  </a:lnTo>
+                  <a:lnTo>
+                    <a:pt x="3652748" y="1278279"/>
+                  </a:lnTo>
+                  <a:lnTo>
+                    <a:pt x="3724371" y="1294703"/>
+                  </a:lnTo>
+                  <a:lnTo>
+                    <a:pt x="3795993" y="1310877"/>
+                  </a:lnTo>
+                  <a:lnTo>
+                    <a:pt x="3867616" y="1326806"/>
+                  </a:lnTo>
+                  <a:lnTo>
+                    <a:pt x="3939238" y="1342494"/>
+                  </a:lnTo>
+                  <a:lnTo>
+                    <a:pt x="4010861" y="1357943"/>
+                  </a:lnTo>
+                  <a:lnTo>
+                    <a:pt x="4082483" y="1373158"/>
+                  </a:lnTo>
+                  <a:lnTo>
+                    <a:pt x="4154106" y="1388142"/>
+                  </a:lnTo>
+                  <a:lnTo>
+                    <a:pt x="4225729" y="1402899"/>
+                  </a:lnTo>
+                  <a:lnTo>
+                    <a:pt x="4297351" y="1417432"/>
+                  </a:lnTo>
+                  <a:lnTo>
+                    <a:pt x="4368974" y="1431744"/>
+                  </a:lnTo>
+                  <a:lnTo>
+                    <a:pt x="4440596" y="1445840"/>
+                  </a:lnTo>
+                  <a:lnTo>
+                    <a:pt x="4512219" y="1459721"/>
+                  </a:lnTo>
+                  <a:lnTo>
+                    <a:pt x="4583841" y="1473392"/>
+                  </a:lnTo>
+                  <a:lnTo>
+                    <a:pt x="4655464" y="1486855"/>
+                  </a:lnTo>
+                  <a:lnTo>
+                    <a:pt x="4727086" y="1500114"/>
+                  </a:lnTo>
+                  <a:lnTo>
+                    <a:pt x="4798709" y="1513172"/>
+                  </a:lnTo>
+                  <a:lnTo>
+                    <a:pt x="4870331" y="1526032"/>
+                  </a:lnTo>
+                  <a:lnTo>
+                    <a:pt x="4941954" y="1538696"/>
+                  </a:lnTo>
+                  <a:lnTo>
+                    <a:pt x="5013576" y="1551169"/>
+                  </a:lnTo>
+                  <a:lnTo>
+                    <a:pt x="5085199" y="1563452"/>
+                  </a:lnTo>
+                  <a:lnTo>
+                    <a:pt x="5156821" y="1575549"/>
+                  </a:lnTo>
+                  <a:lnTo>
+                    <a:pt x="5228444" y="1587462"/>
+                  </a:lnTo>
+                  <a:lnTo>
+                    <a:pt x="5300066" y="1599194"/>
+                  </a:lnTo>
+                  <a:lnTo>
+                    <a:pt x="5371689" y="1610749"/>
+                  </a:lnTo>
+                  <a:lnTo>
+                    <a:pt x="5443311" y="1622128"/>
+                  </a:lnTo>
+                  <a:lnTo>
+                    <a:pt x="5514934" y="1633335"/>
+                  </a:lnTo>
+                  <a:lnTo>
+                    <a:pt x="5586557" y="1644371"/>
+                  </a:lnTo>
+                  <a:lnTo>
+                    <a:pt x="5658179" y="1655240"/>
+                  </a:lnTo>
+                  <a:lnTo>
+                    <a:pt x="5729802" y="1665944"/>
+                  </a:lnTo>
+                  <a:lnTo>
+                    <a:pt x="5801424" y="1676486"/>
+                  </a:lnTo>
+                  <a:lnTo>
+                    <a:pt x="5873047" y="1686868"/>
+                  </a:lnTo>
+                  <a:lnTo>
+                    <a:pt x="5944669" y="1697092"/>
+                  </a:lnTo>
+                  <a:lnTo>
+                    <a:pt x="6016292" y="1707161"/>
+                  </a:lnTo>
+                  <a:lnTo>
+                    <a:pt x="6087914" y="1717077"/>
+                  </a:lnTo>
+                  <a:lnTo>
+                    <a:pt x="6159537" y="1726843"/>
+                  </a:lnTo>
+                  <a:lnTo>
+                    <a:pt x="6231159" y="1736461"/>
+                  </a:lnTo>
+                  <a:lnTo>
+                    <a:pt x="6302782" y="1745933"/>
+                  </a:lnTo>
+                  <a:lnTo>
+                    <a:pt x="6374404" y="1755261"/>
+                  </a:lnTo>
+                  <a:lnTo>
+                    <a:pt x="6446027" y="1764447"/>
+                  </a:lnTo>
+                  <a:lnTo>
+                    <a:pt x="6517649" y="1773494"/>
+                  </a:lnTo>
+                  <a:lnTo>
+                    <a:pt x="6589272" y="1782404"/>
+                  </a:lnTo>
+                  <a:lnTo>
+                    <a:pt x="6660894" y="1791179"/>
+                  </a:lnTo>
+                  <a:lnTo>
+                    <a:pt x="6732517" y="1799820"/>
+                  </a:lnTo>
+                  <a:lnTo>
+                    <a:pt x="6804139" y="1808331"/>
+                  </a:lnTo>
+                  <a:lnTo>
+                    <a:pt x="6875762" y="1816712"/>
+                  </a:lnTo>
+                  <a:lnTo>
+                    <a:pt x="6947385" y="1824966"/>
+                  </a:lnTo>
+                  <a:lnTo>
+                    <a:pt x="7019007" y="1833095"/>
+                  </a:lnTo>
+                  <a:lnTo>
+                    <a:pt x="7090630" y="1841101"/>
                   </a:lnTo>
                 </a:path>
               </a:pathLst>
@@ -5136,7 +5148,7 @@
                   <a:latin typeface="Helvetica"/>
                   <a:cs typeface="Helvetica"/>
                 </a:rPr>
-                <a:t>subHR per 1 mL/min: 0.97 (0.95-1.00)  |  per IQR (Δ = 18.2): 0.62 (0.39-1.00)  |  IQR: [-11.5, 6.7]</a:t>
+                <a:t>subHR per 1 mL/min: 0.98 (0.95-1.01)  |  per IQR (Δ = 18.2): 0.70 (0.41-1.19)  |  IQR: [-11.5, 6.7]</a:t>
               </a:r>
             </a:p>
           </p:txBody>

--- a/docs/plots/carbo/jx_carbo_linsubhr_egfrdisc_anemia2.pptx
+++ b/docs/plots/carbo/jx_carbo_linsubhr_egfrdisc_anemia2.pptx
@@ -3003,521 +3003,521 @@
           <p:spPr>
             <a:xfrm>
               <a:off x="1172049" y="2073503"/>
-              <a:ext cx="7090630" cy="3223040"/>
+              <a:ext cx="7090630" cy="3223713"/>
             </a:xfrm>
             <a:custGeom>
               <a:avLst/>
               <a:pathLst>
-                <a:path w="7090630" h="3223040">
+                <a:path w="7090630" h="3223713">
                   <a:moveTo>
-                    <a:pt x="2183453" y="0"/>
+                    <a:pt x="2189502" y="0"/>
                   </a:moveTo>
                   <a:lnTo>
-                    <a:pt x="2220298" y="67762"/>
-                  </a:lnTo>
-                  <a:lnTo>
-                    <a:pt x="2291920" y="194594"/>
-                  </a:lnTo>
-                  <a:lnTo>
-                    <a:pt x="2363543" y="316716"/>
-                  </a:lnTo>
-                  <a:lnTo>
-                    <a:pt x="2435165" y="434304"/>
-                  </a:lnTo>
-                  <a:lnTo>
-                    <a:pt x="2506788" y="547526"/>
-                  </a:lnTo>
-                  <a:lnTo>
-                    <a:pt x="2578410" y="656545"/>
-                  </a:lnTo>
-                  <a:lnTo>
-                    <a:pt x="2650033" y="761515"/>
-                  </a:lnTo>
-                  <a:lnTo>
-                    <a:pt x="2721655" y="862589"/>
-                  </a:lnTo>
-                  <a:lnTo>
-                    <a:pt x="2793278" y="959909"/>
-                  </a:lnTo>
-                  <a:lnTo>
-                    <a:pt x="2864901" y="1053616"/>
-                  </a:lnTo>
-                  <a:lnTo>
-                    <a:pt x="2936523" y="1143844"/>
-                  </a:lnTo>
-                  <a:lnTo>
-                    <a:pt x="3008146" y="1230722"/>
-                  </a:lnTo>
-                  <a:lnTo>
-                    <a:pt x="3079768" y="1314374"/>
-                  </a:lnTo>
-                  <a:lnTo>
-                    <a:pt x="3151391" y="1394920"/>
-                  </a:lnTo>
-                  <a:lnTo>
-                    <a:pt x="3223013" y="1472476"/>
-                  </a:lnTo>
-                  <a:lnTo>
-                    <a:pt x="3294636" y="1547152"/>
-                  </a:lnTo>
-                  <a:lnTo>
-                    <a:pt x="3366258" y="1619056"/>
-                  </a:lnTo>
-                  <a:lnTo>
-                    <a:pt x="3437881" y="1688289"/>
-                  </a:lnTo>
-                  <a:lnTo>
-                    <a:pt x="3509503" y="1754953"/>
-                  </a:lnTo>
-                  <a:lnTo>
-                    <a:pt x="3581126" y="1819141"/>
-                  </a:lnTo>
-                  <a:lnTo>
-                    <a:pt x="3652748" y="1880946"/>
-                  </a:lnTo>
-                  <a:lnTo>
-                    <a:pt x="3724371" y="1940456"/>
-                  </a:lnTo>
-                  <a:lnTo>
-                    <a:pt x="3795993" y="1997756"/>
-                  </a:lnTo>
-                  <a:lnTo>
-                    <a:pt x="3867616" y="2052929"/>
-                  </a:lnTo>
-                  <a:lnTo>
-                    <a:pt x="3939238" y="2106054"/>
-                  </a:lnTo>
-                  <a:lnTo>
-                    <a:pt x="4010861" y="2157206"/>
-                  </a:lnTo>
-                  <a:lnTo>
-                    <a:pt x="4082483" y="2206459"/>
-                  </a:lnTo>
-                  <a:lnTo>
-                    <a:pt x="4154106" y="2253883"/>
-                  </a:lnTo>
-                  <a:lnTo>
-                    <a:pt x="4225729" y="2299546"/>
-                  </a:lnTo>
-                  <a:lnTo>
-                    <a:pt x="4297351" y="2343514"/>
-                  </a:lnTo>
-                  <a:lnTo>
-                    <a:pt x="4368974" y="2385850"/>
-                  </a:lnTo>
-                  <a:lnTo>
-                    <a:pt x="4440596" y="2426613"/>
-                  </a:lnTo>
-                  <a:lnTo>
-                    <a:pt x="4512219" y="2465864"/>
-                  </a:lnTo>
-                  <a:lnTo>
-                    <a:pt x="4583841" y="2503656"/>
-                  </a:lnTo>
-                  <a:lnTo>
-                    <a:pt x="4655464" y="2540046"/>
-                  </a:lnTo>
-                  <a:lnTo>
-                    <a:pt x="4727086" y="2575084"/>
-                  </a:lnTo>
-                  <a:lnTo>
-                    <a:pt x="4798709" y="2608822"/>
-                  </a:lnTo>
-                  <a:lnTo>
-                    <a:pt x="4870331" y="2641307"/>
-                  </a:lnTo>
-                  <a:lnTo>
-                    <a:pt x="4941954" y="2650725"/>
-                  </a:lnTo>
-                  <a:lnTo>
-                    <a:pt x="5013576" y="2644658"/>
-                  </a:lnTo>
-                  <a:lnTo>
-                    <a:pt x="5085199" y="2638546"/>
-                  </a:lnTo>
-                  <a:lnTo>
-                    <a:pt x="5156821" y="2632390"/>
-                  </a:lnTo>
-                  <a:lnTo>
-                    <a:pt x="5228444" y="2626189"/>
-                  </a:lnTo>
-                  <a:lnTo>
-                    <a:pt x="5300066" y="2619943"/>
-                  </a:lnTo>
-                  <a:lnTo>
-                    <a:pt x="5371689" y="2613652"/>
-                  </a:lnTo>
-                  <a:lnTo>
-                    <a:pt x="5443311" y="2607314"/>
-                  </a:lnTo>
-                  <a:lnTo>
-                    <a:pt x="5514934" y="2600931"/>
-                  </a:lnTo>
-                  <a:lnTo>
-                    <a:pt x="5586557" y="2594501"/>
-                  </a:lnTo>
-                  <a:lnTo>
-                    <a:pt x="5658179" y="2588024"/>
-                  </a:lnTo>
-                  <a:lnTo>
-                    <a:pt x="5729802" y="2581500"/>
-                  </a:lnTo>
-                  <a:lnTo>
-                    <a:pt x="5801424" y="2574928"/>
-                  </a:lnTo>
-                  <a:lnTo>
-                    <a:pt x="5873047" y="2568309"/>
-                  </a:lnTo>
-                  <a:lnTo>
-                    <a:pt x="5944669" y="2561641"/>
-                  </a:lnTo>
-                  <a:lnTo>
-                    <a:pt x="6016292" y="2554925"/>
-                  </a:lnTo>
-                  <a:lnTo>
-                    <a:pt x="6087914" y="2548160"/>
-                  </a:lnTo>
-                  <a:lnTo>
-                    <a:pt x="6159537" y="2541345"/>
-                  </a:lnTo>
-                  <a:lnTo>
-                    <a:pt x="6231159" y="2534481"/>
-                  </a:lnTo>
-                  <a:lnTo>
-                    <a:pt x="6302782" y="2527567"/>
-                  </a:lnTo>
-                  <a:lnTo>
-                    <a:pt x="6374404" y="2520603"/>
-                  </a:lnTo>
-                  <a:lnTo>
-                    <a:pt x="6446027" y="2513588"/>
-                  </a:lnTo>
-                  <a:lnTo>
-                    <a:pt x="6517649" y="2506521"/>
-                  </a:lnTo>
-                  <a:lnTo>
-                    <a:pt x="6589272" y="2499404"/>
-                  </a:lnTo>
-                  <a:lnTo>
-                    <a:pt x="6660894" y="2492234"/>
-                  </a:lnTo>
-                  <a:lnTo>
-                    <a:pt x="6732517" y="2485012"/>
-                  </a:lnTo>
-                  <a:lnTo>
-                    <a:pt x="6804139" y="2477738"/>
-                  </a:lnTo>
-                  <a:lnTo>
-                    <a:pt x="6875762" y="2470411"/>
-                  </a:lnTo>
-                  <a:lnTo>
-                    <a:pt x="6947385" y="2463030"/>
-                  </a:lnTo>
-                  <a:lnTo>
-                    <a:pt x="7019007" y="2455595"/>
-                  </a:lnTo>
-                  <a:lnTo>
-                    <a:pt x="7090630" y="2448107"/>
-                  </a:lnTo>
-                  <a:lnTo>
-                    <a:pt x="7090630" y="3223040"/>
-                  </a:lnTo>
-                  <a:lnTo>
-                    <a:pt x="7019007" y="3212987"/>
-                  </a:lnTo>
-                  <a:lnTo>
-                    <a:pt x="6947385" y="3202546"/>
-                  </a:lnTo>
-                  <a:lnTo>
-                    <a:pt x="6875762" y="3191703"/>
-                  </a:lnTo>
-                  <a:lnTo>
-                    <a:pt x="6804139" y="3180441"/>
-                  </a:lnTo>
-                  <a:lnTo>
-                    <a:pt x="6732517" y="3168746"/>
-                  </a:lnTo>
-                  <a:lnTo>
-                    <a:pt x="6660894" y="3156599"/>
-                  </a:lnTo>
-                  <a:lnTo>
-                    <a:pt x="6589272" y="3143984"/>
-                  </a:lnTo>
-                  <a:lnTo>
-                    <a:pt x="6517649" y="3130883"/>
-                  </a:lnTo>
-                  <a:lnTo>
-                    <a:pt x="6446027" y="3117276"/>
-                  </a:lnTo>
-                  <a:lnTo>
-                    <a:pt x="6374404" y="3103145"/>
-                  </a:lnTo>
-                  <a:lnTo>
-                    <a:pt x="6302782" y="3088469"/>
-                  </a:lnTo>
-                  <a:lnTo>
-                    <a:pt x="6231159" y="3073226"/>
-                  </a:lnTo>
-                  <a:lnTo>
-                    <a:pt x="6159537" y="3057397"/>
-                  </a:lnTo>
-                  <a:lnTo>
-                    <a:pt x="6087914" y="3040956"/>
-                  </a:lnTo>
-                  <a:lnTo>
-                    <a:pt x="6016292" y="3023882"/>
-                  </a:lnTo>
-                  <a:lnTo>
-                    <a:pt x="5944669" y="3006149"/>
-                  </a:lnTo>
-                  <a:lnTo>
-                    <a:pt x="5873047" y="2987733"/>
-                  </a:lnTo>
-                  <a:lnTo>
-                    <a:pt x="5801424" y="2968607"/>
-                  </a:lnTo>
-                  <a:lnTo>
-                    <a:pt x="5729802" y="2948743"/>
-                  </a:lnTo>
-                  <a:lnTo>
-                    <a:pt x="5658179" y="2928112"/>
-                  </a:lnTo>
-                  <a:lnTo>
-                    <a:pt x="5586557" y="2906687"/>
-                  </a:lnTo>
-                  <a:lnTo>
-                    <a:pt x="5514934" y="2884435"/>
-                  </a:lnTo>
-                  <a:lnTo>
-                    <a:pt x="5443311" y="2861325"/>
-                  </a:lnTo>
-                  <a:lnTo>
-                    <a:pt x="5371689" y="2837325"/>
-                  </a:lnTo>
-                  <a:lnTo>
-                    <a:pt x="5300066" y="2812398"/>
-                  </a:lnTo>
-                  <a:lnTo>
-                    <a:pt x="5228444" y="2786511"/>
-                  </a:lnTo>
-                  <a:lnTo>
-                    <a:pt x="5156821" y="2759625"/>
-                  </a:lnTo>
-                  <a:lnTo>
-                    <a:pt x="5085199" y="2731702"/>
-                  </a:lnTo>
-                  <a:lnTo>
-                    <a:pt x="5013576" y="2702703"/>
-                  </a:lnTo>
-                  <a:lnTo>
-                    <a:pt x="4941954" y="2672586"/>
-                  </a:lnTo>
-                  <a:lnTo>
-                    <a:pt x="4870331" y="2656749"/>
-                  </a:lnTo>
-                  <a:lnTo>
-                    <a:pt x="4798709" y="2662729"/>
-                  </a:lnTo>
-                  <a:lnTo>
-                    <a:pt x="4727086" y="2668665"/>
-                  </a:lnTo>
-                  <a:lnTo>
-                    <a:pt x="4655464" y="2674559"/>
-                  </a:lnTo>
-                  <a:lnTo>
-                    <a:pt x="4583841" y="2680410"/>
-                  </a:lnTo>
-                  <a:lnTo>
-                    <a:pt x="4512219" y="2686219"/>
-                  </a:lnTo>
-                  <a:lnTo>
-                    <a:pt x="4440596" y="2691986"/>
-                  </a:lnTo>
-                  <a:lnTo>
-                    <a:pt x="4368974" y="2697711"/>
-                  </a:lnTo>
-                  <a:lnTo>
-                    <a:pt x="4297351" y="2703395"/>
-                  </a:lnTo>
-                  <a:lnTo>
-                    <a:pt x="4225729" y="2709038"/>
-                  </a:lnTo>
-                  <a:lnTo>
-                    <a:pt x="4154106" y="2714640"/>
-                  </a:lnTo>
-                  <a:lnTo>
-                    <a:pt x="4082483" y="2720201"/>
-                  </a:lnTo>
-                  <a:lnTo>
-                    <a:pt x="4010861" y="2725722"/>
-                  </a:lnTo>
-                  <a:lnTo>
-                    <a:pt x="3939238" y="2731203"/>
-                  </a:lnTo>
-                  <a:lnTo>
-                    <a:pt x="3867616" y="2736645"/>
-                  </a:lnTo>
-                  <a:lnTo>
-                    <a:pt x="3795993" y="2742047"/>
-                  </a:lnTo>
-                  <a:lnTo>
-                    <a:pt x="3724371" y="2747410"/>
-                  </a:lnTo>
-                  <a:lnTo>
-                    <a:pt x="3652748" y="2752735"/>
-                  </a:lnTo>
-                  <a:lnTo>
-                    <a:pt x="3581126" y="2758020"/>
-                  </a:lnTo>
-                  <a:lnTo>
-                    <a:pt x="3509503" y="2763268"/>
-                  </a:lnTo>
-                  <a:lnTo>
-                    <a:pt x="3437881" y="2768478"/>
-                  </a:lnTo>
-                  <a:lnTo>
-                    <a:pt x="3366258" y="2773650"/>
-                  </a:lnTo>
-                  <a:lnTo>
-                    <a:pt x="3294636" y="2778785"/>
-                  </a:lnTo>
-                  <a:lnTo>
-                    <a:pt x="3223013" y="2783882"/>
-                  </a:lnTo>
-                  <a:lnTo>
-                    <a:pt x="3151391" y="2788943"/>
-                  </a:lnTo>
-                  <a:lnTo>
-                    <a:pt x="3079768" y="2793967"/>
-                  </a:lnTo>
-                  <a:lnTo>
-                    <a:pt x="3008146" y="2798954"/>
-                  </a:lnTo>
-                  <a:lnTo>
-                    <a:pt x="2936523" y="2803906"/>
-                  </a:lnTo>
-                  <a:lnTo>
-                    <a:pt x="2864901" y="2808822"/>
-                  </a:lnTo>
-                  <a:lnTo>
-                    <a:pt x="2793278" y="2813702"/>
-                  </a:lnTo>
-                  <a:lnTo>
-                    <a:pt x="2721655" y="2818547"/>
-                  </a:lnTo>
-                  <a:lnTo>
-                    <a:pt x="2650033" y="2823357"/>
-                  </a:lnTo>
-                  <a:lnTo>
-                    <a:pt x="2578410" y="2828133"/>
-                  </a:lnTo>
-                  <a:lnTo>
-                    <a:pt x="2506788" y="2832873"/>
-                  </a:lnTo>
-                  <a:lnTo>
-                    <a:pt x="2435165" y="2837580"/>
-                  </a:lnTo>
-                  <a:lnTo>
-                    <a:pt x="2363543" y="2842252"/>
-                  </a:lnTo>
-                  <a:lnTo>
-                    <a:pt x="2291920" y="2846891"/>
-                  </a:lnTo>
-                  <a:lnTo>
-                    <a:pt x="2220298" y="2851496"/>
-                  </a:lnTo>
-                  <a:lnTo>
-                    <a:pt x="2148675" y="2856067"/>
-                  </a:lnTo>
-                  <a:lnTo>
-                    <a:pt x="2077053" y="2860606"/>
-                  </a:lnTo>
-                  <a:lnTo>
-                    <a:pt x="2005430" y="2865112"/>
-                  </a:lnTo>
-                  <a:lnTo>
-                    <a:pt x="1933808" y="2869585"/>
-                  </a:lnTo>
-                  <a:lnTo>
-                    <a:pt x="1862185" y="2874026"/>
-                  </a:lnTo>
-                  <a:lnTo>
-                    <a:pt x="1790563" y="2878435"/>
-                  </a:lnTo>
-                  <a:lnTo>
-                    <a:pt x="1718940" y="2882812"/>
-                  </a:lnTo>
-                  <a:lnTo>
-                    <a:pt x="1647318" y="2887157"/>
-                  </a:lnTo>
-                  <a:lnTo>
-                    <a:pt x="1575695" y="2891471"/>
-                  </a:lnTo>
-                  <a:lnTo>
-                    <a:pt x="1504073" y="2895754"/>
-                  </a:lnTo>
-                  <a:lnTo>
-                    <a:pt x="1432450" y="2900006"/>
-                  </a:lnTo>
-                  <a:lnTo>
-                    <a:pt x="1360827" y="2904227"/>
-                  </a:lnTo>
-                  <a:lnTo>
-                    <a:pt x="1289205" y="2908417"/>
-                  </a:lnTo>
-                  <a:lnTo>
-                    <a:pt x="1217582" y="2912577"/>
-                  </a:lnTo>
-                  <a:lnTo>
-                    <a:pt x="1145960" y="2916707"/>
-                  </a:lnTo>
-                  <a:lnTo>
-                    <a:pt x="1074337" y="2920808"/>
-                  </a:lnTo>
-                  <a:lnTo>
-                    <a:pt x="1002715" y="2924878"/>
-                  </a:lnTo>
-                  <a:lnTo>
-                    <a:pt x="931092" y="2928919"/>
-                  </a:lnTo>
-                  <a:lnTo>
-                    <a:pt x="859470" y="2932931"/>
-                  </a:lnTo>
-                  <a:lnTo>
-                    <a:pt x="787847" y="2936914"/>
-                  </a:lnTo>
-                  <a:lnTo>
-                    <a:pt x="716225" y="2940868"/>
-                  </a:lnTo>
-                  <a:lnTo>
-                    <a:pt x="644602" y="2944794"/>
-                  </a:lnTo>
-                  <a:lnTo>
-                    <a:pt x="572980" y="2948691"/>
-                  </a:lnTo>
-                  <a:lnTo>
-                    <a:pt x="501357" y="2952560"/>
-                  </a:lnTo>
-                  <a:lnTo>
-                    <a:pt x="429735" y="2956401"/>
-                  </a:lnTo>
-                  <a:lnTo>
-                    <a:pt x="358112" y="2960214"/>
-                  </a:lnTo>
-                  <a:lnTo>
-                    <a:pt x="286490" y="2963999"/>
-                  </a:lnTo>
-                  <a:lnTo>
-                    <a:pt x="214867" y="2967758"/>
-                  </a:lnTo>
-                  <a:lnTo>
-                    <a:pt x="143245" y="2971489"/>
-                  </a:lnTo>
-                  <a:lnTo>
-                    <a:pt x="71622" y="2975193"/>
-                  </a:lnTo>
-                  <a:lnTo>
-                    <a:pt x="0" y="2978870"/>
+                    <a:pt x="2220298" y="56946"/>
+                  </a:lnTo>
+                  <a:lnTo>
+                    <a:pt x="2291920" y="184458"/>
+                  </a:lnTo>
+                  <a:lnTo>
+                    <a:pt x="2363543" y="307225"/>
+                  </a:lnTo>
+                  <a:lnTo>
+                    <a:pt x="2435165" y="425424"/>
+                  </a:lnTo>
+                  <a:lnTo>
+                    <a:pt x="2506788" y="539225"/>
+                  </a:lnTo>
+                  <a:lnTo>
+                    <a:pt x="2578410" y="648791"/>
+                  </a:lnTo>
+                  <a:lnTo>
+                    <a:pt x="2650033" y="754280"/>
+                  </a:lnTo>
+                  <a:lnTo>
+                    <a:pt x="2721655" y="855844"/>
+                  </a:lnTo>
+                  <a:lnTo>
+                    <a:pt x="2793278" y="953629"/>
+                  </a:lnTo>
+                  <a:lnTo>
+                    <a:pt x="2864901" y="1047775"/>
+                  </a:lnTo>
+                  <a:lnTo>
+                    <a:pt x="2936523" y="1138418"/>
+                  </a:lnTo>
+                  <a:lnTo>
+                    <a:pt x="3008146" y="1225688"/>
+                  </a:lnTo>
+                  <a:lnTo>
+                    <a:pt x="3079768" y="1309711"/>
+                  </a:lnTo>
+                  <a:lnTo>
+                    <a:pt x="3151391" y="1390607"/>
+                  </a:lnTo>
+                  <a:lnTo>
+                    <a:pt x="3223013" y="1468493"/>
+                  </a:lnTo>
+                  <a:lnTo>
+                    <a:pt x="3294636" y="1543481"/>
+                  </a:lnTo>
+                  <a:lnTo>
+                    <a:pt x="3366258" y="1615679"/>
+                  </a:lnTo>
+                  <a:lnTo>
+                    <a:pt x="3437881" y="1685190"/>
+                  </a:lnTo>
+                  <a:lnTo>
+                    <a:pt x="3509503" y="1752115"/>
+                  </a:lnTo>
+                  <a:lnTo>
+                    <a:pt x="3581126" y="1816549"/>
+                  </a:lnTo>
+                  <a:lnTo>
+                    <a:pt x="3652748" y="1878586"/>
+                  </a:lnTo>
+                  <a:lnTo>
+                    <a:pt x="3724371" y="1938314"/>
+                  </a:lnTo>
+                  <a:lnTo>
+                    <a:pt x="3795993" y="1995820"/>
+                  </a:lnTo>
+                  <a:lnTo>
+                    <a:pt x="3867616" y="2051186"/>
+                  </a:lnTo>
+                  <a:lnTo>
+                    <a:pt x="3939238" y="2104492"/>
+                  </a:lnTo>
+                  <a:lnTo>
+                    <a:pt x="4010861" y="2155814"/>
+                  </a:lnTo>
+                  <a:lnTo>
+                    <a:pt x="4082483" y="2205227"/>
+                  </a:lnTo>
+                  <a:lnTo>
+                    <a:pt x="4154106" y="2252801"/>
+                  </a:lnTo>
+                  <a:lnTo>
+                    <a:pt x="4225729" y="2298604"/>
+                  </a:lnTo>
+                  <a:lnTo>
+                    <a:pt x="4297351" y="2342704"/>
+                  </a:lnTo>
+                  <a:lnTo>
+                    <a:pt x="4368974" y="2385162"/>
+                  </a:lnTo>
+                  <a:lnTo>
+                    <a:pt x="4440596" y="2426041"/>
+                  </a:lnTo>
+                  <a:lnTo>
+                    <a:pt x="4512219" y="2465398"/>
+                  </a:lnTo>
+                  <a:lnTo>
+                    <a:pt x="4583841" y="2503291"/>
+                  </a:lnTo>
+                  <a:lnTo>
+                    <a:pt x="4655464" y="2539774"/>
+                  </a:lnTo>
+                  <a:lnTo>
+                    <a:pt x="4727086" y="2574899"/>
+                  </a:lnTo>
+                  <a:lnTo>
+                    <a:pt x="4798709" y="2608718"/>
+                  </a:lnTo>
+                  <a:lnTo>
+                    <a:pt x="4870331" y="2641278"/>
+                  </a:lnTo>
+                  <a:lnTo>
+                    <a:pt x="4941954" y="2652918"/>
+                  </a:lnTo>
+                  <a:lnTo>
+                    <a:pt x="5013576" y="2650597"/>
+                  </a:lnTo>
+                  <a:lnTo>
+                    <a:pt x="5085199" y="2648271"/>
+                  </a:lnTo>
+                  <a:lnTo>
+                    <a:pt x="5156821" y="2645937"/>
+                  </a:lnTo>
+                  <a:lnTo>
+                    <a:pt x="5228444" y="2643598"/>
+                  </a:lnTo>
+                  <a:lnTo>
+                    <a:pt x="5300066" y="2641252"/>
+                  </a:lnTo>
+                  <a:lnTo>
+                    <a:pt x="5371689" y="2638899"/>
+                  </a:lnTo>
+                  <a:lnTo>
+                    <a:pt x="5443311" y="2636539"/>
+                  </a:lnTo>
+                  <a:lnTo>
+                    <a:pt x="5514934" y="2634173"/>
+                  </a:lnTo>
+                  <a:lnTo>
+                    <a:pt x="5586557" y="2631801"/>
+                  </a:lnTo>
+                  <a:lnTo>
+                    <a:pt x="5658179" y="2629422"/>
+                  </a:lnTo>
+                  <a:lnTo>
+                    <a:pt x="5729802" y="2627036"/>
+                  </a:lnTo>
+                  <a:lnTo>
+                    <a:pt x="5801424" y="2624643"/>
+                  </a:lnTo>
+                  <a:lnTo>
+                    <a:pt x="5873047" y="2622244"/>
+                  </a:lnTo>
+                  <a:lnTo>
+                    <a:pt x="5944669" y="2619838"/>
+                  </a:lnTo>
+                  <a:lnTo>
+                    <a:pt x="6016292" y="2617426"/>
+                  </a:lnTo>
+                  <a:lnTo>
+                    <a:pt x="6087914" y="2615006"/>
+                  </a:lnTo>
+                  <a:lnTo>
+                    <a:pt x="6159537" y="2612580"/>
+                  </a:lnTo>
+                  <a:lnTo>
+                    <a:pt x="6231159" y="2610147"/>
+                  </a:lnTo>
+                  <a:lnTo>
+                    <a:pt x="6302782" y="2607708"/>
+                  </a:lnTo>
+                  <a:lnTo>
+                    <a:pt x="6374404" y="2605261"/>
+                  </a:lnTo>
+                  <a:lnTo>
+                    <a:pt x="6446027" y="2602808"/>
+                  </a:lnTo>
+                  <a:lnTo>
+                    <a:pt x="6517649" y="2600348"/>
+                  </a:lnTo>
+                  <a:lnTo>
+                    <a:pt x="6589272" y="2597881"/>
+                  </a:lnTo>
+                  <a:lnTo>
+                    <a:pt x="6660894" y="2595407"/>
+                  </a:lnTo>
+                  <a:lnTo>
+                    <a:pt x="6732517" y="2592926"/>
+                  </a:lnTo>
+                  <a:lnTo>
+                    <a:pt x="6804139" y="2590438"/>
+                  </a:lnTo>
+                  <a:lnTo>
+                    <a:pt x="6875762" y="2587944"/>
+                  </a:lnTo>
+                  <a:lnTo>
+                    <a:pt x="6947385" y="2585442"/>
+                  </a:lnTo>
+                  <a:lnTo>
+                    <a:pt x="7019007" y="2582933"/>
+                  </a:lnTo>
+                  <a:lnTo>
+                    <a:pt x="7090630" y="2580418"/>
+                  </a:lnTo>
+                  <a:lnTo>
+                    <a:pt x="7090630" y="3223713"/>
+                  </a:lnTo>
+                  <a:lnTo>
+                    <a:pt x="7019007" y="3213663"/>
+                  </a:lnTo>
+                  <a:lnTo>
+                    <a:pt x="6947385" y="3203224"/>
+                  </a:lnTo>
+                  <a:lnTo>
+                    <a:pt x="6875762" y="3192383"/>
+                  </a:lnTo>
+                  <a:lnTo>
+                    <a:pt x="6804139" y="3181122"/>
+                  </a:lnTo>
+                  <a:lnTo>
+                    <a:pt x="6732517" y="3169426"/>
+                  </a:lnTo>
+                  <a:lnTo>
+                    <a:pt x="6660894" y="3157278"/>
+                  </a:lnTo>
+                  <a:lnTo>
+                    <a:pt x="6589272" y="3144661"/>
+                  </a:lnTo>
+                  <a:lnTo>
+                    <a:pt x="6517649" y="3131556"/>
+                  </a:lnTo>
+                  <a:lnTo>
+                    <a:pt x="6446027" y="3117944"/>
+                  </a:lnTo>
+                  <a:lnTo>
+                    <a:pt x="6374404" y="3103806"/>
+                  </a:lnTo>
+                  <a:lnTo>
+                    <a:pt x="6302782" y="3089122"/>
+                  </a:lnTo>
+                  <a:lnTo>
+                    <a:pt x="6231159" y="3073871"/>
+                  </a:lnTo>
+                  <a:lnTo>
+                    <a:pt x="6159537" y="3058030"/>
+                  </a:lnTo>
+                  <a:lnTo>
+                    <a:pt x="6087914" y="3041577"/>
+                  </a:lnTo>
+                  <a:lnTo>
+                    <a:pt x="6016292" y="3024488"/>
+                  </a:lnTo>
+                  <a:lnTo>
+                    <a:pt x="5944669" y="3006738"/>
+                  </a:lnTo>
+                  <a:lnTo>
+                    <a:pt x="5873047" y="2988302"/>
+                  </a:lnTo>
+                  <a:lnTo>
+                    <a:pt x="5801424" y="2969154"/>
+                  </a:lnTo>
+                  <a:lnTo>
+                    <a:pt x="5729802" y="2949266"/>
+                  </a:lnTo>
+                  <a:lnTo>
+                    <a:pt x="5658179" y="2928609"/>
+                  </a:lnTo>
+                  <a:lnTo>
+                    <a:pt x="5586557" y="2907154"/>
+                  </a:lnTo>
+                  <a:lnTo>
+                    <a:pt x="5514934" y="2884870"/>
+                  </a:lnTo>
+                  <a:lnTo>
+                    <a:pt x="5443311" y="2861725"/>
+                  </a:lnTo>
+                  <a:lnTo>
+                    <a:pt x="5371689" y="2837684"/>
+                  </a:lnTo>
+                  <a:lnTo>
+                    <a:pt x="5300066" y="2812715"/>
+                  </a:lnTo>
+                  <a:lnTo>
+                    <a:pt x="5228444" y="2786781"/>
+                  </a:lnTo>
+                  <a:lnTo>
+                    <a:pt x="5156821" y="2759844"/>
+                  </a:lnTo>
+                  <a:lnTo>
+                    <a:pt x="5085199" y="2731867"/>
+                  </a:lnTo>
+                  <a:lnTo>
+                    <a:pt x="5013576" y="2702808"/>
+                  </a:lnTo>
+                  <a:lnTo>
+                    <a:pt x="4941954" y="2672626"/>
+                  </a:lnTo>
+                  <a:lnTo>
+                    <a:pt x="4870331" y="2655231"/>
+                  </a:lnTo>
+                  <a:lnTo>
+                    <a:pt x="4798709" y="2657539"/>
+                  </a:lnTo>
+                  <a:lnTo>
+                    <a:pt x="4727086" y="2659840"/>
+                  </a:lnTo>
+                  <a:lnTo>
+                    <a:pt x="4655464" y="2662134"/>
+                  </a:lnTo>
+                  <a:lnTo>
+                    <a:pt x="4583841" y="2664422"/>
+                  </a:lnTo>
+                  <a:lnTo>
+                    <a:pt x="4512219" y="2666704"/>
+                  </a:lnTo>
+                  <a:lnTo>
+                    <a:pt x="4440596" y="2668979"/>
+                  </a:lnTo>
+                  <a:lnTo>
+                    <a:pt x="4368974" y="2671248"/>
+                  </a:lnTo>
+                  <a:lnTo>
+                    <a:pt x="4297351" y="2673511"/>
+                  </a:lnTo>
+                  <a:lnTo>
+                    <a:pt x="4225729" y="2675767"/>
+                  </a:lnTo>
+                  <a:lnTo>
+                    <a:pt x="4154106" y="2678017"/>
+                  </a:lnTo>
+                  <a:lnTo>
+                    <a:pt x="4082483" y="2680261"/>
+                  </a:lnTo>
+                  <a:lnTo>
+                    <a:pt x="4010861" y="2682499"/>
+                  </a:lnTo>
+                  <a:lnTo>
+                    <a:pt x="3939238" y="2684730"/>
+                  </a:lnTo>
+                  <a:lnTo>
+                    <a:pt x="3867616" y="2686955"/>
+                  </a:lnTo>
+                  <a:lnTo>
+                    <a:pt x="3795993" y="2689174"/>
+                  </a:lnTo>
+                  <a:lnTo>
+                    <a:pt x="3724371" y="2691387"/>
+                  </a:lnTo>
+                  <a:lnTo>
+                    <a:pt x="3652748" y="2693594"/>
+                  </a:lnTo>
+                  <a:lnTo>
+                    <a:pt x="3581126" y="2695794"/>
+                  </a:lnTo>
+                  <a:lnTo>
+                    <a:pt x="3509503" y="2697989"/>
+                  </a:lnTo>
+                  <a:lnTo>
+                    <a:pt x="3437881" y="2700177"/>
+                  </a:lnTo>
+                  <a:lnTo>
+                    <a:pt x="3366258" y="2702359"/>
+                  </a:lnTo>
+                  <a:lnTo>
+                    <a:pt x="3294636" y="2704535"/>
+                  </a:lnTo>
+                  <a:lnTo>
+                    <a:pt x="3223013" y="2706705"/>
+                  </a:lnTo>
+                  <a:lnTo>
+                    <a:pt x="3151391" y="2708869"/>
+                  </a:lnTo>
+                  <a:lnTo>
+                    <a:pt x="3079768" y="2711027"/>
+                  </a:lnTo>
+                  <a:lnTo>
+                    <a:pt x="3008146" y="2713179"/>
+                  </a:lnTo>
+                  <a:lnTo>
+                    <a:pt x="2936523" y="2715325"/>
+                  </a:lnTo>
+                  <a:lnTo>
+                    <a:pt x="2864901" y="2717465"/>
+                  </a:lnTo>
+                  <a:lnTo>
+                    <a:pt x="2793278" y="2719599"/>
+                  </a:lnTo>
+                  <a:lnTo>
+                    <a:pt x="2721655" y="2721727"/>
+                  </a:lnTo>
+                  <a:lnTo>
+                    <a:pt x="2650033" y="2723849"/>
+                  </a:lnTo>
+                  <a:lnTo>
+                    <a:pt x="2578410" y="2725965"/>
+                  </a:lnTo>
+                  <a:lnTo>
+                    <a:pt x="2506788" y="2728075"/>
+                  </a:lnTo>
+                  <a:lnTo>
+                    <a:pt x="2435165" y="2730180"/>
+                  </a:lnTo>
+                  <a:lnTo>
+                    <a:pt x="2363543" y="2732278"/>
+                  </a:lnTo>
+                  <a:lnTo>
+                    <a:pt x="2291920" y="2734371"/>
+                  </a:lnTo>
+                  <a:lnTo>
+                    <a:pt x="2220298" y="2736458"/>
+                  </a:lnTo>
+                  <a:lnTo>
+                    <a:pt x="2148675" y="2738539"/>
+                  </a:lnTo>
+                  <a:lnTo>
+                    <a:pt x="2077053" y="2740614"/>
+                  </a:lnTo>
+                  <a:lnTo>
+                    <a:pt x="2005430" y="2742684"/>
+                  </a:lnTo>
+                  <a:lnTo>
+                    <a:pt x="1933808" y="2744748"/>
+                  </a:lnTo>
+                  <a:lnTo>
+                    <a:pt x="1862185" y="2746806"/>
+                  </a:lnTo>
+                  <a:lnTo>
+                    <a:pt x="1790563" y="2748858"/>
+                  </a:lnTo>
+                  <a:lnTo>
+                    <a:pt x="1718940" y="2750905"/>
+                  </a:lnTo>
+                  <a:lnTo>
+                    <a:pt x="1647318" y="2752946"/>
+                  </a:lnTo>
+                  <a:lnTo>
+                    <a:pt x="1575695" y="2754981"/>
+                  </a:lnTo>
+                  <a:lnTo>
+                    <a:pt x="1504073" y="2757010"/>
+                  </a:lnTo>
+                  <a:lnTo>
+                    <a:pt x="1432450" y="2759034"/>
+                  </a:lnTo>
+                  <a:lnTo>
+                    <a:pt x="1360827" y="2761052"/>
+                  </a:lnTo>
+                  <a:lnTo>
+                    <a:pt x="1289205" y="2763065"/>
+                  </a:lnTo>
+                  <a:lnTo>
+                    <a:pt x="1217582" y="2765072"/>
+                  </a:lnTo>
+                  <a:lnTo>
+                    <a:pt x="1145960" y="2767073"/>
+                  </a:lnTo>
+                  <a:lnTo>
+                    <a:pt x="1074337" y="2769069"/>
+                  </a:lnTo>
+                  <a:lnTo>
+                    <a:pt x="1002715" y="2771059"/>
+                  </a:lnTo>
+                  <a:lnTo>
+                    <a:pt x="931092" y="2773044"/>
+                  </a:lnTo>
+                  <a:lnTo>
+                    <a:pt x="859470" y="2775023"/>
+                  </a:lnTo>
+                  <a:lnTo>
+                    <a:pt x="787847" y="2776997"/>
+                  </a:lnTo>
+                  <a:lnTo>
+                    <a:pt x="716225" y="2778965"/>
+                  </a:lnTo>
+                  <a:lnTo>
+                    <a:pt x="644602" y="2780928"/>
+                  </a:lnTo>
+                  <a:lnTo>
+                    <a:pt x="572980" y="2782885"/>
+                  </a:lnTo>
+                  <a:lnTo>
+                    <a:pt x="501357" y="2784837"/>
+                  </a:lnTo>
+                  <a:lnTo>
+                    <a:pt x="429735" y="2786784"/>
+                  </a:lnTo>
+                  <a:lnTo>
+                    <a:pt x="358112" y="2788724"/>
+                  </a:lnTo>
+                  <a:lnTo>
+                    <a:pt x="286490" y="2790660"/>
+                  </a:lnTo>
+                  <a:lnTo>
+                    <a:pt x="214867" y="2792590"/>
+                  </a:lnTo>
+                  <a:lnTo>
+                    <a:pt x="143245" y="2794515"/>
+                  </a:lnTo>
+                  <a:lnTo>
+                    <a:pt x="71622" y="2796434"/>
+                  </a:lnTo>
+                  <a:lnTo>
+                    <a:pt x="0" y="2798348"/>
                   </a:lnTo>
                   <a:close/>
                 </a:path>
@@ -3543,222 +3543,222 @@
           </p:nvSpPr>
           <p:spPr>
             <a:xfrm>
-              <a:off x="3355502" y="2073503"/>
-              <a:ext cx="4907176" cy="2650725"/>
+              <a:off x="3361551" y="2073503"/>
+              <a:ext cx="4901127" cy="2652918"/>
             </a:xfrm>
             <a:custGeom>
               <a:avLst/>
               <a:pathLst>
-                <a:path w="4907176" h="2650725">
+                <a:path w="4901127" h="2652918">
                   <a:moveTo>
                     <a:pt x="0" y="0"/>
                   </a:moveTo>
                   <a:lnTo>
-                    <a:pt x="36845" y="67762"/>
-                  </a:lnTo>
-                  <a:lnTo>
-                    <a:pt x="108467" y="194594"/>
-                  </a:lnTo>
-                  <a:lnTo>
-                    <a:pt x="180090" y="316716"/>
-                  </a:lnTo>
-                  <a:lnTo>
-                    <a:pt x="251712" y="434304"/>
-                  </a:lnTo>
-                  <a:lnTo>
-                    <a:pt x="323335" y="547526"/>
-                  </a:lnTo>
-                  <a:lnTo>
-                    <a:pt x="394957" y="656545"/>
-                  </a:lnTo>
-                  <a:lnTo>
-                    <a:pt x="466580" y="761515"/>
-                  </a:lnTo>
-                  <a:lnTo>
-                    <a:pt x="538202" y="862589"/>
-                  </a:lnTo>
-                  <a:lnTo>
-                    <a:pt x="609825" y="959909"/>
-                  </a:lnTo>
-                  <a:lnTo>
-                    <a:pt x="681447" y="1053616"/>
-                  </a:lnTo>
-                  <a:lnTo>
-                    <a:pt x="753070" y="1143844"/>
-                  </a:lnTo>
-                  <a:lnTo>
-                    <a:pt x="824692" y="1230722"/>
-                  </a:lnTo>
-                  <a:lnTo>
-                    <a:pt x="896315" y="1314374"/>
-                  </a:lnTo>
-                  <a:lnTo>
-                    <a:pt x="967938" y="1394920"/>
-                  </a:lnTo>
-                  <a:lnTo>
-                    <a:pt x="1039560" y="1472476"/>
-                  </a:lnTo>
-                  <a:lnTo>
-                    <a:pt x="1111183" y="1547152"/>
-                  </a:lnTo>
-                  <a:lnTo>
-                    <a:pt x="1182805" y="1619056"/>
-                  </a:lnTo>
-                  <a:lnTo>
-                    <a:pt x="1254428" y="1688289"/>
-                  </a:lnTo>
-                  <a:lnTo>
-                    <a:pt x="1326050" y="1754953"/>
-                  </a:lnTo>
-                  <a:lnTo>
-                    <a:pt x="1397673" y="1819141"/>
-                  </a:lnTo>
-                  <a:lnTo>
-                    <a:pt x="1469295" y="1880946"/>
-                  </a:lnTo>
-                  <a:lnTo>
-                    <a:pt x="1540918" y="1940456"/>
-                  </a:lnTo>
-                  <a:lnTo>
-                    <a:pt x="1612540" y="1997756"/>
-                  </a:lnTo>
-                  <a:lnTo>
-                    <a:pt x="1684163" y="2052929"/>
-                  </a:lnTo>
-                  <a:lnTo>
-                    <a:pt x="1755785" y="2106054"/>
-                  </a:lnTo>
-                  <a:lnTo>
-                    <a:pt x="1827408" y="2157206"/>
-                  </a:lnTo>
-                  <a:lnTo>
-                    <a:pt x="1899030" y="2206459"/>
-                  </a:lnTo>
-                  <a:lnTo>
-                    <a:pt x="1970653" y="2253883"/>
-                  </a:lnTo>
-                  <a:lnTo>
-                    <a:pt x="2042275" y="2299546"/>
-                  </a:lnTo>
-                  <a:lnTo>
-                    <a:pt x="2113898" y="2343514"/>
-                  </a:lnTo>
-                  <a:lnTo>
-                    <a:pt x="2185520" y="2385850"/>
-                  </a:lnTo>
-                  <a:lnTo>
-                    <a:pt x="2257143" y="2426613"/>
-                  </a:lnTo>
-                  <a:lnTo>
-                    <a:pt x="2328766" y="2465864"/>
-                  </a:lnTo>
-                  <a:lnTo>
-                    <a:pt x="2400388" y="2503656"/>
-                  </a:lnTo>
-                  <a:lnTo>
-                    <a:pt x="2472011" y="2540046"/>
-                  </a:lnTo>
-                  <a:lnTo>
-                    <a:pt x="2543633" y="2575084"/>
-                  </a:lnTo>
-                  <a:lnTo>
-                    <a:pt x="2615256" y="2608822"/>
-                  </a:lnTo>
-                  <a:lnTo>
-                    <a:pt x="2686878" y="2641307"/>
-                  </a:lnTo>
-                  <a:lnTo>
-                    <a:pt x="2758501" y="2650725"/>
-                  </a:lnTo>
-                  <a:lnTo>
-                    <a:pt x="2830123" y="2644658"/>
-                  </a:lnTo>
-                  <a:lnTo>
-                    <a:pt x="2901746" y="2638546"/>
-                  </a:lnTo>
-                  <a:lnTo>
-                    <a:pt x="2973368" y="2632390"/>
-                  </a:lnTo>
-                  <a:lnTo>
-                    <a:pt x="3044991" y="2626189"/>
-                  </a:lnTo>
-                  <a:lnTo>
-                    <a:pt x="3116613" y="2619943"/>
-                  </a:lnTo>
-                  <a:lnTo>
-                    <a:pt x="3188236" y="2613652"/>
-                  </a:lnTo>
-                  <a:lnTo>
-                    <a:pt x="3259858" y="2607314"/>
-                  </a:lnTo>
-                  <a:lnTo>
-                    <a:pt x="3331481" y="2600931"/>
-                  </a:lnTo>
-                  <a:lnTo>
-                    <a:pt x="3403103" y="2594501"/>
-                  </a:lnTo>
-                  <a:lnTo>
-                    <a:pt x="3474726" y="2588024"/>
-                  </a:lnTo>
-                  <a:lnTo>
-                    <a:pt x="3546348" y="2581500"/>
-                  </a:lnTo>
-                  <a:lnTo>
-                    <a:pt x="3617971" y="2574928"/>
-                  </a:lnTo>
-                  <a:lnTo>
-                    <a:pt x="3689594" y="2568309"/>
-                  </a:lnTo>
-                  <a:lnTo>
-                    <a:pt x="3761216" y="2561641"/>
-                  </a:lnTo>
-                  <a:lnTo>
-                    <a:pt x="3832839" y="2554925"/>
-                  </a:lnTo>
-                  <a:lnTo>
-                    <a:pt x="3904461" y="2548160"/>
-                  </a:lnTo>
-                  <a:lnTo>
-                    <a:pt x="3976084" y="2541345"/>
-                  </a:lnTo>
-                  <a:lnTo>
-                    <a:pt x="4047706" y="2534481"/>
-                  </a:lnTo>
-                  <a:lnTo>
-                    <a:pt x="4119329" y="2527567"/>
-                  </a:lnTo>
-                  <a:lnTo>
-                    <a:pt x="4190951" y="2520603"/>
-                  </a:lnTo>
-                  <a:lnTo>
-                    <a:pt x="4262574" y="2513588"/>
-                  </a:lnTo>
-                  <a:lnTo>
-                    <a:pt x="4334196" y="2506521"/>
-                  </a:lnTo>
-                  <a:lnTo>
-                    <a:pt x="4405819" y="2499404"/>
-                  </a:lnTo>
-                  <a:lnTo>
-                    <a:pt x="4477441" y="2492234"/>
-                  </a:lnTo>
-                  <a:lnTo>
-                    <a:pt x="4549064" y="2485012"/>
-                  </a:lnTo>
-                  <a:lnTo>
-                    <a:pt x="4620686" y="2477738"/>
-                  </a:lnTo>
-                  <a:lnTo>
-                    <a:pt x="4692309" y="2470411"/>
-                  </a:lnTo>
-                  <a:lnTo>
-                    <a:pt x="4763931" y="2463030"/>
-                  </a:lnTo>
-                  <a:lnTo>
-                    <a:pt x="4835554" y="2455595"/>
-                  </a:lnTo>
-                  <a:lnTo>
-                    <a:pt x="4907176" y="2448107"/>
+                    <a:pt x="30796" y="56946"/>
+                  </a:lnTo>
+                  <a:lnTo>
+                    <a:pt x="102418" y="184458"/>
+                  </a:lnTo>
+                  <a:lnTo>
+                    <a:pt x="174041" y="307225"/>
+                  </a:lnTo>
+                  <a:lnTo>
+                    <a:pt x="245663" y="425424"/>
+                  </a:lnTo>
+                  <a:lnTo>
+                    <a:pt x="317286" y="539225"/>
+                  </a:lnTo>
+                  <a:lnTo>
+                    <a:pt x="388908" y="648791"/>
+                  </a:lnTo>
+                  <a:lnTo>
+                    <a:pt x="460531" y="754280"/>
+                  </a:lnTo>
+                  <a:lnTo>
+                    <a:pt x="532153" y="855844"/>
+                  </a:lnTo>
+                  <a:lnTo>
+                    <a:pt x="603776" y="953629"/>
+                  </a:lnTo>
+                  <a:lnTo>
+                    <a:pt x="675398" y="1047775"/>
+                  </a:lnTo>
+                  <a:lnTo>
+                    <a:pt x="747021" y="1138418"/>
+                  </a:lnTo>
+                  <a:lnTo>
+                    <a:pt x="818643" y="1225688"/>
+                  </a:lnTo>
+                  <a:lnTo>
+                    <a:pt x="890266" y="1309711"/>
+                  </a:lnTo>
+                  <a:lnTo>
+                    <a:pt x="961888" y="1390607"/>
+                  </a:lnTo>
+                  <a:lnTo>
+                    <a:pt x="1033511" y="1468493"/>
+                  </a:lnTo>
+                  <a:lnTo>
+                    <a:pt x="1105133" y="1543481"/>
+                  </a:lnTo>
+                  <a:lnTo>
+                    <a:pt x="1176756" y="1615679"/>
+                  </a:lnTo>
+                  <a:lnTo>
+                    <a:pt x="1248379" y="1685190"/>
+                  </a:lnTo>
+                  <a:lnTo>
+                    <a:pt x="1320001" y="1752115"/>
+                  </a:lnTo>
+                  <a:lnTo>
+                    <a:pt x="1391624" y="1816549"/>
+                  </a:lnTo>
+                  <a:lnTo>
+                    <a:pt x="1463246" y="1878586"/>
+                  </a:lnTo>
+                  <a:lnTo>
+                    <a:pt x="1534869" y="1938314"/>
+                  </a:lnTo>
+                  <a:lnTo>
+                    <a:pt x="1606491" y="1995820"/>
+                  </a:lnTo>
+                  <a:lnTo>
+                    <a:pt x="1678114" y="2051186"/>
+                  </a:lnTo>
+                  <a:lnTo>
+                    <a:pt x="1749736" y="2104492"/>
+                  </a:lnTo>
+                  <a:lnTo>
+                    <a:pt x="1821359" y="2155814"/>
+                  </a:lnTo>
+                  <a:lnTo>
+                    <a:pt x="1892981" y="2205227"/>
+                  </a:lnTo>
+                  <a:lnTo>
+                    <a:pt x="1964604" y="2252801"/>
+                  </a:lnTo>
+                  <a:lnTo>
+                    <a:pt x="2036226" y="2298604"/>
+                  </a:lnTo>
+                  <a:lnTo>
+                    <a:pt x="2107849" y="2342704"/>
+                  </a:lnTo>
+                  <a:lnTo>
+                    <a:pt x="2179471" y="2385162"/>
+                  </a:lnTo>
+                  <a:lnTo>
+                    <a:pt x="2251094" y="2426041"/>
+                  </a:lnTo>
+                  <a:lnTo>
+                    <a:pt x="2322716" y="2465398"/>
+                  </a:lnTo>
+                  <a:lnTo>
+                    <a:pt x="2394339" y="2503291"/>
+                  </a:lnTo>
+                  <a:lnTo>
+                    <a:pt x="2465961" y="2539774"/>
+                  </a:lnTo>
+                  <a:lnTo>
+                    <a:pt x="2537584" y="2574899"/>
+                  </a:lnTo>
+                  <a:lnTo>
+                    <a:pt x="2609207" y="2608718"/>
+                  </a:lnTo>
+                  <a:lnTo>
+                    <a:pt x="2680829" y="2641278"/>
+                  </a:lnTo>
+                  <a:lnTo>
+                    <a:pt x="2752452" y="2652918"/>
+                  </a:lnTo>
+                  <a:lnTo>
+                    <a:pt x="2824074" y="2650597"/>
+                  </a:lnTo>
+                  <a:lnTo>
+                    <a:pt x="2895697" y="2648271"/>
+                  </a:lnTo>
+                  <a:lnTo>
+                    <a:pt x="2967319" y="2645937"/>
+                  </a:lnTo>
+                  <a:lnTo>
+                    <a:pt x="3038942" y="2643598"/>
+                  </a:lnTo>
+                  <a:lnTo>
+                    <a:pt x="3110564" y="2641252"/>
+                  </a:lnTo>
+                  <a:lnTo>
+                    <a:pt x="3182187" y="2638899"/>
+                  </a:lnTo>
+                  <a:lnTo>
+                    <a:pt x="3253809" y="2636539"/>
+                  </a:lnTo>
+                  <a:lnTo>
+                    <a:pt x="3325432" y="2634173"/>
+                  </a:lnTo>
+                  <a:lnTo>
+                    <a:pt x="3397054" y="2631801"/>
+                  </a:lnTo>
+                  <a:lnTo>
+                    <a:pt x="3468677" y="2629422"/>
+                  </a:lnTo>
+                  <a:lnTo>
+                    <a:pt x="3540299" y="2627036"/>
+                  </a:lnTo>
+                  <a:lnTo>
+                    <a:pt x="3611922" y="2624643"/>
+                  </a:lnTo>
+                  <a:lnTo>
+                    <a:pt x="3683544" y="2622244"/>
+                  </a:lnTo>
+                  <a:lnTo>
+                    <a:pt x="3755167" y="2619838"/>
+                  </a:lnTo>
+                  <a:lnTo>
+                    <a:pt x="3826789" y="2617426"/>
+                  </a:lnTo>
+                  <a:lnTo>
+                    <a:pt x="3898412" y="2615006"/>
+                  </a:lnTo>
+                  <a:lnTo>
+                    <a:pt x="3970035" y="2612580"/>
+                  </a:lnTo>
+                  <a:lnTo>
+                    <a:pt x="4041657" y="2610147"/>
+                  </a:lnTo>
+                  <a:lnTo>
+                    <a:pt x="4113280" y="2607708"/>
+                  </a:lnTo>
+                  <a:lnTo>
+                    <a:pt x="4184902" y="2605261"/>
+                  </a:lnTo>
+                  <a:lnTo>
+                    <a:pt x="4256525" y="2602808"/>
+                  </a:lnTo>
+                  <a:lnTo>
+                    <a:pt x="4328147" y="2600348"/>
+                  </a:lnTo>
+                  <a:lnTo>
+                    <a:pt x="4399770" y="2597881"/>
+                  </a:lnTo>
+                  <a:lnTo>
+                    <a:pt x="4471392" y="2595407"/>
+                  </a:lnTo>
+                  <a:lnTo>
+                    <a:pt x="4543015" y="2592926"/>
+                  </a:lnTo>
+                  <a:lnTo>
+                    <a:pt x="4614637" y="2590438"/>
+                  </a:lnTo>
+                  <a:lnTo>
+                    <a:pt x="4686260" y="2587944"/>
+                  </a:lnTo>
+                  <a:lnTo>
+                    <a:pt x="4757882" y="2585442"/>
+                  </a:lnTo>
+                  <a:lnTo>
+                    <a:pt x="4829505" y="2582933"/>
+                  </a:lnTo>
+                  <a:lnTo>
+                    <a:pt x="4901127" y="2580418"/>
                   </a:lnTo>
                 </a:path>
               </a:pathLst>
@@ -3778,312 +3778,312 @@
           </p:nvSpPr>
           <p:spPr>
             <a:xfrm>
-              <a:off x="1172049" y="4730252"/>
-              <a:ext cx="7090630" cy="566290"/>
+              <a:off x="1172049" y="4728734"/>
+              <a:ext cx="7090630" cy="568481"/>
             </a:xfrm>
             <a:custGeom>
               <a:avLst/>
               <a:pathLst>
-                <a:path w="7090630" h="566290">
+                <a:path w="7090630" h="568481">
                   <a:moveTo>
-                    <a:pt x="7090630" y="566290"/>
+                    <a:pt x="7090630" y="568481"/>
                   </a:moveTo>
                   <a:lnTo>
-                    <a:pt x="7019007" y="556237"/>
-                  </a:lnTo>
-                  <a:lnTo>
-                    <a:pt x="6947385" y="545797"/>
-                  </a:lnTo>
-                  <a:lnTo>
-                    <a:pt x="6875762" y="534953"/>
-                  </a:lnTo>
-                  <a:lnTo>
-                    <a:pt x="6804139" y="523692"/>
-                  </a:lnTo>
-                  <a:lnTo>
-                    <a:pt x="6732517" y="511996"/>
-                  </a:lnTo>
-                  <a:lnTo>
-                    <a:pt x="6660894" y="499850"/>
-                  </a:lnTo>
-                  <a:lnTo>
-                    <a:pt x="6589272" y="487235"/>
-                  </a:lnTo>
-                  <a:lnTo>
-                    <a:pt x="6517649" y="474133"/>
-                  </a:lnTo>
-                  <a:lnTo>
-                    <a:pt x="6446027" y="460527"/>
-                  </a:lnTo>
-                  <a:lnTo>
-                    <a:pt x="6374404" y="446395"/>
-                  </a:lnTo>
-                  <a:lnTo>
-                    <a:pt x="6302782" y="431719"/>
-                  </a:lnTo>
-                  <a:lnTo>
-                    <a:pt x="6231159" y="416477"/>
-                  </a:lnTo>
-                  <a:lnTo>
-                    <a:pt x="6159537" y="400647"/>
-                  </a:lnTo>
-                  <a:lnTo>
-                    <a:pt x="6087914" y="384207"/>
-                  </a:lnTo>
-                  <a:lnTo>
-                    <a:pt x="6016292" y="367133"/>
-                  </a:lnTo>
-                  <a:lnTo>
-                    <a:pt x="5944669" y="349400"/>
-                  </a:lnTo>
-                  <a:lnTo>
-                    <a:pt x="5873047" y="330984"/>
-                  </a:lnTo>
-                  <a:lnTo>
-                    <a:pt x="5801424" y="311857"/>
-                  </a:lnTo>
-                  <a:lnTo>
-                    <a:pt x="5729802" y="291993"/>
-                  </a:lnTo>
-                  <a:lnTo>
-                    <a:pt x="5658179" y="271363"/>
-                  </a:lnTo>
-                  <a:lnTo>
-                    <a:pt x="5586557" y="249938"/>
-                  </a:lnTo>
-                  <a:lnTo>
-                    <a:pt x="5514934" y="227686"/>
-                  </a:lnTo>
-                  <a:lnTo>
-                    <a:pt x="5443311" y="204576"/>
-                  </a:lnTo>
-                  <a:lnTo>
-                    <a:pt x="5371689" y="180575"/>
-                  </a:lnTo>
-                  <a:lnTo>
-                    <a:pt x="5300066" y="155649"/>
-                  </a:lnTo>
-                  <a:lnTo>
-                    <a:pt x="5228444" y="129761"/>
-                  </a:lnTo>
-                  <a:lnTo>
-                    <a:pt x="5156821" y="102876"/>
-                  </a:lnTo>
-                  <a:lnTo>
-                    <a:pt x="5085199" y="74953"/>
-                  </a:lnTo>
-                  <a:lnTo>
-                    <a:pt x="5013576" y="45954"/>
-                  </a:lnTo>
-                  <a:lnTo>
-                    <a:pt x="4941954" y="15836"/>
+                    <a:pt x="7019007" y="558431"/>
+                  </a:lnTo>
+                  <a:lnTo>
+                    <a:pt x="6947385" y="547993"/>
+                  </a:lnTo>
+                  <a:lnTo>
+                    <a:pt x="6875762" y="537151"/>
+                  </a:lnTo>
+                  <a:lnTo>
+                    <a:pt x="6804139" y="525890"/>
+                  </a:lnTo>
+                  <a:lnTo>
+                    <a:pt x="6732517" y="514194"/>
+                  </a:lnTo>
+                  <a:lnTo>
+                    <a:pt x="6660894" y="502046"/>
+                  </a:lnTo>
+                  <a:lnTo>
+                    <a:pt x="6589272" y="489429"/>
+                  </a:lnTo>
+                  <a:lnTo>
+                    <a:pt x="6517649" y="476324"/>
+                  </a:lnTo>
+                  <a:lnTo>
+                    <a:pt x="6446027" y="462712"/>
+                  </a:lnTo>
+                  <a:lnTo>
+                    <a:pt x="6374404" y="448575"/>
+                  </a:lnTo>
+                  <a:lnTo>
+                    <a:pt x="6302782" y="433891"/>
+                  </a:lnTo>
+                  <a:lnTo>
+                    <a:pt x="6231159" y="418639"/>
+                  </a:lnTo>
+                  <a:lnTo>
+                    <a:pt x="6159537" y="402798"/>
+                  </a:lnTo>
+                  <a:lnTo>
+                    <a:pt x="6087914" y="386345"/>
+                  </a:lnTo>
+                  <a:lnTo>
+                    <a:pt x="6016292" y="369256"/>
+                  </a:lnTo>
+                  <a:lnTo>
+                    <a:pt x="5944669" y="351506"/>
+                  </a:lnTo>
+                  <a:lnTo>
+                    <a:pt x="5873047" y="333071"/>
+                  </a:lnTo>
+                  <a:lnTo>
+                    <a:pt x="5801424" y="313923"/>
+                  </a:lnTo>
+                  <a:lnTo>
+                    <a:pt x="5729802" y="294034"/>
+                  </a:lnTo>
+                  <a:lnTo>
+                    <a:pt x="5658179" y="273378"/>
+                  </a:lnTo>
+                  <a:lnTo>
+                    <a:pt x="5586557" y="251923"/>
+                  </a:lnTo>
+                  <a:lnTo>
+                    <a:pt x="5514934" y="229638"/>
+                  </a:lnTo>
+                  <a:lnTo>
+                    <a:pt x="5443311" y="206493"/>
+                  </a:lnTo>
+                  <a:lnTo>
+                    <a:pt x="5371689" y="182453"/>
+                  </a:lnTo>
+                  <a:lnTo>
+                    <a:pt x="5300066" y="157483"/>
+                  </a:lnTo>
+                  <a:lnTo>
+                    <a:pt x="5228444" y="131549"/>
+                  </a:lnTo>
+                  <a:lnTo>
+                    <a:pt x="5156821" y="104613"/>
+                  </a:lnTo>
+                  <a:lnTo>
+                    <a:pt x="5085199" y="76635"/>
+                  </a:lnTo>
+                  <a:lnTo>
+                    <a:pt x="5013576" y="47576"/>
+                  </a:lnTo>
+                  <a:lnTo>
+                    <a:pt x="4941954" y="17394"/>
                   </a:lnTo>
                   <a:lnTo>
                     <a:pt x="4870331" y="0"/>
                   </a:lnTo>
                   <a:lnTo>
-                    <a:pt x="4798709" y="5979"/>
-                  </a:lnTo>
-                  <a:lnTo>
-                    <a:pt x="4727086" y="11916"/>
-                  </a:lnTo>
-                  <a:lnTo>
-                    <a:pt x="4655464" y="17810"/>
-                  </a:lnTo>
-                  <a:lnTo>
-                    <a:pt x="4583841" y="23661"/>
-                  </a:lnTo>
-                  <a:lnTo>
-                    <a:pt x="4512219" y="29470"/>
-                  </a:lnTo>
-                  <a:lnTo>
-                    <a:pt x="4440596" y="35237"/>
-                  </a:lnTo>
-                  <a:lnTo>
-                    <a:pt x="4368974" y="40962"/>
-                  </a:lnTo>
-                  <a:lnTo>
-                    <a:pt x="4297351" y="46646"/>
-                  </a:lnTo>
-                  <a:lnTo>
-                    <a:pt x="4225729" y="52288"/>
-                  </a:lnTo>
-                  <a:lnTo>
-                    <a:pt x="4154106" y="57890"/>
-                  </a:lnTo>
-                  <a:lnTo>
-                    <a:pt x="4082483" y="63452"/>
-                  </a:lnTo>
-                  <a:lnTo>
-                    <a:pt x="4010861" y="68973"/>
-                  </a:lnTo>
-                  <a:lnTo>
-                    <a:pt x="3939238" y="74454"/>
-                  </a:lnTo>
-                  <a:lnTo>
-                    <a:pt x="3867616" y="79895"/>
-                  </a:lnTo>
-                  <a:lnTo>
-                    <a:pt x="3795993" y="85298"/>
-                  </a:lnTo>
-                  <a:lnTo>
-                    <a:pt x="3724371" y="90661"/>
-                  </a:lnTo>
-                  <a:lnTo>
-                    <a:pt x="3652748" y="95985"/>
-                  </a:lnTo>
-                  <a:lnTo>
-                    <a:pt x="3581126" y="101271"/>
-                  </a:lnTo>
-                  <a:lnTo>
-                    <a:pt x="3509503" y="106519"/>
-                  </a:lnTo>
-                  <a:lnTo>
-                    <a:pt x="3437881" y="111729"/>
-                  </a:lnTo>
-                  <a:lnTo>
-                    <a:pt x="3366258" y="116901"/>
-                  </a:lnTo>
-                  <a:lnTo>
-                    <a:pt x="3294636" y="122035"/>
-                  </a:lnTo>
-                  <a:lnTo>
-                    <a:pt x="3223013" y="127133"/>
-                  </a:lnTo>
-                  <a:lnTo>
-                    <a:pt x="3151391" y="132193"/>
-                  </a:lnTo>
-                  <a:lnTo>
-                    <a:pt x="3079768" y="137217"/>
-                  </a:lnTo>
-                  <a:lnTo>
-                    <a:pt x="3008146" y="142205"/>
-                  </a:lnTo>
-                  <a:lnTo>
-                    <a:pt x="2936523" y="147157"/>
-                  </a:lnTo>
-                  <a:lnTo>
-                    <a:pt x="2864901" y="152073"/>
-                  </a:lnTo>
-                  <a:lnTo>
-                    <a:pt x="2793278" y="156953"/>
-                  </a:lnTo>
-                  <a:lnTo>
-                    <a:pt x="2721655" y="161798"/>
-                  </a:lnTo>
-                  <a:lnTo>
-                    <a:pt x="2650033" y="166608"/>
-                  </a:lnTo>
-                  <a:lnTo>
-                    <a:pt x="2578410" y="171383"/>
-                  </a:lnTo>
-                  <a:lnTo>
-                    <a:pt x="2506788" y="176124"/>
-                  </a:lnTo>
-                  <a:lnTo>
-                    <a:pt x="2435165" y="180830"/>
-                  </a:lnTo>
-                  <a:lnTo>
-                    <a:pt x="2363543" y="185503"/>
-                  </a:lnTo>
-                  <a:lnTo>
-                    <a:pt x="2291920" y="190141"/>
-                  </a:lnTo>
-                  <a:lnTo>
-                    <a:pt x="2220298" y="194746"/>
-                  </a:lnTo>
-                  <a:lnTo>
-                    <a:pt x="2148675" y="199318"/>
-                  </a:lnTo>
-                  <a:lnTo>
-                    <a:pt x="2077053" y="203857"/>
-                  </a:lnTo>
-                  <a:lnTo>
-                    <a:pt x="2005430" y="208363"/>
-                  </a:lnTo>
-                  <a:lnTo>
-                    <a:pt x="1933808" y="212836"/>
-                  </a:lnTo>
-                  <a:lnTo>
-                    <a:pt x="1862185" y="217277"/>
-                  </a:lnTo>
-                  <a:lnTo>
-                    <a:pt x="1790563" y="221686"/>
-                  </a:lnTo>
-                  <a:lnTo>
-                    <a:pt x="1718940" y="226063"/>
-                  </a:lnTo>
-                  <a:lnTo>
-                    <a:pt x="1647318" y="230408"/>
-                  </a:lnTo>
-                  <a:lnTo>
-                    <a:pt x="1575695" y="234722"/>
-                  </a:lnTo>
-                  <a:lnTo>
-                    <a:pt x="1504073" y="239005"/>
-                  </a:lnTo>
-                  <a:lnTo>
-                    <a:pt x="1432450" y="243256"/>
-                  </a:lnTo>
-                  <a:lnTo>
-                    <a:pt x="1360827" y="247477"/>
-                  </a:lnTo>
-                  <a:lnTo>
-                    <a:pt x="1289205" y="251668"/>
-                  </a:lnTo>
-                  <a:lnTo>
-                    <a:pt x="1217582" y="255828"/>
-                  </a:lnTo>
-                  <a:lnTo>
-                    <a:pt x="1145960" y="259958"/>
-                  </a:lnTo>
-                  <a:lnTo>
-                    <a:pt x="1074337" y="264058"/>
-                  </a:lnTo>
-                  <a:lnTo>
-                    <a:pt x="1002715" y="268129"/>
-                  </a:lnTo>
-                  <a:lnTo>
-                    <a:pt x="931092" y="272170"/>
-                  </a:lnTo>
-                  <a:lnTo>
-                    <a:pt x="859470" y="276182"/>
-                  </a:lnTo>
-                  <a:lnTo>
-                    <a:pt x="787847" y="280165"/>
-                  </a:lnTo>
-                  <a:lnTo>
-                    <a:pt x="716225" y="284119"/>
-                  </a:lnTo>
-                  <a:lnTo>
-                    <a:pt x="644602" y="288044"/>
-                  </a:lnTo>
-                  <a:lnTo>
-                    <a:pt x="572980" y="291941"/>
-                  </a:lnTo>
-                  <a:lnTo>
-                    <a:pt x="501357" y="295810"/>
-                  </a:lnTo>
-                  <a:lnTo>
-                    <a:pt x="429735" y="299651"/>
-                  </a:lnTo>
-                  <a:lnTo>
-                    <a:pt x="358112" y="303465"/>
-                  </a:lnTo>
-                  <a:lnTo>
-                    <a:pt x="286490" y="307250"/>
-                  </a:lnTo>
-                  <a:lnTo>
-                    <a:pt x="214867" y="311008"/>
-                  </a:lnTo>
-                  <a:lnTo>
-                    <a:pt x="143245" y="314739"/>
-                  </a:lnTo>
-                  <a:lnTo>
-                    <a:pt x="71622" y="318444"/>
-                  </a:lnTo>
-                  <a:lnTo>
-                    <a:pt x="0" y="322121"/>
+                    <a:pt x="4798709" y="2307"/>
+                  </a:lnTo>
+                  <a:lnTo>
+                    <a:pt x="4727086" y="4608"/>
+                  </a:lnTo>
+                  <a:lnTo>
+                    <a:pt x="4655464" y="6902"/>
+                  </a:lnTo>
+                  <a:lnTo>
+                    <a:pt x="4583841" y="9190"/>
+                  </a:lnTo>
+                  <a:lnTo>
+                    <a:pt x="4512219" y="11472"/>
+                  </a:lnTo>
+                  <a:lnTo>
+                    <a:pt x="4440596" y="13747"/>
+                  </a:lnTo>
+                  <a:lnTo>
+                    <a:pt x="4368974" y="16016"/>
+                  </a:lnTo>
+                  <a:lnTo>
+                    <a:pt x="4297351" y="18279"/>
+                  </a:lnTo>
+                  <a:lnTo>
+                    <a:pt x="4225729" y="20535"/>
+                  </a:lnTo>
+                  <a:lnTo>
+                    <a:pt x="4154106" y="22786"/>
+                  </a:lnTo>
+                  <a:lnTo>
+                    <a:pt x="4082483" y="25029"/>
+                  </a:lnTo>
+                  <a:lnTo>
+                    <a:pt x="4010861" y="27267"/>
+                  </a:lnTo>
+                  <a:lnTo>
+                    <a:pt x="3939238" y="29498"/>
+                  </a:lnTo>
+                  <a:lnTo>
+                    <a:pt x="3867616" y="31724"/>
+                  </a:lnTo>
+                  <a:lnTo>
+                    <a:pt x="3795993" y="33943"/>
+                  </a:lnTo>
+                  <a:lnTo>
+                    <a:pt x="3724371" y="36155"/>
+                  </a:lnTo>
+                  <a:lnTo>
+                    <a:pt x="3652748" y="38362"/>
+                  </a:lnTo>
+                  <a:lnTo>
+                    <a:pt x="3581126" y="40562"/>
+                  </a:lnTo>
+                  <a:lnTo>
+                    <a:pt x="3509503" y="42757"/>
+                  </a:lnTo>
+                  <a:lnTo>
+                    <a:pt x="3437881" y="44945"/>
+                  </a:lnTo>
+                  <a:lnTo>
+                    <a:pt x="3366258" y="47127"/>
+                  </a:lnTo>
+                  <a:lnTo>
+                    <a:pt x="3294636" y="49303"/>
+                  </a:lnTo>
+                  <a:lnTo>
+                    <a:pt x="3223013" y="51473"/>
+                  </a:lnTo>
+                  <a:lnTo>
+                    <a:pt x="3151391" y="53637"/>
+                  </a:lnTo>
+                  <a:lnTo>
+                    <a:pt x="3079768" y="55795"/>
+                  </a:lnTo>
+                  <a:lnTo>
+                    <a:pt x="3008146" y="57947"/>
+                  </a:lnTo>
+                  <a:lnTo>
+                    <a:pt x="2936523" y="60093"/>
+                  </a:lnTo>
+                  <a:lnTo>
+                    <a:pt x="2864901" y="62233"/>
+                  </a:lnTo>
+                  <a:lnTo>
+                    <a:pt x="2793278" y="64367"/>
+                  </a:lnTo>
+                  <a:lnTo>
+                    <a:pt x="2721655" y="66495"/>
+                  </a:lnTo>
+                  <a:lnTo>
+                    <a:pt x="2650033" y="68617"/>
+                  </a:lnTo>
+                  <a:lnTo>
+                    <a:pt x="2578410" y="70733"/>
+                  </a:lnTo>
+                  <a:lnTo>
+                    <a:pt x="2506788" y="72844"/>
+                  </a:lnTo>
+                  <a:lnTo>
+                    <a:pt x="2435165" y="74948"/>
+                  </a:lnTo>
+                  <a:lnTo>
+                    <a:pt x="2363543" y="77047"/>
+                  </a:lnTo>
+                  <a:lnTo>
+                    <a:pt x="2291920" y="79139"/>
+                  </a:lnTo>
+                  <a:lnTo>
+                    <a:pt x="2220298" y="81226"/>
+                  </a:lnTo>
+                  <a:lnTo>
+                    <a:pt x="2148675" y="83307"/>
+                  </a:lnTo>
+                  <a:lnTo>
+                    <a:pt x="2077053" y="85383"/>
+                  </a:lnTo>
+                  <a:lnTo>
+                    <a:pt x="2005430" y="87452"/>
+                  </a:lnTo>
+                  <a:lnTo>
+                    <a:pt x="1933808" y="89516"/>
+                  </a:lnTo>
+                  <a:lnTo>
+                    <a:pt x="1862185" y="91574"/>
+                  </a:lnTo>
+                  <a:lnTo>
+                    <a:pt x="1790563" y="93626"/>
+                  </a:lnTo>
+                  <a:lnTo>
+                    <a:pt x="1718940" y="95673"/>
+                  </a:lnTo>
+                  <a:lnTo>
+                    <a:pt x="1647318" y="97714"/>
+                  </a:lnTo>
+                  <a:lnTo>
+                    <a:pt x="1575695" y="99749"/>
+                  </a:lnTo>
+                  <a:lnTo>
+                    <a:pt x="1504073" y="101778"/>
+                  </a:lnTo>
+                  <a:lnTo>
+                    <a:pt x="1432450" y="103802"/>
+                  </a:lnTo>
+                  <a:lnTo>
+                    <a:pt x="1360827" y="105820"/>
+                  </a:lnTo>
+                  <a:lnTo>
+                    <a:pt x="1289205" y="107833"/>
+                  </a:lnTo>
+                  <a:lnTo>
+                    <a:pt x="1217582" y="109840"/>
+                  </a:lnTo>
+                  <a:lnTo>
+                    <a:pt x="1145960" y="111842"/>
+                  </a:lnTo>
+                  <a:lnTo>
+                    <a:pt x="1074337" y="113837"/>
+                  </a:lnTo>
+                  <a:lnTo>
+                    <a:pt x="1002715" y="115828"/>
+                  </a:lnTo>
+                  <a:lnTo>
+                    <a:pt x="931092" y="117812"/>
+                  </a:lnTo>
+                  <a:lnTo>
+                    <a:pt x="859470" y="119792"/>
+                  </a:lnTo>
+                  <a:lnTo>
+                    <a:pt x="787847" y="121765"/>
+                  </a:lnTo>
+                  <a:lnTo>
+                    <a:pt x="716225" y="123734"/>
+                  </a:lnTo>
+                  <a:lnTo>
+                    <a:pt x="644602" y="125696"/>
+                  </a:lnTo>
+                  <a:lnTo>
+                    <a:pt x="572980" y="127653"/>
+                  </a:lnTo>
+                  <a:lnTo>
+                    <a:pt x="501357" y="129605"/>
+                  </a:lnTo>
+                  <a:lnTo>
+                    <a:pt x="429735" y="131552"/>
+                  </a:lnTo>
+                  <a:lnTo>
+                    <a:pt x="358112" y="133493"/>
+                  </a:lnTo>
+                  <a:lnTo>
+                    <a:pt x="286490" y="135428"/>
+                  </a:lnTo>
+                  <a:lnTo>
+                    <a:pt x="214867" y="137358"/>
+                  </a:lnTo>
+                  <a:lnTo>
+                    <a:pt x="143245" y="139283"/>
+                  </a:lnTo>
+                  <a:lnTo>
+                    <a:pt x="71622" y="141203"/>
+                  </a:lnTo>
+                  <a:lnTo>
+                    <a:pt x="0" y="143117"/>
                   </a:lnTo>
                 </a:path>
               </a:pathLst>
@@ -4103,312 +4103,312 @@
           </p:nvSpPr>
           <p:spPr>
             <a:xfrm>
-              <a:off x="1172049" y="3196535"/>
-              <a:ext cx="7090630" cy="1841101"/>
+              <a:off x="1172049" y="2798719"/>
+              <a:ext cx="7090630" cy="2273869"/>
             </a:xfrm>
             <a:custGeom>
               <a:avLst/>
               <a:pathLst>
-                <a:path w="7090630" h="1841101">
+                <a:path w="7090630" h="2273869">
                   <a:moveTo>
                     <a:pt x="0" y="0"/>
                   </a:moveTo>
                   <a:lnTo>
-                    <a:pt x="71622" y="35819"/>
-                  </a:lnTo>
-                  <a:lnTo>
-                    <a:pt x="143245" y="71094"/>
-                  </a:lnTo>
-                  <a:lnTo>
-                    <a:pt x="214867" y="105834"/>
-                  </a:lnTo>
-                  <a:lnTo>
-                    <a:pt x="286490" y="140047"/>
-                  </a:lnTo>
-                  <a:lnTo>
-                    <a:pt x="358112" y="173742"/>
-                  </a:lnTo>
-                  <a:lnTo>
-                    <a:pt x="429735" y="206924"/>
-                  </a:lnTo>
-                  <a:lnTo>
-                    <a:pt x="501357" y="239604"/>
-                  </a:lnTo>
-                  <a:lnTo>
-                    <a:pt x="572980" y="271787"/>
-                  </a:lnTo>
-                  <a:lnTo>
-                    <a:pt x="644602" y="303482"/>
-                  </a:lnTo>
-                  <a:lnTo>
-                    <a:pt x="716225" y="334697"/>
-                  </a:lnTo>
-                  <a:lnTo>
-                    <a:pt x="787847" y="365437"/>
-                  </a:lnTo>
-                  <a:lnTo>
-                    <a:pt x="859470" y="395712"/>
-                  </a:lnTo>
-                  <a:lnTo>
-                    <a:pt x="931092" y="425526"/>
-                  </a:lnTo>
-                  <a:lnTo>
-                    <a:pt x="1002715" y="454889"/>
-                  </a:lnTo>
-                  <a:lnTo>
-                    <a:pt x="1074337" y="483806"/>
-                  </a:lnTo>
-                  <a:lnTo>
-                    <a:pt x="1145960" y="512284"/>
-                  </a:lnTo>
-                  <a:lnTo>
-                    <a:pt x="1217582" y="540330"/>
-                  </a:lnTo>
-                  <a:lnTo>
-                    <a:pt x="1289205" y="567951"/>
-                  </a:lnTo>
-                  <a:lnTo>
-                    <a:pt x="1360827" y="595152"/>
-                  </a:lnTo>
-                  <a:lnTo>
-                    <a:pt x="1432450" y="621941"/>
-                  </a:lnTo>
-                  <a:lnTo>
-                    <a:pt x="1504073" y="648323"/>
-                  </a:lnTo>
-                  <a:lnTo>
-                    <a:pt x="1575695" y="674306"/>
-                  </a:lnTo>
-                  <a:lnTo>
-                    <a:pt x="1647318" y="699893"/>
-                  </a:lnTo>
-                  <a:lnTo>
-                    <a:pt x="1718940" y="725093"/>
-                  </a:lnTo>
-                  <a:lnTo>
-                    <a:pt x="1790563" y="749910"/>
-                  </a:lnTo>
-                  <a:lnTo>
-                    <a:pt x="1862185" y="774351"/>
-                  </a:lnTo>
-                  <a:lnTo>
-                    <a:pt x="1933808" y="798421"/>
-                  </a:lnTo>
-                  <a:lnTo>
-                    <a:pt x="2005430" y="822125"/>
-                  </a:lnTo>
-                  <a:lnTo>
-                    <a:pt x="2077053" y="845470"/>
-                  </a:lnTo>
-                  <a:lnTo>
-                    <a:pt x="2148675" y="868461"/>
-                  </a:lnTo>
-                  <a:lnTo>
-                    <a:pt x="2220298" y="891103"/>
-                  </a:lnTo>
-                  <a:lnTo>
-                    <a:pt x="2291920" y="913401"/>
-                  </a:lnTo>
-                  <a:lnTo>
-                    <a:pt x="2363543" y="935361"/>
-                  </a:lnTo>
-                  <a:lnTo>
-                    <a:pt x="2435165" y="956988"/>
-                  </a:lnTo>
-                  <a:lnTo>
-                    <a:pt x="2506788" y="978286"/>
-                  </a:lnTo>
-                  <a:lnTo>
-                    <a:pt x="2578410" y="999262"/>
-                  </a:lnTo>
-                  <a:lnTo>
-                    <a:pt x="2650033" y="1019919"/>
-                  </a:lnTo>
-                  <a:lnTo>
-                    <a:pt x="2721655" y="1040263"/>
-                  </a:lnTo>
-                  <a:lnTo>
-                    <a:pt x="2793278" y="1060298"/>
-                  </a:lnTo>
-                  <a:lnTo>
-                    <a:pt x="2864901" y="1080029"/>
-                  </a:lnTo>
-                  <a:lnTo>
-                    <a:pt x="2936523" y="1099461"/>
-                  </a:lnTo>
-                  <a:lnTo>
-                    <a:pt x="3008146" y="1118598"/>
-                  </a:lnTo>
-                  <a:lnTo>
-                    <a:pt x="3079768" y="1137445"/>
-                  </a:lnTo>
-                  <a:lnTo>
-                    <a:pt x="3151391" y="1156005"/>
-                  </a:lnTo>
-                  <a:lnTo>
-                    <a:pt x="3223013" y="1174284"/>
-                  </a:lnTo>
-                  <a:lnTo>
-                    <a:pt x="3294636" y="1192286"/>
-                  </a:lnTo>
-                  <a:lnTo>
-                    <a:pt x="3366258" y="1210014"/>
-                  </a:lnTo>
-                  <a:lnTo>
-                    <a:pt x="3437881" y="1227474"/>
-                  </a:lnTo>
-                  <a:lnTo>
-                    <a:pt x="3509503" y="1244668"/>
-                  </a:lnTo>
-                  <a:lnTo>
-                    <a:pt x="3581126" y="1261602"/>
-                  </a:lnTo>
-                  <a:lnTo>
-                    <a:pt x="3652748" y="1278279"/>
-                  </a:lnTo>
-                  <a:lnTo>
-                    <a:pt x="3724371" y="1294703"/>
-                  </a:lnTo>
-                  <a:lnTo>
-                    <a:pt x="3795993" y="1310877"/>
-                  </a:lnTo>
-                  <a:lnTo>
-                    <a:pt x="3867616" y="1326806"/>
-                  </a:lnTo>
-                  <a:lnTo>
-                    <a:pt x="3939238" y="1342494"/>
-                  </a:lnTo>
-                  <a:lnTo>
-                    <a:pt x="4010861" y="1357943"/>
-                  </a:lnTo>
-                  <a:lnTo>
-                    <a:pt x="4082483" y="1373158"/>
-                  </a:lnTo>
-                  <a:lnTo>
-                    <a:pt x="4154106" y="1388142"/>
-                  </a:lnTo>
-                  <a:lnTo>
-                    <a:pt x="4225729" y="1402899"/>
-                  </a:lnTo>
-                  <a:lnTo>
-                    <a:pt x="4297351" y="1417432"/>
-                  </a:lnTo>
-                  <a:lnTo>
-                    <a:pt x="4368974" y="1431744"/>
-                  </a:lnTo>
-                  <a:lnTo>
-                    <a:pt x="4440596" y="1445840"/>
-                  </a:lnTo>
-                  <a:lnTo>
-                    <a:pt x="4512219" y="1459721"/>
-                  </a:lnTo>
-                  <a:lnTo>
-                    <a:pt x="4583841" y="1473392"/>
-                  </a:lnTo>
-                  <a:lnTo>
-                    <a:pt x="4655464" y="1486855"/>
-                  </a:lnTo>
-                  <a:lnTo>
-                    <a:pt x="4727086" y="1500114"/>
-                  </a:lnTo>
-                  <a:lnTo>
-                    <a:pt x="4798709" y="1513172"/>
-                  </a:lnTo>
-                  <a:lnTo>
-                    <a:pt x="4870331" y="1526032"/>
-                  </a:lnTo>
-                  <a:lnTo>
-                    <a:pt x="4941954" y="1538696"/>
-                  </a:lnTo>
-                  <a:lnTo>
-                    <a:pt x="5013576" y="1551169"/>
-                  </a:lnTo>
-                  <a:lnTo>
-                    <a:pt x="5085199" y="1563452"/>
-                  </a:lnTo>
-                  <a:lnTo>
-                    <a:pt x="5156821" y="1575549"/>
-                  </a:lnTo>
-                  <a:lnTo>
-                    <a:pt x="5228444" y="1587462"/>
-                  </a:lnTo>
-                  <a:lnTo>
-                    <a:pt x="5300066" y="1599194"/>
-                  </a:lnTo>
-                  <a:lnTo>
-                    <a:pt x="5371689" y="1610749"/>
-                  </a:lnTo>
-                  <a:lnTo>
-                    <a:pt x="5443311" y="1622128"/>
-                  </a:lnTo>
-                  <a:lnTo>
-                    <a:pt x="5514934" y="1633335"/>
-                  </a:lnTo>
-                  <a:lnTo>
-                    <a:pt x="5586557" y="1644371"/>
-                  </a:lnTo>
-                  <a:lnTo>
-                    <a:pt x="5658179" y="1655240"/>
-                  </a:lnTo>
-                  <a:lnTo>
-                    <a:pt x="5729802" y="1665944"/>
-                  </a:lnTo>
-                  <a:lnTo>
-                    <a:pt x="5801424" y="1676486"/>
-                  </a:lnTo>
-                  <a:lnTo>
-                    <a:pt x="5873047" y="1686868"/>
-                  </a:lnTo>
-                  <a:lnTo>
-                    <a:pt x="5944669" y="1697092"/>
-                  </a:lnTo>
-                  <a:lnTo>
-                    <a:pt x="6016292" y="1707161"/>
-                  </a:lnTo>
-                  <a:lnTo>
-                    <a:pt x="6087914" y="1717077"/>
-                  </a:lnTo>
-                  <a:lnTo>
-                    <a:pt x="6159537" y="1726843"/>
-                  </a:lnTo>
-                  <a:lnTo>
-                    <a:pt x="6231159" y="1736461"/>
-                  </a:lnTo>
-                  <a:lnTo>
-                    <a:pt x="6302782" y="1745933"/>
-                  </a:lnTo>
-                  <a:lnTo>
-                    <a:pt x="6374404" y="1755261"/>
-                  </a:lnTo>
-                  <a:lnTo>
-                    <a:pt x="6446027" y="1764447"/>
-                  </a:lnTo>
-                  <a:lnTo>
-                    <a:pt x="6517649" y="1773494"/>
-                  </a:lnTo>
-                  <a:lnTo>
-                    <a:pt x="6589272" y="1782404"/>
-                  </a:lnTo>
-                  <a:lnTo>
-                    <a:pt x="6660894" y="1791179"/>
-                  </a:lnTo>
-                  <a:lnTo>
-                    <a:pt x="6732517" y="1799820"/>
-                  </a:lnTo>
-                  <a:lnTo>
-                    <a:pt x="6804139" y="1808331"/>
-                  </a:lnTo>
-                  <a:lnTo>
-                    <a:pt x="6875762" y="1816712"/>
-                  </a:lnTo>
-                  <a:lnTo>
-                    <a:pt x="6947385" y="1824966"/>
-                  </a:lnTo>
-                  <a:lnTo>
-                    <a:pt x="7019007" y="1833095"/>
-                  </a:lnTo>
-                  <a:lnTo>
-                    <a:pt x="7090630" y="1841101"/>
+                    <a:pt x="71622" y="48032"/>
+                  </a:lnTo>
+                  <a:lnTo>
+                    <a:pt x="143245" y="95228"/>
+                  </a:lnTo>
+                  <a:lnTo>
+                    <a:pt x="214867" y="141602"/>
+                  </a:lnTo>
+                  <a:lnTo>
+                    <a:pt x="286490" y="187169"/>
+                  </a:lnTo>
+                  <a:lnTo>
+                    <a:pt x="358112" y="231942"/>
+                  </a:lnTo>
+                  <a:lnTo>
+                    <a:pt x="429735" y="275936"/>
+                  </a:lnTo>
+                  <a:lnTo>
+                    <a:pt x="501357" y="319164"/>
+                  </a:lnTo>
+                  <a:lnTo>
+                    <a:pt x="572980" y="361639"/>
+                  </a:lnTo>
+                  <a:lnTo>
+                    <a:pt x="644602" y="403374"/>
+                  </a:lnTo>
+                  <a:lnTo>
+                    <a:pt x="716225" y="444383"/>
+                  </a:lnTo>
+                  <a:lnTo>
+                    <a:pt x="787847" y="484678"/>
+                  </a:lnTo>
+                  <a:lnTo>
+                    <a:pt x="859470" y="524271"/>
+                  </a:lnTo>
+                  <a:lnTo>
+                    <a:pt x="931092" y="563175"/>
+                  </a:lnTo>
+                  <a:lnTo>
+                    <a:pt x="1002715" y="601401"/>
+                  </a:lnTo>
+                  <a:lnTo>
+                    <a:pt x="1074337" y="638961"/>
+                  </a:lnTo>
+                  <a:lnTo>
+                    <a:pt x="1145960" y="675868"/>
+                  </a:lnTo>
+                  <a:lnTo>
+                    <a:pt x="1217582" y="712132"/>
+                  </a:lnTo>
+                  <a:lnTo>
+                    <a:pt x="1289205" y="747765"/>
+                  </a:lnTo>
+                  <a:lnTo>
+                    <a:pt x="1360827" y="782777"/>
+                  </a:lnTo>
+                  <a:lnTo>
+                    <a:pt x="1432450" y="817179"/>
+                  </a:lnTo>
+                  <a:lnTo>
+                    <a:pt x="1504073" y="850983"/>
+                  </a:lnTo>
+                  <a:lnTo>
+                    <a:pt x="1575695" y="884197"/>
+                  </a:lnTo>
+                  <a:lnTo>
+                    <a:pt x="1647318" y="916834"/>
+                  </a:lnTo>
+                  <a:lnTo>
+                    <a:pt x="1718940" y="948902"/>
+                  </a:lnTo>
+                  <a:lnTo>
+                    <a:pt x="1790563" y="980412"/>
+                  </a:lnTo>
+                  <a:lnTo>
+                    <a:pt x="1862185" y="1011373"/>
+                  </a:lnTo>
+                  <a:lnTo>
+                    <a:pt x="1933808" y="1041795"/>
+                  </a:lnTo>
+                  <a:lnTo>
+                    <a:pt x="2005430" y="1071687"/>
+                  </a:lnTo>
+                  <a:lnTo>
+                    <a:pt x="2077053" y="1101059"/>
+                  </a:lnTo>
+                  <a:lnTo>
+                    <a:pt x="2148675" y="1129920"/>
+                  </a:lnTo>
+                  <a:lnTo>
+                    <a:pt x="2220298" y="1158278"/>
+                  </a:lnTo>
+                  <a:lnTo>
+                    <a:pt x="2291920" y="1186142"/>
+                  </a:lnTo>
+                  <a:lnTo>
+                    <a:pt x="2363543" y="1213521"/>
+                  </a:lnTo>
+                  <a:lnTo>
+                    <a:pt x="2435165" y="1240423"/>
+                  </a:lnTo>
+                  <a:lnTo>
+                    <a:pt x="2506788" y="1266857"/>
+                  </a:lnTo>
+                  <a:lnTo>
+                    <a:pt x="2578410" y="1292830"/>
+                  </a:lnTo>
+                  <a:lnTo>
+                    <a:pt x="2650033" y="1318351"/>
+                  </a:lnTo>
+                  <a:lnTo>
+                    <a:pt x="2721655" y="1343428"/>
+                  </a:lnTo>
+                  <a:lnTo>
+                    <a:pt x="2793278" y="1368068"/>
+                  </a:lnTo>
+                  <a:lnTo>
+                    <a:pt x="2864901" y="1392280"/>
+                  </a:lnTo>
+                  <a:lnTo>
+                    <a:pt x="2936523" y="1416069"/>
+                  </a:lnTo>
+                  <a:lnTo>
+                    <a:pt x="3008146" y="1439445"/>
+                  </a:lnTo>
+                  <a:lnTo>
+                    <a:pt x="3079768" y="1462413"/>
+                  </a:lnTo>
+                  <a:lnTo>
+                    <a:pt x="3151391" y="1484981"/>
+                  </a:lnTo>
+                  <a:lnTo>
+                    <a:pt x="3223013" y="1507157"/>
+                  </a:lnTo>
+                  <a:lnTo>
+                    <a:pt x="3294636" y="1528946"/>
+                  </a:lnTo>
+                  <a:lnTo>
+                    <a:pt x="3366258" y="1550356"/>
+                  </a:lnTo>
+                  <a:lnTo>
+                    <a:pt x="3437881" y="1571393"/>
+                  </a:lnTo>
+                  <a:lnTo>
+                    <a:pt x="3509503" y="1592064"/>
+                  </a:lnTo>
+                  <a:lnTo>
+                    <a:pt x="3581126" y="1612375"/>
+                  </a:lnTo>
+                  <a:lnTo>
+                    <a:pt x="3652748" y="1632332"/>
+                  </a:lnTo>
+                  <a:lnTo>
+                    <a:pt x="3724371" y="1651942"/>
+                  </a:lnTo>
+                  <a:lnTo>
+                    <a:pt x="3795993" y="1671210"/>
+                  </a:lnTo>
+                  <a:lnTo>
+                    <a:pt x="3867616" y="1690143"/>
+                  </a:lnTo>
+                  <a:lnTo>
+                    <a:pt x="3939238" y="1708746"/>
+                  </a:lnTo>
+                  <a:lnTo>
+                    <a:pt x="4010861" y="1727025"/>
+                  </a:lnTo>
+                  <a:lnTo>
+                    <a:pt x="4082483" y="1744986"/>
+                  </a:lnTo>
+                  <a:lnTo>
+                    <a:pt x="4154106" y="1762634"/>
+                  </a:lnTo>
+                  <a:lnTo>
+                    <a:pt x="4225729" y="1779975"/>
+                  </a:lnTo>
+                  <a:lnTo>
+                    <a:pt x="4297351" y="1797014"/>
+                  </a:lnTo>
+                  <a:lnTo>
+                    <a:pt x="4368974" y="1813756"/>
+                  </a:lnTo>
+                  <a:lnTo>
+                    <a:pt x="4440596" y="1830207"/>
+                  </a:lnTo>
+                  <a:lnTo>
+                    <a:pt x="4512219" y="1846371"/>
+                  </a:lnTo>
+                  <a:lnTo>
+                    <a:pt x="4583841" y="1862254"/>
+                  </a:lnTo>
+                  <a:lnTo>
+                    <a:pt x="4655464" y="1877860"/>
+                  </a:lnTo>
+                  <a:lnTo>
+                    <a:pt x="4727086" y="1893195"/>
+                  </a:lnTo>
+                  <a:lnTo>
+                    <a:pt x="4798709" y="1908262"/>
+                  </a:lnTo>
+                  <a:lnTo>
+                    <a:pt x="4870331" y="1923067"/>
+                  </a:lnTo>
+                  <a:lnTo>
+                    <a:pt x="4941954" y="1937615"/>
+                  </a:lnTo>
+                  <a:lnTo>
+                    <a:pt x="5013576" y="1951909"/>
+                  </a:lnTo>
+                  <a:lnTo>
+                    <a:pt x="5085199" y="1965954"/>
+                  </a:lnTo>
+                  <a:lnTo>
+                    <a:pt x="5156821" y="1979754"/>
+                  </a:lnTo>
+                  <a:lnTo>
+                    <a:pt x="5228444" y="1993315"/>
+                  </a:lnTo>
+                  <a:lnTo>
+                    <a:pt x="5300066" y="2006639"/>
+                  </a:lnTo>
+                  <a:lnTo>
+                    <a:pt x="5371689" y="2019731"/>
+                  </a:lnTo>
+                  <a:lnTo>
+                    <a:pt x="5443311" y="2032595"/>
+                  </a:lnTo>
+                  <a:lnTo>
+                    <a:pt x="5514934" y="2045236"/>
+                  </a:lnTo>
+                  <a:lnTo>
+                    <a:pt x="5586557" y="2057656"/>
+                  </a:lnTo>
+                  <a:lnTo>
+                    <a:pt x="5658179" y="2069860"/>
+                  </a:lnTo>
+                  <a:lnTo>
+                    <a:pt x="5729802" y="2081851"/>
+                  </a:lnTo>
+                  <a:lnTo>
+                    <a:pt x="5801424" y="2093633"/>
+                  </a:lnTo>
+                  <a:lnTo>
+                    <a:pt x="5873047" y="2105211"/>
+                  </a:lnTo>
+                  <a:lnTo>
+                    <a:pt x="5944669" y="2116587"/>
+                  </a:lnTo>
+                  <a:lnTo>
+                    <a:pt x="6016292" y="2127764"/>
+                  </a:lnTo>
+                  <a:lnTo>
+                    <a:pt x="6087914" y="2138747"/>
+                  </a:lnTo>
+                  <a:lnTo>
+                    <a:pt x="6159537" y="2149539"/>
+                  </a:lnTo>
+                  <a:lnTo>
+                    <a:pt x="6231159" y="2160143"/>
+                  </a:lnTo>
+                  <a:lnTo>
+                    <a:pt x="6302782" y="2170563"/>
+                  </a:lnTo>
+                  <a:lnTo>
+                    <a:pt x="6374404" y="2180800"/>
+                  </a:lnTo>
+                  <a:lnTo>
+                    <a:pt x="6446027" y="2190860"/>
+                  </a:lnTo>
+                  <a:lnTo>
+                    <a:pt x="6517649" y="2200745"/>
+                  </a:lnTo>
+                  <a:lnTo>
+                    <a:pt x="6589272" y="2210457"/>
+                  </a:lnTo>
+                  <a:lnTo>
+                    <a:pt x="6660894" y="2220000"/>
+                  </a:lnTo>
+                  <a:lnTo>
+                    <a:pt x="6732517" y="2229377"/>
+                  </a:lnTo>
+                  <a:lnTo>
+                    <a:pt x="6804139" y="2238591"/>
+                  </a:lnTo>
+                  <a:lnTo>
+                    <a:pt x="6875762" y="2247644"/>
+                  </a:lnTo>
+                  <a:lnTo>
+                    <a:pt x="6947385" y="2256540"/>
+                  </a:lnTo>
+                  <a:lnTo>
+                    <a:pt x="7019007" y="2265281"/>
+                  </a:lnTo>
+                  <a:lnTo>
+                    <a:pt x="7090630" y="2273869"/>
                   </a:lnTo>
                 </a:path>
               </a:pathLst>
@@ -5148,7 +5148,7 @@
                   <a:latin typeface="Helvetica"/>
                   <a:cs typeface="Helvetica"/>
                 </a:rPr>
-                <a:t>subHR per 1 mL/min: 0.98 (0.95-1.01)  |  per IQR (Δ = 18.2): 0.70 (0.41-1.19)  |  IQR: [-11.5, 6.7]</a:t>
+                <a:t>subHR per 1 mL/min: 0.98 (0.95-1.00)  |  per IQR (Δ = 18.2): 0.66 (0.41-1.07)  |  IQR: [-11.5, 6.7]</a:t>
               </a:r>
             </a:p>
           </p:txBody>

--- a/docs/plots/carbo/jx_carbo_linsubhr_egfrdisc_anemia2.pptx
+++ b/docs/plots/carbo/jx_carbo_linsubhr_egfrdisc_anemia2.pptx
@@ -3003,521 +3003,521 @@
           <p:spPr>
             <a:xfrm>
               <a:off x="1172049" y="2073503"/>
-              <a:ext cx="7090630" cy="3223713"/>
+              <a:ext cx="7090630" cy="3223040"/>
             </a:xfrm>
             <a:custGeom>
               <a:avLst/>
               <a:pathLst>
-                <a:path w="7090630" h="3223713">
+                <a:path w="7090630" h="3223040">
                   <a:moveTo>
-                    <a:pt x="2189502" y="0"/>
+                    <a:pt x="2183453" y="0"/>
                   </a:moveTo>
                   <a:lnTo>
-                    <a:pt x="2220298" y="56946"/>
-                  </a:lnTo>
-                  <a:lnTo>
-                    <a:pt x="2291920" y="184458"/>
-                  </a:lnTo>
-                  <a:lnTo>
-                    <a:pt x="2363543" y="307225"/>
-                  </a:lnTo>
-                  <a:lnTo>
-                    <a:pt x="2435165" y="425424"/>
-                  </a:lnTo>
-                  <a:lnTo>
-                    <a:pt x="2506788" y="539225"/>
-                  </a:lnTo>
-                  <a:lnTo>
-                    <a:pt x="2578410" y="648791"/>
-                  </a:lnTo>
-                  <a:lnTo>
-                    <a:pt x="2650033" y="754280"/>
-                  </a:lnTo>
-                  <a:lnTo>
-                    <a:pt x="2721655" y="855844"/>
-                  </a:lnTo>
-                  <a:lnTo>
-                    <a:pt x="2793278" y="953629"/>
-                  </a:lnTo>
-                  <a:lnTo>
-                    <a:pt x="2864901" y="1047775"/>
-                  </a:lnTo>
-                  <a:lnTo>
-                    <a:pt x="2936523" y="1138418"/>
-                  </a:lnTo>
-                  <a:lnTo>
-                    <a:pt x="3008146" y="1225688"/>
-                  </a:lnTo>
-                  <a:lnTo>
-                    <a:pt x="3079768" y="1309711"/>
-                  </a:lnTo>
-                  <a:lnTo>
-                    <a:pt x="3151391" y="1390607"/>
-                  </a:lnTo>
-                  <a:lnTo>
-                    <a:pt x="3223013" y="1468493"/>
-                  </a:lnTo>
-                  <a:lnTo>
-                    <a:pt x="3294636" y="1543481"/>
-                  </a:lnTo>
-                  <a:lnTo>
-                    <a:pt x="3366258" y="1615679"/>
-                  </a:lnTo>
-                  <a:lnTo>
-                    <a:pt x="3437881" y="1685190"/>
-                  </a:lnTo>
-                  <a:lnTo>
-                    <a:pt x="3509503" y="1752115"/>
-                  </a:lnTo>
-                  <a:lnTo>
-                    <a:pt x="3581126" y="1816549"/>
-                  </a:lnTo>
-                  <a:lnTo>
-                    <a:pt x="3652748" y="1878586"/>
-                  </a:lnTo>
-                  <a:lnTo>
-                    <a:pt x="3724371" y="1938314"/>
-                  </a:lnTo>
-                  <a:lnTo>
-                    <a:pt x="3795993" y="1995820"/>
-                  </a:lnTo>
-                  <a:lnTo>
-                    <a:pt x="3867616" y="2051186"/>
-                  </a:lnTo>
-                  <a:lnTo>
-                    <a:pt x="3939238" y="2104492"/>
-                  </a:lnTo>
-                  <a:lnTo>
-                    <a:pt x="4010861" y="2155814"/>
-                  </a:lnTo>
-                  <a:lnTo>
-                    <a:pt x="4082483" y="2205227"/>
-                  </a:lnTo>
-                  <a:lnTo>
-                    <a:pt x="4154106" y="2252801"/>
-                  </a:lnTo>
-                  <a:lnTo>
-                    <a:pt x="4225729" y="2298604"/>
-                  </a:lnTo>
-                  <a:lnTo>
-                    <a:pt x="4297351" y="2342704"/>
-                  </a:lnTo>
-                  <a:lnTo>
-                    <a:pt x="4368974" y="2385162"/>
-                  </a:lnTo>
-                  <a:lnTo>
-                    <a:pt x="4440596" y="2426041"/>
-                  </a:lnTo>
-                  <a:lnTo>
-                    <a:pt x="4512219" y="2465398"/>
-                  </a:lnTo>
-                  <a:lnTo>
-                    <a:pt x="4583841" y="2503291"/>
-                  </a:lnTo>
-                  <a:lnTo>
-                    <a:pt x="4655464" y="2539774"/>
-                  </a:lnTo>
-                  <a:lnTo>
-                    <a:pt x="4727086" y="2574899"/>
-                  </a:lnTo>
-                  <a:lnTo>
-                    <a:pt x="4798709" y="2608718"/>
-                  </a:lnTo>
-                  <a:lnTo>
-                    <a:pt x="4870331" y="2641278"/>
-                  </a:lnTo>
-                  <a:lnTo>
-                    <a:pt x="4941954" y="2652918"/>
-                  </a:lnTo>
-                  <a:lnTo>
-                    <a:pt x="5013576" y="2650597"/>
-                  </a:lnTo>
-                  <a:lnTo>
-                    <a:pt x="5085199" y="2648271"/>
-                  </a:lnTo>
-                  <a:lnTo>
-                    <a:pt x="5156821" y="2645937"/>
-                  </a:lnTo>
-                  <a:lnTo>
-                    <a:pt x="5228444" y="2643598"/>
-                  </a:lnTo>
-                  <a:lnTo>
-                    <a:pt x="5300066" y="2641252"/>
-                  </a:lnTo>
-                  <a:lnTo>
-                    <a:pt x="5371689" y="2638899"/>
-                  </a:lnTo>
-                  <a:lnTo>
-                    <a:pt x="5443311" y="2636539"/>
-                  </a:lnTo>
-                  <a:lnTo>
-                    <a:pt x="5514934" y="2634173"/>
-                  </a:lnTo>
-                  <a:lnTo>
-                    <a:pt x="5586557" y="2631801"/>
-                  </a:lnTo>
-                  <a:lnTo>
-                    <a:pt x="5658179" y="2629422"/>
-                  </a:lnTo>
-                  <a:lnTo>
-                    <a:pt x="5729802" y="2627036"/>
-                  </a:lnTo>
-                  <a:lnTo>
-                    <a:pt x="5801424" y="2624643"/>
-                  </a:lnTo>
-                  <a:lnTo>
-                    <a:pt x="5873047" y="2622244"/>
-                  </a:lnTo>
-                  <a:lnTo>
-                    <a:pt x="5944669" y="2619838"/>
-                  </a:lnTo>
-                  <a:lnTo>
-                    <a:pt x="6016292" y="2617426"/>
-                  </a:lnTo>
-                  <a:lnTo>
-                    <a:pt x="6087914" y="2615006"/>
-                  </a:lnTo>
-                  <a:lnTo>
-                    <a:pt x="6159537" y="2612580"/>
-                  </a:lnTo>
-                  <a:lnTo>
-                    <a:pt x="6231159" y="2610147"/>
-                  </a:lnTo>
-                  <a:lnTo>
-                    <a:pt x="6302782" y="2607708"/>
-                  </a:lnTo>
-                  <a:lnTo>
-                    <a:pt x="6374404" y="2605261"/>
-                  </a:lnTo>
-                  <a:lnTo>
-                    <a:pt x="6446027" y="2602808"/>
-                  </a:lnTo>
-                  <a:lnTo>
-                    <a:pt x="6517649" y="2600348"/>
-                  </a:lnTo>
-                  <a:lnTo>
-                    <a:pt x="6589272" y="2597881"/>
-                  </a:lnTo>
-                  <a:lnTo>
-                    <a:pt x="6660894" y="2595407"/>
-                  </a:lnTo>
-                  <a:lnTo>
-                    <a:pt x="6732517" y="2592926"/>
-                  </a:lnTo>
-                  <a:lnTo>
-                    <a:pt x="6804139" y="2590438"/>
-                  </a:lnTo>
-                  <a:lnTo>
-                    <a:pt x="6875762" y="2587944"/>
-                  </a:lnTo>
-                  <a:lnTo>
-                    <a:pt x="6947385" y="2585442"/>
-                  </a:lnTo>
-                  <a:lnTo>
-                    <a:pt x="7019007" y="2582933"/>
-                  </a:lnTo>
-                  <a:lnTo>
-                    <a:pt x="7090630" y="2580418"/>
-                  </a:lnTo>
-                  <a:lnTo>
-                    <a:pt x="7090630" y="3223713"/>
-                  </a:lnTo>
-                  <a:lnTo>
-                    <a:pt x="7019007" y="3213663"/>
-                  </a:lnTo>
-                  <a:lnTo>
-                    <a:pt x="6947385" y="3203224"/>
-                  </a:lnTo>
-                  <a:lnTo>
-                    <a:pt x="6875762" y="3192383"/>
-                  </a:lnTo>
-                  <a:lnTo>
-                    <a:pt x="6804139" y="3181122"/>
-                  </a:lnTo>
-                  <a:lnTo>
-                    <a:pt x="6732517" y="3169426"/>
-                  </a:lnTo>
-                  <a:lnTo>
-                    <a:pt x="6660894" y="3157278"/>
-                  </a:lnTo>
-                  <a:lnTo>
-                    <a:pt x="6589272" y="3144661"/>
-                  </a:lnTo>
-                  <a:lnTo>
-                    <a:pt x="6517649" y="3131556"/>
-                  </a:lnTo>
-                  <a:lnTo>
-                    <a:pt x="6446027" y="3117944"/>
-                  </a:lnTo>
-                  <a:lnTo>
-                    <a:pt x="6374404" y="3103806"/>
-                  </a:lnTo>
-                  <a:lnTo>
-                    <a:pt x="6302782" y="3089122"/>
-                  </a:lnTo>
-                  <a:lnTo>
-                    <a:pt x="6231159" y="3073871"/>
-                  </a:lnTo>
-                  <a:lnTo>
-                    <a:pt x="6159537" y="3058030"/>
-                  </a:lnTo>
-                  <a:lnTo>
-                    <a:pt x="6087914" y="3041577"/>
-                  </a:lnTo>
-                  <a:lnTo>
-                    <a:pt x="6016292" y="3024488"/>
-                  </a:lnTo>
-                  <a:lnTo>
-                    <a:pt x="5944669" y="3006738"/>
-                  </a:lnTo>
-                  <a:lnTo>
-                    <a:pt x="5873047" y="2988302"/>
-                  </a:lnTo>
-                  <a:lnTo>
-                    <a:pt x="5801424" y="2969154"/>
-                  </a:lnTo>
-                  <a:lnTo>
-                    <a:pt x="5729802" y="2949266"/>
-                  </a:lnTo>
-                  <a:lnTo>
-                    <a:pt x="5658179" y="2928609"/>
-                  </a:lnTo>
-                  <a:lnTo>
-                    <a:pt x="5586557" y="2907154"/>
-                  </a:lnTo>
-                  <a:lnTo>
-                    <a:pt x="5514934" y="2884870"/>
-                  </a:lnTo>
-                  <a:lnTo>
-                    <a:pt x="5443311" y="2861725"/>
-                  </a:lnTo>
-                  <a:lnTo>
-                    <a:pt x="5371689" y="2837684"/>
-                  </a:lnTo>
-                  <a:lnTo>
-                    <a:pt x="5300066" y="2812715"/>
-                  </a:lnTo>
-                  <a:lnTo>
-                    <a:pt x="5228444" y="2786781"/>
-                  </a:lnTo>
-                  <a:lnTo>
-                    <a:pt x="5156821" y="2759844"/>
-                  </a:lnTo>
-                  <a:lnTo>
-                    <a:pt x="5085199" y="2731867"/>
-                  </a:lnTo>
-                  <a:lnTo>
-                    <a:pt x="5013576" y="2702808"/>
-                  </a:lnTo>
-                  <a:lnTo>
-                    <a:pt x="4941954" y="2672626"/>
-                  </a:lnTo>
-                  <a:lnTo>
-                    <a:pt x="4870331" y="2655231"/>
-                  </a:lnTo>
-                  <a:lnTo>
-                    <a:pt x="4798709" y="2657539"/>
-                  </a:lnTo>
-                  <a:lnTo>
-                    <a:pt x="4727086" y="2659840"/>
-                  </a:lnTo>
-                  <a:lnTo>
-                    <a:pt x="4655464" y="2662134"/>
-                  </a:lnTo>
-                  <a:lnTo>
-                    <a:pt x="4583841" y="2664422"/>
-                  </a:lnTo>
-                  <a:lnTo>
-                    <a:pt x="4512219" y="2666704"/>
-                  </a:lnTo>
-                  <a:lnTo>
-                    <a:pt x="4440596" y="2668979"/>
-                  </a:lnTo>
-                  <a:lnTo>
-                    <a:pt x="4368974" y="2671248"/>
-                  </a:lnTo>
-                  <a:lnTo>
-                    <a:pt x="4297351" y="2673511"/>
-                  </a:lnTo>
-                  <a:lnTo>
-                    <a:pt x="4225729" y="2675767"/>
-                  </a:lnTo>
-                  <a:lnTo>
-                    <a:pt x="4154106" y="2678017"/>
-                  </a:lnTo>
-                  <a:lnTo>
-                    <a:pt x="4082483" y="2680261"/>
-                  </a:lnTo>
-                  <a:lnTo>
-                    <a:pt x="4010861" y="2682499"/>
-                  </a:lnTo>
-                  <a:lnTo>
-                    <a:pt x="3939238" y="2684730"/>
-                  </a:lnTo>
-                  <a:lnTo>
-                    <a:pt x="3867616" y="2686955"/>
-                  </a:lnTo>
-                  <a:lnTo>
-                    <a:pt x="3795993" y="2689174"/>
-                  </a:lnTo>
-                  <a:lnTo>
-                    <a:pt x="3724371" y="2691387"/>
-                  </a:lnTo>
-                  <a:lnTo>
-                    <a:pt x="3652748" y="2693594"/>
-                  </a:lnTo>
-                  <a:lnTo>
-                    <a:pt x="3581126" y="2695794"/>
-                  </a:lnTo>
-                  <a:lnTo>
-                    <a:pt x="3509503" y="2697989"/>
-                  </a:lnTo>
-                  <a:lnTo>
-                    <a:pt x="3437881" y="2700177"/>
-                  </a:lnTo>
-                  <a:lnTo>
-                    <a:pt x="3366258" y="2702359"/>
-                  </a:lnTo>
-                  <a:lnTo>
-                    <a:pt x="3294636" y="2704535"/>
-                  </a:lnTo>
-                  <a:lnTo>
-                    <a:pt x="3223013" y="2706705"/>
-                  </a:lnTo>
-                  <a:lnTo>
-                    <a:pt x="3151391" y="2708869"/>
-                  </a:lnTo>
-                  <a:lnTo>
-                    <a:pt x="3079768" y="2711027"/>
-                  </a:lnTo>
-                  <a:lnTo>
-                    <a:pt x="3008146" y="2713179"/>
-                  </a:lnTo>
-                  <a:lnTo>
-                    <a:pt x="2936523" y="2715325"/>
-                  </a:lnTo>
-                  <a:lnTo>
-                    <a:pt x="2864901" y="2717465"/>
-                  </a:lnTo>
-                  <a:lnTo>
-                    <a:pt x="2793278" y="2719599"/>
-                  </a:lnTo>
-                  <a:lnTo>
-                    <a:pt x="2721655" y="2721727"/>
-                  </a:lnTo>
-                  <a:lnTo>
-                    <a:pt x="2650033" y="2723849"/>
-                  </a:lnTo>
-                  <a:lnTo>
-                    <a:pt x="2578410" y="2725965"/>
-                  </a:lnTo>
-                  <a:lnTo>
-                    <a:pt x="2506788" y="2728075"/>
-                  </a:lnTo>
-                  <a:lnTo>
-                    <a:pt x="2435165" y="2730180"/>
-                  </a:lnTo>
-                  <a:lnTo>
-                    <a:pt x="2363543" y="2732278"/>
-                  </a:lnTo>
-                  <a:lnTo>
-                    <a:pt x="2291920" y="2734371"/>
-                  </a:lnTo>
-                  <a:lnTo>
-                    <a:pt x="2220298" y="2736458"/>
-                  </a:lnTo>
-                  <a:lnTo>
-                    <a:pt x="2148675" y="2738539"/>
-                  </a:lnTo>
-                  <a:lnTo>
-                    <a:pt x="2077053" y="2740614"/>
-                  </a:lnTo>
-                  <a:lnTo>
-                    <a:pt x="2005430" y="2742684"/>
-                  </a:lnTo>
-                  <a:lnTo>
-                    <a:pt x="1933808" y="2744748"/>
-                  </a:lnTo>
-                  <a:lnTo>
-                    <a:pt x="1862185" y="2746806"/>
-                  </a:lnTo>
-                  <a:lnTo>
-                    <a:pt x="1790563" y="2748858"/>
-                  </a:lnTo>
-                  <a:lnTo>
-                    <a:pt x="1718940" y="2750905"/>
-                  </a:lnTo>
-                  <a:lnTo>
-                    <a:pt x="1647318" y="2752946"/>
-                  </a:lnTo>
-                  <a:lnTo>
-                    <a:pt x="1575695" y="2754981"/>
-                  </a:lnTo>
-                  <a:lnTo>
-                    <a:pt x="1504073" y="2757010"/>
-                  </a:lnTo>
-                  <a:lnTo>
-                    <a:pt x="1432450" y="2759034"/>
-                  </a:lnTo>
-                  <a:lnTo>
-                    <a:pt x="1360827" y="2761052"/>
-                  </a:lnTo>
-                  <a:lnTo>
-                    <a:pt x="1289205" y="2763065"/>
-                  </a:lnTo>
-                  <a:lnTo>
-                    <a:pt x="1217582" y="2765072"/>
-                  </a:lnTo>
-                  <a:lnTo>
-                    <a:pt x="1145960" y="2767073"/>
-                  </a:lnTo>
-                  <a:lnTo>
-                    <a:pt x="1074337" y="2769069"/>
-                  </a:lnTo>
-                  <a:lnTo>
-                    <a:pt x="1002715" y="2771059"/>
-                  </a:lnTo>
-                  <a:lnTo>
-                    <a:pt x="931092" y="2773044"/>
-                  </a:lnTo>
-                  <a:lnTo>
-                    <a:pt x="859470" y="2775023"/>
-                  </a:lnTo>
-                  <a:lnTo>
-                    <a:pt x="787847" y="2776997"/>
-                  </a:lnTo>
-                  <a:lnTo>
-                    <a:pt x="716225" y="2778965"/>
-                  </a:lnTo>
-                  <a:lnTo>
-                    <a:pt x="644602" y="2780928"/>
-                  </a:lnTo>
-                  <a:lnTo>
-                    <a:pt x="572980" y="2782885"/>
-                  </a:lnTo>
-                  <a:lnTo>
-                    <a:pt x="501357" y="2784837"/>
-                  </a:lnTo>
-                  <a:lnTo>
-                    <a:pt x="429735" y="2786784"/>
-                  </a:lnTo>
-                  <a:lnTo>
-                    <a:pt x="358112" y="2788724"/>
-                  </a:lnTo>
-                  <a:lnTo>
-                    <a:pt x="286490" y="2790660"/>
-                  </a:lnTo>
-                  <a:lnTo>
-                    <a:pt x="214867" y="2792590"/>
-                  </a:lnTo>
-                  <a:lnTo>
-                    <a:pt x="143245" y="2794515"/>
-                  </a:lnTo>
-                  <a:lnTo>
-                    <a:pt x="71622" y="2796434"/>
-                  </a:lnTo>
-                  <a:lnTo>
-                    <a:pt x="0" y="2798348"/>
+                    <a:pt x="2220298" y="67762"/>
+                  </a:lnTo>
+                  <a:lnTo>
+                    <a:pt x="2291920" y="194594"/>
+                  </a:lnTo>
+                  <a:lnTo>
+                    <a:pt x="2363543" y="316716"/>
+                  </a:lnTo>
+                  <a:lnTo>
+                    <a:pt x="2435165" y="434304"/>
+                  </a:lnTo>
+                  <a:lnTo>
+                    <a:pt x="2506788" y="547526"/>
+                  </a:lnTo>
+                  <a:lnTo>
+                    <a:pt x="2578410" y="656545"/>
+                  </a:lnTo>
+                  <a:lnTo>
+                    <a:pt x="2650033" y="761515"/>
+                  </a:lnTo>
+                  <a:lnTo>
+                    <a:pt x="2721655" y="862589"/>
+                  </a:lnTo>
+                  <a:lnTo>
+                    <a:pt x="2793278" y="959909"/>
+                  </a:lnTo>
+                  <a:lnTo>
+                    <a:pt x="2864901" y="1053616"/>
+                  </a:lnTo>
+                  <a:lnTo>
+                    <a:pt x="2936523" y="1143844"/>
+                  </a:lnTo>
+                  <a:lnTo>
+                    <a:pt x="3008146" y="1230722"/>
+                  </a:lnTo>
+                  <a:lnTo>
+                    <a:pt x="3079768" y="1314374"/>
+                  </a:lnTo>
+                  <a:lnTo>
+                    <a:pt x="3151391" y="1394920"/>
+                  </a:lnTo>
+                  <a:lnTo>
+                    <a:pt x="3223013" y="1472476"/>
+                  </a:lnTo>
+                  <a:lnTo>
+                    <a:pt x="3294636" y="1547152"/>
+                  </a:lnTo>
+                  <a:lnTo>
+                    <a:pt x="3366258" y="1619056"/>
+                  </a:lnTo>
+                  <a:lnTo>
+                    <a:pt x="3437881" y="1688289"/>
+                  </a:lnTo>
+                  <a:lnTo>
+                    <a:pt x="3509503" y="1754953"/>
+                  </a:lnTo>
+                  <a:lnTo>
+                    <a:pt x="3581126" y="1819141"/>
+                  </a:lnTo>
+                  <a:lnTo>
+                    <a:pt x="3652748" y="1880946"/>
+                  </a:lnTo>
+                  <a:lnTo>
+                    <a:pt x="3724371" y="1940456"/>
+                  </a:lnTo>
+                  <a:lnTo>
+                    <a:pt x="3795993" y="1997756"/>
+                  </a:lnTo>
+                  <a:lnTo>
+                    <a:pt x="3867616" y="2052929"/>
+                  </a:lnTo>
+                  <a:lnTo>
+                    <a:pt x="3939238" y="2106054"/>
+                  </a:lnTo>
+                  <a:lnTo>
+                    <a:pt x="4010861" y="2157206"/>
+                  </a:lnTo>
+                  <a:lnTo>
+                    <a:pt x="4082483" y="2206459"/>
+                  </a:lnTo>
+                  <a:lnTo>
+                    <a:pt x="4154106" y="2253883"/>
+                  </a:lnTo>
+                  <a:lnTo>
+                    <a:pt x="4225729" y="2299546"/>
+                  </a:lnTo>
+                  <a:lnTo>
+                    <a:pt x="4297351" y="2343514"/>
+                  </a:lnTo>
+                  <a:lnTo>
+                    <a:pt x="4368974" y="2385850"/>
+                  </a:lnTo>
+                  <a:lnTo>
+                    <a:pt x="4440596" y="2426613"/>
+                  </a:lnTo>
+                  <a:lnTo>
+                    <a:pt x="4512219" y="2465864"/>
+                  </a:lnTo>
+                  <a:lnTo>
+                    <a:pt x="4583841" y="2503656"/>
+                  </a:lnTo>
+                  <a:lnTo>
+                    <a:pt x="4655464" y="2540046"/>
+                  </a:lnTo>
+                  <a:lnTo>
+                    <a:pt x="4727086" y="2575084"/>
+                  </a:lnTo>
+                  <a:lnTo>
+                    <a:pt x="4798709" y="2608822"/>
+                  </a:lnTo>
+                  <a:lnTo>
+                    <a:pt x="4870331" y="2641307"/>
+                  </a:lnTo>
+                  <a:lnTo>
+                    <a:pt x="4941954" y="2650725"/>
+                  </a:lnTo>
+                  <a:lnTo>
+                    <a:pt x="5013576" y="2644658"/>
+                  </a:lnTo>
+                  <a:lnTo>
+                    <a:pt x="5085199" y="2638546"/>
+                  </a:lnTo>
+                  <a:lnTo>
+                    <a:pt x="5156821" y="2632390"/>
+                  </a:lnTo>
+                  <a:lnTo>
+                    <a:pt x="5228444" y="2626189"/>
+                  </a:lnTo>
+                  <a:lnTo>
+                    <a:pt x="5300066" y="2619943"/>
+                  </a:lnTo>
+                  <a:lnTo>
+                    <a:pt x="5371689" y="2613652"/>
+                  </a:lnTo>
+                  <a:lnTo>
+                    <a:pt x="5443311" y="2607314"/>
+                  </a:lnTo>
+                  <a:lnTo>
+                    <a:pt x="5514934" y="2600931"/>
+                  </a:lnTo>
+                  <a:lnTo>
+                    <a:pt x="5586557" y="2594501"/>
+                  </a:lnTo>
+                  <a:lnTo>
+                    <a:pt x="5658179" y="2588024"/>
+                  </a:lnTo>
+                  <a:lnTo>
+                    <a:pt x="5729802" y="2581500"/>
+                  </a:lnTo>
+                  <a:lnTo>
+                    <a:pt x="5801424" y="2574928"/>
+                  </a:lnTo>
+                  <a:lnTo>
+                    <a:pt x="5873047" y="2568309"/>
+                  </a:lnTo>
+                  <a:lnTo>
+                    <a:pt x="5944669" y="2561641"/>
+                  </a:lnTo>
+                  <a:lnTo>
+                    <a:pt x="6016292" y="2554925"/>
+                  </a:lnTo>
+                  <a:lnTo>
+                    <a:pt x="6087914" y="2548160"/>
+                  </a:lnTo>
+                  <a:lnTo>
+                    <a:pt x="6159537" y="2541345"/>
+                  </a:lnTo>
+                  <a:lnTo>
+                    <a:pt x="6231159" y="2534481"/>
+                  </a:lnTo>
+                  <a:lnTo>
+                    <a:pt x="6302782" y="2527567"/>
+                  </a:lnTo>
+                  <a:lnTo>
+                    <a:pt x="6374404" y="2520603"/>
+                  </a:lnTo>
+                  <a:lnTo>
+                    <a:pt x="6446027" y="2513588"/>
+                  </a:lnTo>
+                  <a:lnTo>
+                    <a:pt x="6517649" y="2506521"/>
+                  </a:lnTo>
+                  <a:lnTo>
+                    <a:pt x="6589272" y="2499404"/>
+                  </a:lnTo>
+                  <a:lnTo>
+                    <a:pt x="6660894" y="2492234"/>
+                  </a:lnTo>
+                  <a:lnTo>
+                    <a:pt x="6732517" y="2485012"/>
+                  </a:lnTo>
+                  <a:lnTo>
+                    <a:pt x="6804139" y="2477738"/>
+                  </a:lnTo>
+                  <a:lnTo>
+                    <a:pt x="6875762" y="2470411"/>
+                  </a:lnTo>
+                  <a:lnTo>
+                    <a:pt x="6947385" y="2463030"/>
+                  </a:lnTo>
+                  <a:lnTo>
+                    <a:pt x="7019007" y="2455595"/>
+                  </a:lnTo>
+                  <a:lnTo>
+                    <a:pt x="7090630" y="2448107"/>
+                  </a:lnTo>
+                  <a:lnTo>
+                    <a:pt x="7090630" y="3223040"/>
+                  </a:lnTo>
+                  <a:lnTo>
+                    <a:pt x="7019007" y="3212987"/>
+                  </a:lnTo>
+                  <a:lnTo>
+                    <a:pt x="6947385" y="3202546"/>
+                  </a:lnTo>
+                  <a:lnTo>
+                    <a:pt x="6875762" y="3191703"/>
+                  </a:lnTo>
+                  <a:lnTo>
+                    <a:pt x="6804139" y="3180441"/>
+                  </a:lnTo>
+                  <a:lnTo>
+                    <a:pt x="6732517" y="3168746"/>
+                  </a:lnTo>
+                  <a:lnTo>
+                    <a:pt x="6660894" y="3156599"/>
+                  </a:lnTo>
+                  <a:lnTo>
+                    <a:pt x="6589272" y="3143984"/>
+                  </a:lnTo>
+                  <a:lnTo>
+                    <a:pt x="6517649" y="3130883"/>
+                  </a:lnTo>
+                  <a:lnTo>
+                    <a:pt x="6446027" y="3117276"/>
+                  </a:lnTo>
+                  <a:lnTo>
+                    <a:pt x="6374404" y="3103145"/>
+                  </a:lnTo>
+                  <a:lnTo>
+                    <a:pt x="6302782" y="3088469"/>
+                  </a:lnTo>
+                  <a:lnTo>
+                    <a:pt x="6231159" y="3073226"/>
+                  </a:lnTo>
+                  <a:lnTo>
+                    <a:pt x="6159537" y="3057397"/>
+                  </a:lnTo>
+                  <a:lnTo>
+                    <a:pt x="6087914" y="3040956"/>
+                  </a:lnTo>
+                  <a:lnTo>
+                    <a:pt x="6016292" y="3023882"/>
+                  </a:lnTo>
+                  <a:lnTo>
+                    <a:pt x="5944669" y="3006149"/>
+                  </a:lnTo>
+                  <a:lnTo>
+                    <a:pt x="5873047" y="2987733"/>
+                  </a:lnTo>
+                  <a:lnTo>
+                    <a:pt x="5801424" y="2968607"/>
+                  </a:lnTo>
+                  <a:lnTo>
+                    <a:pt x="5729802" y="2948743"/>
+                  </a:lnTo>
+                  <a:lnTo>
+                    <a:pt x="5658179" y="2928112"/>
+                  </a:lnTo>
+                  <a:lnTo>
+                    <a:pt x="5586557" y="2906687"/>
+                  </a:lnTo>
+                  <a:lnTo>
+                    <a:pt x="5514934" y="2884435"/>
+                  </a:lnTo>
+                  <a:lnTo>
+                    <a:pt x="5443311" y="2861325"/>
+                  </a:lnTo>
+                  <a:lnTo>
+                    <a:pt x="5371689" y="2837325"/>
+                  </a:lnTo>
+                  <a:lnTo>
+                    <a:pt x="5300066" y="2812398"/>
+                  </a:lnTo>
+                  <a:lnTo>
+                    <a:pt x="5228444" y="2786511"/>
+                  </a:lnTo>
+                  <a:lnTo>
+                    <a:pt x="5156821" y="2759625"/>
+                  </a:lnTo>
+                  <a:lnTo>
+                    <a:pt x="5085199" y="2731702"/>
+                  </a:lnTo>
+                  <a:lnTo>
+                    <a:pt x="5013576" y="2702703"/>
+                  </a:lnTo>
+                  <a:lnTo>
+                    <a:pt x="4941954" y="2672586"/>
+                  </a:lnTo>
+                  <a:lnTo>
+                    <a:pt x="4870331" y="2656749"/>
+                  </a:lnTo>
+                  <a:lnTo>
+                    <a:pt x="4798709" y="2662729"/>
+                  </a:lnTo>
+                  <a:lnTo>
+                    <a:pt x="4727086" y="2668665"/>
+                  </a:lnTo>
+                  <a:lnTo>
+                    <a:pt x="4655464" y="2674559"/>
+                  </a:lnTo>
+                  <a:lnTo>
+                    <a:pt x="4583841" y="2680410"/>
+                  </a:lnTo>
+                  <a:lnTo>
+                    <a:pt x="4512219" y="2686219"/>
+                  </a:lnTo>
+                  <a:lnTo>
+                    <a:pt x="4440596" y="2691986"/>
+                  </a:lnTo>
+                  <a:lnTo>
+                    <a:pt x="4368974" y="2697711"/>
+                  </a:lnTo>
+                  <a:lnTo>
+                    <a:pt x="4297351" y="2703395"/>
+                  </a:lnTo>
+                  <a:lnTo>
+                    <a:pt x="4225729" y="2709038"/>
+                  </a:lnTo>
+                  <a:lnTo>
+                    <a:pt x="4154106" y="2714640"/>
+                  </a:lnTo>
+                  <a:lnTo>
+                    <a:pt x="4082483" y="2720201"/>
+                  </a:lnTo>
+                  <a:lnTo>
+                    <a:pt x="4010861" y="2725722"/>
+                  </a:lnTo>
+                  <a:lnTo>
+                    <a:pt x="3939238" y="2731203"/>
+                  </a:lnTo>
+                  <a:lnTo>
+                    <a:pt x="3867616" y="2736645"/>
+                  </a:lnTo>
+                  <a:lnTo>
+                    <a:pt x="3795993" y="2742047"/>
+                  </a:lnTo>
+                  <a:lnTo>
+                    <a:pt x="3724371" y="2747410"/>
+                  </a:lnTo>
+                  <a:lnTo>
+                    <a:pt x="3652748" y="2752735"/>
+                  </a:lnTo>
+                  <a:lnTo>
+                    <a:pt x="3581126" y="2758020"/>
+                  </a:lnTo>
+                  <a:lnTo>
+                    <a:pt x="3509503" y="2763268"/>
+                  </a:lnTo>
+                  <a:lnTo>
+                    <a:pt x="3437881" y="2768478"/>
+                  </a:lnTo>
+                  <a:lnTo>
+                    <a:pt x="3366258" y="2773650"/>
+                  </a:lnTo>
+                  <a:lnTo>
+                    <a:pt x="3294636" y="2778785"/>
+                  </a:lnTo>
+                  <a:lnTo>
+                    <a:pt x="3223013" y="2783882"/>
+                  </a:lnTo>
+                  <a:lnTo>
+                    <a:pt x="3151391" y="2788943"/>
+                  </a:lnTo>
+                  <a:lnTo>
+                    <a:pt x="3079768" y="2793967"/>
+                  </a:lnTo>
+                  <a:lnTo>
+                    <a:pt x="3008146" y="2798954"/>
+                  </a:lnTo>
+                  <a:lnTo>
+                    <a:pt x="2936523" y="2803906"/>
+                  </a:lnTo>
+                  <a:lnTo>
+                    <a:pt x="2864901" y="2808822"/>
+                  </a:lnTo>
+                  <a:lnTo>
+                    <a:pt x="2793278" y="2813702"/>
+                  </a:lnTo>
+                  <a:lnTo>
+                    <a:pt x="2721655" y="2818547"/>
+                  </a:lnTo>
+                  <a:lnTo>
+                    <a:pt x="2650033" y="2823357"/>
+                  </a:lnTo>
+                  <a:lnTo>
+                    <a:pt x="2578410" y="2828133"/>
+                  </a:lnTo>
+                  <a:lnTo>
+                    <a:pt x="2506788" y="2832873"/>
+                  </a:lnTo>
+                  <a:lnTo>
+                    <a:pt x="2435165" y="2837580"/>
+                  </a:lnTo>
+                  <a:lnTo>
+                    <a:pt x="2363543" y="2842252"/>
+                  </a:lnTo>
+                  <a:lnTo>
+                    <a:pt x="2291920" y="2846891"/>
+                  </a:lnTo>
+                  <a:lnTo>
+                    <a:pt x="2220298" y="2851496"/>
+                  </a:lnTo>
+                  <a:lnTo>
+                    <a:pt x="2148675" y="2856067"/>
+                  </a:lnTo>
+                  <a:lnTo>
+                    <a:pt x="2077053" y="2860606"/>
+                  </a:lnTo>
+                  <a:lnTo>
+                    <a:pt x="2005430" y="2865112"/>
+                  </a:lnTo>
+                  <a:lnTo>
+                    <a:pt x="1933808" y="2869585"/>
+                  </a:lnTo>
+                  <a:lnTo>
+                    <a:pt x="1862185" y="2874026"/>
+                  </a:lnTo>
+                  <a:lnTo>
+                    <a:pt x="1790563" y="2878435"/>
+                  </a:lnTo>
+                  <a:lnTo>
+                    <a:pt x="1718940" y="2882812"/>
+                  </a:lnTo>
+                  <a:lnTo>
+                    <a:pt x="1647318" y="2887157"/>
+                  </a:lnTo>
+                  <a:lnTo>
+                    <a:pt x="1575695" y="2891471"/>
+                  </a:lnTo>
+                  <a:lnTo>
+                    <a:pt x="1504073" y="2895754"/>
+                  </a:lnTo>
+                  <a:lnTo>
+                    <a:pt x="1432450" y="2900006"/>
+                  </a:lnTo>
+                  <a:lnTo>
+                    <a:pt x="1360827" y="2904227"/>
+                  </a:lnTo>
+                  <a:lnTo>
+                    <a:pt x="1289205" y="2908417"/>
+                  </a:lnTo>
+                  <a:lnTo>
+                    <a:pt x="1217582" y="2912577"/>
+                  </a:lnTo>
+                  <a:lnTo>
+                    <a:pt x="1145960" y="2916707"/>
+                  </a:lnTo>
+                  <a:lnTo>
+                    <a:pt x="1074337" y="2920808"/>
+                  </a:lnTo>
+                  <a:lnTo>
+                    <a:pt x="1002715" y="2924878"/>
+                  </a:lnTo>
+                  <a:lnTo>
+                    <a:pt x="931092" y="2928919"/>
+                  </a:lnTo>
+                  <a:lnTo>
+                    <a:pt x="859470" y="2932931"/>
+                  </a:lnTo>
+                  <a:lnTo>
+                    <a:pt x="787847" y="2936914"/>
+                  </a:lnTo>
+                  <a:lnTo>
+                    <a:pt x="716225" y="2940868"/>
+                  </a:lnTo>
+                  <a:lnTo>
+                    <a:pt x="644602" y="2944794"/>
+                  </a:lnTo>
+                  <a:lnTo>
+                    <a:pt x="572980" y="2948691"/>
+                  </a:lnTo>
+                  <a:lnTo>
+                    <a:pt x="501357" y="2952560"/>
+                  </a:lnTo>
+                  <a:lnTo>
+                    <a:pt x="429735" y="2956401"/>
+                  </a:lnTo>
+                  <a:lnTo>
+                    <a:pt x="358112" y="2960214"/>
+                  </a:lnTo>
+                  <a:lnTo>
+                    <a:pt x="286490" y="2963999"/>
+                  </a:lnTo>
+                  <a:lnTo>
+                    <a:pt x="214867" y="2967758"/>
+                  </a:lnTo>
+                  <a:lnTo>
+                    <a:pt x="143245" y="2971489"/>
+                  </a:lnTo>
+                  <a:lnTo>
+                    <a:pt x="71622" y="2975193"/>
+                  </a:lnTo>
+                  <a:lnTo>
+                    <a:pt x="0" y="2978870"/>
                   </a:lnTo>
                   <a:close/>
                 </a:path>
@@ -3543,222 +3543,222 @@
           </p:nvSpPr>
           <p:spPr>
             <a:xfrm>
-              <a:off x="3361551" y="2073503"/>
-              <a:ext cx="4901127" cy="2652918"/>
+              <a:off x="3355502" y="2073503"/>
+              <a:ext cx="4907176" cy="2650725"/>
             </a:xfrm>
             <a:custGeom>
               <a:avLst/>
               <a:pathLst>
-                <a:path w="4901127" h="2652918">
+                <a:path w="4907176" h="2650725">
                   <a:moveTo>
                     <a:pt x="0" y="0"/>
                   </a:moveTo>
                   <a:lnTo>
-                    <a:pt x="30796" y="56946"/>
-                  </a:lnTo>
-                  <a:lnTo>
-                    <a:pt x="102418" y="184458"/>
-                  </a:lnTo>
-                  <a:lnTo>
-                    <a:pt x="174041" y="307225"/>
-                  </a:lnTo>
-                  <a:lnTo>
-                    <a:pt x="245663" y="425424"/>
-                  </a:lnTo>
-                  <a:lnTo>
-                    <a:pt x="317286" y="539225"/>
-                  </a:lnTo>
-                  <a:lnTo>
-                    <a:pt x="388908" y="648791"/>
-                  </a:lnTo>
-                  <a:lnTo>
-                    <a:pt x="460531" y="754280"/>
-                  </a:lnTo>
-                  <a:lnTo>
-                    <a:pt x="532153" y="855844"/>
-                  </a:lnTo>
-                  <a:lnTo>
-                    <a:pt x="603776" y="953629"/>
-                  </a:lnTo>
-                  <a:lnTo>
-                    <a:pt x="675398" y="1047775"/>
-                  </a:lnTo>
-                  <a:lnTo>
-                    <a:pt x="747021" y="1138418"/>
-                  </a:lnTo>
-                  <a:lnTo>
-                    <a:pt x="818643" y="1225688"/>
-                  </a:lnTo>
-                  <a:lnTo>
-                    <a:pt x="890266" y="1309711"/>
-                  </a:lnTo>
-                  <a:lnTo>
-                    <a:pt x="961888" y="1390607"/>
-                  </a:lnTo>
-                  <a:lnTo>
-                    <a:pt x="1033511" y="1468493"/>
-                  </a:lnTo>
-                  <a:lnTo>
-                    <a:pt x="1105133" y="1543481"/>
-                  </a:lnTo>
-                  <a:lnTo>
-                    <a:pt x="1176756" y="1615679"/>
-                  </a:lnTo>
-                  <a:lnTo>
-                    <a:pt x="1248379" y="1685190"/>
-                  </a:lnTo>
-                  <a:lnTo>
-                    <a:pt x="1320001" y="1752115"/>
-                  </a:lnTo>
-                  <a:lnTo>
-                    <a:pt x="1391624" y="1816549"/>
-                  </a:lnTo>
-                  <a:lnTo>
-                    <a:pt x="1463246" y="1878586"/>
-                  </a:lnTo>
-                  <a:lnTo>
-                    <a:pt x="1534869" y="1938314"/>
-                  </a:lnTo>
-                  <a:lnTo>
-                    <a:pt x="1606491" y="1995820"/>
-                  </a:lnTo>
-                  <a:lnTo>
-                    <a:pt x="1678114" y="2051186"/>
-                  </a:lnTo>
-                  <a:lnTo>
-                    <a:pt x="1749736" y="2104492"/>
-                  </a:lnTo>
-                  <a:lnTo>
-                    <a:pt x="1821359" y="2155814"/>
-                  </a:lnTo>
-                  <a:lnTo>
-                    <a:pt x="1892981" y="2205227"/>
-                  </a:lnTo>
-                  <a:lnTo>
-                    <a:pt x="1964604" y="2252801"/>
-                  </a:lnTo>
-                  <a:lnTo>
-                    <a:pt x="2036226" y="2298604"/>
-                  </a:lnTo>
-                  <a:lnTo>
-                    <a:pt x="2107849" y="2342704"/>
-                  </a:lnTo>
-                  <a:lnTo>
-                    <a:pt x="2179471" y="2385162"/>
-                  </a:lnTo>
-                  <a:lnTo>
-                    <a:pt x="2251094" y="2426041"/>
-                  </a:lnTo>
-                  <a:lnTo>
-                    <a:pt x="2322716" y="2465398"/>
-                  </a:lnTo>
-                  <a:lnTo>
-                    <a:pt x="2394339" y="2503291"/>
-                  </a:lnTo>
-                  <a:lnTo>
-                    <a:pt x="2465961" y="2539774"/>
-                  </a:lnTo>
-                  <a:lnTo>
-                    <a:pt x="2537584" y="2574899"/>
-                  </a:lnTo>
-                  <a:lnTo>
-                    <a:pt x="2609207" y="2608718"/>
-                  </a:lnTo>
-                  <a:lnTo>
-                    <a:pt x="2680829" y="2641278"/>
-                  </a:lnTo>
-                  <a:lnTo>
-                    <a:pt x="2752452" y="2652918"/>
-                  </a:lnTo>
-                  <a:lnTo>
-                    <a:pt x="2824074" y="2650597"/>
-                  </a:lnTo>
-                  <a:lnTo>
-                    <a:pt x="2895697" y="2648271"/>
-                  </a:lnTo>
-                  <a:lnTo>
-                    <a:pt x="2967319" y="2645937"/>
-                  </a:lnTo>
-                  <a:lnTo>
-                    <a:pt x="3038942" y="2643598"/>
-                  </a:lnTo>
-                  <a:lnTo>
-                    <a:pt x="3110564" y="2641252"/>
-                  </a:lnTo>
-                  <a:lnTo>
-                    <a:pt x="3182187" y="2638899"/>
-                  </a:lnTo>
-                  <a:lnTo>
-                    <a:pt x="3253809" y="2636539"/>
-                  </a:lnTo>
-                  <a:lnTo>
-                    <a:pt x="3325432" y="2634173"/>
-                  </a:lnTo>
-                  <a:lnTo>
-                    <a:pt x="3397054" y="2631801"/>
-                  </a:lnTo>
-                  <a:lnTo>
-                    <a:pt x="3468677" y="2629422"/>
-                  </a:lnTo>
-                  <a:lnTo>
-                    <a:pt x="3540299" y="2627036"/>
-                  </a:lnTo>
-                  <a:lnTo>
-                    <a:pt x="3611922" y="2624643"/>
-                  </a:lnTo>
-                  <a:lnTo>
-                    <a:pt x="3683544" y="2622244"/>
-                  </a:lnTo>
-                  <a:lnTo>
-                    <a:pt x="3755167" y="2619838"/>
-                  </a:lnTo>
-                  <a:lnTo>
-                    <a:pt x="3826789" y="2617426"/>
-                  </a:lnTo>
-                  <a:lnTo>
-                    <a:pt x="3898412" y="2615006"/>
-                  </a:lnTo>
-                  <a:lnTo>
-                    <a:pt x="3970035" y="2612580"/>
-                  </a:lnTo>
-                  <a:lnTo>
-                    <a:pt x="4041657" y="2610147"/>
-                  </a:lnTo>
-                  <a:lnTo>
-                    <a:pt x="4113280" y="2607708"/>
-                  </a:lnTo>
-                  <a:lnTo>
-                    <a:pt x="4184902" y="2605261"/>
-                  </a:lnTo>
-                  <a:lnTo>
-                    <a:pt x="4256525" y="2602808"/>
-                  </a:lnTo>
-                  <a:lnTo>
-                    <a:pt x="4328147" y="2600348"/>
-                  </a:lnTo>
-                  <a:lnTo>
-                    <a:pt x="4399770" y="2597881"/>
-                  </a:lnTo>
-                  <a:lnTo>
-                    <a:pt x="4471392" y="2595407"/>
-                  </a:lnTo>
-                  <a:lnTo>
-                    <a:pt x="4543015" y="2592926"/>
-                  </a:lnTo>
-                  <a:lnTo>
-                    <a:pt x="4614637" y="2590438"/>
-                  </a:lnTo>
-                  <a:lnTo>
-                    <a:pt x="4686260" y="2587944"/>
-                  </a:lnTo>
-                  <a:lnTo>
-                    <a:pt x="4757882" y="2585442"/>
-                  </a:lnTo>
-                  <a:lnTo>
-                    <a:pt x="4829505" y="2582933"/>
-                  </a:lnTo>
-                  <a:lnTo>
-                    <a:pt x="4901127" y="2580418"/>
+                    <a:pt x="36845" y="67762"/>
+                  </a:lnTo>
+                  <a:lnTo>
+                    <a:pt x="108467" y="194594"/>
+                  </a:lnTo>
+                  <a:lnTo>
+                    <a:pt x="180090" y="316716"/>
+                  </a:lnTo>
+                  <a:lnTo>
+                    <a:pt x="251712" y="434304"/>
+                  </a:lnTo>
+                  <a:lnTo>
+                    <a:pt x="323335" y="547526"/>
+                  </a:lnTo>
+                  <a:lnTo>
+                    <a:pt x="394957" y="656545"/>
+                  </a:lnTo>
+                  <a:lnTo>
+                    <a:pt x="466580" y="761515"/>
+                  </a:lnTo>
+                  <a:lnTo>
+                    <a:pt x="538202" y="862589"/>
+                  </a:lnTo>
+                  <a:lnTo>
+                    <a:pt x="609825" y="959909"/>
+                  </a:lnTo>
+                  <a:lnTo>
+                    <a:pt x="681447" y="1053616"/>
+                  </a:lnTo>
+                  <a:lnTo>
+                    <a:pt x="753070" y="1143844"/>
+                  </a:lnTo>
+                  <a:lnTo>
+                    <a:pt x="824692" y="1230722"/>
+                  </a:lnTo>
+                  <a:lnTo>
+                    <a:pt x="896315" y="1314374"/>
+                  </a:lnTo>
+                  <a:lnTo>
+                    <a:pt x="967938" y="1394920"/>
+                  </a:lnTo>
+                  <a:lnTo>
+                    <a:pt x="1039560" y="1472476"/>
+                  </a:lnTo>
+                  <a:lnTo>
+                    <a:pt x="1111183" y="1547152"/>
+                  </a:lnTo>
+                  <a:lnTo>
+                    <a:pt x="1182805" y="1619056"/>
+                  </a:lnTo>
+                  <a:lnTo>
+                    <a:pt x="1254428" y="1688289"/>
+                  </a:lnTo>
+                  <a:lnTo>
+                    <a:pt x="1326050" y="1754953"/>
+                  </a:lnTo>
+                  <a:lnTo>
+                    <a:pt x="1397673" y="1819141"/>
+                  </a:lnTo>
+                  <a:lnTo>
+                    <a:pt x="1469295" y="1880946"/>
+                  </a:lnTo>
+                  <a:lnTo>
+                    <a:pt x="1540918" y="1940456"/>
+                  </a:lnTo>
+                  <a:lnTo>
+                    <a:pt x="1612540" y="1997756"/>
+                  </a:lnTo>
+                  <a:lnTo>
+                    <a:pt x="1684163" y="2052929"/>
+                  </a:lnTo>
+                  <a:lnTo>
+                    <a:pt x="1755785" y="2106054"/>
+                  </a:lnTo>
+                  <a:lnTo>
+                    <a:pt x="1827408" y="2157206"/>
+                  </a:lnTo>
+                  <a:lnTo>
+                    <a:pt x="1899030" y="2206459"/>
+                  </a:lnTo>
+                  <a:lnTo>
+                    <a:pt x="1970653" y="2253883"/>
+                  </a:lnTo>
+                  <a:lnTo>
+                    <a:pt x="2042275" y="2299546"/>
+                  </a:lnTo>
+                  <a:lnTo>
+                    <a:pt x="2113898" y="2343514"/>
+                  </a:lnTo>
+                  <a:lnTo>
+                    <a:pt x="2185520" y="2385850"/>
+                  </a:lnTo>
+                  <a:lnTo>
+                    <a:pt x="2257143" y="2426613"/>
+                  </a:lnTo>
+                  <a:lnTo>
+                    <a:pt x="2328766" y="2465864"/>
+                  </a:lnTo>
+                  <a:lnTo>
+                    <a:pt x="2400388" y="2503656"/>
+                  </a:lnTo>
+                  <a:lnTo>
+                    <a:pt x="2472011" y="2540046"/>
+                  </a:lnTo>
+                  <a:lnTo>
+                    <a:pt x="2543633" y="2575084"/>
+                  </a:lnTo>
+                  <a:lnTo>
+                    <a:pt x="2615256" y="2608822"/>
+                  </a:lnTo>
+                  <a:lnTo>
+                    <a:pt x="2686878" y="2641307"/>
+                  </a:lnTo>
+                  <a:lnTo>
+                    <a:pt x="2758501" y="2650725"/>
+                  </a:lnTo>
+                  <a:lnTo>
+                    <a:pt x="2830123" y="2644658"/>
+                  </a:lnTo>
+                  <a:lnTo>
+                    <a:pt x="2901746" y="2638546"/>
+                  </a:lnTo>
+                  <a:lnTo>
+                    <a:pt x="2973368" y="2632390"/>
+                  </a:lnTo>
+                  <a:lnTo>
+                    <a:pt x="3044991" y="2626189"/>
+                  </a:lnTo>
+                  <a:lnTo>
+                    <a:pt x="3116613" y="2619943"/>
+                  </a:lnTo>
+                  <a:lnTo>
+                    <a:pt x="3188236" y="2613652"/>
+                  </a:lnTo>
+                  <a:lnTo>
+                    <a:pt x="3259858" y="2607314"/>
+                  </a:lnTo>
+                  <a:lnTo>
+                    <a:pt x="3331481" y="2600931"/>
+                  </a:lnTo>
+                  <a:lnTo>
+                    <a:pt x="3403103" y="2594501"/>
+                  </a:lnTo>
+                  <a:lnTo>
+                    <a:pt x="3474726" y="2588024"/>
+                  </a:lnTo>
+                  <a:lnTo>
+                    <a:pt x="3546348" y="2581500"/>
+                  </a:lnTo>
+                  <a:lnTo>
+                    <a:pt x="3617971" y="2574928"/>
+                  </a:lnTo>
+                  <a:lnTo>
+                    <a:pt x="3689594" y="2568309"/>
+                  </a:lnTo>
+                  <a:lnTo>
+                    <a:pt x="3761216" y="2561641"/>
+                  </a:lnTo>
+                  <a:lnTo>
+                    <a:pt x="3832839" y="2554925"/>
+                  </a:lnTo>
+                  <a:lnTo>
+                    <a:pt x="3904461" y="2548160"/>
+                  </a:lnTo>
+                  <a:lnTo>
+                    <a:pt x="3976084" y="2541345"/>
+                  </a:lnTo>
+                  <a:lnTo>
+                    <a:pt x="4047706" y="2534481"/>
+                  </a:lnTo>
+                  <a:lnTo>
+                    <a:pt x="4119329" y="2527567"/>
+                  </a:lnTo>
+                  <a:lnTo>
+                    <a:pt x="4190951" y="2520603"/>
+                  </a:lnTo>
+                  <a:lnTo>
+                    <a:pt x="4262574" y="2513588"/>
+                  </a:lnTo>
+                  <a:lnTo>
+                    <a:pt x="4334196" y="2506521"/>
+                  </a:lnTo>
+                  <a:lnTo>
+                    <a:pt x="4405819" y="2499404"/>
+                  </a:lnTo>
+                  <a:lnTo>
+                    <a:pt x="4477441" y="2492234"/>
+                  </a:lnTo>
+                  <a:lnTo>
+                    <a:pt x="4549064" y="2485012"/>
+                  </a:lnTo>
+                  <a:lnTo>
+                    <a:pt x="4620686" y="2477738"/>
+                  </a:lnTo>
+                  <a:lnTo>
+                    <a:pt x="4692309" y="2470411"/>
+                  </a:lnTo>
+                  <a:lnTo>
+                    <a:pt x="4763931" y="2463030"/>
+                  </a:lnTo>
+                  <a:lnTo>
+                    <a:pt x="4835554" y="2455595"/>
+                  </a:lnTo>
+                  <a:lnTo>
+                    <a:pt x="4907176" y="2448107"/>
                   </a:lnTo>
                 </a:path>
               </a:pathLst>
@@ -3778,312 +3778,312 @@
           </p:nvSpPr>
           <p:spPr>
             <a:xfrm>
-              <a:off x="1172049" y="4728734"/>
-              <a:ext cx="7090630" cy="568481"/>
+              <a:off x="1172049" y="4730252"/>
+              <a:ext cx="7090630" cy="566290"/>
             </a:xfrm>
             <a:custGeom>
               <a:avLst/>
               <a:pathLst>
-                <a:path w="7090630" h="568481">
+                <a:path w="7090630" h="566290">
                   <a:moveTo>
-                    <a:pt x="7090630" y="568481"/>
+                    <a:pt x="7090630" y="566290"/>
                   </a:moveTo>
                   <a:lnTo>
-                    <a:pt x="7019007" y="558431"/>
-                  </a:lnTo>
-                  <a:lnTo>
-                    <a:pt x="6947385" y="547993"/>
-                  </a:lnTo>
-                  <a:lnTo>
-                    <a:pt x="6875762" y="537151"/>
-                  </a:lnTo>
-                  <a:lnTo>
-                    <a:pt x="6804139" y="525890"/>
-                  </a:lnTo>
-                  <a:lnTo>
-                    <a:pt x="6732517" y="514194"/>
-                  </a:lnTo>
-                  <a:lnTo>
-                    <a:pt x="6660894" y="502046"/>
-                  </a:lnTo>
-                  <a:lnTo>
-                    <a:pt x="6589272" y="489429"/>
-                  </a:lnTo>
-                  <a:lnTo>
-                    <a:pt x="6517649" y="476324"/>
-                  </a:lnTo>
-                  <a:lnTo>
-                    <a:pt x="6446027" y="462712"/>
-                  </a:lnTo>
-                  <a:lnTo>
-                    <a:pt x="6374404" y="448575"/>
-                  </a:lnTo>
-                  <a:lnTo>
-                    <a:pt x="6302782" y="433891"/>
-                  </a:lnTo>
-                  <a:lnTo>
-                    <a:pt x="6231159" y="418639"/>
-                  </a:lnTo>
-                  <a:lnTo>
-                    <a:pt x="6159537" y="402798"/>
-                  </a:lnTo>
-                  <a:lnTo>
-                    <a:pt x="6087914" y="386345"/>
-                  </a:lnTo>
-                  <a:lnTo>
-                    <a:pt x="6016292" y="369256"/>
-                  </a:lnTo>
-                  <a:lnTo>
-                    <a:pt x="5944669" y="351506"/>
-                  </a:lnTo>
-                  <a:lnTo>
-                    <a:pt x="5873047" y="333071"/>
-                  </a:lnTo>
-                  <a:lnTo>
-                    <a:pt x="5801424" y="313923"/>
-                  </a:lnTo>
-                  <a:lnTo>
-                    <a:pt x="5729802" y="294034"/>
-                  </a:lnTo>
-                  <a:lnTo>
-                    <a:pt x="5658179" y="273378"/>
-                  </a:lnTo>
-                  <a:lnTo>
-                    <a:pt x="5586557" y="251923"/>
-                  </a:lnTo>
-                  <a:lnTo>
-                    <a:pt x="5514934" y="229638"/>
-                  </a:lnTo>
-                  <a:lnTo>
-                    <a:pt x="5443311" y="206493"/>
-                  </a:lnTo>
-                  <a:lnTo>
-                    <a:pt x="5371689" y="182453"/>
-                  </a:lnTo>
-                  <a:lnTo>
-                    <a:pt x="5300066" y="157483"/>
-                  </a:lnTo>
-                  <a:lnTo>
-                    <a:pt x="5228444" y="131549"/>
-                  </a:lnTo>
-                  <a:lnTo>
-                    <a:pt x="5156821" y="104613"/>
-                  </a:lnTo>
-                  <a:lnTo>
-                    <a:pt x="5085199" y="76635"/>
-                  </a:lnTo>
-                  <a:lnTo>
-                    <a:pt x="5013576" y="47576"/>
-                  </a:lnTo>
-                  <a:lnTo>
-                    <a:pt x="4941954" y="17394"/>
+                    <a:pt x="7019007" y="556237"/>
+                  </a:lnTo>
+                  <a:lnTo>
+                    <a:pt x="6947385" y="545797"/>
+                  </a:lnTo>
+                  <a:lnTo>
+                    <a:pt x="6875762" y="534953"/>
+                  </a:lnTo>
+                  <a:lnTo>
+                    <a:pt x="6804139" y="523692"/>
+                  </a:lnTo>
+                  <a:lnTo>
+                    <a:pt x="6732517" y="511996"/>
+                  </a:lnTo>
+                  <a:lnTo>
+                    <a:pt x="6660894" y="499850"/>
+                  </a:lnTo>
+                  <a:lnTo>
+                    <a:pt x="6589272" y="487235"/>
+                  </a:lnTo>
+                  <a:lnTo>
+                    <a:pt x="6517649" y="474133"/>
+                  </a:lnTo>
+                  <a:lnTo>
+                    <a:pt x="6446027" y="460527"/>
+                  </a:lnTo>
+                  <a:lnTo>
+                    <a:pt x="6374404" y="446395"/>
+                  </a:lnTo>
+                  <a:lnTo>
+                    <a:pt x="6302782" y="431719"/>
+                  </a:lnTo>
+                  <a:lnTo>
+                    <a:pt x="6231159" y="416477"/>
+                  </a:lnTo>
+                  <a:lnTo>
+                    <a:pt x="6159537" y="400647"/>
+                  </a:lnTo>
+                  <a:lnTo>
+                    <a:pt x="6087914" y="384207"/>
+                  </a:lnTo>
+                  <a:lnTo>
+                    <a:pt x="6016292" y="367133"/>
+                  </a:lnTo>
+                  <a:lnTo>
+                    <a:pt x="5944669" y="349400"/>
+                  </a:lnTo>
+                  <a:lnTo>
+                    <a:pt x="5873047" y="330984"/>
+                  </a:lnTo>
+                  <a:lnTo>
+                    <a:pt x="5801424" y="311857"/>
+                  </a:lnTo>
+                  <a:lnTo>
+                    <a:pt x="5729802" y="291993"/>
+                  </a:lnTo>
+                  <a:lnTo>
+                    <a:pt x="5658179" y="271363"/>
+                  </a:lnTo>
+                  <a:lnTo>
+                    <a:pt x="5586557" y="249938"/>
+                  </a:lnTo>
+                  <a:lnTo>
+                    <a:pt x="5514934" y="227686"/>
+                  </a:lnTo>
+                  <a:lnTo>
+                    <a:pt x="5443311" y="204576"/>
+                  </a:lnTo>
+                  <a:lnTo>
+                    <a:pt x="5371689" y="180575"/>
+                  </a:lnTo>
+                  <a:lnTo>
+                    <a:pt x="5300066" y="155649"/>
+                  </a:lnTo>
+                  <a:lnTo>
+                    <a:pt x="5228444" y="129761"/>
+                  </a:lnTo>
+                  <a:lnTo>
+                    <a:pt x="5156821" y="102876"/>
+                  </a:lnTo>
+                  <a:lnTo>
+                    <a:pt x="5085199" y="74953"/>
+                  </a:lnTo>
+                  <a:lnTo>
+                    <a:pt x="5013576" y="45954"/>
+                  </a:lnTo>
+                  <a:lnTo>
+                    <a:pt x="4941954" y="15836"/>
                   </a:lnTo>
                   <a:lnTo>
                     <a:pt x="4870331" y="0"/>
                   </a:lnTo>
                   <a:lnTo>
-                    <a:pt x="4798709" y="2307"/>
-                  </a:lnTo>
-                  <a:lnTo>
-                    <a:pt x="4727086" y="4608"/>
-                  </a:lnTo>
-                  <a:lnTo>
-                    <a:pt x="4655464" y="6902"/>
-                  </a:lnTo>
-                  <a:lnTo>
-                    <a:pt x="4583841" y="9190"/>
-                  </a:lnTo>
-                  <a:lnTo>
-                    <a:pt x="4512219" y="11472"/>
-                  </a:lnTo>
-                  <a:lnTo>
-                    <a:pt x="4440596" y="13747"/>
-                  </a:lnTo>
-                  <a:lnTo>
-                    <a:pt x="4368974" y="16016"/>
-                  </a:lnTo>
-                  <a:lnTo>
-                    <a:pt x="4297351" y="18279"/>
-                  </a:lnTo>
-                  <a:lnTo>
-                    <a:pt x="4225729" y="20535"/>
-                  </a:lnTo>
-                  <a:lnTo>
-                    <a:pt x="4154106" y="22786"/>
-                  </a:lnTo>
-                  <a:lnTo>
-                    <a:pt x="4082483" y="25029"/>
-                  </a:lnTo>
-                  <a:lnTo>
-                    <a:pt x="4010861" y="27267"/>
-                  </a:lnTo>
-                  <a:lnTo>
-                    <a:pt x="3939238" y="29498"/>
-                  </a:lnTo>
-                  <a:lnTo>
-                    <a:pt x="3867616" y="31724"/>
-                  </a:lnTo>
-                  <a:lnTo>
-                    <a:pt x="3795993" y="33943"/>
-                  </a:lnTo>
-                  <a:lnTo>
-                    <a:pt x="3724371" y="36155"/>
-                  </a:lnTo>
-                  <a:lnTo>
-                    <a:pt x="3652748" y="38362"/>
-                  </a:lnTo>
-                  <a:lnTo>
-                    <a:pt x="3581126" y="40562"/>
-                  </a:lnTo>
-                  <a:lnTo>
-                    <a:pt x="3509503" y="42757"/>
-                  </a:lnTo>
-                  <a:lnTo>
-                    <a:pt x="3437881" y="44945"/>
-                  </a:lnTo>
-                  <a:lnTo>
-                    <a:pt x="3366258" y="47127"/>
-                  </a:lnTo>
-                  <a:lnTo>
-                    <a:pt x="3294636" y="49303"/>
-                  </a:lnTo>
-                  <a:lnTo>
-                    <a:pt x="3223013" y="51473"/>
-                  </a:lnTo>
-                  <a:lnTo>
-                    <a:pt x="3151391" y="53637"/>
-                  </a:lnTo>
-                  <a:lnTo>
-                    <a:pt x="3079768" y="55795"/>
-                  </a:lnTo>
-                  <a:lnTo>
-                    <a:pt x="3008146" y="57947"/>
-                  </a:lnTo>
-                  <a:lnTo>
-                    <a:pt x="2936523" y="60093"/>
-                  </a:lnTo>
-                  <a:lnTo>
-                    <a:pt x="2864901" y="62233"/>
-                  </a:lnTo>
-                  <a:lnTo>
-                    <a:pt x="2793278" y="64367"/>
-                  </a:lnTo>
-                  <a:lnTo>
-                    <a:pt x="2721655" y="66495"/>
-                  </a:lnTo>
-                  <a:lnTo>
-                    <a:pt x="2650033" y="68617"/>
-                  </a:lnTo>
-                  <a:lnTo>
-                    <a:pt x="2578410" y="70733"/>
-                  </a:lnTo>
-                  <a:lnTo>
-                    <a:pt x="2506788" y="72844"/>
-                  </a:lnTo>
-                  <a:lnTo>
-                    <a:pt x="2435165" y="74948"/>
-                  </a:lnTo>
-                  <a:lnTo>
-                    <a:pt x="2363543" y="77047"/>
-                  </a:lnTo>
-                  <a:lnTo>
-                    <a:pt x="2291920" y="79139"/>
-                  </a:lnTo>
-                  <a:lnTo>
-                    <a:pt x="2220298" y="81226"/>
-                  </a:lnTo>
-                  <a:lnTo>
-                    <a:pt x="2148675" y="83307"/>
-                  </a:lnTo>
-                  <a:lnTo>
-                    <a:pt x="2077053" y="85383"/>
-                  </a:lnTo>
-                  <a:lnTo>
-                    <a:pt x="2005430" y="87452"/>
-                  </a:lnTo>
-                  <a:lnTo>
-                    <a:pt x="1933808" y="89516"/>
-                  </a:lnTo>
-                  <a:lnTo>
-                    <a:pt x="1862185" y="91574"/>
-                  </a:lnTo>
-                  <a:lnTo>
-                    <a:pt x="1790563" y="93626"/>
-                  </a:lnTo>
-                  <a:lnTo>
-                    <a:pt x="1718940" y="95673"/>
-                  </a:lnTo>
-                  <a:lnTo>
-                    <a:pt x="1647318" y="97714"/>
-                  </a:lnTo>
-                  <a:lnTo>
-                    <a:pt x="1575695" y="99749"/>
-                  </a:lnTo>
-                  <a:lnTo>
-                    <a:pt x="1504073" y="101778"/>
-                  </a:lnTo>
-                  <a:lnTo>
-                    <a:pt x="1432450" y="103802"/>
-                  </a:lnTo>
-                  <a:lnTo>
-                    <a:pt x="1360827" y="105820"/>
-                  </a:lnTo>
-                  <a:lnTo>
-                    <a:pt x="1289205" y="107833"/>
-                  </a:lnTo>
-                  <a:lnTo>
-                    <a:pt x="1217582" y="109840"/>
-                  </a:lnTo>
-                  <a:lnTo>
-                    <a:pt x="1145960" y="111842"/>
-                  </a:lnTo>
-                  <a:lnTo>
-                    <a:pt x="1074337" y="113837"/>
-                  </a:lnTo>
-                  <a:lnTo>
-                    <a:pt x="1002715" y="115828"/>
-                  </a:lnTo>
-                  <a:lnTo>
-                    <a:pt x="931092" y="117812"/>
-                  </a:lnTo>
-                  <a:lnTo>
-                    <a:pt x="859470" y="119792"/>
-                  </a:lnTo>
-                  <a:lnTo>
-                    <a:pt x="787847" y="121765"/>
-                  </a:lnTo>
-                  <a:lnTo>
-                    <a:pt x="716225" y="123734"/>
-                  </a:lnTo>
-                  <a:lnTo>
-                    <a:pt x="644602" y="125696"/>
-                  </a:lnTo>
-                  <a:lnTo>
-                    <a:pt x="572980" y="127653"/>
-                  </a:lnTo>
-                  <a:lnTo>
-                    <a:pt x="501357" y="129605"/>
-                  </a:lnTo>
-                  <a:lnTo>
-                    <a:pt x="429735" y="131552"/>
-                  </a:lnTo>
-                  <a:lnTo>
-                    <a:pt x="358112" y="133493"/>
-                  </a:lnTo>
-                  <a:lnTo>
-                    <a:pt x="286490" y="135428"/>
-                  </a:lnTo>
-                  <a:lnTo>
-                    <a:pt x="214867" y="137358"/>
-                  </a:lnTo>
-                  <a:lnTo>
-                    <a:pt x="143245" y="139283"/>
-                  </a:lnTo>
-                  <a:lnTo>
-                    <a:pt x="71622" y="141203"/>
-                  </a:lnTo>
-                  <a:lnTo>
-                    <a:pt x="0" y="143117"/>
+                    <a:pt x="4798709" y="5979"/>
+                  </a:lnTo>
+                  <a:lnTo>
+                    <a:pt x="4727086" y="11916"/>
+                  </a:lnTo>
+                  <a:lnTo>
+                    <a:pt x="4655464" y="17810"/>
+                  </a:lnTo>
+                  <a:lnTo>
+                    <a:pt x="4583841" y="23661"/>
+                  </a:lnTo>
+                  <a:lnTo>
+                    <a:pt x="4512219" y="29470"/>
+                  </a:lnTo>
+                  <a:lnTo>
+                    <a:pt x="4440596" y="35237"/>
+                  </a:lnTo>
+                  <a:lnTo>
+                    <a:pt x="4368974" y="40962"/>
+                  </a:lnTo>
+                  <a:lnTo>
+                    <a:pt x="4297351" y="46646"/>
+                  </a:lnTo>
+                  <a:lnTo>
+                    <a:pt x="4225729" y="52288"/>
+                  </a:lnTo>
+                  <a:lnTo>
+                    <a:pt x="4154106" y="57890"/>
+                  </a:lnTo>
+                  <a:lnTo>
+                    <a:pt x="4082483" y="63452"/>
+                  </a:lnTo>
+                  <a:lnTo>
+                    <a:pt x="4010861" y="68973"/>
+                  </a:lnTo>
+                  <a:lnTo>
+                    <a:pt x="3939238" y="74454"/>
+                  </a:lnTo>
+                  <a:lnTo>
+                    <a:pt x="3867616" y="79895"/>
+                  </a:lnTo>
+                  <a:lnTo>
+                    <a:pt x="3795993" y="85298"/>
+                  </a:lnTo>
+                  <a:lnTo>
+                    <a:pt x="3724371" y="90661"/>
+                  </a:lnTo>
+                  <a:lnTo>
+                    <a:pt x="3652748" y="95985"/>
+                  </a:lnTo>
+                  <a:lnTo>
+                    <a:pt x="3581126" y="101271"/>
+                  </a:lnTo>
+                  <a:lnTo>
+                    <a:pt x="3509503" y="106519"/>
+                  </a:lnTo>
+                  <a:lnTo>
+                    <a:pt x="3437881" y="111729"/>
+                  </a:lnTo>
+                  <a:lnTo>
+                    <a:pt x="3366258" y="116901"/>
+                  </a:lnTo>
+                  <a:lnTo>
+                    <a:pt x="3294636" y="122035"/>
+                  </a:lnTo>
+                  <a:lnTo>
+                    <a:pt x="3223013" y="127133"/>
+                  </a:lnTo>
+                  <a:lnTo>
+                    <a:pt x="3151391" y="132193"/>
+                  </a:lnTo>
+                  <a:lnTo>
+                    <a:pt x="3079768" y="137217"/>
+                  </a:lnTo>
+                  <a:lnTo>
+                    <a:pt x="3008146" y="142205"/>
+                  </a:lnTo>
+                  <a:lnTo>
+                    <a:pt x="2936523" y="147157"/>
+                  </a:lnTo>
+                  <a:lnTo>
+                    <a:pt x="2864901" y="152073"/>
+                  </a:lnTo>
+                  <a:lnTo>
+                    <a:pt x="2793278" y="156953"/>
+                  </a:lnTo>
+                  <a:lnTo>
+                    <a:pt x="2721655" y="161798"/>
+                  </a:lnTo>
+                  <a:lnTo>
+                    <a:pt x="2650033" y="166608"/>
+                  </a:lnTo>
+                  <a:lnTo>
+                    <a:pt x="2578410" y="171383"/>
+                  </a:lnTo>
+                  <a:lnTo>
+                    <a:pt x="2506788" y="176124"/>
+                  </a:lnTo>
+                  <a:lnTo>
+                    <a:pt x="2435165" y="180830"/>
+                  </a:lnTo>
+                  <a:lnTo>
+                    <a:pt x="2363543" y="185503"/>
+                  </a:lnTo>
+                  <a:lnTo>
+                    <a:pt x="2291920" y="190141"/>
+                  </a:lnTo>
+                  <a:lnTo>
+                    <a:pt x="2220298" y="194746"/>
+                  </a:lnTo>
+                  <a:lnTo>
+                    <a:pt x="2148675" y="199318"/>
+                  </a:lnTo>
+                  <a:lnTo>
+                    <a:pt x="2077053" y="203857"/>
+                  </a:lnTo>
+                  <a:lnTo>
+                    <a:pt x="2005430" y="208363"/>
+                  </a:lnTo>
+                  <a:lnTo>
+                    <a:pt x="1933808" y="212836"/>
+                  </a:lnTo>
+                  <a:lnTo>
+                    <a:pt x="1862185" y="217277"/>
+                  </a:lnTo>
+                  <a:lnTo>
+                    <a:pt x="1790563" y="221686"/>
+                  </a:lnTo>
+                  <a:lnTo>
+                    <a:pt x="1718940" y="226063"/>
+                  </a:lnTo>
+                  <a:lnTo>
+                    <a:pt x="1647318" y="230408"/>
+                  </a:lnTo>
+                  <a:lnTo>
+                    <a:pt x="1575695" y="234722"/>
+                  </a:lnTo>
+                  <a:lnTo>
+                    <a:pt x="1504073" y="239005"/>
+                  </a:lnTo>
+                  <a:lnTo>
+                    <a:pt x="1432450" y="243256"/>
+                  </a:lnTo>
+                  <a:lnTo>
+                    <a:pt x="1360827" y="247477"/>
+                  </a:lnTo>
+                  <a:lnTo>
+                    <a:pt x="1289205" y="251668"/>
+                  </a:lnTo>
+                  <a:lnTo>
+                    <a:pt x="1217582" y="255828"/>
+                  </a:lnTo>
+                  <a:lnTo>
+                    <a:pt x="1145960" y="259958"/>
+                  </a:lnTo>
+                  <a:lnTo>
+                    <a:pt x="1074337" y="264058"/>
+                  </a:lnTo>
+                  <a:lnTo>
+                    <a:pt x="1002715" y="268129"/>
+                  </a:lnTo>
+                  <a:lnTo>
+                    <a:pt x="931092" y="272170"/>
+                  </a:lnTo>
+                  <a:lnTo>
+                    <a:pt x="859470" y="276182"/>
+                  </a:lnTo>
+                  <a:lnTo>
+                    <a:pt x="787847" y="280165"/>
+                  </a:lnTo>
+                  <a:lnTo>
+                    <a:pt x="716225" y="284119"/>
+                  </a:lnTo>
+                  <a:lnTo>
+                    <a:pt x="644602" y="288044"/>
+                  </a:lnTo>
+                  <a:lnTo>
+                    <a:pt x="572980" y="291941"/>
+                  </a:lnTo>
+                  <a:lnTo>
+                    <a:pt x="501357" y="295810"/>
+                  </a:lnTo>
+                  <a:lnTo>
+                    <a:pt x="429735" y="299651"/>
+                  </a:lnTo>
+                  <a:lnTo>
+                    <a:pt x="358112" y="303465"/>
+                  </a:lnTo>
+                  <a:lnTo>
+                    <a:pt x="286490" y="307250"/>
+                  </a:lnTo>
+                  <a:lnTo>
+                    <a:pt x="214867" y="311008"/>
+                  </a:lnTo>
+                  <a:lnTo>
+                    <a:pt x="143245" y="314739"/>
+                  </a:lnTo>
+                  <a:lnTo>
+                    <a:pt x="71622" y="318444"/>
+                  </a:lnTo>
+                  <a:lnTo>
+                    <a:pt x="0" y="322121"/>
                   </a:lnTo>
                 </a:path>
               </a:pathLst>
@@ -4103,312 +4103,312 @@
           </p:nvSpPr>
           <p:spPr>
             <a:xfrm>
-              <a:off x="1172049" y="2798719"/>
-              <a:ext cx="7090630" cy="2273869"/>
+              <a:off x="1172049" y="3196535"/>
+              <a:ext cx="7090630" cy="1841101"/>
             </a:xfrm>
             <a:custGeom>
               <a:avLst/>
               <a:pathLst>
-                <a:path w="7090630" h="2273869">
+                <a:path w="7090630" h="1841101">
                   <a:moveTo>
                     <a:pt x="0" y="0"/>
                   </a:moveTo>
                   <a:lnTo>
-                    <a:pt x="71622" y="48032"/>
-                  </a:lnTo>
-                  <a:lnTo>
-                    <a:pt x="143245" y="95228"/>
-                  </a:lnTo>
-                  <a:lnTo>
-                    <a:pt x="214867" y="141602"/>
-                  </a:lnTo>
-                  <a:lnTo>
-                    <a:pt x="286490" y="187169"/>
-                  </a:lnTo>
-                  <a:lnTo>
-                    <a:pt x="358112" y="231942"/>
-                  </a:lnTo>
-                  <a:lnTo>
-                    <a:pt x="429735" y="275936"/>
-                  </a:lnTo>
-                  <a:lnTo>
-                    <a:pt x="501357" y="319164"/>
-                  </a:lnTo>
-                  <a:lnTo>
-                    <a:pt x="572980" y="361639"/>
-                  </a:lnTo>
-                  <a:lnTo>
-                    <a:pt x="644602" y="403374"/>
-                  </a:lnTo>
-                  <a:lnTo>
-                    <a:pt x="716225" y="444383"/>
-                  </a:lnTo>
-                  <a:lnTo>
-                    <a:pt x="787847" y="484678"/>
-                  </a:lnTo>
-                  <a:lnTo>
-                    <a:pt x="859470" y="524271"/>
-                  </a:lnTo>
-                  <a:lnTo>
-                    <a:pt x="931092" y="563175"/>
-                  </a:lnTo>
-                  <a:lnTo>
-                    <a:pt x="1002715" y="601401"/>
-                  </a:lnTo>
-                  <a:lnTo>
-                    <a:pt x="1074337" y="638961"/>
-                  </a:lnTo>
-                  <a:lnTo>
-                    <a:pt x="1145960" y="675868"/>
-                  </a:lnTo>
-                  <a:lnTo>
-                    <a:pt x="1217582" y="712132"/>
-                  </a:lnTo>
-                  <a:lnTo>
-                    <a:pt x="1289205" y="747765"/>
-                  </a:lnTo>
-                  <a:lnTo>
-                    <a:pt x="1360827" y="782777"/>
-                  </a:lnTo>
-                  <a:lnTo>
-                    <a:pt x="1432450" y="817179"/>
-                  </a:lnTo>
-                  <a:lnTo>
-                    <a:pt x="1504073" y="850983"/>
-                  </a:lnTo>
-                  <a:lnTo>
-                    <a:pt x="1575695" y="884197"/>
-                  </a:lnTo>
-                  <a:lnTo>
-                    <a:pt x="1647318" y="916834"/>
-                  </a:lnTo>
-                  <a:lnTo>
-                    <a:pt x="1718940" y="948902"/>
-                  </a:lnTo>
-                  <a:lnTo>
-                    <a:pt x="1790563" y="980412"/>
-                  </a:lnTo>
-                  <a:lnTo>
-                    <a:pt x="1862185" y="1011373"/>
-                  </a:lnTo>
-                  <a:lnTo>
-                    <a:pt x="1933808" y="1041795"/>
-                  </a:lnTo>
-                  <a:lnTo>
-                    <a:pt x="2005430" y="1071687"/>
-                  </a:lnTo>
-                  <a:lnTo>
-                    <a:pt x="2077053" y="1101059"/>
-                  </a:lnTo>
-                  <a:lnTo>
-                    <a:pt x="2148675" y="1129920"/>
-                  </a:lnTo>
-                  <a:lnTo>
-                    <a:pt x="2220298" y="1158278"/>
-                  </a:lnTo>
-                  <a:lnTo>
-                    <a:pt x="2291920" y="1186142"/>
-                  </a:lnTo>
-                  <a:lnTo>
-                    <a:pt x="2363543" y="1213521"/>
-                  </a:lnTo>
-                  <a:lnTo>
-                    <a:pt x="2435165" y="1240423"/>
-                  </a:lnTo>
-                  <a:lnTo>
-                    <a:pt x="2506788" y="1266857"/>
-                  </a:lnTo>
-                  <a:lnTo>
-                    <a:pt x="2578410" y="1292830"/>
-                  </a:lnTo>
-                  <a:lnTo>
-                    <a:pt x="2650033" y="1318351"/>
-                  </a:lnTo>
-                  <a:lnTo>
-                    <a:pt x="2721655" y="1343428"/>
-                  </a:lnTo>
-                  <a:lnTo>
-                    <a:pt x="2793278" y="1368068"/>
-                  </a:lnTo>
-                  <a:lnTo>
-                    <a:pt x="2864901" y="1392280"/>
-                  </a:lnTo>
-                  <a:lnTo>
-                    <a:pt x="2936523" y="1416069"/>
-                  </a:lnTo>
-                  <a:lnTo>
-                    <a:pt x="3008146" y="1439445"/>
-                  </a:lnTo>
-                  <a:lnTo>
-                    <a:pt x="3079768" y="1462413"/>
-                  </a:lnTo>
-                  <a:lnTo>
-                    <a:pt x="3151391" y="1484981"/>
-                  </a:lnTo>
-                  <a:lnTo>
-                    <a:pt x="3223013" y="1507157"/>
-                  </a:lnTo>
-                  <a:lnTo>
-                    <a:pt x="3294636" y="1528946"/>
-                  </a:lnTo>
-                  <a:lnTo>
-                    <a:pt x="3366258" y="1550356"/>
-                  </a:lnTo>
-                  <a:lnTo>
-                    <a:pt x="3437881" y="1571393"/>
-                  </a:lnTo>
-                  <a:lnTo>
-                    <a:pt x="3509503" y="1592064"/>
-                  </a:lnTo>
-                  <a:lnTo>
-                    <a:pt x="3581126" y="1612375"/>
-                  </a:lnTo>
-                  <a:lnTo>
-                    <a:pt x="3652748" y="1632332"/>
-                  </a:lnTo>
-                  <a:lnTo>
-                    <a:pt x="3724371" y="1651942"/>
-                  </a:lnTo>
-                  <a:lnTo>
-                    <a:pt x="3795993" y="1671210"/>
-                  </a:lnTo>
-                  <a:lnTo>
-                    <a:pt x="3867616" y="1690143"/>
-                  </a:lnTo>
-                  <a:lnTo>
-                    <a:pt x="3939238" y="1708746"/>
-                  </a:lnTo>
-                  <a:lnTo>
-                    <a:pt x="4010861" y="1727025"/>
-                  </a:lnTo>
-                  <a:lnTo>
-                    <a:pt x="4082483" y="1744986"/>
-                  </a:lnTo>
-                  <a:lnTo>
-                    <a:pt x="4154106" y="1762634"/>
-                  </a:lnTo>
-                  <a:lnTo>
-                    <a:pt x="4225729" y="1779975"/>
-                  </a:lnTo>
-                  <a:lnTo>
-                    <a:pt x="4297351" y="1797014"/>
-                  </a:lnTo>
-                  <a:lnTo>
-                    <a:pt x="4368974" y="1813756"/>
-                  </a:lnTo>
-                  <a:lnTo>
-                    <a:pt x="4440596" y="1830207"/>
-                  </a:lnTo>
-                  <a:lnTo>
-                    <a:pt x="4512219" y="1846371"/>
-                  </a:lnTo>
-                  <a:lnTo>
-                    <a:pt x="4583841" y="1862254"/>
-                  </a:lnTo>
-                  <a:lnTo>
-                    <a:pt x="4655464" y="1877860"/>
-                  </a:lnTo>
-                  <a:lnTo>
-                    <a:pt x="4727086" y="1893195"/>
-                  </a:lnTo>
-                  <a:lnTo>
-                    <a:pt x="4798709" y="1908262"/>
-                  </a:lnTo>
-                  <a:lnTo>
-                    <a:pt x="4870331" y="1923067"/>
-                  </a:lnTo>
-                  <a:lnTo>
-                    <a:pt x="4941954" y="1937615"/>
-                  </a:lnTo>
-                  <a:lnTo>
-                    <a:pt x="5013576" y="1951909"/>
-                  </a:lnTo>
-                  <a:lnTo>
-                    <a:pt x="5085199" y="1965954"/>
-                  </a:lnTo>
-                  <a:lnTo>
-                    <a:pt x="5156821" y="1979754"/>
-                  </a:lnTo>
-                  <a:lnTo>
-                    <a:pt x="5228444" y="1993315"/>
-                  </a:lnTo>
-                  <a:lnTo>
-                    <a:pt x="5300066" y="2006639"/>
-                  </a:lnTo>
-                  <a:lnTo>
-                    <a:pt x="5371689" y="2019731"/>
-                  </a:lnTo>
-                  <a:lnTo>
-                    <a:pt x="5443311" y="2032595"/>
-                  </a:lnTo>
-                  <a:lnTo>
-                    <a:pt x="5514934" y="2045236"/>
-                  </a:lnTo>
-                  <a:lnTo>
-                    <a:pt x="5586557" y="2057656"/>
-                  </a:lnTo>
-                  <a:lnTo>
-                    <a:pt x="5658179" y="2069860"/>
-                  </a:lnTo>
-                  <a:lnTo>
-                    <a:pt x="5729802" y="2081851"/>
-                  </a:lnTo>
-                  <a:lnTo>
-                    <a:pt x="5801424" y="2093633"/>
-                  </a:lnTo>
-                  <a:lnTo>
-                    <a:pt x="5873047" y="2105211"/>
-                  </a:lnTo>
-                  <a:lnTo>
-                    <a:pt x="5944669" y="2116587"/>
-                  </a:lnTo>
-                  <a:lnTo>
-                    <a:pt x="6016292" y="2127764"/>
-                  </a:lnTo>
-                  <a:lnTo>
-                    <a:pt x="6087914" y="2138747"/>
-                  </a:lnTo>
-                  <a:lnTo>
-                    <a:pt x="6159537" y="2149539"/>
-                  </a:lnTo>
-                  <a:lnTo>
-                    <a:pt x="6231159" y="2160143"/>
-                  </a:lnTo>
-                  <a:lnTo>
-                    <a:pt x="6302782" y="2170563"/>
-                  </a:lnTo>
-                  <a:lnTo>
-                    <a:pt x="6374404" y="2180800"/>
-                  </a:lnTo>
-                  <a:lnTo>
-                    <a:pt x="6446027" y="2190860"/>
-                  </a:lnTo>
-                  <a:lnTo>
-                    <a:pt x="6517649" y="2200745"/>
-                  </a:lnTo>
-                  <a:lnTo>
-                    <a:pt x="6589272" y="2210457"/>
-                  </a:lnTo>
-                  <a:lnTo>
-                    <a:pt x="6660894" y="2220000"/>
-                  </a:lnTo>
-                  <a:lnTo>
-                    <a:pt x="6732517" y="2229377"/>
-                  </a:lnTo>
-                  <a:lnTo>
-                    <a:pt x="6804139" y="2238591"/>
-                  </a:lnTo>
-                  <a:lnTo>
-                    <a:pt x="6875762" y="2247644"/>
-                  </a:lnTo>
-                  <a:lnTo>
-                    <a:pt x="6947385" y="2256540"/>
-                  </a:lnTo>
-                  <a:lnTo>
-                    <a:pt x="7019007" y="2265281"/>
-                  </a:lnTo>
-                  <a:lnTo>
-                    <a:pt x="7090630" y="2273869"/>
+                    <a:pt x="71622" y="35819"/>
+                  </a:lnTo>
+                  <a:lnTo>
+                    <a:pt x="143245" y="71094"/>
+                  </a:lnTo>
+                  <a:lnTo>
+                    <a:pt x="214867" y="105834"/>
+                  </a:lnTo>
+                  <a:lnTo>
+                    <a:pt x="286490" y="140047"/>
+                  </a:lnTo>
+                  <a:lnTo>
+                    <a:pt x="358112" y="173742"/>
+                  </a:lnTo>
+                  <a:lnTo>
+                    <a:pt x="429735" y="206924"/>
+                  </a:lnTo>
+                  <a:lnTo>
+                    <a:pt x="501357" y="239604"/>
+                  </a:lnTo>
+                  <a:lnTo>
+                    <a:pt x="572980" y="271787"/>
+                  </a:lnTo>
+                  <a:lnTo>
+                    <a:pt x="644602" y="303482"/>
+                  </a:lnTo>
+                  <a:lnTo>
+                    <a:pt x="716225" y="334697"/>
+                  </a:lnTo>
+                  <a:lnTo>
+                    <a:pt x="787847" y="365437"/>
+                  </a:lnTo>
+                  <a:lnTo>
+                    <a:pt x="859470" y="395712"/>
+                  </a:lnTo>
+                  <a:lnTo>
+                    <a:pt x="931092" y="425526"/>
+                  </a:lnTo>
+                  <a:lnTo>
+                    <a:pt x="1002715" y="454889"/>
+                  </a:lnTo>
+                  <a:lnTo>
+                    <a:pt x="1074337" y="483806"/>
+                  </a:lnTo>
+                  <a:lnTo>
+                    <a:pt x="1145960" y="512284"/>
+                  </a:lnTo>
+                  <a:lnTo>
+                    <a:pt x="1217582" y="540330"/>
+                  </a:lnTo>
+                  <a:lnTo>
+                    <a:pt x="1289205" y="567951"/>
+                  </a:lnTo>
+                  <a:lnTo>
+                    <a:pt x="1360827" y="595152"/>
+                  </a:lnTo>
+                  <a:lnTo>
+                    <a:pt x="1432450" y="621941"/>
+                  </a:lnTo>
+                  <a:lnTo>
+                    <a:pt x="1504073" y="648323"/>
+                  </a:lnTo>
+                  <a:lnTo>
+                    <a:pt x="1575695" y="674306"/>
+                  </a:lnTo>
+                  <a:lnTo>
+                    <a:pt x="1647318" y="699893"/>
+                  </a:lnTo>
+                  <a:lnTo>
+                    <a:pt x="1718940" y="725093"/>
+                  </a:lnTo>
+                  <a:lnTo>
+                    <a:pt x="1790563" y="749910"/>
+                  </a:lnTo>
+                  <a:lnTo>
+                    <a:pt x="1862185" y="774351"/>
+                  </a:lnTo>
+                  <a:lnTo>
+                    <a:pt x="1933808" y="798421"/>
+                  </a:lnTo>
+                  <a:lnTo>
+                    <a:pt x="2005430" y="822125"/>
+                  </a:lnTo>
+                  <a:lnTo>
+                    <a:pt x="2077053" y="845470"/>
+                  </a:lnTo>
+                  <a:lnTo>
+                    <a:pt x="2148675" y="868461"/>
+                  </a:lnTo>
+                  <a:lnTo>
+                    <a:pt x="2220298" y="891103"/>
+                  </a:lnTo>
+                  <a:lnTo>
+                    <a:pt x="2291920" y="913401"/>
+                  </a:lnTo>
+                  <a:lnTo>
+                    <a:pt x="2363543" y="935361"/>
+                  </a:lnTo>
+                  <a:lnTo>
+                    <a:pt x="2435165" y="956988"/>
+                  </a:lnTo>
+                  <a:lnTo>
+                    <a:pt x="2506788" y="978286"/>
+                  </a:lnTo>
+                  <a:lnTo>
+                    <a:pt x="2578410" y="999262"/>
+                  </a:lnTo>
+                  <a:lnTo>
+                    <a:pt x="2650033" y="1019919"/>
+                  </a:lnTo>
+                  <a:lnTo>
+                    <a:pt x="2721655" y="1040263"/>
+                  </a:lnTo>
+                  <a:lnTo>
+                    <a:pt x="2793278" y="1060298"/>
+                  </a:lnTo>
+                  <a:lnTo>
+                    <a:pt x="2864901" y="1080029"/>
+                  </a:lnTo>
+                  <a:lnTo>
+                    <a:pt x="2936523" y="1099461"/>
+                  </a:lnTo>
+                  <a:lnTo>
+                    <a:pt x="3008146" y="1118598"/>
+                  </a:lnTo>
+                  <a:lnTo>
+                    <a:pt x="3079768" y="1137445"/>
+                  </a:lnTo>
+                  <a:lnTo>
+                    <a:pt x="3151391" y="1156005"/>
+                  </a:lnTo>
+                  <a:lnTo>
+                    <a:pt x="3223013" y="1174284"/>
+                  </a:lnTo>
+                  <a:lnTo>
+                    <a:pt x="3294636" y="1192286"/>
+                  </a:lnTo>
+                  <a:lnTo>
+                    <a:pt x="3366258" y="1210014"/>
+                  </a:lnTo>
+                  <a:lnTo>
+                    <a:pt x="3437881" y="1227474"/>
+                  </a:lnTo>
+                  <a:lnTo>
+                    <a:pt x="3509503" y="1244668"/>
+                  </a:lnTo>
+                  <a:lnTo>
+                    <a:pt x="3581126" y="1261602"/>
+                  </a:lnTo>
+                  <a:lnTo>
+                    <a:pt x="3652748" y="1278279"/>
+                  </a:lnTo>
+                  <a:lnTo>
+                    <a:pt x="3724371" y="1294703"/>
+                  </a:lnTo>
+                  <a:lnTo>
+                    <a:pt x="3795993" y="1310877"/>
+                  </a:lnTo>
+                  <a:lnTo>
+                    <a:pt x="3867616" y="1326806"/>
+                  </a:lnTo>
+                  <a:lnTo>
+                    <a:pt x="3939238" y="1342494"/>
+                  </a:lnTo>
+                  <a:lnTo>
+                    <a:pt x="4010861" y="1357943"/>
+                  </a:lnTo>
+                  <a:lnTo>
+                    <a:pt x="4082483" y="1373158"/>
+                  </a:lnTo>
+                  <a:lnTo>
+                    <a:pt x="4154106" y="1388142"/>
+                  </a:lnTo>
+                  <a:lnTo>
+                    <a:pt x="4225729" y="1402899"/>
+                  </a:lnTo>
+                  <a:lnTo>
+                    <a:pt x="4297351" y="1417432"/>
+                  </a:lnTo>
+                  <a:lnTo>
+                    <a:pt x="4368974" y="1431744"/>
+                  </a:lnTo>
+                  <a:lnTo>
+                    <a:pt x="4440596" y="1445840"/>
+                  </a:lnTo>
+                  <a:lnTo>
+                    <a:pt x="4512219" y="1459721"/>
+                  </a:lnTo>
+                  <a:lnTo>
+                    <a:pt x="4583841" y="1473392"/>
+                  </a:lnTo>
+                  <a:lnTo>
+                    <a:pt x="4655464" y="1486855"/>
+                  </a:lnTo>
+                  <a:lnTo>
+                    <a:pt x="4727086" y="1500114"/>
+                  </a:lnTo>
+                  <a:lnTo>
+                    <a:pt x="4798709" y="1513172"/>
+                  </a:lnTo>
+                  <a:lnTo>
+                    <a:pt x="4870331" y="1526032"/>
+                  </a:lnTo>
+                  <a:lnTo>
+                    <a:pt x="4941954" y="1538696"/>
+                  </a:lnTo>
+                  <a:lnTo>
+                    <a:pt x="5013576" y="1551169"/>
+                  </a:lnTo>
+                  <a:lnTo>
+                    <a:pt x="5085199" y="1563452"/>
+                  </a:lnTo>
+                  <a:lnTo>
+                    <a:pt x="5156821" y="1575549"/>
+                  </a:lnTo>
+                  <a:lnTo>
+                    <a:pt x="5228444" y="1587462"/>
+                  </a:lnTo>
+                  <a:lnTo>
+                    <a:pt x="5300066" y="1599194"/>
+                  </a:lnTo>
+                  <a:lnTo>
+                    <a:pt x="5371689" y="1610749"/>
+                  </a:lnTo>
+                  <a:lnTo>
+                    <a:pt x="5443311" y="1622128"/>
+                  </a:lnTo>
+                  <a:lnTo>
+                    <a:pt x="5514934" y="1633335"/>
+                  </a:lnTo>
+                  <a:lnTo>
+                    <a:pt x="5586557" y="1644371"/>
+                  </a:lnTo>
+                  <a:lnTo>
+                    <a:pt x="5658179" y="1655240"/>
+                  </a:lnTo>
+                  <a:lnTo>
+                    <a:pt x="5729802" y="1665944"/>
+                  </a:lnTo>
+                  <a:lnTo>
+                    <a:pt x="5801424" y="1676486"/>
+                  </a:lnTo>
+                  <a:lnTo>
+                    <a:pt x="5873047" y="1686868"/>
+                  </a:lnTo>
+                  <a:lnTo>
+                    <a:pt x="5944669" y="1697092"/>
+                  </a:lnTo>
+                  <a:lnTo>
+                    <a:pt x="6016292" y="1707161"/>
+                  </a:lnTo>
+                  <a:lnTo>
+                    <a:pt x="6087914" y="1717077"/>
+                  </a:lnTo>
+                  <a:lnTo>
+                    <a:pt x="6159537" y="1726843"/>
+                  </a:lnTo>
+                  <a:lnTo>
+                    <a:pt x="6231159" y="1736461"/>
+                  </a:lnTo>
+                  <a:lnTo>
+                    <a:pt x="6302782" y="1745933"/>
+                  </a:lnTo>
+                  <a:lnTo>
+                    <a:pt x="6374404" y="1755261"/>
+                  </a:lnTo>
+                  <a:lnTo>
+                    <a:pt x="6446027" y="1764447"/>
+                  </a:lnTo>
+                  <a:lnTo>
+                    <a:pt x="6517649" y="1773494"/>
+                  </a:lnTo>
+                  <a:lnTo>
+                    <a:pt x="6589272" y="1782404"/>
+                  </a:lnTo>
+                  <a:lnTo>
+                    <a:pt x="6660894" y="1791179"/>
+                  </a:lnTo>
+                  <a:lnTo>
+                    <a:pt x="6732517" y="1799820"/>
+                  </a:lnTo>
+                  <a:lnTo>
+                    <a:pt x="6804139" y="1808331"/>
+                  </a:lnTo>
+                  <a:lnTo>
+                    <a:pt x="6875762" y="1816712"/>
+                  </a:lnTo>
+                  <a:lnTo>
+                    <a:pt x="6947385" y="1824966"/>
+                  </a:lnTo>
+                  <a:lnTo>
+                    <a:pt x="7019007" y="1833095"/>
+                  </a:lnTo>
+                  <a:lnTo>
+                    <a:pt x="7090630" y="1841101"/>
                   </a:lnTo>
                 </a:path>
               </a:pathLst>
@@ -5148,7 +5148,7 @@
                   <a:latin typeface="Helvetica"/>
                   <a:cs typeface="Helvetica"/>
                 </a:rPr>
-                <a:t>subHR per 1 mL/min: 0.98 (0.95-1.00)  |  per IQR (Δ = 18.2): 0.66 (0.41-1.07)  |  IQR: [-11.5, 6.7]</a:t>
+                <a:t>subHR per 1 mL/min: 0.98 (0.95-1.01)  |  per IQR (Δ = 18.2): 0.70 (0.41-1.19)  |  IQR: [-11.5, 6.7]</a:t>
               </a:r>
             </a:p>
           </p:txBody>

--- a/docs/plots/carbo/jx_carbo_linsubhr_egfrdisc_anemia2.pptx
+++ b/docs/plots/carbo/jx_carbo_linsubhr_egfrdisc_anemia2.pptx
@@ -3016,7 +3016,7 @@
                     <a:pt x="2220298" y="67762"/>
                   </a:lnTo>
                   <a:lnTo>
-                    <a:pt x="2291920" y="194594"/>
+                    <a:pt x="2291920" y="194593"/>
                   </a:lnTo>
                   <a:lnTo>
                     <a:pt x="2363543" y="316716"/>
@@ -3034,7 +3034,7 @@
                     <a:pt x="2650033" y="761515"/>
                   </a:lnTo>
                   <a:lnTo>
-                    <a:pt x="2721655" y="862589"/>
+                    <a:pt x="2721655" y="862588"/>
                   </a:lnTo>
                   <a:lnTo>
                     <a:pt x="2793278" y="959909"/>
@@ -3073,7 +3073,7 @@
                     <a:pt x="3581126" y="1819141"/>
                   </a:lnTo>
                   <a:lnTo>
-                    <a:pt x="3652748" y="1880946"/>
+                    <a:pt x="3652748" y="1880945"/>
                   </a:lnTo>
                   <a:lnTo>
                     <a:pt x="3724371" y="1940456"/>
@@ -3214,7 +3214,7 @@
                     <a:pt x="6947385" y="2463030"/>
                   </a:lnTo>
                   <a:lnTo>
-                    <a:pt x="7019007" y="2455595"/>
+                    <a:pt x="7019007" y="2455596"/>
                   </a:lnTo>
                   <a:lnTo>
                     <a:pt x="7090630" y="2448107"/>
@@ -3268,7 +3268,7 @@
                     <a:pt x="6016292" y="3023882"/>
                   </a:lnTo>
                   <a:lnTo>
-                    <a:pt x="5944669" y="3006149"/>
+                    <a:pt x="5944669" y="3006150"/>
                   </a:lnTo>
                   <a:lnTo>
                     <a:pt x="5873047" y="2987733"/>
@@ -3343,7 +3343,7 @@
                     <a:pt x="4225729" y="2709038"/>
                   </a:lnTo>
                   <a:lnTo>
-                    <a:pt x="4154106" y="2714640"/>
+                    <a:pt x="4154106" y="2714639"/>
                   </a:lnTo>
                   <a:lnTo>
                     <a:pt x="4082483" y="2720201"/>
@@ -3364,7 +3364,7 @@
                     <a:pt x="3724371" y="2747410"/>
                   </a:lnTo>
                   <a:lnTo>
-                    <a:pt x="3652748" y="2752735"/>
+                    <a:pt x="3652748" y="2752734"/>
                   </a:lnTo>
                   <a:lnTo>
                     <a:pt x="3581126" y="2758020"/>
@@ -3379,7 +3379,7 @@
                     <a:pt x="3366258" y="2773650"/>
                   </a:lnTo>
                   <a:lnTo>
-                    <a:pt x="3294636" y="2778785"/>
+                    <a:pt x="3294636" y="2778784"/>
                   </a:lnTo>
                   <a:lnTo>
                     <a:pt x="3223013" y="2783882"/>
@@ -3409,7 +3409,7 @@
                     <a:pt x="2650033" y="2823357"/>
                   </a:lnTo>
                   <a:lnTo>
-                    <a:pt x="2578410" y="2828133"/>
+                    <a:pt x="2578410" y="2828132"/>
                   </a:lnTo>
                   <a:lnTo>
                     <a:pt x="2506788" y="2832873"/>
@@ -3457,10 +3457,10 @@
                     <a:pt x="1504073" y="2895754"/>
                   </a:lnTo>
                   <a:lnTo>
-                    <a:pt x="1432450" y="2900006"/>
-                  </a:lnTo>
-                  <a:lnTo>
-                    <a:pt x="1360827" y="2904227"/>
+                    <a:pt x="1432450" y="2900005"/>
+                  </a:lnTo>
+                  <a:lnTo>
+                    <a:pt x="1360827" y="2904226"/>
                   </a:lnTo>
                   <a:lnTo>
                     <a:pt x="1289205" y="2908417"/>
@@ -3472,7 +3472,7 @@
                     <a:pt x="1145960" y="2916707"/>
                   </a:lnTo>
                   <a:lnTo>
-                    <a:pt x="1074337" y="2920808"/>
+                    <a:pt x="1074337" y="2920807"/>
                   </a:lnTo>
                   <a:lnTo>
                     <a:pt x="1002715" y="2924878"/>
@@ -3490,7 +3490,7 @@
                     <a:pt x="716225" y="2940868"/>
                   </a:lnTo>
                   <a:lnTo>
-                    <a:pt x="644602" y="2944794"/>
+                    <a:pt x="644602" y="2944793"/>
                   </a:lnTo>
                   <a:lnTo>
                     <a:pt x="572980" y="2948691"/>
@@ -3499,7 +3499,7 @@
                     <a:pt x="501357" y="2952560"/>
                   </a:lnTo>
                   <a:lnTo>
-                    <a:pt x="429735" y="2956401"/>
+                    <a:pt x="429735" y="2956400"/>
                   </a:lnTo>
                   <a:lnTo>
                     <a:pt x="358112" y="2960214"/>
@@ -3557,7 +3557,7 @@
                     <a:pt x="36845" y="67762"/>
                   </a:lnTo>
                   <a:lnTo>
-                    <a:pt x="108467" y="194594"/>
+                    <a:pt x="108467" y="194593"/>
                   </a:lnTo>
                   <a:lnTo>
                     <a:pt x="180090" y="316716"/>
@@ -3575,7 +3575,7 @@
                     <a:pt x="466580" y="761515"/>
                   </a:lnTo>
                   <a:lnTo>
-                    <a:pt x="538202" y="862589"/>
+                    <a:pt x="538202" y="862588"/>
                   </a:lnTo>
                   <a:lnTo>
                     <a:pt x="609825" y="959909"/>
@@ -3593,13 +3593,13 @@
                     <a:pt x="896315" y="1314374"/>
                   </a:lnTo>
                   <a:lnTo>
-                    <a:pt x="967938" y="1394920"/>
+                    <a:pt x="967937" y="1394920"/>
                   </a:lnTo>
                   <a:lnTo>
                     <a:pt x="1039560" y="1472476"/>
                   </a:lnTo>
                   <a:lnTo>
-                    <a:pt x="1111183" y="1547152"/>
+                    <a:pt x="1111182" y="1547152"/>
                   </a:lnTo>
                   <a:lnTo>
                     <a:pt x="1182805" y="1619056"/>
@@ -3614,7 +3614,7 @@
                     <a:pt x="1397673" y="1819141"/>
                   </a:lnTo>
                   <a:lnTo>
-                    <a:pt x="1469295" y="1880946"/>
+                    <a:pt x="1469295" y="1880945"/>
                   </a:lnTo>
                   <a:lnTo>
                     <a:pt x="1540918" y="1940456"/>
@@ -3650,13 +3650,13 @@
                     <a:pt x="2257143" y="2426613"/>
                   </a:lnTo>
                   <a:lnTo>
-                    <a:pt x="2328766" y="2465864"/>
+                    <a:pt x="2328765" y="2465864"/>
                   </a:lnTo>
                   <a:lnTo>
                     <a:pt x="2400388" y="2503656"/>
                   </a:lnTo>
                   <a:lnTo>
-                    <a:pt x="2472011" y="2540046"/>
+                    <a:pt x="2472010" y="2540046"/>
                   </a:lnTo>
                   <a:lnTo>
                     <a:pt x="2543633" y="2575084"/>
@@ -3707,13 +3707,13 @@
                     <a:pt x="3617971" y="2574928"/>
                   </a:lnTo>
                   <a:lnTo>
-                    <a:pt x="3689594" y="2568309"/>
+                    <a:pt x="3689593" y="2568309"/>
                   </a:lnTo>
                   <a:lnTo>
                     <a:pt x="3761216" y="2561641"/>
                   </a:lnTo>
                   <a:lnTo>
-                    <a:pt x="3832839" y="2554925"/>
+                    <a:pt x="3832838" y="2554925"/>
                   </a:lnTo>
                   <a:lnTo>
                     <a:pt x="3904461" y="2548160"/>
@@ -3755,7 +3755,7 @@
                     <a:pt x="4763931" y="2463030"/>
                   </a:lnTo>
                   <a:lnTo>
-                    <a:pt x="4835554" y="2455595"/>
+                    <a:pt x="4835554" y="2455596"/>
                   </a:lnTo>
                   <a:lnTo>
                     <a:pt x="4907176" y="2448107"/>
@@ -3816,7 +3816,7 @@
                     <a:pt x="6446027" y="460527"/>
                   </a:lnTo>
                   <a:lnTo>
-                    <a:pt x="6374404" y="446395"/>
+                    <a:pt x="6374404" y="446396"/>
                   </a:lnTo>
                   <a:lnTo>
                     <a:pt x="6302782" y="431719"/>
@@ -3939,10 +3939,10 @@
                     <a:pt x="3509503" y="106519"/>
                   </a:lnTo>
                   <a:lnTo>
-                    <a:pt x="3437881" y="111729"/>
-                  </a:lnTo>
-                  <a:lnTo>
-                    <a:pt x="3366258" y="116901"/>
+                    <a:pt x="3437881" y="111728"/>
+                  </a:lnTo>
+                  <a:lnTo>
+                    <a:pt x="3366258" y="116900"/>
                   </a:lnTo>
                   <a:lnTo>
                     <a:pt x="3294636" y="122035"/>
@@ -4020,7 +4020,7 @@
                     <a:pt x="1575695" y="234722"/>
                   </a:lnTo>
                   <a:lnTo>
-                    <a:pt x="1504073" y="239005"/>
+                    <a:pt x="1504073" y="239004"/>
                   </a:lnTo>
                   <a:lnTo>
                     <a:pt x="1432450" y="243256"/>
@@ -4068,7 +4068,7 @@
                     <a:pt x="429735" y="299651"/>
                   </a:lnTo>
                   <a:lnTo>
-                    <a:pt x="358112" y="303465"/>
+                    <a:pt x="358112" y="303464"/>
                   </a:lnTo>
                   <a:lnTo>
                     <a:pt x="286490" y="307250"/>
@@ -4080,7 +4080,7 @@
                     <a:pt x="143245" y="314739"/>
                   </a:lnTo>
                   <a:lnTo>
-                    <a:pt x="71622" y="318444"/>
+                    <a:pt x="71622" y="318443"/>
                   </a:lnTo>
                   <a:lnTo>
                     <a:pt x="0" y="322121"/>
@@ -4103,7 +4103,7 @@
           </p:nvSpPr>
           <p:spPr>
             <a:xfrm>
-              <a:off x="1172049" y="3196535"/>
+              <a:off x="1172049" y="3196534"/>
               <a:ext cx="7090630" cy="1841101"/>
             </a:xfrm>
             <a:custGeom>
@@ -4123,7 +4123,7 @@
                     <a:pt x="214867" y="105834"/>
                   </a:lnTo>
                   <a:lnTo>
-                    <a:pt x="286490" y="140047"/>
+                    <a:pt x="286490" y="140048"/>
                   </a:lnTo>
                   <a:lnTo>
                     <a:pt x="358112" y="173742"/>
@@ -4138,7 +4138,7 @@
                     <a:pt x="572980" y="271787"/>
                   </a:lnTo>
                   <a:lnTo>
-                    <a:pt x="644602" y="303482"/>
+                    <a:pt x="644602" y="303483"/>
                   </a:lnTo>
                   <a:lnTo>
                     <a:pt x="716225" y="334697"/>
@@ -4150,7 +4150,7 @@
                     <a:pt x="859470" y="395712"/>
                   </a:lnTo>
                   <a:lnTo>
-                    <a:pt x="931092" y="425526"/>
+                    <a:pt x="931092" y="425527"/>
                   </a:lnTo>
                   <a:lnTo>
                     <a:pt x="1002715" y="454889"/>
@@ -4162,25 +4162,25 @@
                     <a:pt x="1145960" y="512284"/>
                   </a:lnTo>
                   <a:lnTo>
-                    <a:pt x="1217582" y="540330"/>
+                    <a:pt x="1217582" y="540331"/>
                   </a:lnTo>
                   <a:lnTo>
                     <a:pt x="1289205" y="567951"/>
                   </a:lnTo>
                   <a:lnTo>
-                    <a:pt x="1360827" y="595152"/>
+                    <a:pt x="1360827" y="595153"/>
                   </a:lnTo>
                   <a:lnTo>
                     <a:pt x="1432450" y="621941"/>
                   </a:lnTo>
                   <a:lnTo>
-                    <a:pt x="1504073" y="648323"/>
+                    <a:pt x="1504073" y="648324"/>
                   </a:lnTo>
                   <a:lnTo>
                     <a:pt x="1575695" y="674306"/>
                   </a:lnTo>
                   <a:lnTo>
-                    <a:pt x="1647318" y="699893"/>
+                    <a:pt x="1647318" y="699894"/>
                   </a:lnTo>
                   <a:lnTo>
                     <a:pt x="1718940" y="725093"/>
@@ -4216,25 +4216,25 @@
                     <a:pt x="2435165" y="956988"/>
                   </a:lnTo>
                   <a:lnTo>
-                    <a:pt x="2506788" y="978286"/>
+                    <a:pt x="2506788" y="978287"/>
                   </a:lnTo>
                   <a:lnTo>
                     <a:pt x="2578410" y="999262"/>
                   </a:lnTo>
                   <a:lnTo>
-                    <a:pt x="2650033" y="1019919"/>
+                    <a:pt x="2650033" y="1019920"/>
                   </a:lnTo>
                   <a:lnTo>
                     <a:pt x="2721655" y="1040263"/>
                   </a:lnTo>
                   <a:lnTo>
-                    <a:pt x="2793278" y="1060298"/>
-                  </a:lnTo>
-                  <a:lnTo>
-                    <a:pt x="2864901" y="1080029"/>
-                  </a:lnTo>
-                  <a:lnTo>
-                    <a:pt x="2936523" y="1099461"/>
+                    <a:pt x="2793278" y="1060299"/>
+                  </a:lnTo>
+                  <a:lnTo>
+                    <a:pt x="2864901" y="1080030"/>
+                  </a:lnTo>
+                  <a:lnTo>
+                    <a:pt x="2936523" y="1099462"/>
                   </a:lnTo>
                   <a:lnTo>
                     <a:pt x="3008146" y="1118598"/>
@@ -4243,25 +4243,25 @@
                     <a:pt x="3079768" y="1137445"/>
                   </a:lnTo>
                   <a:lnTo>
-                    <a:pt x="3151391" y="1156005"/>
-                  </a:lnTo>
-                  <a:lnTo>
-                    <a:pt x="3223013" y="1174284"/>
+                    <a:pt x="3151391" y="1156006"/>
+                  </a:lnTo>
+                  <a:lnTo>
+                    <a:pt x="3223013" y="1174285"/>
                   </a:lnTo>
                   <a:lnTo>
                     <a:pt x="3294636" y="1192286"/>
                   </a:lnTo>
                   <a:lnTo>
-                    <a:pt x="3366258" y="1210014"/>
+                    <a:pt x="3366258" y="1210015"/>
                   </a:lnTo>
                   <a:lnTo>
                     <a:pt x="3437881" y="1227474"/>
                   </a:lnTo>
                   <a:lnTo>
-                    <a:pt x="3509503" y="1244668"/>
-                  </a:lnTo>
-                  <a:lnTo>
-                    <a:pt x="3581126" y="1261602"/>
+                    <a:pt x="3509503" y="1244669"/>
+                  </a:lnTo>
+                  <a:lnTo>
+                    <a:pt x="3581126" y="1261603"/>
                   </a:lnTo>
                   <a:lnTo>
                     <a:pt x="3652748" y="1278279"/>
@@ -4270,31 +4270,31 @@
                     <a:pt x="3724371" y="1294703"/>
                   </a:lnTo>
                   <a:lnTo>
-                    <a:pt x="3795993" y="1310877"/>
-                  </a:lnTo>
-                  <a:lnTo>
-                    <a:pt x="3867616" y="1326806"/>
+                    <a:pt x="3795993" y="1310878"/>
+                  </a:lnTo>
+                  <a:lnTo>
+                    <a:pt x="3867616" y="1326807"/>
                   </a:lnTo>
                   <a:lnTo>
                     <a:pt x="3939238" y="1342494"/>
                   </a:lnTo>
                   <a:lnTo>
-                    <a:pt x="4010861" y="1357943"/>
-                  </a:lnTo>
-                  <a:lnTo>
-                    <a:pt x="4082483" y="1373158"/>
-                  </a:lnTo>
-                  <a:lnTo>
-                    <a:pt x="4154106" y="1388142"/>
-                  </a:lnTo>
-                  <a:lnTo>
-                    <a:pt x="4225729" y="1402899"/>
+                    <a:pt x="4010861" y="1357944"/>
+                  </a:lnTo>
+                  <a:lnTo>
+                    <a:pt x="4082483" y="1373159"/>
+                  </a:lnTo>
+                  <a:lnTo>
+                    <a:pt x="4154106" y="1388143"/>
+                  </a:lnTo>
+                  <a:lnTo>
+                    <a:pt x="4225729" y="1402900"/>
                   </a:lnTo>
                   <a:lnTo>
                     <a:pt x="4297351" y="1417432"/>
                   </a:lnTo>
                   <a:lnTo>
-                    <a:pt x="4368974" y="1431744"/>
+                    <a:pt x="4368974" y="1431745"/>
                   </a:lnTo>
                   <a:lnTo>
                     <a:pt x="4440596" y="1445840"/>
@@ -4318,7 +4318,7 @@
                     <a:pt x="4870331" y="1526032"/>
                   </a:lnTo>
                   <a:lnTo>
-                    <a:pt x="4941954" y="1538696"/>
+                    <a:pt x="4941954" y="1538697"/>
                   </a:lnTo>
                   <a:lnTo>
                     <a:pt x="5013576" y="1551169"/>
@@ -4333,25 +4333,25 @@
                     <a:pt x="5228444" y="1587462"/>
                   </a:lnTo>
                   <a:lnTo>
-                    <a:pt x="5300066" y="1599194"/>
+                    <a:pt x="5300066" y="1599195"/>
                   </a:lnTo>
                   <a:lnTo>
                     <a:pt x="5371689" y="1610749"/>
                   </a:lnTo>
                   <a:lnTo>
-                    <a:pt x="5443311" y="1622128"/>
+                    <a:pt x="5443311" y="1622129"/>
                   </a:lnTo>
                   <a:lnTo>
                     <a:pt x="5514934" y="1633335"/>
                   </a:lnTo>
                   <a:lnTo>
-                    <a:pt x="5586557" y="1644371"/>
-                  </a:lnTo>
-                  <a:lnTo>
-                    <a:pt x="5658179" y="1655240"/>
-                  </a:lnTo>
-                  <a:lnTo>
-                    <a:pt x="5729802" y="1665944"/>
+                    <a:pt x="5586557" y="1644372"/>
+                  </a:lnTo>
+                  <a:lnTo>
+                    <a:pt x="5658179" y="1655241"/>
+                  </a:lnTo>
+                  <a:lnTo>
+                    <a:pt x="5729802" y="1665945"/>
                   </a:lnTo>
                   <a:lnTo>
                     <a:pt x="5801424" y="1676486"/>
@@ -4363,16 +4363,16 @@
                     <a:pt x="5944669" y="1697092"/>
                   </a:lnTo>
                   <a:lnTo>
-                    <a:pt x="6016292" y="1707161"/>
-                  </a:lnTo>
-                  <a:lnTo>
-                    <a:pt x="6087914" y="1717077"/>
-                  </a:lnTo>
-                  <a:lnTo>
-                    <a:pt x="6159537" y="1726843"/>
-                  </a:lnTo>
-                  <a:lnTo>
-                    <a:pt x="6231159" y="1736461"/>
+                    <a:pt x="6016292" y="1707162"/>
+                  </a:lnTo>
+                  <a:lnTo>
+                    <a:pt x="6087914" y="1717078"/>
+                  </a:lnTo>
+                  <a:lnTo>
+                    <a:pt x="6159537" y="1726844"/>
+                  </a:lnTo>
+                  <a:lnTo>
+                    <a:pt x="6231159" y="1736462"/>
                   </a:lnTo>
                   <a:lnTo>
                     <a:pt x="6302782" y="1745933"/>
@@ -4381,31 +4381,31 @@
                     <a:pt x="6374404" y="1755261"/>
                   </a:lnTo>
                   <a:lnTo>
-                    <a:pt x="6446027" y="1764447"/>
-                  </a:lnTo>
-                  <a:lnTo>
-                    <a:pt x="6517649" y="1773494"/>
-                  </a:lnTo>
-                  <a:lnTo>
-                    <a:pt x="6589272" y="1782404"/>
+                    <a:pt x="6446027" y="1764448"/>
+                  </a:lnTo>
+                  <a:lnTo>
+                    <a:pt x="6517649" y="1773495"/>
+                  </a:lnTo>
+                  <a:lnTo>
+                    <a:pt x="6589272" y="1782405"/>
                   </a:lnTo>
                   <a:lnTo>
                     <a:pt x="6660894" y="1791179"/>
                   </a:lnTo>
                   <a:lnTo>
-                    <a:pt x="6732517" y="1799820"/>
+                    <a:pt x="6732517" y="1799821"/>
                   </a:lnTo>
                   <a:lnTo>
                     <a:pt x="6804139" y="1808331"/>
                   </a:lnTo>
                   <a:lnTo>
-                    <a:pt x="6875762" y="1816712"/>
-                  </a:lnTo>
-                  <a:lnTo>
-                    <a:pt x="6947385" y="1824966"/>
-                  </a:lnTo>
-                  <a:lnTo>
-                    <a:pt x="7019007" y="1833095"/>
+                    <a:pt x="6875762" y="1816713"/>
+                  </a:lnTo>
+                  <a:lnTo>
+                    <a:pt x="6947385" y="1824967"/>
+                  </a:lnTo>
+                  <a:lnTo>
+                    <a:pt x="7019007" y="1833096"/>
                   </a:lnTo>
                   <a:lnTo>
                     <a:pt x="7090630" y="1841101"/>

--- a/docs/plots/carbo/jx_carbo_linsubhr_egfrdisc_anemia2.pptx
+++ b/docs/plots/carbo/jx_carbo_linsubhr_egfrdisc_anemia2.pptx
@@ -5116,7 +5116,7 @@
           <p:spPr>
             <a:xfrm>
               <a:off x="817517" y="1896563"/>
-              <a:ext cx="4869911" cy="82021"/>
+              <a:ext cx="5413065" cy="82021"/>
             </a:xfrm>
             <a:prstGeom prst="rect">
               <a:avLst/>
@@ -5148,7 +5148,7 @@
                   <a:latin typeface="Helvetica"/>
                   <a:cs typeface="Helvetica"/>
                 </a:rPr>
-                <a:t>subHR per 1 mL/min: 0.98 (0.95-1.01)  |  per IQR (Δ = 18.2): 0.70 (0.41-1.19)  |  IQR: [-11.5, 6.7]</a:t>
+                <a:t>subHR per 1 mL/min: 0.98 (0.95-1.01), p = 0.184  |  per IQR (Δ = 18.2): 0.70 (0.41-1.19)  |  IQR: [-11.5, 6.7]</a:t>
               </a:r>
             </a:p>
           </p:txBody>

--- a/docs/plots/carbo/jx_carbo_linsubhr_egfrdisc_anemia2.pptx
+++ b/docs/plots/carbo/jx_carbo_linsubhr_egfrdisc_anemia2.pptx
@@ -2271,26 +2271,26 @@
           </p:nvSpPr>
           <p:spPr>
             <a:xfrm>
-              <a:off x="817517" y="5142518"/>
-              <a:ext cx="7799693" cy="0"/>
+              <a:off x="915645" y="5071743"/>
+              <a:ext cx="7682587" cy="0"/>
             </a:xfrm>
             <a:custGeom>
               <a:avLst/>
               <a:pathLst>
-                <a:path w="7799693" h="0">
+                <a:path w="7682587" h="0">
                   <a:moveTo>
                     <a:pt x="0" y="0"/>
                   </a:moveTo>
                   <a:lnTo>
-                    <a:pt x="7799693" y="0"/>
-                  </a:lnTo>
-                  <a:lnTo>
-                    <a:pt x="7799693" y="0"/>
+                    <a:pt x="7682587" y="0"/>
+                  </a:lnTo>
+                  <a:lnTo>
+                    <a:pt x="7682587" y="0"/>
                   </a:lnTo>
                 </a:path>
               </a:pathLst>
             </a:custGeom>
-            <a:ln w="6775" cap="flat">
+            <a:ln w="8623" cap="flat">
               <a:solidFill>
                 <a:srgbClr val="EBEBEB">
                   <a:alpha val="100000"/>
@@ -2314,26 +2314,26 @@
           </p:nvSpPr>
           <p:spPr>
             <a:xfrm>
-              <a:off x="817517" y="4313054"/>
-              <a:ext cx="7799693" cy="0"/>
+              <a:off x="915645" y="4298074"/>
+              <a:ext cx="7682587" cy="0"/>
             </a:xfrm>
             <a:custGeom>
               <a:avLst/>
               <a:pathLst>
-                <a:path w="7799693" h="0">
+                <a:path w="7682587" h="0">
                   <a:moveTo>
                     <a:pt x="0" y="0"/>
                   </a:moveTo>
                   <a:lnTo>
-                    <a:pt x="7799693" y="0"/>
-                  </a:lnTo>
-                  <a:lnTo>
-                    <a:pt x="7799693" y="0"/>
+                    <a:pt x="7682587" y="0"/>
+                  </a:lnTo>
+                  <a:lnTo>
+                    <a:pt x="7682587" y="0"/>
                   </a:lnTo>
                 </a:path>
               </a:pathLst>
             </a:custGeom>
-            <a:ln w="6775" cap="flat">
+            <a:ln w="8623" cap="flat">
               <a:solidFill>
                 <a:srgbClr val="EBEBEB">
                   <a:alpha val="100000"/>
@@ -2357,26 +2357,26 @@
           </p:nvSpPr>
           <p:spPr>
             <a:xfrm>
-              <a:off x="817517" y="3483591"/>
-              <a:ext cx="7799693" cy="0"/>
+              <a:off x="915645" y="3524405"/>
+              <a:ext cx="7682587" cy="0"/>
             </a:xfrm>
             <a:custGeom>
               <a:avLst/>
               <a:pathLst>
-                <a:path w="7799693" h="0">
+                <a:path w="7682587" h="0">
                   <a:moveTo>
                     <a:pt x="0" y="0"/>
                   </a:moveTo>
                   <a:lnTo>
-                    <a:pt x="7799693" y="0"/>
-                  </a:lnTo>
-                  <a:lnTo>
-                    <a:pt x="7799693" y="0"/>
+                    <a:pt x="7682587" y="0"/>
+                  </a:lnTo>
+                  <a:lnTo>
+                    <a:pt x="7682587" y="0"/>
                   </a:lnTo>
                 </a:path>
               </a:pathLst>
             </a:custGeom>
-            <a:ln w="6775" cap="flat">
+            <a:ln w="8623" cap="flat">
               <a:solidFill>
                 <a:srgbClr val="EBEBEB">
                   <a:alpha val="100000"/>
@@ -2400,26 +2400,26 @@
           </p:nvSpPr>
           <p:spPr>
             <a:xfrm>
-              <a:off x="817517" y="2654127"/>
-              <a:ext cx="7799693" cy="0"/>
+              <a:off x="915645" y="2750737"/>
+              <a:ext cx="7682587" cy="0"/>
             </a:xfrm>
             <a:custGeom>
               <a:avLst/>
               <a:pathLst>
-                <a:path w="7799693" h="0">
+                <a:path w="7682587" h="0">
                   <a:moveTo>
                     <a:pt x="0" y="0"/>
                   </a:moveTo>
                   <a:lnTo>
-                    <a:pt x="7799693" y="0"/>
-                  </a:lnTo>
-                  <a:lnTo>
-                    <a:pt x="7799693" y="0"/>
+                    <a:pt x="7682587" y="0"/>
+                  </a:lnTo>
+                  <a:lnTo>
+                    <a:pt x="7682587" y="0"/>
                   </a:lnTo>
                 </a:path>
               </a:pathLst>
             </a:custGeom>
-            <a:ln w="6775" cap="flat">
+            <a:ln w="8623" cap="flat">
               <a:solidFill>
                 <a:srgbClr val="EBEBEB">
                   <a:alpha val="100000"/>
@@ -2443,15 +2443,15 @@
           </p:nvSpPr>
           <p:spPr>
             <a:xfrm>
-              <a:off x="1487487" y="2073503"/>
-              <a:ext cx="0" cy="3649639"/>
+              <a:off x="1575555" y="2209169"/>
+              <a:ext cx="0" cy="3404141"/>
             </a:xfrm>
             <a:custGeom>
               <a:avLst/>
               <a:pathLst>
-                <a:path w="0" h="3649639">
+                <a:path w="0" h="3404141">
                   <a:moveTo>
-                    <a:pt x="0" y="3649639"/>
+                    <a:pt x="0" y="3404141"/>
                   </a:moveTo>
                   <a:lnTo>
                     <a:pt x="0" y="0"/>
@@ -2462,7 +2462,7 @@
                 </a:path>
               </a:pathLst>
             </a:custGeom>
-            <a:ln w="6775" cap="flat">
+            <a:ln w="8623" cap="flat">
               <a:solidFill>
                 <a:srgbClr val="EBEBEB">
                   <a:alpha val="100000"/>
@@ -2486,15 +2486,15 @@
           </p:nvSpPr>
           <p:spPr>
             <a:xfrm>
-              <a:off x="3337360" y="2073503"/>
-              <a:ext cx="0" cy="3649639"/>
+              <a:off x="3397654" y="2209169"/>
+              <a:ext cx="0" cy="3404141"/>
             </a:xfrm>
             <a:custGeom>
               <a:avLst/>
               <a:pathLst>
-                <a:path w="0" h="3649639">
+                <a:path w="0" h="3404141">
                   <a:moveTo>
-                    <a:pt x="0" y="3649639"/>
+                    <a:pt x="0" y="3404141"/>
                   </a:moveTo>
                   <a:lnTo>
                     <a:pt x="0" y="0"/>
@@ -2505,7 +2505,7 @@
                 </a:path>
               </a:pathLst>
             </a:custGeom>
-            <a:ln w="6775" cap="flat">
+            <a:ln w="8623" cap="flat">
               <a:solidFill>
                 <a:srgbClr val="EBEBEB">
                   <a:alpha val="100000"/>
@@ -2529,15 +2529,15 @@
           </p:nvSpPr>
           <p:spPr>
             <a:xfrm>
-              <a:off x="5187233" y="2073503"/>
-              <a:ext cx="0" cy="3649639"/>
+              <a:off x="5219752" y="2209169"/>
+              <a:ext cx="0" cy="3404141"/>
             </a:xfrm>
             <a:custGeom>
               <a:avLst/>
               <a:pathLst>
-                <a:path w="0" h="3649639">
+                <a:path w="0" h="3404141">
                   <a:moveTo>
-                    <a:pt x="0" y="3649639"/>
+                    <a:pt x="0" y="3404141"/>
                   </a:moveTo>
                   <a:lnTo>
                     <a:pt x="0" y="0"/>
@@ -2548,7 +2548,7 @@
                 </a:path>
               </a:pathLst>
             </a:custGeom>
-            <a:ln w="6775" cap="flat">
+            <a:ln w="8623" cap="flat">
               <a:solidFill>
                 <a:srgbClr val="EBEBEB">
                   <a:alpha val="100000"/>
@@ -2572,15 +2572,15 @@
           </p:nvSpPr>
           <p:spPr>
             <a:xfrm>
-              <a:off x="7037106" y="2073503"/>
-              <a:ext cx="0" cy="3649639"/>
+              <a:off x="7041851" y="2209169"/>
+              <a:ext cx="0" cy="3404141"/>
             </a:xfrm>
             <a:custGeom>
               <a:avLst/>
               <a:pathLst>
-                <a:path w="0" h="3649639">
+                <a:path w="0" h="3404141">
                   <a:moveTo>
-                    <a:pt x="0" y="3649639"/>
+                    <a:pt x="0" y="3404141"/>
                   </a:moveTo>
                   <a:lnTo>
                     <a:pt x="0" y="0"/>
@@ -2591,7 +2591,7 @@
                 </a:path>
               </a:pathLst>
             </a:custGeom>
-            <a:ln w="6775" cap="flat">
+            <a:ln w="8623" cap="flat">
               <a:solidFill>
                 <a:srgbClr val="EBEBEB">
                   <a:alpha val="100000"/>
@@ -2615,26 +2615,26 @@
           </p:nvSpPr>
           <p:spPr>
             <a:xfrm>
-              <a:off x="817517" y="5557249"/>
-              <a:ext cx="7799693" cy="0"/>
+              <a:off x="915645" y="5458577"/>
+              <a:ext cx="7682587" cy="0"/>
             </a:xfrm>
             <a:custGeom>
               <a:avLst/>
               <a:pathLst>
-                <a:path w="7799693" h="0">
+                <a:path w="7682587" h="0">
                   <a:moveTo>
                     <a:pt x="0" y="0"/>
                   </a:moveTo>
                   <a:lnTo>
-                    <a:pt x="7799693" y="0"/>
-                  </a:lnTo>
-                  <a:lnTo>
-                    <a:pt x="7799693" y="0"/>
+                    <a:pt x="7682587" y="0"/>
+                  </a:lnTo>
+                  <a:lnTo>
+                    <a:pt x="7682587" y="0"/>
                   </a:lnTo>
                 </a:path>
               </a:pathLst>
             </a:custGeom>
-            <a:ln w="13550" cap="flat">
+            <a:ln w="17246" cap="flat">
               <a:solidFill>
                 <a:srgbClr val="EBEBEB">
                   <a:alpha val="100000"/>
@@ -2658,26 +2658,26 @@
           </p:nvSpPr>
           <p:spPr>
             <a:xfrm>
-              <a:off x="817517" y="4727786"/>
-              <a:ext cx="7799693" cy="0"/>
+              <a:off x="915645" y="4684908"/>
+              <a:ext cx="7682587" cy="0"/>
             </a:xfrm>
             <a:custGeom>
               <a:avLst/>
               <a:pathLst>
-                <a:path w="7799693" h="0">
+                <a:path w="7682587" h="0">
                   <a:moveTo>
                     <a:pt x="0" y="0"/>
                   </a:moveTo>
                   <a:lnTo>
-                    <a:pt x="7799693" y="0"/>
-                  </a:lnTo>
-                  <a:lnTo>
-                    <a:pt x="7799693" y="0"/>
+                    <a:pt x="7682587" y="0"/>
+                  </a:lnTo>
+                  <a:lnTo>
+                    <a:pt x="7682587" y="0"/>
                   </a:lnTo>
                 </a:path>
               </a:pathLst>
             </a:custGeom>
-            <a:ln w="13550" cap="flat">
+            <a:ln w="17246" cap="flat">
               <a:solidFill>
                 <a:srgbClr val="EBEBEB">
                   <a:alpha val="100000"/>
@@ -2701,26 +2701,26 @@
           </p:nvSpPr>
           <p:spPr>
             <a:xfrm>
-              <a:off x="817517" y="3898322"/>
-              <a:ext cx="7799693" cy="0"/>
+              <a:off x="915645" y="3911240"/>
+              <a:ext cx="7682587" cy="0"/>
             </a:xfrm>
             <a:custGeom>
               <a:avLst/>
               <a:pathLst>
-                <a:path w="7799693" h="0">
+                <a:path w="7682587" h="0">
                   <a:moveTo>
                     <a:pt x="0" y="0"/>
                   </a:moveTo>
                   <a:lnTo>
-                    <a:pt x="7799693" y="0"/>
-                  </a:lnTo>
-                  <a:lnTo>
-                    <a:pt x="7799693" y="0"/>
+                    <a:pt x="7682587" y="0"/>
+                  </a:lnTo>
+                  <a:lnTo>
+                    <a:pt x="7682587" y="0"/>
                   </a:lnTo>
                 </a:path>
               </a:pathLst>
             </a:custGeom>
-            <a:ln w="13550" cap="flat">
+            <a:ln w="17246" cap="flat">
               <a:solidFill>
                 <a:srgbClr val="EBEBEB">
                   <a:alpha val="100000"/>
@@ -2744,26 +2744,26 @@
           </p:nvSpPr>
           <p:spPr>
             <a:xfrm>
-              <a:off x="817517" y="3068859"/>
-              <a:ext cx="7799693" cy="0"/>
+              <a:off x="915645" y="3137571"/>
+              <a:ext cx="7682587" cy="0"/>
             </a:xfrm>
             <a:custGeom>
               <a:avLst/>
               <a:pathLst>
-                <a:path w="7799693" h="0">
+                <a:path w="7682587" h="0">
                   <a:moveTo>
                     <a:pt x="0" y="0"/>
                   </a:moveTo>
                   <a:lnTo>
-                    <a:pt x="7799693" y="0"/>
-                  </a:lnTo>
-                  <a:lnTo>
-                    <a:pt x="7799693" y="0"/>
+                    <a:pt x="7682587" y="0"/>
+                  </a:lnTo>
+                  <a:lnTo>
+                    <a:pt x="7682587" y="0"/>
                   </a:lnTo>
                 </a:path>
               </a:pathLst>
             </a:custGeom>
-            <a:ln w="13550" cap="flat">
+            <a:ln w="17246" cap="flat">
               <a:solidFill>
                 <a:srgbClr val="EBEBEB">
                   <a:alpha val="100000"/>
@@ -2787,26 +2787,26 @@
           </p:nvSpPr>
           <p:spPr>
             <a:xfrm>
-              <a:off x="817517" y="2239395"/>
-              <a:ext cx="7799693" cy="0"/>
+              <a:off x="915645" y="2363903"/>
+              <a:ext cx="7682587" cy="0"/>
             </a:xfrm>
             <a:custGeom>
               <a:avLst/>
               <a:pathLst>
-                <a:path w="7799693" h="0">
+                <a:path w="7682587" h="0">
                   <a:moveTo>
                     <a:pt x="0" y="0"/>
                   </a:moveTo>
                   <a:lnTo>
-                    <a:pt x="7799693" y="0"/>
-                  </a:lnTo>
-                  <a:lnTo>
-                    <a:pt x="7799693" y="0"/>
+                    <a:pt x="7682587" y="0"/>
+                  </a:lnTo>
+                  <a:lnTo>
+                    <a:pt x="7682587" y="0"/>
                   </a:lnTo>
                 </a:path>
               </a:pathLst>
             </a:custGeom>
-            <a:ln w="13550" cap="flat">
+            <a:ln w="17246" cap="flat">
               <a:solidFill>
                 <a:srgbClr val="EBEBEB">
                   <a:alpha val="100000"/>
@@ -2830,15 +2830,15 @@
           </p:nvSpPr>
           <p:spPr>
             <a:xfrm>
-              <a:off x="2412424" y="2073503"/>
-              <a:ext cx="0" cy="3649639"/>
+              <a:off x="2486605" y="2209169"/>
+              <a:ext cx="0" cy="3404141"/>
             </a:xfrm>
             <a:custGeom>
               <a:avLst/>
               <a:pathLst>
-                <a:path w="0" h="3649639">
+                <a:path w="0" h="3404141">
                   <a:moveTo>
-                    <a:pt x="0" y="3649639"/>
+                    <a:pt x="0" y="3404141"/>
                   </a:moveTo>
                   <a:lnTo>
                     <a:pt x="0" y="0"/>
@@ -2849,7 +2849,7 @@
                 </a:path>
               </a:pathLst>
             </a:custGeom>
-            <a:ln w="13550" cap="flat">
+            <a:ln w="17246" cap="flat">
               <a:solidFill>
                 <a:srgbClr val="EBEBEB">
                   <a:alpha val="100000"/>
@@ -2873,15 +2873,15 @@
           </p:nvSpPr>
           <p:spPr>
             <a:xfrm>
-              <a:off x="4262297" y="2073503"/>
-              <a:ext cx="0" cy="3649639"/>
+              <a:off x="4308703" y="2209169"/>
+              <a:ext cx="0" cy="3404141"/>
             </a:xfrm>
             <a:custGeom>
               <a:avLst/>
               <a:pathLst>
-                <a:path w="0" h="3649639">
+                <a:path w="0" h="3404141">
                   <a:moveTo>
-                    <a:pt x="0" y="3649639"/>
+                    <a:pt x="0" y="3404141"/>
                   </a:moveTo>
                   <a:lnTo>
                     <a:pt x="0" y="0"/>
@@ -2892,7 +2892,7 @@
                 </a:path>
               </a:pathLst>
             </a:custGeom>
-            <a:ln w="13550" cap="flat">
+            <a:ln w="17246" cap="flat">
               <a:solidFill>
                 <a:srgbClr val="EBEBEB">
                   <a:alpha val="100000"/>
@@ -2916,15 +2916,15 @@
           </p:nvSpPr>
           <p:spPr>
             <a:xfrm>
-              <a:off x="6112169" y="2073503"/>
-              <a:ext cx="0" cy="3649639"/>
+              <a:off x="6130802" y="2209169"/>
+              <a:ext cx="0" cy="3404141"/>
             </a:xfrm>
             <a:custGeom>
               <a:avLst/>
               <a:pathLst>
-                <a:path w="0" h="3649639">
+                <a:path w="0" h="3404141">
                   <a:moveTo>
-                    <a:pt x="0" y="3649639"/>
+                    <a:pt x="0" y="3404141"/>
                   </a:moveTo>
                   <a:lnTo>
                     <a:pt x="0" y="0"/>
@@ -2935,7 +2935,7 @@
                 </a:path>
               </a:pathLst>
             </a:custGeom>
-            <a:ln w="13550" cap="flat">
+            <a:ln w="17246" cap="flat">
               <a:solidFill>
                 <a:srgbClr val="EBEBEB">
                   <a:alpha val="100000"/>
@@ -2959,15 +2959,15 @@
           </p:nvSpPr>
           <p:spPr>
             <a:xfrm>
-              <a:off x="7962042" y="2073503"/>
-              <a:ext cx="0" cy="3649639"/>
+              <a:off x="7952900" y="2209169"/>
+              <a:ext cx="0" cy="3404141"/>
             </a:xfrm>
             <a:custGeom>
               <a:avLst/>
               <a:pathLst>
-                <a:path w="0" h="3649639">
+                <a:path w="0" h="3404141">
                   <a:moveTo>
-                    <a:pt x="0" y="3649639"/>
+                    <a:pt x="0" y="3404141"/>
                   </a:moveTo>
                   <a:lnTo>
                     <a:pt x="0" y="0"/>
@@ -2978,7 +2978,7 @@
                 </a:path>
               </a:pathLst>
             </a:custGeom>
-            <a:ln w="13550" cap="flat">
+            <a:ln w="17246" cap="flat">
               <a:solidFill>
                 <a:srgbClr val="EBEBEB">
                   <a:alpha val="100000"/>
@@ -3002,522 +3002,522 @@
           </p:nvSpPr>
           <p:spPr>
             <a:xfrm>
-              <a:off x="1172049" y="2073503"/>
-              <a:ext cx="7090630" cy="3223040"/>
+              <a:off x="1264853" y="2209169"/>
+              <a:ext cx="6984170" cy="3006237"/>
             </a:xfrm>
             <a:custGeom>
               <a:avLst/>
               <a:pathLst>
-                <a:path w="7090630" h="3223040">
+                <a:path w="6984170" h="3006237">
                   <a:moveTo>
-                    <a:pt x="2183453" y="0"/>
+                    <a:pt x="2150670" y="0"/>
                   </a:moveTo>
                   <a:lnTo>
-                    <a:pt x="2220298" y="67762"/>
-                  </a:lnTo>
-                  <a:lnTo>
-                    <a:pt x="2291920" y="194593"/>
-                  </a:lnTo>
-                  <a:lnTo>
-                    <a:pt x="2363543" y="316716"/>
-                  </a:lnTo>
-                  <a:lnTo>
-                    <a:pt x="2435165" y="434304"/>
-                  </a:lnTo>
-                  <a:lnTo>
-                    <a:pt x="2506788" y="547526"/>
-                  </a:lnTo>
-                  <a:lnTo>
-                    <a:pt x="2578410" y="656545"/>
-                  </a:lnTo>
-                  <a:lnTo>
-                    <a:pt x="2650033" y="761515"/>
-                  </a:lnTo>
-                  <a:lnTo>
-                    <a:pt x="2721655" y="862588"/>
-                  </a:lnTo>
-                  <a:lnTo>
-                    <a:pt x="2793278" y="959909"/>
-                  </a:lnTo>
-                  <a:lnTo>
-                    <a:pt x="2864901" y="1053616"/>
-                  </a:lnTo>
-                  <a:lnTo>
-                    <a:pt x="2936523" y="1143844"/>
-                  </a:lnTo>
-                  <a:lnTo>
-                    <a:pt x="3008146" y="1230722"/>
-                  </a:lnTo>
-                  <a:lnTo>
-                    <a:pt x="3079768" y="1314374"/>
-                  </a:lnTo>
-                  <a:lnTo>
-                    <a:pt x="3151391" y="1394920"/>
-                  </a:lnTo>
-                  <a:lnTo>
-                    <a:pt x="3223013" y="1472476"/>
-                  </a:lnTo>
-                  <a:lnTo>
-                    <a:pt x="3294636" y="1547152"/>
-                  </a:lnTo>
-                  <a:lnTo>
-                    <a:pt x="3366258" y="1619056"/>
-                  </a:lnTo>
-                  <a:lnTo>
-                    <a:pt x="3437881" y="1688289"/>
-                  </a:lnTo>
-                  <a:lnTo>
-                    <a:pt x="3509503" y="1754953"/>
-                  </a:lnTo>
-                  <a:lnTo>
-                    <a:pt x="3581126" y="1819141"/>
-                  </a:lnTo>
-                  <a:lnTo>
-                    <a:pt x="3652748" y="1880945"/>
-                  </a:lnTo>
-                  <a:lnTo>
-                    <a:pt x="3724371" y="1940456"/>
-                  </a:lnTo>
-                  <a:lnTo>
-                    <a:pt x="3795993" y="1997756"/>
-                  </a:lnTo>
-                  <a:lnTo>
-                    <a:pt x="3867616" y="2052929"/>
-                  </a:lnTo>
-                  <a:lnTo>
-                    <a:pt x="3939238" y="2106054"/>
-                  </a:lnTo>
-                  <a:lnTo>
-                    <a:pt x="4010861" y="2157206"/>
-                  </a:lnTo>
-                  <a:lnTo>
-                    <a:pt x="4082483" y="2206459"/>
-                  </a:lnTo>
-                  <a:lnTo>
-                    <a:pt x="4154106" y="2253883"/>
-                  </a:lnTo>
-                  <a:lnTo>
-                    <a:pt x="4225729" y="2299546"/>
-                  </a:lnTo>
-                  <a:lnTo>
-                    <a:pt x="4297351" y="2343514"/>
-                  </a:lnTo>
-                  <a:lnTo>
-                    <a:pt x="4368974" y="2385850"/>
-                  </a:lnTo>
-                  <a:lnTo>
-                    <a:pt x="4440596" y="2426613"/>
-                  </a:lnTo>
-                  <a:lnTo>
-                    <a:pt x="4512219" y="2465864"/>
-                  </a:lnTo>
-                  <a:lnTo>
-                    <a:pt x="4583841" y="2503656"/>
-                  </a:lnTo>
-                  <a:lnTo>
-                    <a:pt x="4655464" y="2540046"/>
-                  </a:lnTo>
-                  <a:lnTo>
-                    <a:pt x="4727086" y="2575084"/>
-                  </a:lnTo>
-                  <a:lnTo>
-                    <a:pt x="4798709" y="2608822"/>
-                  </a:lnTo>
-                  <a:lnTo>
-                    <a:pt x="4870331" y="2641307"/>
-                  </a:lnTo>
-                  <a:lnTo>
-                    <a:pt x="4941954" y="2650725"/>
-                  </a:lnTo>
-                  <a:lnTo>
-                    <a:pt x="5013576" y="2644658"/>
-                  </a:lnTo>
-                  <a:lnTo>
-                    <a:pt x="5085199" y="2638546"/>
-                  </a:lnTo>
-                  <a:lnTo>
-                    <a:pt x="5156821" y="2632390"/>
-                  </a:lnTo>
-                  <a:lnTo>
-                    <a:pt x="5228444" y="2626189"/>
-                  </a:lnTo>
-                  <a:lnTo>
-                    <a:pt x="5300066" y="2619943"/>
-                  </a:lnTo>
-                  <a:lnTo>
-                    <a:pt x="5371689" y="2613652"/>
-                  </a:lnTo>
-                  <a:lnTo>
-                    <a:pt x="5443311" y="2607314"/>
-                  </a:lnTo>
-                  <a:lnTo>
-                    <a:pt x="5514934" y="2600931"/>
-                  </a:lnTo>
-                  <a:lnTo>
-                    <a:pt x="5586557" y="2594501"/>
-                  </a:lnTo>
-                  <a:lnTo>
-                    <a:pt x="5658179" y="2588024"/>
-                  </a:lnTo>
-                  <a:lnTo>
-                    <a:pt x="5729802" y="2581500"/>
-                  </a:lnTo>
-                  <a:lnTo>
-                    <a:pt x="5801424" y="2574928"/>
-                  </a:lnTo>
-                  <a:lnTo>
-                    <a:pt x="5873047" y="2568309"/>
-                  </a:lnTo>
-                  <a:lnTo>
-                    <a:pt x="5944669" y="2561641"/>
-                  </a:lnTo>
-                  <a:lnTo>
-                    <a:pt x="6016292" y="2554925"/>
-                  </a:lnTo>
-                  <a:lnTo>
-                    <a:pt x="6087914" y="2548160"/>
-                  </a:lnTo>
-                  <a:lnTo>
-                    <a:pt x="6159537" y="2541345"/>
-                  </a:lnTo>
-                  <a:lnTo>
-                    <a:pt x="6231159" y="2534481"/>
-                  </a:lnTo>
-                  <a:lnTo>
-                    <a:pt x="6302782" y="2527567"/>
-                  </a:lnTo>
-                  <a:lnTo>
-                    <a:pt x="6374404" y="2520603"/>
-                  </a:lnTo>
-                  <a:lnTo>
-                    <a:pt x="6446027" y="2513588"/>
-                  </a:lnTo>
-                  <a:lnTo>
-                    <a:pt x="6517649" y="2506521"/>
-                  </a:lnTo>
-                  <a:lnTo>
-                    <a:pt x="6589272" y="2499404"/>
-                  </a:lnTo>
-                  <a:lnTo>
-                    <a:pt x="6660894" y="2492234"/>
-                  </a:lnTo>
-                  <a:lnTo>
-                    <a:pt x="6732517" y="2485012"/>
-                  </a:lnTo>
-                  <a:lnTo>
-                    <a:pt x="6804139" y="2477738"/>
-                  </a:lnTo>
-                  <a:lnTo>
-                    <a:pt x="6875762" y="2470411"/>
-                  </a:lnTo>
-                  <a:lnTo>
-                    <a:pt x="6947385" y="2463030"/>
-                  </a:lnTo>
-                  <a:lnTo>
-                    <a:pt x="7019007" y="2455596"/>
-                  </a:lnTo>
-                  <a:lnTo>
-                    <a:pt x="7090630" y="2448107"/>
-                  </a:lnTo>
-                  <a:lnTo>
-                    <a:pt x="7090630" y="3223040"/>
-                  </a:lnTo>
-                  <a:lnTo>
-                    <a:pt x="7019007" y="3212987"/>
-                  </a:lnTo>
-                  <a:lnTo>
-                    <a:pt x="6947385" y="3202546"/>
-                  </a:lnTo>
-                  <a:lnTo>
-                    <a:pt x="6875762" y="3191703"/>
-                  </a:lnTo>
-                  <a:lnTo>
-                    <a:pt x="6804139" y="3180441"/>
-                  </a:lnTo>
-                  <a:lnTo>
-                    <a:pt x="6732517" y="3168746"/>
-                  </a:lnTo>
-                  <a:lnTo>
-                    <a:pt x="6660894" y="3156599"/>
-                  </a:lnTo>
-                  <a:lnTo>
-                    <a:pt x="6589272" y="3143984"/>
-                  </a:lnTo>
-                  <a:lnTo>
-                    <a:pt x="6517649" y="3130883"/>
-                  </a:lnTo>
-                  <a:lnTo>
-                    <a:pt x="6446027" y="3117276"/>
-                  </a:lnTo>
-                  <a:lnTo>
-                    <a:pt x="6374404" y="3103145"/>
-                  </a:lnTo>
-                  <a:lnTo>
-                    <a:pt x="6302782" y="3088469"/>
-                  </a:lnTo>
-                  <a:lnTo>
-                    <a:pt x="6231159" y="3073226"/>
-                  </a:lnTo>
-                  <a:lnTo>
-                    <a:pt x="6159537" y="3057397"/>
-                  </a:lnTo>
-                  <a:lnTo>
-                    <a:pt x="6087914" y="3040956"/>
-                  </a:lnTo>
-                  <a:lnTo>
-                    <a:pt x="6016292" y="3023882"/>
-                  </a:lnTo>
-                  <a:lnTo>
-                    <a:pt x="5944669" y="3006150"/>
-                  </a:lnTo>
-                  <a:lnTo>
-                    <a:pt x="5873047" y="2987733"/>
-                  </a:lnTo>
-                  <a:lnTo>
-                    <a:pt x="5801424" y="2968607"/>
-                  </a:lnTo>
-                  <a:lnTo>
-                    <a:pt x="5729802" y="2948743"/>
-                  </a:lnTo>
-                  <a:lnTo>
-                    <a:pt x="5658179" y="2928112"/>
-                  </a:lnTo>
-                  <a:lnTo>
-                    <a:pt x="5586557" y="2906687"/>
-                  </a:lnTo>
-                  <a:lnTo>
-                    <a:pt x="5514934" y="2884435"/>
-                  </a:lnTo>
-                  <a:lnTo>
-                    <a:pt x="5443311" y="2861325"/>
-                  </a:lnTo>
-                  <a:lnTo>
-                    <a:pt x="5371689" y="2837325"/>
-                  </a:lnTo>
-                  <a:lnTo>
-                    <a:pt x="5300066" y="2812398"/>
-                  </a:lnTo>
-                  <a:lnTo>
-                    <a:pt x="5228444" y="2786511"/>
-                  </a:lnTo>
-                  <a:lnTo>
-                    <a:pt x="5156821" y="2759625"/>
-                  </a:lnTo>
-                  <a:lnTo>
-                    <a:pt x="5085199" y="2731702"/>
-                  </a:lnTo>
-                  <a:lnTo>
-                    <a:pt x="5013576" y="2702703"/>
-                  </a:lnTo>
-                  <a:lnTo>
-                    <a:pt x="4941954" y="2672586"/>
-                  </a:lnTo>
-                  <a:lnTo>
-                    <a:pt x="4870331" y="2656749"/>
-                  </a:lnTo>
-                  <a:lnTo>
-                    <a:pt x="4798709" y="2662729"/>
-                  </a:lnTo>
-                  <a:lnTo>
-                    <a:pt x="4727086" y="2668665"/>
-                  </a:lnTo>
-                  <a:lnTo>
-                    <a:pt x="4655464" y="2674559"/>
-                  </a:lnTo>
-                  <a:lnTo>
-                    <a:pt x="4583841" y="2680410"/>
-                  </a:lnTo>
-                  <a:lnTo>
-                    <a:pt x="4512219" y="2686219"/>
-                  </a:lnTo>
-                  <a:lnTo>
-                    <a:pt x="4440596" y="2691986"/>
-                  </a:lnTo>
-                  <a:lnTo>
-                    <a:pt x="4368974" y="2697711"/>
-                  </a:lnTo>
-                  <a:lnTo>
-                    <a:pt x="4297351" y="2703395"/>
-                  </a:lnTo>
-                  <a:lnTo>
-                    <a:pt x="4225729" y="2709038"/>
-                  </a:lnTo>
-                  <a:lnTo>
-                    <a:pt x="4154106" y="2714639"/>
-                  </a:lnTo>
-                  <a:lnTo>
-                    <a:pt x="4082483" y="2720201"/>
-                  </a:lnTo>
-                  <a:lnTo>
-                    <a:pt x="4010861" y="2725722"/>
-                  </a:lnTo>
-                  <a:lnTo>
-                    <a:pt x="3939238" y="2731203"/>
-                  </a:lnTo>
-                  <a:lnTo>
-                    <a:pt x="3867616" y="2736645"/>
-                  </a:lnTo>
-                  <a:lnTo>
-                    <a:pt x="3795993" y="2742047"/>
-                  </a:lnTo>
-                  <a:lnTo>
-                    <a:pt x="3724371" y="2747410"/>
-                  </a:lnTo>
-                  <a:lnTo>
-                    <a:pt x="3652748" y="2752734"/>
-                  </a:lnTo>
-                  <a:lnTo>
-                    <a:pt x="3581126" y="2758020"/>
-                  </a:lnTo>
-                  <a:lnTo>
-                    <a:pt x="3509503" y="2763268"/>
-                  </a:lnTo>
-                  <a:lnTo>
-                    <a:pt x="3437881" y="2768478"/>
-                  </a:lnTo>
-                  <a:lnTo>
-                    <a:pt x="3366258" y="2773650"/>
-                  </a:lnTo>
-                  <a:lnTo>
-                    <a:pt x="3294636" y="2778784"/>
-                  </a:lnTo>
-                  <a:lnTo>
-                    <a:pt x="3223013" y="2783882"/>
-                  </a:lnTo>
-                  <a:lnTo>
-                    <a:pt x="3151391" y="2788943"/>
-                  </a:lnTo>
-                  <a:lnTo>
-                    <a:pt x="3079768" y="2793967"/>
-                  </a:lnTo>
-                  <a:lnTo>
-                    <a:pt x="3008146" y="2798954"/>
-                  </a:lnTo>
-                  <a:lnTo>
-                    <a:pt x="2936523" y="2803906"/>
-                  </a:lnTo>
-                  <a:lnTo>
-                    <a:pt x="2864901" y="2808822"/>
-                  </a:lnTo>
-                  <a:lnTo>
-                    <a:pt x="2793278" y="2813702"/>
-                  </a:lnTo>
-                  <a:lnTo>
-                    <a:pt x="2721655" y="2818547"/>
-                  </a:lnTo>
-                  <a:lnTo>
-                    <a:pt x="2650033" y="2823357"/>
-                  </a:lnTo>
-                  <a:lnTo>
-                    <a:pt x="2578410" y="2828132"/>
-                  </a:lnTo>
-                  <a:lnTo>
-                    <a:pt x="2506788" y="2832873"/>
-                  </a:lnTo>
-                  <a:lnTo>
-                    <a:pt x="2435165" y="2837580"/>
-                  </a:lnTo>
-                  <a:lnTo>
-                    <a:pt x="2363543" y="2842252"/>
-                  </a:lnTo>
-                  <a:lnTo>
-                    <a:pt x="2291920" y="2846891"/>
-                  </a:lnTo>
-                  <a:lnTo>
-                    <a:pt x="2220298" y="2851496"/>
-                  </a:lnTo>
-                  <a:lnTo>
-                    <a:pt x="2148675" y="2856067"/>
-                  </a:lnTo>
-                  <a:lnTo>
-                    <a:pt x="2077053" y="2860606"/>
-                  </a:lnTo>
-                  <a:lnTo>
-                    <a:pt x="2005430" y="2865112"/>
-                  </a:lnTo>
-                  <a:lnTo>
-                    <a:pt x="1933808" y="2869585"/>
-                  </a:lnTo>
-                  <a:lnTo>
-                    <a:pt x="1862185" y="2874026"/>
-                  </a:lnTo>
-                  <a:lnTo>
-                    <a:pt x="1790563" y="2878435"/>
-                  </a:lnTo>
-                  <a:lnTo>
-                    <a:pt x="1718940" y="2882812"/>
-                  </a:lnTo>
-                  <a:lnTo>
-                    <a:pt x="1647318" y="2887157"/>
-                  </a:lnTo>
-                  <a:lnTo>
-                    <a:pt x="1575695" y="2891471"/>
-                  </a:lnTo>
-                  <a:lnTo>
-                    <a:pt x="1504073" y="2895754"/>
-                  </a:lnTo>
-                  <a:lnTo>
-                    <a:pt x="1432450" y="2900005"/>
-                  </a:lnTo>
-                  <a:lnTo>
-                    <a:pt x="1360827" y="2904226"/>
-                  </a:lnTo>
-                  <a:lnTo>
-                    <a:pt x="1289205" y="2908417"/>
-                  </a:lnTo>
-                  <a:lnTo>
-                    <a:pt x="1217582" y="2912577"/>
-                  </a:lnTo>
-                  <a:lnTo>
-                    <a:pt x="1145960" y="2916707"/>
-                  </a:lnTo>
-                  <a:lnTo>
-                    <a:pt x="1074337" y="2920807"/>
-                  </a:lnTo>
-                  <a:lnTo>
-                    <a:pt x="1002715" y="2924878"/>
-                  </a:lnTo>
-                  <a:lnTo>
-                    <a:pt x="931092" y="2928919"/>
-                  </a:lnTo>
-                  <a:lnTo>
-                    <a:pt x="859470" y="2932931"/>
-                  </a:lnTo>
-                  <a:lnTo>
-                    <a:pt x="787847" y="2936914"/>
-                  </a:lnTo>
-                  <a:lnTo>
-                    <a:pt x="716225" y="2940868"/>
-                  </a:lnTo>
-                  <a:lnTo>
-                    <a:pt x="644602" y="2944793"/>
-                  </a:lnTo>
-                  <a:lnTo>
-                    <a:pt x="572980" y="2948691"/>
-                  </a:lnTo>
-                  <a:lnTo>
-                    <a:pt x="501357" y="2952560"/>
-                  </a:lnTo>
-                  <a:lnTo>
-                    <a:pt x="429735" y="2956400"/>
-                  </a:lnTo>
-                  <a:lnTo>
-                    <a:pt x="358112" y="2960214"/>
-                  </a:lnTo>
-                  <a:lnTo>
-                    <a:pt x="286490" y="2963999"/>
-                  </a:lnTo>
-                  <a:lnTo>
-                    <a:pt x="214867" y="2967758"/>
-                  </a:lnTo>
-                  <a:lnTo>
-                    <a:pt x="143245" y="2971489"/>
-                  </a:lnTo>
-                  <a:lnTo>
-                    <a:pt x="71622" y="2975193"/>
-                  </a:lnTo>
-                  <a:lnTo>
-                    <a:pt x="0" y="2978870"/>
+                    <a:pt x="2186962" y="63204"/>
+                  </a:lnTo>
+                  <a:lnTo>
+                    <a:pt x="2257509" y="181504"/>
+                  </a:lnTo>
+                  <a:lnTo>
+                    <a:pt x="2328056" y="295411"/>
+                  </a:lnTo>
+                  <a:lnTo>
+                    <a:pt x="2398603" y="405090"/>
+                  </a:lnTo>
+                  <a:lnTo>
+                    <a:pt x="2469151" y="510696"/>
+                  </a:lnTo>
+                  <a:lnTo>
+                    <a:pt x="2539698" y="612381"/>
+                  </a:lnTo>
+                  <a:lnTo>
+                    <a:pt x="2610245" y="710291"/>
+                  </a:lnTo>
+                  <a:lnTo>
+                    <a:pt x="2680792" y="804565"/>
+                  </a:lnTo>
+                  <a:lnTo>
+                    <a:pt x="2751339" y="895339"/>
+                  </a:lnTo>
+                  <a:lnTo>
+                    <a:pt x="2821886" y="982743"/>
+                  </a:lnTo>
+                  <a:lnTo>
+                    <a:pt x="2892434" y="1066902"/>
+                  </a:lnTo>
+                  <a:lnTo>
+                    <a:pt x="2962981" y="1147936"/>
+                  </a:lnTo>
+                  <a:lnTo>
+                    <a:pt x="3033528" y="1225961"/>
+                  </a:lnTo>
+                  <a:lnTo>
+                    <a:pt x="3104075" y="1301089"/>
+                  </a:lnTo>
+                  <a:lnTo>
+                    <a:pt x="3174622" y="1373428"/>
+                  </a:lnTo>
+                  <a:lnTo>
+                    <a:pt x="3245169" y="1443081"/>
+                  </a:lnTo>
+                  <a:lnTo>
+                    <a:pt x="3315717" y="1510148"/>
+                  </a:lnTo>
+                  <a:lnTo>
+                    <a:pt x="3386264" y="1574724"/>
+                  </a:lnTo>
+                  <a:lnTo>
+                    <a:pt x="3456811" y="1636903"/>
+                  </a:lnTo>
+                  <a:lnTo>
+                    <a:pt x="3527358" y="1696774"/>
+                  </a:lnTo>
+                  <a:lnTo>
+                    <a:pt x="3597905" y="1754421"/>
+                  </a:lnTo>
+                  <a:lnTo>
+                    <a:pt x="3668452" y="1809928"/>
+                  </a:lnTo>
+                  <a:lnTo>
+                    <a:pt x="3739000" y="1863374"/>
+                  </a:lnTo>
+                  <a:lnTo>
+                    <a:pt x="3809547" y="1914836"/>
+                  </a:lnTo>
+                  <a:lnTo>
+                    <a:pt x="3880094" y="1964387"/>
+                  </a:lnTo>
+                  <a:lnTo>
+                    <a:pt x="3950641" y="2012099"/>
+                  </a:lnTo>
+                  <a:lnTo>
+                    <a:pt x="4021188" y="2058038"/>
+                  </a:lnTo>
+                  <a:lnTo>
+                    <a:pt x="4091736" y="2102273"/>
+                  </a:lnTo>
+                  <a:lnTo>
+                    <a:pt x="4162283" y="2144864"/>
+                  </a:lnTo>
+                  <a:lnTo>
+                    <a:pt x="4232830" y="2185875"/>
+                  </a:lnTo>
+                  <a:lnTo>
+                    <a:pt x="4303377" y="2225362"/>
+                  </a:lnTo>
+                  <a:lnTo>
+                    <a:pt x="4373924" y="2263384"/>
+                  </a:lnTo>
+                  <a:lnTo>
+                    <a:pt x="4444471" y="2299994"/>
+                  </a:lnTo>
+                  <a:lnTo>
+                    <a:pt x="4515019" y="2335245"/>
+                  </a:lnTo>
+                  <a:lnTo>
+                    <a:pt x="4585566" y="2369186"/>
+                  </a:lnTo>
+                  <a:lnTo>
+                    <a:pt x="4656113" y="2401868"/>
+                  </a:lnTo>
+                  <a:lnTo>
+                    <a:pt x="4726660" y="2433336"/>
+                  </a:lnTo>
+                  <a:lnTo>
+                    <a:pt x="4797207" y="2463636"/>
+                  </a:lnTo>
+                  <a:lnTo>
+                    <a:pt x="4867754" y="2472421"/>
+                  </a:lnTo>
+                  <a:lnTo>
+                    <a:pt x="4938302" y="2466761"/>
+                  </a:lnTo>
+                  <a:lnTo>
+                    <a:pt x="5008849" y="2461061"/>
+                  </a:lnTo>
+                  <a:lnTo>
+                    <a:pt x="5079396" y="2455319"/>
+                  </a:lnTo>
+                  <a:lnTo>
+                    <a:pt x="5149943" y="2449535"/>
+                  </a:lnTo>
+                  <a:lnTo>
+                    <a:pt x="5220490" y="2443709"/>
+                  </a:lnTo>
+                  <a:lnTo>
+                    <a:pt x="5291037" y="2437841"/>
+                  </a:lnTo>
+                  <a:lnTo>
+                    <a:pt x="5361585" y="2431930"/>
+                  </a:lnTo>
+                  <a:lnTo>
+                    <a:pt x="5432132" y="2425976"/>
+                  </a:lnTo>
+                  <a:lnTo>
+                    <a:pt x="5502679" y="2419978"/>
+                  </a:lnTo>
+                  <a:lnTo>
+                    <a:pt x="5573226" y="2413937"/>
+                  </a:lnTo>
+                  <a:lnTo>
+                    <a:pt x="5643773" y="2407852"/>
+                  </a:lnTo>
+                  <a:lnTo>
+                    <a:pt x="5714320" y="2401722"/>
+                  </a:lnTo>
+                  <a:lnTo>
+                    <a:pt x="5784868" y="2395548"/>
+                  </a:lnTo>
+                  <a:lnTo>
+                    <a:pt x="5855415" y="2389329"/>
+                  </a:lnTo>
+                  <a:lnTo>
+                    <a:pt x="5925962" y="2383064"/>
+                  </a:lnTo>
+                  <a:lnTo>
+                    <a:pt x="5996509" y="2376754"/>
+                  </a:lnTo>
+                  <a:lnTo>
+                    <a:pt x="6067056" y="2370398"/>
+                  </a:lnTo>
+                  <a:lnTo>
+                    <a:pt x="6137604" y="2363996"/>
+                  </a:lnTo>
+                  <a:lnTo>
+                    <a:pt x="6208151" y="2357547"/>
+                  </a:lnTo>
+                  <a:lnTo>
+                    <a:pt x="6278698" y="2351051"/>
+                  </a:lnTo>
+                  <a:lnTo>
+                    <a:pt x="6349245" y="2344508"/>
+                  </a:lnTo>
+                  <a:lnTo>
+                    <a:pt x="6419792" y="2337917"/>
+                  </a:lnTo>
+                  <a:lnTo>
+                    <a:pt x="6490339" y="2331278"/>
+                  </a:lnTo>
+                  <a:lnTo>
+                    <a:pt x="6560887" y="2324591"/>
+                  </a:lnTo>
+                  <a:lnTo>
+                    <a:pt x="6631434" y="2317855"/>
+                  </a:lnTo>
+                  <a:lnTo>
+                    <a:pt x="6701981" y="2311070"/>
+                  </a:lnTo>
+                  <a:lnTo>
+                    <a:pt x="6772528" y="2304235"/>
+                  </a:lnTo>
+                  <a:lnTo>
+                    <a:pt x="6843075" y="2297351"/>
+                  </a:lnTo>
+                  <a:lnTo>
+                    <a:pt x="6913622" y="2290417"/>
+                  </a:lnTo>
+                  <a:lnTo>
+                    <a:pt x="6984170" y="2283432"/>
+                  </a:lnTo>
+                  <a:lnTo>
+                    <a:pt x="6984170" y="3006237"/>
+                  </a:lnTo>
+                  <a:lnTo>
+                    <a:pt x="6913622" y="2996861"/>
+                  </a:lnTo>
+                  <a:lnTo>
+                    <a:pt x="6843075" y="2987122"/>
+                  </a:lnTo>
+                  <a:lnTo>
+                    <a:pt x="6772528" y="2977009"/>
+                  </a:lnTo>
+                  <a:lnTo>
+                    <a:pt x="6701981" y="2966505"/>
+                  </a:lnTo>
+                  <a:lnTo>
+                    <a:pt x="6631434" y="2955596"/>
+                  </a:lnTo>
+                  <a:lnTo>
+                    <a:pt x="6560887" y="2944266"/>
+                  </a:lnTo>
+                  <a:lnTo>
+                    <a:pt x="6490339" y="2932500"/>
+                  </a:lnTo>
+                  <a:lnTo>
+                    <a:pt x="6419792" y="2920280"/>
+                  </a:lnTo>
+                  <a:lnTo>
+                    <a:pt x="6349245" y="2907588"/>
+                  </a:lnTo>
+                  <a:lnTo>
+                    <a:pt x="6278698" y="2894408"/>
+                  </a:lnTo>
+                  <a:lnTo>
+                    <a:pt x="6208151" y="2880719"/>
+                  </a:lnTo>
+                  <a:lnTo>
+                    <a:pt x="6137604" y="2866502"/>
+                  </a:lnTo>
+                  <a:lnTo>
+                    <a:pt x="6067056" y="2851737"/>
+                  </a:lnTo>
+                  <a:lnTo>
+                    <a:pt x="5996509" y="2836402"/>
+                  </a:lnTo>
+                  <a:lnTo>
+                    <a:pt x="5925962" y="2820477"/>
+                  </a:lnTo>
+                  <a:lnTo>
+                    <a:pt x="5855415" y="2803937"/>
+                  </a:lnTo>
+                  <a:lnTo>
+                    <a:pt x="5784868" y="2786759"/>
+                  </a:lnTo>
+                  <a:lnTo>
+                    <a:pt x="5714320" y="2768919"/>
+                  </a:lnTo>
+                  <a:lnTo>
+                    <a:pt x="5643773" y="2750391"/>
+                  </a:lnTo>
+                  <a:lnTo>
+                    <a:pt x="5573226" y="2731149"/>
+                  </a:lnTo>
+                  <a:lnTo>
+                    <a:pt x="5502679" y="2711165"/>
+                  </a:lnTo>
+                  <a:lnTo>
+                    <a:pt x="5432132" y="2690410"/>
+                  </a:lnTo>
+                  <a:lnTo>
+                    <a:pt x="5361585" y="2668855"/>
+                  </a:lnTo>
+                  <a:lnTo>
+                    <a:pt x="5291037" y="2646468"/>
+                  </a:lnTo>
+                  <a:lnTo>
+                    <a:pt x="5220490" y="2623218"/>
+                  </a:lnTo>
+                  <a:lnTo>
+                    <a:pt x="5149943" y="2599072"/>
+                  </a:lnTo>
+                  <a:lnTo>
+                    <a:pt x="5079396" y="2573995"/>
+                  </a:lnTo>
+                  <a:lnTo>
+                    <a:pt x="5008849" y="2547951"/>
+                  </a:lnTo>
+                  <a:lnTo>
+                    <a:pt x="4938302" y="2520902"/>
+                  </a:lnTo>
+                  <a:lnTo>
+                    <a:pt x="4867754" y="2492811"/>
+                  </a:lnTo>
+                  <a:lnTo>
+                    <a:pt x="4797207" y="2478039"/>
+                  </a:lnTo>
+                  <a:lnTo>
+                    <a:pt x="4726660" y="2483617"/>
+                  </a:lnTo>
+                  <a:lnTo>
+                    <a:pt x="4656113" y="2489154"/>
+                  </a:lnTo>
+                  <a:lnTo>
+                    <a:pt x="4585566" y="2494651"/>
+                  </a:lnTo>
+                  <a:lnTo>
+                    <a:pt x="4515019" y="2500109"/>
+                  </a:lnTo>
+                  <a:lnTo>
+                    <a:pt x="4444471" y="2505527"/>
+                  </a:lnTo>
+                  <a:lnTo>
+                    <a:pt x="4373924" y="2510906"/>
+                  </a:lnTo>
+                  <a:lnTo>
+                    <a:pt x="4303377" y="2516246"/>
+                  </a:lnTo>
+                  <a:lnTo>
+                    <a:pt x="4232830" y="2521548"/>
+                  </a:lnTo>
+                  <a:lnTo>
+                    <a:pt x="4162283" y="2526811"/>
+                  </a:lnTo>
+                  <a:lnTo>
+                    <a:pt x="4091736" y="2532036"/>
+                  </a:lnTo>
+                  <a:lnTo>
+                    <a:pt x="4021188" y="2537223"/>
+                  </a:lnTo>
+                  <a:lnTo>
+                    <a:pt x="3950641" y="2542373"/>
+                  </a:lnTo>
+                  <a:lnTo>
+                    <a:pt x="3880094" y="2547485"/>
+                  </a:lnTo>
+                  <a:lnTo>
+                    <a:pt x="3809547" y="2552561"/>
+                  </a:lnTo>
+                  <a:lnTo>
+                    <a:pt x="3739000" y="2557600"/>
+                  </a:lnTo>
+                  <a:lnTo>
+                    <a:pt x="3668452" y="2562602"/>
+                  </a:lnTo>
+                  <a:lnTo>
+                    <a:pt x="3597905" y="2567568"/>
+                  </a:lnTo>
+                  <a:lnTo>
+                    <a:pt x="3527358" y="2572498"/>
+                  </a:lnTo>
+                  <a:lnTo>
+                    <a:pt x="3456811" y="2577393"/>
+                  </a:lnTo>
+                  <a:lnTo>
+                    <a:pt x="3386264" y="2582252"/>
+                  </a:lnTo>
+                  <a:lnTo>
+                    <a:pt x="3315717" y="2587077"/>
+                  </a:lnTo>
+                  <a:lnTo>
+                    <a:pt x="3245169" y="2591866"/>
+                  </a:lnTo>
+                  <a:lnTo>
+                    <a:pt x="3174622" y="2596620"/>
+                  </a:lnTo>
+                  <a:lnTo>
+                    <a:pt x="3104075" y="2601341"/>
+                  </a:lnTo>
+                  <a:lnTo>
+                    <a:pt x="3033528" y="2606027"/>
+                  </a:lnTo>
+                  <a:lnTo>
+                    <a:pt x="2962981" y="2610679"/>
+                  </a:lnTo>
+                  <a:lnTo>
+                    <a:pt x="2892434" y="2615298"/>
+                  </a:lnTo>
+                  <a:lnTo>
+                    <a:pt x="2821886" y="2619883"/>
+                  </a:lnTo>
+                  <a:lnTo>
+                    <a:pt x="2751339" y="2624435"/>
+                  </a:lnTo>
+                  <a:lnTo>
+                    <a:pt x="2680792" y="2628954"/>
+                  </a:lnTo>
+                  <a:lnTo>
+                    <a:pt x="2610245" y="2633440"/>
+                  </a:lnTo>
+                  <a:lnTo>
+                    <a:pt x="2539698" y="2637894"/>
+                  </a:lnTo>
+                  <a:lnTo>
+                    <a:pt x="2469151" y="2642316"/>
+                  </a:lnTo>
+                  <a:lnTo>
+                    <a:pt x="2398603" y="2646706"/>
+                  </a:lnTo>
+                  <a:lnTo>
+                    <a:pt x="2328056" y="2651064"/>
+                  </a:lnTo>
+                  <a:lnTo>
+                    <a:pt x="2257509" y="2655391"/>
+                  </a:lnTo>
+                  <a:lnTo>
+                    <a:pt x="2186962" y="2659686"/>
+                  </a:lnTo>
+                  <a:lnTo>
+                    <a:pt x="2116415" y="2663950"/>
+                  </a:lnTo>
+                  <a:lnTo>
+                    <a:pt x="2045868" y="2668184"/>
+                  </a:lnTo>
+                  <a:lnTo>
+                    <a:pt x="1975320" y="2672386"/>
+                  </a:lnTo>
+                  <a:lnTo>
+                    <a:pt x="1904773" y="2676559"/>
+                  </a:lnTo>
+                  <a:lnTo>
+                    <a:pt x="1834226" y="2680701"/>
+                  </a:lnTo>
+                  <a:lnTo>
+                    <a:pt x="1763679" y="2684813"/>
+                  </a:lnTo>
+                  <a:lnTo>
+                    <a:pt x="1693132" y="2688896"/>
+                  </a:lnTo>
+                  <a:lnTo>
+                    <a:pt x="1622584" y="2692949"/>
+                  </a:lnTo>
+                  <a:lnTo>
+                    <a:pt x="1552037" y="2696972"/>
+                  </a:lnTo>
+                  <a:lnTo>
+                    <a:pt x="1481490" y="2700967"/>
+                  </a:lnTo>
+                  <a:lnTo>
+                    <a:pt x="1410943" y="2704933"/>
+                  </a:lnTo>
+                  <a:lnTo>
+                    <a:pt x="1340396" y="2708870"/>
+                  </a:lnTo>
+                  <a:lnTo>
+                    <a:pt x="1269849" y="2712778"/>
+                  </a:lnTo>
+                  <a:lnTo>
+                    <a:pt x="1199301" y="2716659"/>
+                  </a:lnTo>
+                  <a:lnTo>
+                    <a:pt x="1128754" y="2720511"/>
+                  </a:lnTo>
+                  <a:lnTo>
+                    <a:pt x="1058207" y="2724335"/>
+                  </a:lnTo>
+                  <a:lnTo>
+                    <a:pt x="987660" y="2728132"/>
+                  </a:lnTo>
+                  <a:lnTo>
+                    <a:pt x="917113" y="2731901"/>
+                  </a:lnTo>
+                  <a:lnTo>
+                    <a:pt x="846566" y="2735643"/>
+                  </a:lnTo>
+                  <a:lnTo>
+                    <a:pt x="776018" y="2739358"/>
+                  </a:lnTo>
+                  <a:lnTo>
+                    <a:pt x="705471" y="2743047"/>
+                  </a:lnTo>
+                  <a:lnTo>
+                    <a:pt x="634924" y="2746708"/>
+                  </a:lnTo>
+                  <a:lnTo>
+                    <a:pt x="564377" y="2750343"/>
+                  </a:lnTo>
+                  <a:lnTo>
+                    <a:pt x="493830" y="2753952"/>
+                  </a:lnTo>
+                  <a:lnTo>
+                    <a:pt x="423283" y="2757534"/>
+                  </a:lnTo>
+                  <a:lnTo>
+                    <a:pt x="352735" y="2761091"/>
+                  </a:lnTo>
+                  <a:lnTo>
+                    <a:pt x="282188" y="2764622"/>
+                  </a:lnTo>
+                  <a:lnTo>
+                    <a:pt x="211641" y="2768127"/>
+                  </a:lnTo>
+                  <a:lnTo>
+                    <a:pt x="141094" y="2771607"/>
+                  </a:lnTo>
+                  <a:lnTo>
+                    <a:pt x="70547" y="2775062"/>
+                  </a:lnTo>
+                  <a:lnTo>
+                    <a:pt x="0" y="2778492"/>
                   </a:lnTo>
                   <a:close/>
                 </a:path>
@@ -3543,222 +3543,222 @@
           </p:nvSpPr>
           <p:spPr>
             <a:xfrm>
-              <a:off x="3355502" y="2073503"/>
-              <a:ext cx="4907176" cy="2650725"/>
+              <a:off x="3415524" y="2209169"/>
+              <a:ext cx="4833499" cy="2472421"/>
             </a:xfrm>
             <a:custGeom>
               <a:avLst/>
               <a:pathLst>
-                <a:path w="4907176" h="2650725">
+                <a:path w="4833499" h="2472421">
                   <a:moveTo>
                     <a:pt x="0" y="0"/>
                   </a:moveTo>
                   <a:lnTo>
-                    <a:pt x="36845" y="67762"/>
-                  </a:lnTo>
-                  <a:lnTo>
-                    <a:pt x="108467" y="194593"/>
-                  </a:lnTo>
-                  <a:lnTo>
-                    <a:pt x="180090" y="316716"/>
-                  </a:lnTo>
-                  <a:lnTo>
-                    <a:pt x="251712" y="434304"/>
-                  </a:lnTo>
-                  <a:lnTo>
-                    <a:pt x="323335" y="547526"/>
-                  </a:lnTo>
-                  <a:lnTo>
-                    <a:pt x="394957" y="656545"/>
-                  </a:lnTo>
-                  <a:lnTo>
-                    <a:pt x="466580" y="761515"/>
-                  </a:lnTo>
-                  <a:lnTo>
-                    <a:pt x="538202" y="862588"/>
-                  </a:lnTo>
-                  <a:lnTo>
-                    <a:pt x="609825" y="959909"/>
-                  </a:lnTo>
-                  <a:lnTo>
-                    <a:pt x="681447" y="1053616"/>
-                  </a:lnTo>
-                  <a:lnTo>
-                    <a:pt x="753070" y="1143844"/>
-                  </a:lnTo>
-                  <a:lnTo>
-                    <a:pt x="824692" y="1230722"/>
-                  </a:lnTo>
-                  <a:lnTo>
-                    <a:pt x="896315" y="1314374"/>
-                  </a:lnTo>
-                  <a:lnTo>
-                    <a:pt x="967937" y="1394920"/>
-                  </a:lnTo>
-                  <a:lnTo>
-                    <a:pt x="1039560" y="1472476"/>
-                  </a:lnTo>
-                  <a:lnTo>
-                    <a:pt x="1111182" y="1547152"/>
-                  </a:lnTo>
-                  <a:lnTo>
-                    <a:pt x="1182805" y="1619056"/>
-                  </a:lnTo>
-                  <a:lnTo>
-                    <a:pt x="1254428" y="1688289"/>
-                  </a:lnTo>
-                  <a:lnTo>
-                    <a:pt x="1326050" y="1754953"/>
-                  </a:lnTo>
-                  <a:lnTo>
-                    <a:pt x="1397673" y="1819141"/>
-                  </a:lnTo>
-                  <a:lnTo>
-                    <a:pt x="1469295" y="1880945"/>
-                  </a:lnTo>
-                  <a:lnTo>
-                    <a:pt x="1540918" y="1940456"/>
-                  </a:lnTo>
-                  <a:lnTo>
-                    <a:pt x="1612540" y="1997756"/>
-                  </a:lnTo>
-                  <a:lnTo>
-                    <a:pt x="1684163" y="2052929"/>
-                  </a:lnTo>
-                  <a:lnTo>
-                    <a:pt x="1755785" y="2106054"/>
-                  </a:lnTo>
-                  <a:lnTo>
-                    <a:pt x="1827408" y="2157206"/>
-                  </a:lnTo>
-                  <a:lnTo>
-                    <a:pt x="1899030" y="2206459"/>
-                  </a:lnTo>
-                  <a:lnTo>
-                    <a:pt x="1970653" y="2253883"/>
-                  </a:lnTo>
-                  <a:lnTo>
-                    <a:pt x="2042275" y="2299546"/>
-                  </a:lnTo>
-                  <a:lnTo>
-                    <a:pt x="2113898" y="2343514"/>
-                  </a:lnTo>
-                  <a:lnTo>
-                    <a:pt x="2185520" y="2385850"/>
-                  </a:lnTo>
-                  <a:lnTo>
-                    <a:pt x="2257143" y="2426613"/>
-                  </a:lnTo>
-                  <a:lnTo>
-                    <a:pt x="2328765" y="2465864"/>
-                  </a:lnTo>
-                  <a:lnTo>
-                    <a:pt x="2400388" y="2503656"/>
-                  </a:lnTo>
-                  <a:lnTo>
-                    <a:pt x="2472010" y="2540046"/>
-                  </a:lnTo>
-                  <a:lnTo>
-                    <a:pt x="2543633" y="2575084"/>
-                  </a:lnTo>
-                  <a:lnTo>
-                    <a:pt x="2615256" y="2608822"/>
-                  </a:lnTo>
-                  <a:lnTo>
-                    <a:pt x="2686878" y="2641307"/>
-                  </a:lnTo>
-                  <a:lnTo>
-                    <a:pt x="2758501" y="2650725"/>
-                  </a:lnTo>
-                  <a:lnTo>
-                    <a:pt x="2830123" y="2644658"/>
-                  </a:lnTo>
-                  <a:lnTo>
-                    <a:pt x="2901746" y="2638546"/>
-                  </a:lnTo>
-                  <a:lnTo>
-                    <a:pt x="2973368" y="2632390"/>
-                  </a:lnTo>
-                  <a:lnTo>
-                    <a:pt x="3044991" y="2626189"/>
-                  </a:lnTo>
-                  <a:lnTo>
-                    <a:pt x="3116613" y="2619943"/>
-                  </a:lnTo>
-                  <a:lnTo>
-                    <a:pt x="3188236" y="2613652"/>
-                  </a:lnTo>
-                  <a:lnTo>
-                    <a:pt x="3259858" y="2607314"/>
-                  </a:lnTo>
-                  <a:lnTo>
-                    <a:pt x="3331481" y="2600931"/>
-                  </a:lnTo>
-                  <a:lnTo>
-                    <a:pt x="3403103" y="2594501"/>
-                  </a:lnTo>
-                  <a:lnTo>
-                    <a:pt x="3474726" y="2588024"/>
-                  </a:lnTo>
-                  <a:lnTo>
-                    <a:pt x="3546348" y="2581500"/>
-                  </a:lnTo>
-                  <a:lnTo>
-                    <a:pt x="3617971" y="2574928"/>
-                  </a:lnTo>
-                  <a:lnTo>
-                    <a:pt x="3689593" y="2568309"/>
-                  </a:lnTo>
-                  <a:lnTo>
-                    <a:pt x="3761216" y="2561641"/>
-                  </a:lnTo>
-                  <a:lnTo>
-                    <a:pt x="3832838" y="2554925"/>
-                  </a:lnTo>
-                  <a:lnTo>
-                    <a:pt x="3904461" y="2548160"/>
-                  </a:lnTo>
-                  <a:lnTo>
-                    <a:pt x="3976084" y="2541345"/>
-                  </a:lnTo>
-                  <a:lnTo>
-                    <a:pt x="4047706" y="2534481"/>
-                  </a:lnTo>
-                  <a:lnTo>
-                    <a:pt x="4119329" y="2527567"/>
-                  </a:lnTo>
-                  <a:lnTo>
-                    <a:pt x="4190951" y="2520603"/>
-                  </a:lnTo>
-                  <a:lnTo>
-                    <a:pt x="4262574" y="2513588"/>
-                  </a:lnTo>
-                  <a:lnTo>
-                    <a:pt x="4334196" y="2506521"/>
-                  </a:lnTo>
-                  <a:lnTo>
-                    <a:pt x="4405819" y="2499404"/>
-                  </a:lnTo>
-                  <a:lnTo>
-                    <a:pt x="4477441" y="2492234"/>
-                  </a:lnTo>
-                  <a:lnTo>
-                    <a:pt x="4549064" y="2485012"/>
-                  </a:lnTo>
-                  <a:lnTo>
-                    <a:pt x="4620686" y="2477738"/>
-                  </a:lnTo>
-                  <a:lnTo>
-                    <a:pt x="4692309" y="2470411"/>
-                  </a:lnTo>
-                  <a:lnTo>
-                    <a:pt x="4763931" y="2463030"/>
-                  </a:lnTo>
-                  <a:lnTo>
-                    <a:pt x="4835554" y="2455596"/>
-                  </a:lnTo>
-                  <a:lnTo>
-                    <a:pt x="4907176" y="2448107"/>
+                    <a:pt x="36291" y="63204"/>
+                  </a:lnTo>
+                  <a:lnTo>
+                    <a:pt x="106839" y="181504"/>
+                  </a:lnTo>
+                  <a:lnTo>
+                    <a:pt x="177386" y="295411"/>
+                  </a:lnTo>
+                  <a:lnTo>
+                    <a:pt x="247933" y="405090"/>
+                  </a:lnTo>
+                  <a:lnTo>
+                    <a:pt x="318480" y="510696"/>
+                  </a:lnTo>
+                  <a:lnTo>
+                    <a:pt x="389027" y="612381"/>
+                  </a:lnTo>
+                  <a:lnTo>
+                    <a:pt x="459574" y="710291"/>
+                  </a:lnTo>
+                  <a:lnTo>
+                    <a:pt x="530122" y="804565"/>
+                  </a:lnTo>
+                  <a:lnTo>
+                    <a:pt x="600669" y="895339"/>
+                  </a:lnTo>
+                  <a:lnTo>
+                    <a:pt x="671216" y="982743"/>
+                  </a:lnTo>
+                  <a:lnTo>
+                    <a:pt x="741763" y="1066902"/>
+                  </a:lnTo>
+                  <a:lnTo>
+                    <a:pt x="812310" y="1147936"/>
+                  </a:lnTo>
+                  <a:lnTo>
+                    <a:pt x="882857" y="1225961"/>
+                  </a:lnTo>
+                  <a:lnTo>
+                    <a:pt x="953405" y="1301089"/>
+                  </a:lnTo>
+                  <a:lnTo>
+                    <a:pt x="1023952" y="1373428"/>
+                  </a:lnTo>
+                  <a:lnTo>
+                    <a:pt x="1094499" y="1443081"/>
+                  </a:lnTo>
+                  <a:lnTo>
+                    <a:pt x="1165046" y="1510148"/>
+                  </a:lnTo>
+                  <a:lnTo>
+                    <a:pt x="1235593" y="1574724"/>
+                  </a:lnTo>
+                  <a:lnTo>
+                    <a:pt x="1306140" y="1636903"/>
+                  </a:lnTo>
+                  <a:lnTo>
+                    <a:pt x="1376688" y="1696774"/>
+                  </a:lnTo>
+                  <a:lnTo>
+                    <a:pt x="1447235" y="1754421"/>
+                  </a:lnTo>
+                  <a:lnTo>
+                    <a:pt x="1517782" y="1809928"/>
+                  </a:lnTo>
+                  <a:lnTo>
+                    <a:pt x="1588329" y="1863374"/>
+                  </a:lnTo>
+                  <a:lnTo>
+                    <a:pt x="1658876" y="1914836"/>
+                  </a:lnTo>
+                  <a:lnTo>
+                    <a:pt x="1729424" y="1964387"/>
+                  </a:lnTo>
+                  <a:lnTo>
+                    <a:pt x="1799971" y="2012099"/>
+                  </a:lnTo>
+                  <a:lnTo>
+                    <a:pt x="1870518" y="2058038"/>
+                  </a:lnTo>
+                  <a:lnTo>
+                    <a:pt x="1941065" y="2102273"/>
+                  </a:lnTo>
+                  <a:lnTo>
+                    <a:pt x="2011612" y="2144864"/>
+                  </a:lnTo>
+                  <a:lnTo>
+                    <a:pt x="2082159" y="2185875"/>
+                  </a:lnTo>
+                  <a:lnTo>
+                    <a:pt x="2152707" y="2225362"/>
+                  </a:lnTo>
+                  <a:lnTo>
+                    <a:pt x="2223254" y="2263384"/>
+                  </a:lnTo>
+                  <a:lnTo>
+                    <a:pt x="2293801" y="2299994"/>
+                  </a:lnTo>
+                  <a:lnTo>
+                    <a:pt x="2364348" y="2335245"/>
+                  </a:lnTo>
+                  <a:lnTo>
+                    <a:pt x="2434895" y="2369186"/>
+                  </a:lnTo>
+                  <a:lnTo>
+                    <a:pt x="2505442" y="2401868"/>
+                  </a:lnTo>
+                  <a:lnTo>
+                    <a:pt x="2575990" y="2433336"/>
+                  </a:lnTo>
+                  <a:lnTo>
+                    <a:pt x="2646537" y="2463636"/>
+                  </a:lnTo>
+                  <a:lnTo>
+                    <a:pt x="2717084" y="2472421"/>
+                  </a:lnTo>
+                  <a:lnTo>
+                    <a:pt x="2787631" y="2466761"/>
+                  </a:lnTo>
+                  <a:lnTo>
+                    <a:pt x="2858178" y="2461061"/>
+                  </a:lnTo>
+                  <a:lnTo>
+                    <a:pt x="2928725" y="2455319"/>
+                  </a:lnTo>
+                  <a:lnTo>
+                    <a:pt x="2999273" y="2449535"/>
+                  </a:lnTo>
+                  <a:lnTo>
+                    <a:pt x="3069820" y="2443709"/>
+                  </a:lnTo>
+                  <a:lnTo>
+                    <a:pt x="3140367" y="2437841"/>
+                  </a:lnTo>
+                  <a:lnTo>
+                    <a:pt x="3210914" y="2431930"/>
+                  </a:lnTo>
+                  <a:lnTo>
+                    <a:pt x="3281461" y="2425976"/>
+                  </a:lnTo>
+                  <a:lnTo>
+                    <a:pt x="3352008" y="2419978"/>
+                  </a:lnTo>
+                  <a:lnTo>
+                    <a:pt x="3422556" y="2413937"/>
+                  </a:lnTo>
+                  <a:lnTo>
+                    <a:pt x="3493103" y="2407852"/>
+                  </a:lnTo>
+                  <a:lnTo>
+                    <a:pt x="3563650" y="2401722"/>
+                  </a:lnTo>
+                  <a:lnTo>
+                    <a:pt x="3634197" y="2395548"/>
+                  </a:lnTo>
+                  <a:lnTo>
+                    <a:pt x="3704744" y="2389329"/>
+                  </a:lnTo>
+                  <a:lnTo>
+                    <a:pt x="3775292" y="2383064"/>
+                  </a:lnTo>
+                  <a:lnTo>
+                    <a:pt x="3845839" y="2376754"/>
+                  </a:lnTo>
+                  <a:lnTo>
+                    <a:pt x="3916386" y="2370398"/>
+                  </a:lnTo>
+                  <a:lnTo>
+                    <a:pt x="3986933" y="2363996"/>
+                  </a:lnTo>
+                  <a:lnTo>
+                    <a:pt x="4057480" y="2357547"/>
+                  </a:lnTo>
+                  <a:lnTo>
+                    <a:pt x="4128027" y="2351051"/>
+                  </a:lnTo>
+                  <a:lnTo>
+                    <a:pt x="4198575" y="2344508"/>
+                  </a:lnTo>
+                  <a:lnTo>
+                    <a:pt x="4269122" y="2337917"/>
+                  </a:lnTo>
+                  <a:lnTo>
+                    <a:pt x="4339669" y="2331278"/>
+                  </a:lnTo>
+                  <a:lnTo>
+                    <a:pt x="4410216" y="2324591"/>
+                  </a:lnTo>
+                  <a:lnTo>
+                    <a:pt x="4480763" y="2317855"/>
+                  </a:lnTo>
+                  <a:lnTo>
+                    <a:pt x="4551310" y="2311070"/>
+                  </a:lnTo>
+                  <a:lnTo>
+                    <a:pt x="4621858" y="2304235"/>
+                  </a:lnTo>
+                  <a:lnTo>
+                    <a:pt x="4692405" y="2297351"/>
+                  </a:lnTo>
+                  <a:lnTo>
+                    <a:pt x="4762952" y="2290417"/>
+                  </a:lnTo>
+                  <a:lnTo>
+                    <a:pt x="4833499" y="2283432"/>
                   </a:lnTo>
                 </a:path>
               </a:pathLst>
@@ -3778,312 +3778,312 @@
           </p:nvSpPr>
           <p:spPr>
             <a:xfrm>
-              <a:off x="1172049" y="4730252"/>
-              <a:ext cx="7090630" cy="566290"/>
+              <a:off x="1264853" y="4687208"/>
+              <a:ext cx="6984170" cy="528198"/>
             </a:xfrm>
             <a:custGeom>
               <a:avLst/>
               <a:pathLst>
-                <a:path w="7090630" h="566290">
+                <a:path w="6984170" h="528198">
                   <a:moveTo>
-                    <a:pt x="7090630" y="566290"/>
+                    <a:pt x="6984170" y="528198"/>
                   </a:moveTo>
                   <a:lnTo>
-                    <a:pt x="7019007" y="556237"/>
-                  </a:lnTo>
-                  <a:lnTo>
-                    <a:pt x="6947385" y="545797"/>
-                  </a:lnTo>
-                  <a:lnTo>
-                    <a:pt x="6875762" y="534953"/>
-                  </a:lnTo>
-                  <a:lnTo>
-                    <a:pt x="6804139" y="523692"/>
-                  </a:lnTo>
-                  <a:lnTo>
-                    <a:pt x="6732517" y="511996"/>
-                  </a:lnTo>
-                  <a:lnTo>
-                    <a:pt x="6660894" y="499850"/>
-                  </a:lnTo>
-                  <a:lnTo>
-                    <a:pt x="6589272" y="487235"/>
-                  </a:lnTo>
-                  <a:lnTo>
-                    <a:pt x="6517649" y="474133"/>
-                  </a:lnTo>
-                  <a:lnTo>
-                    <a:pt x="6446027" y="460527"/>
-                  </a:lnTo>
-                  <a:lnTo>
-                    <a:pt x="6374404" y="446396"/>
-                  </a:lnTo>
-                  <a:lnTo>
-                    <a:pt x="6302782" y="431719"/>
-                  </a:lnTo>
-                  <a:lnTo>
-                    <a:pt x="6231159" y="416477"/>
-                  </a:lnTo>
-                  <a:lnTo>
-                    <a:pt x="6159537" y="400647"/>
-                  </a:lnTo>
-                  <a:lnTo>
-                    <a:pt x="6087914" y="384207"/>
-                  </a:lnTo>
-                  <a:lnTo>
-                    <a:pt x="6016292" y="367133"/>
-                  </a:lnTo>
-                  <a:lnTo>
-                    <a:pt x="5944669" y="349400"/>
-                  </a:lnTo>
-                  <a:lnTo>
-                    <a:pt x="5873047" y="330984"/>
-                  </a:lnTo>
-                  <a:lnTo>
-                    <a:pt x="5801424" y="311857"/>
-                  </a:lnTo>
-                  <a:lnTo>
-                    <a:pt x="5729802" y="291993"/>
-                  </a:lnTo>
-                  <a:lnTo>
-                    <a:pt x="5658179" y="271363"/>
-                  </a:lnTo>
-                  <a:lnTo>
-                    <a:pt x="5586557" y="249938"/>
-                  </a:lnTo>
-                  <a:lnTo>
-                    <a:pt x="5514934" y="227686"/>
-                  </a:lnTo>
-                  <a:lnTo>
-                    <a:pt x="5443311" y="204576"/>
-                  </a:lnTo>
-                  <a:lnTo>
-                    <a:pt x="5371689" y="180575"/>
-                  </a:lnTo>
-                  <a:lnTo>
-                    <a:pt x="5300066" y="155649"/>
-                  </a:lnTo>
-                  <a:lnTo>
-                    <a:pt x="5228444" y="129761"/>
-                  </a:lnTo>
-                  <a:lnTo>
-                    <a:pt x="5156821" y="102876"/>
-                  </a:lnTo>
-                  <a:lnTo>
-                    <a:pt x="5085199" y="74953"/>
-                  </a:lnTo>
-                  <a:lnTo>
-                    <a:pt x="5013576" y="45954"/>
-                  </a:lnTo>
-                  <a:lnTo>
-                    <a:pt x="4941954" y="15836"/>
-                  </a:lnTo>
-                  <a:lnTo>
-                    <a:pt x="4870331" y="0"/>
-                  </a:lnTo>
-                  <a:lnTo>
-                    <a:pt x="4798709" y="5979"/>
-                  </a:lnTo>
-                  <a:lnTo>
-                    <a:pt x="4727086" y="11916"/>
-                  </a:lnTo>
-                  <a:lnTo>
-                    <a:pt x="4655464" y="17810"/>
-                  </a:lnTo>
-                  <a:lnTo>
-                    <a:pt x="4583841" y="23661"/>
-                  </a:lnTo>
-                  <a:lnTo>
-                    <a:pt x="4512219" y="29470"/>
-                  </a:lnTo>
-                  <a:lnTo>
-                    <a:pt x="4440596" y="35237"/>
-                  </a:lnTo>
-                  <a:lnTo>
-                    <a:pt x="4368974" y="40962"/>
-                  </a:lnTo>
-                  <a:lnTo>
-                    <a:pt x="4297351" y="46646"/>
-                  </a:lnTo>
-                  <a:lnTo>
-                    <a:pt x="4225729" y="52288"/>
-                  </a:lnTo>
-                  <a:lnTo>
-                    <a:pt x="4154106" y="57890"/>
-                  </a:lnTo>
-                  <a:lnTo>
-                    <a:pt x="4082483" y="63452"/>
-                  </a:lnTo>
-                  <a:lnTo>
-                    <a:pt x="4010861" y="68973"/>
-                  </a:lnTo>
-                  <a:lnTo>
-                    <a:pt x="3939238" y="74454"/>
-                  </a:lnTo>
-                  <a:lnTo>
-                    <a:pt x="3867616" y="79895"/>
-                  </a:lnTo>
-                  <a:lnTo>
-                    <a:pt x="3795993" y="85298"/>
-                  </a:lnTo>
-                  <a:lnTo>
-                    <a:pt x="3724371" y="90661"/>
-                  </a:lnTo>
-                  <a:lnTo>
-                    <a:pt x="3652748" y="95985"/>
-                  </a:lnTo>
-                  <a:lnTo>
-                    <a:pt x="3581126" y="101271"/>
-                  </a:lnTo>
-                  <a:lnTo>
-                    <a:pt x="3509503" y="106519"/>
-                  </a:lnTo>
-                  <a:lnTo>
-                    <a:pt x="3437881" y="111728"/>
-                  </a:lnTo>
-                  <a:lnTo>
-                    <a:pt x="3366258" y="116900"/>
-                  </a:lnTo>
-                  <a:lnTo>
-                    <a:pt x="3294636" y="122035"/>
-                  </a:lnTo>
-                  <a:lnTo>
-                    <a:pt x="3223013" y="127133"/>
-                  </a:lnTo>
-                  <a:lnTo>
-                    <a:pt x="3151391" y="132193"/>
-                  </a:lnTo>
-                  <a:lnTo>
-                    <a:pt x="3079768" y="137217"/>
-                  </a:lnTo>
-                  <a:lnTo>
-                    <a:pt x="3008146" y="142205"/>
-                  </a:lnTo>
-                  <a:lnTo>
-                    <a:pt x="2936523" y="147157"/>
-                  </a:lnTo>
-                  <a:lnTo>
-                    <a:pt x="2864901" y="152073"/>
-                  </a:lnTo>
-                  <a:lnTo>
-                    <a:pt x="2793278" y="156953"/>
-                  </a:lnTo>
-                  <a:lnTo>
-                    <a:pt x="2721655" y="161798"/>
-                  </a:lnTo>
-                  <a:lnTo>
-                    <a:pt x="2650033" y="166608"/>
-                  </a:lnTo>
-                  <a:lnTo>
-                    <a:pt x="2578410" y="171383"/>
-                  </a:lnTo>
-                  <a:lnTo>
-                    <a:pt x="2506788" y="176124"/>
-                  </a:lnTo>
-                  <a:lnTo>
-                    <a:pt x="2435165" y="180830"/>
-                  </a:lnTo>
-                  <a:lnTo>
-                    <a:pt x="2363543" y="185503"/>
-                  </a:lnTo>
-                  <a:lnTo>
-                    <a:pt x="2291920" y="190141"/>
-                  </a:lnTo>
-                  <a:lnTo>
-                    <a:pt x="2220298" y="194746"/>
-                  </a:lnTo>
-                  <a:lnTo>
-                    <a:pt x="2148675" y="199318"/>
-                  </a:lnTo>
-                  <a:lnTo>
-                    <a:pt x="2077053" y="203857"/>
-                  </a:lnTo>
-                  <a:lnTo>
-                    <a:pt x="2005430" y="208363"/>
-                  </a:lnTo>
-                  <a:lnTo>
-                    <a:pt x="1933808" y="212836"/>
-                  </a:lnTo>
-                  <a:lnTo>
-                    <a:pt x="1862185" y="217277"/>
-                  </a:lnTo>
-                  <a:lnTo>
-                    <a:pt x="1790563" y="221686"/>
-                  </a:lnTo>
-                  <a:lnTo>
-                    <a:pt x="1718940" y="226063"/>
-                  </a:lnTo>
-                  <a:lnTo>
-                    <a:pt x="1647318" y="230408"/>
-                  </a:lnTo>
-                  <a:lnTo>
-                    <a:pt x="1575695" y="234722"/>
-                  </a:lnTo>
-                  <a:lnTo>
-                    <a:pt x="1504073" y="239004"/>
-                  </a:lnTo>
-                  <a:lnTo>
-                    <a:pt x="1432450" y="243256"/>
-                  </a:lnTo>
-                  <a:lnTo>
-                    <a:pt x="1360827" y="247477"/>
-                  </a:lnTo>
-                  <a:lnTo>
-                    <a:pt x="1289205" y="251668"/>
-                  </a:lnTo>
-                  <a:lnTo>
-                    <a:pt x="1217582" y="255828"/>
-                  </a:lnTo>
-                  <a:lnTo>
-                    <a:pt x="1145960" y="259958"/>
-                  </a:lnTo>
-                  <a:lnTo>
-                    <a:pt x="1074337" y="264058"/>
-                  </a:lnTo>
-                  <a:lnTo>
-                    <a:pt x="1002715" y="268129"/>
-                  </a:lnTo>
-                  <a:lnTo>
-                    <a:pt x="931092" y="272170"/>
-                  </a:lnTo>
-                  <a:lnTo>
-                    <a:pt x="859470" y="276182"/>
-                  </a:lnTo>
-                  <a:lnTo>
-                    <a:pt x="787847" y="280165"/>
-                  </a:lnTo>
-                  <a:lnTo>
-                    <a:pt x="716225" y="284119"/>
-                  </a:lnTo>
-                  <a:lnTo>
-                    <a:pt x="644602" y="288044"/>
-                  </a:lnTo>
-                  <a:lnTo>
-                    <a:pt x="572980" y="291941"/>
-                  </a:lnTo>
-                  <a:lnTo>
-                    <a:pt x="501357" y="295810"/>
-                  </a:lnTo>
-                  <a:lnTo>
-                    <a:pt x="429735" y="299651"/>
-                  </a:lnTo>
-                  <a:lnTo>
-                    <a:pt x="358112" y="303464"/>
-                  </a:lnTo>
-                  <a:lnTo>
-                    <a:pt x="286490" y="307250"/>
-                  </a:lnTo>
-                  <a:lnTo>
-                    <a:pt x="214867" y="311008"/>
-                  </a:lnTo>
-                  <a:lnTo>
-                    <a:pt x="143245" y="314739"/>
-                  </a:lnTo>
-                  <a:lnTo>
-                    <a:pt x="71622" y="318443"/>
-                  </a:lnTo>
-                  <a:lnTo>
-                    <a:pt x="0" y="322121"/>
+                    <a:pt x="6913622" y="518821"/>
+                  </a:lnTo>
+                  <a:lnTo>
+                    <a:pt x="6843075" y="509083"/>
+                  </a:lnTo>
+                  <a:lnTo>
+                    <a:pt x="6772528" y="498969"/>
+                  </a:lnTo>
+                  <a:lnTo>
+                    <a:pt x="6701981" y="488465"/>
+                  </a:lnTo>
+                  <a:lnTo>
+                    <a:pt x="6631434" y="477556"/>
+                  </a:lnTo>
+                  <a:lnTo>
+                    <a:pt x="6560887" y="466227"/>
+                  </a:lnTo>
+                  <a:lnTo>
+                    <a:pt x="6490339" y="454460"/>
+                  </a:lnTo>
+                  <a:lnTo>
+                    <a:pt x="6419792" y="442240"/>
+                  </a:lnTo>
+                  <a:lnTo>
+                    <a:pt x="6349245" y="429549"/>
+                  </a:lnTo>
+                  <a:lnTo>
+                    <a:pt x="6278698" y="416368"/>
+                  </a:lnTo>
+                  <a:lnTo>
+                    <a:pt x="6208151" y="402679"/>
+                  </a:lnTo>
+                  <a:lnTo>
+                    <a:pt x="6137604" y="388462"/>
+                  </a:lnTo>
+                  <a:lnTo>
+                    <a:pt x="6067056" y="373697"/>
+                  </a:lnTo>
+                  <a:lnTo>
+                    <a:pt x="5996509" y="358363"/>
+                  </a:lnTo>
+                  <a:lnTo>
+                    <a:pt x="5925962" y="342437"/>
+                  </a:lnTo>
+                  <a:lnTo>
+                    <a:pt x="5855415" y="325897"/>
+                  </a:lnTo>
+                  <a:lnTo>
+                    <a:pt x="5784868" y="308720"/>
+                  </a:lnTo>
+                  <a:lnTo>
+                    <a:pt x="5714320" y="290880"/>
+                  </a:lnTo>
+                  <a:lnTo>
+                    <a:pt x="5643773" y="272352"/>
+                  </a:lnTo>
+                  <a:lnTo>
+                    <a:pt x="5573226" y="253110"/>
+                  </a:lnTo>
+                  <a:lnTo>
+                    <a:pt x="5502679" y="233125"/>
+                  </a:lnTo>
+                  <a:lnTo>
+                    <a:pt x="5432132" y="212370"/>
+                  </a:lnTo>
+                  <a:lnTo>
+                    <a:pt x="5361585" y="190815"/>
+                  </a:lnTo>
+                  <a:lnTo>
+                    <a:pt x="5291037" y="168429"/>
+                  </a:lnTo>
+                  <a:lnTo>
+                    <a:pt x="5220490" y="145179"/>
+                  </a:lnTo>
+                  <a:lnTo>
+                    <a:pt x="5149943" y="121033"/>
+                  </a:lnTo>
+                  <a:lnTo>
+                    <a:pt x="5079396" y="95955"/>
+                  </a:lnTo>
+                  <a:lnTo>
+                    <a:pt x="5008849" y="69911"/>
+                  </a:lnTo>
+                  <a:lnTo>
+                    <a:pt x="4938302" y="42863"/>
+                  </a:lnTo>
+                  <a:lnTo>
+                    <a:pt x="4867754" y="14771"/>
+                  </a:lnTo>
+                  <a:lnTo>
+                    <a:pt x="4797207" y="0"/>
+                  </a:lnTo>
+                  <a:lnTo>
+                    <a:pt x="4726660" y="5577"/>
+                  </a:lnTo>
+                  <a:lnTo>
+                    <a:pt x="4656113" y="11115"/>
+                  </a:lnTo>
+                  <a:lnTo>
+                    <a:pt x="4585566" y="16612"/>
+                  </a:lnTo>
+                  <a:lnTo>
+                    <a:pt x="4515019" y="22069"/>
+                  </a:lnTo>
+                  <a:lnTo>
+                    <a:pt x="4444471" y="27488"/>
+                  </a:lnTo>
+                  <a:lnTo>
+                    <a:pt x="4373924" y="32866"/>
+                  </a:lnTo>
+                  <a:lnTo>
+                    <a:pt x="4303377" y="38207"/>
+                  </a:lnTo>
+                  <a:lnTo>
+                    <a:pt x="4232830" y="43508"/>
+                  </a:lnTo>
+                  <a:lnTo>
+                    <a:pt x="4162283" y="48771"/>
+                  </a:lnTo>
+                  <a:lnTo>
+                    <a:pt x="4091736" y="53996"/>
+                  </a:lnTo>
+                  <a:lnTo>
+                    <a:pt x="4021188" y="59183"/>
+                  </a:lnTo>
+                  <a:lnTo>
+                    <a:pt x="3950641" y="64333"/>
+                  </a:lnTo>
+                  <a:lnTo>
+                    <a:pt x="3880094" y="69446"/>
+                  </a:lnTo>
+                  <a:lnTo>
+                    <a:pt x="3809547" y="74521"/>
+                  </a:lnTo>
+                  <a:lnTo>
+                    <a:pt x="3739000" y="79560"/>
+                  </a:lnTo>
+                  <a:lnTo>
+                    <a:pt x="3668452" y="84562"/>
+                  </a:lnTo>
+                  <a:lnTo>
+                    <a:pt x="3597905" y="89529"/>
+                  </a:lnTo>
+                  <a:lnTo>
+                    <a:pt x="3527358" y="94459"/>
+                  </a:lnTo>
+                  <a:lnTo>
+                    <a:pt x="3456811" y="99354"/>
+                  </a:lnTo>
+                  <a:lnTo>
+                    <a:pt x="3386264" y="104213"/>
+                  </a:lnTo>
+                  <a:lnTo>
+                    <a:pt x="3315717" y="109037"/>
+                  </a:lnTo>
+                  <a:lnTo>
+                    <a:pt x="3245169" y="113826"/>
+                  </a:lnTo>
+                  <a:lnTo>
+                    <a:pt x="3174622" y="118581"/>
+                  </a:lnTo>
+                  <a:lnTo>
+                    <a:pt x="3104075" y="123301"/>
+                  </a:lnTo>
+                  <a:lnTo>
+                    <a:pt x="3033528" y="127987"/>
+                  </a:lnTo>
+                  <a:lnTo>
+                    <a:pt x="2962981" y="132639"/>
+                  </a:lnTo>
+                  <a:lnTo>
+                    <a:pt x="2892434" y="137258"/>
+                  </a:lnTo>
+                  <a:lnTo>
+                    <a:pt x="2821886" y="141843"/>
+                  </a:lnTo>
+                  <a:lnTo>
+                    <a:pt x="2751339" y="146395"/>
+                  </a:lnTo>
+                  <a:lnTo>
+                    <a:pt x="2680792" y="150914"/>
+                  </a:lnTo>
+                  <a:lnTo>
+                    <a:pt x="2610245" y="155401"/>
+                  </a:lnTo>
+                  <a:lnTo>
+                    <a:pt x="2539698" y="159855"/>
+                  </a:lnTo>
+                  <a:lnTo>
+                    <a:pt x="2469151" y="164277"/>
+                  </a:lnTo>
+                  <a:lnTo>
+                    <a:pt x="2398603" y="168666"/>
+                  </a:lnTo>
+                  <a:lnTo>
+                    <a:pt x="2328056" y="173025"/>
+                  </a:lnTo>
+                  <a:lnTo>
+                    <a:pt x="2257509" y="177351"/>
+                  </a:lnTo>
+                  <a:lnTo>
+                    <a:pt x="2186962" y="181646"/>
+                  </a:lnTo>
+                  <a:lnTo>
+                    <a:pt x="2116415" y="185911"/>
+                  </a:lnTo>
+                  <a:lnTo>
+                    <a:pt x="2045868" y="190144"/>
+                  </a:lnTo>
+                  <a:lnTo>
+                    <a:pt x="1975320" y="194347"/>
+                  </a:lnTo>
+                  <a:lnTo>
+                    <a:pt x="1904773" y="198519"/>
+                  </a:lnTo>
+                  <a:lnTo>
+                    <a:pt x="1834226" y="202661"/>
+                  </a:lnTo>
+                  <a:lnTo>
+                    <a:pt x="1763679" y="206774"/>
+                  </a:lnTo>
+                  <a:lnTo>
+                    <a:pt x="1693132" y="210856"/>
+                  </a:lnTo>
+                  <a:lnTo>
+                    <a:pt x="1622584" y="214909"/>
+                  </a:lnTo>
+                  <a:lnTo>
+                    <a:pt x="1552037" y="218933"/>
+                  </a:lnTo>
+                  <a:lnTo>
+                    <a:pt x="1481490" y="222927"/>
+                  </a:lnTo>
+                  <a:lnTo>
+                    <a:pt x="1410943" y="226893"/>
+                  </a:lnTo>
+                  <a:lnTo>
+                    <a:pt x="1340396" y="230830"/>
+                  </a:lnTo>
+                  <a:lnTo>
+                    <a:pt x="1269849" y="234739"/>
+                  </a:lnTo>
+                  <a:lnTo>
+                    <a:pt x="1199301" y="238619"/>
+                  </a:lnTo>
+                  <a:lnTo>
+                    <a:pt x="1128754" y="242471"/>
+                  </a:lnTo>
+                  <a:lnTo>
+                    <a:pt x="1058207" y="246296"/>
+                  </a:lnTo>
+                  <a:lnTo>
+                    <a:pt x="987660" y="250093"/>
+                  </a:lnTo>
+                  <a:lnTo>
+                    <a:pt x="917113" y="253862"/>
+                  </a:lnTo>
+                  <a:lnTo>
+                    <a:pt x="846566" y="257604"/>
+                  </a:lnTo>
+                  <a:lnTo>
+                    <a:pt x="776018" y="261319"/>
+                  </a:lnTo>
+                  <a:lnTo>
+                    <a:pt x="705471" y="265007"/>
+                  </a:lnTo>
+                  <a:lnTo>
+                    <a:pt x="634924" y="268668"/>
+                  </a:lnTo>
+                  <a:lnTo>
+                    <a:pt x="564377" y="272303"/>
+                  </a:lnTo>
+                  <a:lnTo>
+                    <a:pt x="493830" y="275912"/>
+                  </a:lnTo>
+                  <a:lnTo>
+                    <a:pt x="423283" y="279495"/>
+                  </a:lnTo>
+                  <a:lnTo>
+                    <a:pt x="352735" y="283051"/>
+                  </a:lnTo>
+                  <a:lnTo>
+                    <a:pt x="282188" y="286582"/>
+                  </a:lnTo>
+                  <a:lnTo>
+                    <a:pt x="211641" y="290088"/>
+                  </a:lnTo>
+                  <a:lnTo>
+                    <a:pt x="141094" y="293568"/>
+                  </a:lnTo>
+                  <a:lnTo>
+                    <a:pt x="70547" y="297023"/>
+                  </a:lnTo>
+                  <a:lnTo>
+                    <a:pt x="0" y="300453"/>
                   </a:lnTo>
                 </a:path>
               </a:pathLst>
@@ -4103,312 +4103,312 @@
           </p:nvSpPr>
           <p:spPr>
             <a:xfrm>
-              <a:off x="1172049" y="3196534"/>
-              <a:ext cx="7090630" cy="1841101"/>
+              <a:off x="1264853" y="3256658"/>
+              <a:ext cx="6984170" cy="1717257"/>
             </a:xfrm>
             <a:custGeom>
               <a:avLst/>
               <a:pathLst>
-                <a:path w="7090630" h="1841101">
+                <a:path w="6984170" h="1717257">
                   <a:moveTo>
                     <a:pt x="0" y="0"/>
                   </a:moveTo>
                   <a:lnTo>
-                    <a:pt x="71622" y="35819"/>
-                  </a:lnTo>
-                  <a:lnTo>
-                    <a:pt x="143245" y="71094"/>
-                  </a:lnTo>
-                  <a:lnTo>
-                    <a:pt x="214867" y="105834"/>
-                  </a:lnTo>
-                  <a:lnTo>
-                    <a:pt x="286490" y="140048"/>
-                  </a:lnTo>
-                  <a:lnTo>
-                    <a:pt x="358112" y="173742"/>
-                  </a:lnTo>
-                  <a:lnTo>
-                    <a:pt x="429735" y="206924"/>
-                  </a:lnTo>
-                  <a:lnTo>
-                    <a:pt x="501357" y="239604"/>
-                  </a:lnTo>
-                  <a:lnTo>
-                    <a:pt x="572980" y="271787"/>
-                  </a:lnTo>
-                  <a:lnTo>
-                    <a:pt x="644602" y="303483"/>
-                  </a:lnTo>
-                  <a:lnTo>
-                    <a:pt x="716225" y="334697"/>
-                  </a:lnTo>
-                  <a:lnTo>
-                    <a:pt x="787847" y="365437"/>
-                  </a:lnTo>
-                  <a:lnTo>
-                    <a:pt x="859470" y="395712"/>
-                  </a:lnTo>
-                  <a:lnTo>
-                    <a:pt x="931092" y="425527"/>
-                  </a:lnTo>
-                  <a:lnTo>
-                    <a:pt x="1002715" y="454889"/>
-                  </a:lnTo>
-                  <a:lnTo>
-                    <a:pt x="1074337" y="483806"/>
-                  </a:lnTo>
-                  <a:lnTo>
-                    <a:pt x="1145960" y="512284"/>
-                  </a:lnTo>
-                  <a:lnTo>
-                    <a:pt x="1217582" y="540331"/>
-                  </a:lnTo>
-                  <a:lnTo>
-                    <a:pt x="1289205" y="567951"/>
-                  </a:lnTo>
-                  <a:lnTo>
-                    <a:pt x="1360827" y="595153"/>
-                  </a:lnTo>
-                  <a:lnTo>
-                    <a:pt x="1432450" y="621941"/>
-                  </a:lnTo>
-                  <a:lnTo>
-                    <a:pt x="1504073" y="648324"/>
-                  </a:lnTo>
-                  <a:lnTo>
-                    <a:pt x="1575695" y="674306"/>
-                  </a:lnTo>
-                  <a:lnTo>
-                    <a:pt x="1647318" y="699894"/>
-                  </a:lnTo>
-                  <a:lnTo>
-                    <a:pt x="1718940" y="725093"/>
-                  </a:lnTo>
-                  <a:lnTo>
-                    <a:pt x="1790563" y="749910"/>
-                  </a:lnTo>
-                  <a:lnTo>
-                    <a:pt x="1862185" y="774351"/>
-                  </a:lnTo>
-                  <a:lnTo>
-                    <a:pt x="1933808" y="798421"/>
-                  </a:lnTo>
-                  <a:lnTo>
-                    <a:pt x="2005430" y="822125"/>
-                  </a:lnTo>
-                  <a:lnTo>
-                    <a:pt x="2077053" y="845470"/>
-                  </a:lnTo>
-                  <a:lnTo>
-                    <a:pt x="2148675" y="868461"/>
-                  </a:lnTo>
-                  <a:lnTo>
-                    <a:pt x="2220298" y="891103"/>
-                  </a:lnTo>
-                  <a:lnTo>
-                    <a:pt x="2291920" y="913401"/>
-                  </a:lnTo>
-                  <a:lnTo>
-                    <a:pt x="2363543" y="935361"/>
-                  </a:lnTo>
-                  <a:lnTo>
-                    <a:pt x="2435165" y="956988"/>
-                  </a:lnTo>
-                  <a:lnTo>
-                    <a:pt x="2506788" y="978287"/>
-                  </a:lnTo>
-                  <a:lnTo>
-                    <a:pt x="2578410" y="999262"/>
-                  </a:lnTo>
-                  <a:lnTo>
-                    <a:pt x="2650033" y="1019920"/>
-                  </a:lnTo>
-                  <a:lnTo>
-                    <a:pt x="2721655" y="1040263"/>
-                  </a:lnTo>
-                  <a:lnTo>
-                    <a:pt x="2793278" y="1060299"/>
-                  </a:lnTo>
-                  <a:lnTo>
-                    <a:pt x="2864901" y="1080030"/>
-                  </a:lnTo>
-                  <a:lnTo>
-                    <a:pt x="2936523" y="1099462"/>
-                  </a:lnTo>
-                  <a:lnTo>
-                    <a:pt x="3008146" y="1118598"/>
-                  </a:lnTo>
-                  <a:lnTo>
-                    <a:pt x="3079768" y="1137445"/>
-                  </a:lnTo>
-                  <a:lnTo>
-                    <a:pt x="3151391" y="1156006"/>
-                  </a:lnTo>
-                  <a:lnTo>
-                    <a:pt x="3223013" y="1174285"/>
-                  </a:lnTo>
-                  <a:lnTo>
-                    <a:pt x="3294636" y="1192286"/>
-                  </a:lnTo>
-                  <a:lnTo>
-                    <a:pt x="3366258" y="1210015"/>
-                  </a:lnTo>
-                  <a:lnTo>
-                    <a:pt x="3437881" y="1227474"/>
-                  </a:lnTo>
-                  <a:lnTo>
-                    <a:pt x="3509503" y="1244669"/>
-                  </a:lnTo>
-                  <a:lnTo>
-                    <a:pt x="3581126" y="1261603"/>
-                  </a:lnTo>
-                  <a:lnTo>
-                    <a:pt x="3652748" y="1278279"/>
-                  </a:lnTo>
-                  <a:lnTo>
-                    <a:pt x="3724371" y="1294703"/>
-                  </a:lnTo>
-                  <a:lnTo>
-                    <a:pt x="3795993" y="1310878"/>
-                  </a:lnTo>
-                  <a:lnTo>
-                    <a:pt x="3867616" y="1326807"/>
-                  </a:lnTo>
-                  <a:lnTo>
-                    <a:pt x="3939238" y="1342494"/>
-                  </a:lnTo>
-                  <a:lnTo>
-                    <a:pt x="4010861" y="1357944"/>
-                  </a:lnTo>
-                  <a:lnTo>
-                    <a:pt x="4082483" y="1373159"/>
-                  </a:lnTo>
-                  <a:lnTo>
-                    <a:pt x="4154106" y="1388143"/>
-                  </a:lnTo>
-                  <a:lnTo>
-                    <a:pt x="4225729" y="1402900"/>
-                  </a:lnTo>
-                  <a:lnTo>
-                    <a:pt x="4297351" y="1417432"/>
-                  </a:lnTo>
-                  <a:lnTo>
-                    <a:pt x="4368974" y="1431745"/>
-                  </a:lnTo>
-                  <a:lnTo>
-                    <a:pt x="4440596" y="1445840"/>
-                  </a:lnTo>
-                  <a:lnTo>
-                    <a:pt x="4512219" y="1459721"/>
-                  </a:lnTo>
-                  <a:lnTo>
-                    <a:pt x="4583841" y="1473392"/>
-                  </a:lnTo>
-                  <a:lnTo>
-                    <a:pt x="4655464" y="1486855"/>
-                  </a:lnTo>
-                  <a:lnTo>
-                    <a:pt x="4727086" y="1500114"/>
-                  </a:lnTo>
-                  <a:lnTo>
-                    <a:pt x="4798709" y="1513172"/>
-                  </a:lnTo>
-                  <a:lnTo>
-                    <a:pt x="4870331" y="1526032"/>
-                  </a:lnTo>
-                  <a:lnTo>
-                    <a:pt x="4941954" y="1538697"/>
-                  </a:lnTo>
-                  <a:lnTo>
-                    <a:pt x="5013576" y="1551169"/>
-                  </a:lnTo>
-                  <a:lnTo>
-                    <a:pt x="5085199" y="1563452"/>
-                  </a:lnTo>
-                  <a:lnTo>
-                    <a:pt x="5156821" y="1575549"/>
-                  </a:lnTo>
-                  <a:lnTo>
-                    <a:pt x="5228444" y="1587462"/>
-                  </a:lnTo>
-                  <a:lnTo>
-                    <a:pt x="5300066" y="1599195"/>
-                  </a:lnTo>
-                  <a:lnTo>
-                    <a:pt x="5371689" y="1610749"/>
-                  </a:lnTo>
-                  <a:lnTo>
-                    <a:pt x="5443311" y="1622129"/>
-                  </a:lnTo>
-                  <a:lnTo>
-                    <a:pt x="5514934" y="1633335"/>
-                  </a:lnTo>
-                  <a:lnTo>
-                    <a:pt x="5586557" y="1644372"/>
-                  </a:lnTo>
-                  <a:lnTo>
-                    <a:pt x="5658179" y="1655241"/>
-                  </a:lnTo>
-                  <a:lnTo>
-                    <a:pt x="5729802" y="1665945"/>
-                  </a:lnTo>
-                  <a:lnTo>
-                    <a:pt x="5801424" y="1676486"/>
-                  </a:lnTo>
-                  <a:lnTo>
-                    <a:pt x="5873047" y="1686868"/>
-                  </a:lnTo>
-                  <a:lnTo>
-                    <a:pt x="5944669" y="1697092"/>
-                  </a:lnTo>
-                  <a:lnTo>
-                    <a:pt x="6016292" y="1707162"/>
-                  </a:lnTo>
-                  <a:lnTo>
-                    <a:pt x="6087914" y="1717078"/>
-                  </a:lnTo>
-                  <a:lnTo>
-                    <a:pt x="6159537" y="1726844"/>
-                  </a:lnTo>
-                  <a:lnTo>
-                    <a:pt x="6231159" y="1736462"/>
-                  </a:lnTo>
-                  <a:lnTo>
-                    <a:pt x="6302782" y="1745933"/>
-                  </a:lnTo>
-                  <a:lnTo>
-                    <a:pt x="6374404" y="1755261"/>
-                  </a:lnTo>
-                  <a:lnTo>
-                    <a:pt x="6446027" y="1764448"/>
-                  </a:lnTo>
-                  <a:lnTo>
-                    <a:pt x="6517649" y="1773495"/>
-                  </a:lnTo>
-                  <a:lnTo>
-                    <a:pt x="6589272" y="1782405"/>
-                  </a:lnTo>
-                  <a:lnTo>
-                    <a:pt x="6660894" y="1791179"/>
-                  </a:lnTo>
-                  <a:lnTo>
-                    <a:pt x="6732517" y="1799821"/>
-                  </a:lnTo>
-                  <a:lnTo>
-                    <a:pt x="6804139" y="1808331"/>
-                  </a:lnTo>
-                  <a:lnTo>
-                    <a:pt x="6875762" y="1816713"/>
-                  </a:lnTo>
-                  <a:lnTo>
-                    <a:pt x="6947385" y="1824967"/>
-                  </a:lnTo>
-                  <a:lnTo>
-                    <a:pt x="7019007" y="1833096"/>
-                  </a:lnTo>
-                  <a:lnTo>
-                    <a:pt x="7090630" y="1841101"/>
+                    <a:pt x="70547" y="33409"/>
+                  </a:lnTo>
+                  <a:lnTo>
+                    <a:pt x="141094" y="66312"/>
+                  </a:lnTo>
+                  <a:lnTo>
+                    <a:pt x="211641" y="98715"/>
+                  </a:lnTo>
+                  <a:lnTo>
+                    <a:pt x="282188" y="130627"/>
+                  </a:lnTo>
+                  <a:lnTo>
+                    <a:pt x="352735" y="162055"/>
+                  </a:lnTo>
+                  <a:lnTo>
+                    <a:pt x="423283" y="193005"/>
+                  </a:lnTo>
+                  <a:lnTo>
+                    <a:pt x="493830" y="223487"/>
+                  </a:lnTo>
+                  <a:lnTo>
+                    <a:pt x="564377" y="253505"/>
+                  </a:lnTo>
+                  <a:lnTo>
+                    <a:pt x="634924" y="283068"/>
+                  </a:lnTo>
+                  <a:lnTo>
+                    <a:pt x="705471" y="312183"/>
+                  </a:lnTo>
+                  <a:lnTo>
+                    <a:pt x="776018" y="340856"/>
+                  </a:lnTo>
+                  <a:lnTo>
+                    <a:pt x="846566" y="369094"/>
+                  </a:lnTo>
+                  <a:lnTo>
+                    <a:pt x="917113" y="396903"/>
+                  </a:lnTo>
+                  <a:lnTo>
+                    <a:pt x="987660" y="424290"/>
+                  </a:lnTo>
+                  <a:lnTo>
+                    <a:pt x="1058207" y="451262"/>
+                  </a:lnTo>
+                  <a:lnTo>
+                    <a:pt x="1128754" y="477825"/>
+                  </a:lnTo>
+                  <a:lnTo>
+                    <a:pt x="1199301" y="503984"/>
+                  </a:lnTo>
+                  <a:lnTo>
+                    <a:pt x="1269849" y="529747"/>
+                  </a:lnTo>
+                  <a:lnTo>
+                    <a:pt x="1340396" y="555119"/>
+                  </a:lnTo>
+                  <a:lnTo>
+                    <a:pt x="1410943" y="580106"/>
+                  </a:lnTo>
+                  <a:lnTo>
+                    <a:pt x="1481490" y="604713"/>
+                  </a:lnTo>
+                  <a:lnTo>
+                    <a:pt x="1552037" y="628948"/>
+                  </a:lnTo>
+                  <a:lnTo>
+                    <a:pt x="1622584" y="652814"/>
+                  </a:lnTo>
+                  <a:lnTo>
+                    <a:pt x="1693132" y="676319"/>
+                  </a:lnTo>
+                  <a:lnTo>
+                    <a:pt x="1763679" y="699467"/>
+                  </a:lnTo>
+                  <a:lnTo>
+                    <a:pt x="1834226" y="722263"/>
+                  </a:lnTo>
+                  <a:lnTo>
+                    <a:pt x="1904773" y="744714"/>
+                  </a:lnTo>
+                  <a:lnTo>
+                    <a:pt x="1975320" y="766824"/>
+                  </a:lnTo>
+                  <a:lnTo>
+                    <a:pt x="2045868" y="788599"/>
+                  </a:lnTo>
+                  <a:lnTo>
+                    <a:pt x="2116415" y="810043"/>
+                  </a:lnTo>
+                  <a:lnTo>
+                    <a:pt x="2186962" y="831162"/>
+                  </a:lnTo>
+                  <a:lnTo>
+                    <a:pt x="2257509" y="851960"/>
+                  </a:lnTo>
+                  <a:lnTo>
+                    <a:pt x="2328056" y="872443"/>
+                  </a:lnTo>
+                  <a:lnTo>
+                    <a:pt x="2398603" y="892615"/>
+                  </a:lnTo>
+                  <a:lnTo>
+                    <a:pt x="2469151" y="912481"/>
+                  </a:lnTo>
+                  <a:lnTo>
+                    <a:pt x="2539698" y="932046"/>
+                  </a:lnTo>
+                  <a:lnTo>
+                    <a:pt x="2610245" y="951313"/>
+                  </a:lnTo>
+                  <a:lnTo>
+                    <a:pt x="2680792" y="970289"/>
+                  </a:lnTo>
+                  <a:lnTo>
+                    <a:pt x="2751339" y="988976"/>
+                  </a:lnTo>
+                  <a:lnTo>
+                    <a:pt x="2821886" y="1007380"/>
+                  </a:lnTo>
+                  <a:lnTo>
+                    <a:pt x="2892434" y="1025505"/>
+                  </a:lnTo>
+                  <a:lnTo>
+                    <a:pt x="2962981" y="1043354"/>
+                  </a:lnTo>
+                  <a:lnTo>
+                    <a:pt x="3033528" y="1060933"/>
+                  </a:lnTo>
+                  <a:lnTo>
+                    <a:pt x="3104075" y="1078245"/>
+                  </a:lnTo>
+                  <a:lnTo>
+                    <a:pt x="3174622" y="1095295"/>
+                  </a:lnTo>
+                  <a:lnTo>
+                    <a:pt x="3245169" y="1112086"/>
+                  </a:lnTo>
+                  <a:lnTo>
+                    <a:pt x="3315717" y="1128621"/>
+                  </a:lnTo>
+                  <a:lnTo>
+                    <a:pt x="3386264" y="1144907"/>
+                  </a:lnTo>
+                  <a:lnTo>
+                    <a:pt x="3456811" y="1160945"/>
+                  </a:lnTo>
+                  <a:lnTo>
+                    <a:pt x="3527358" y="1176739"/>
+                  </a:lnTo>
+                  <a:lnTo>
+                    <a:pt x="3597905" y="1192294"/>
+                  </a:lnTo>
+                  <a:lnTo>
+                    <a:pt x="3668452" y="1207613"/>
+                  </a:lnTo>
+                  <a:lnTo>
+                    <a:pt x="3739000" y="1222700"/>
+                  </a:lnTo>
+                  <a:lnTo>
+                    <a:pt x="3809547" y="1237557"/>
+                  </a:lnTo>
+                  <a:lnTo>
+                    <a:pt x="3880094" y="1252190"/>
+                  </a:lnTo>
+                  <a:lnTo>
+                    <a:pt x="3950641" y="1266600"/>
+                  </a:lnTo>
+                  <a:lnTo>
+                    <a:pt x="4021188" y="1280791"/>
+                  </a:lnTo>
+                  <a:lnTo>
+                    <a:pt x="4091736" y="1294767"/>
+                  </a:lnTo>
+                  <a:lnTo>
+                    <a:pt x="4162283" y="1308532"/>
+                  </a:lnTo>
+                  <a:lnTo>
+                    <a:pt x="4232830" y="1322087"/>
+                  </a:lnTo>
+                  <a:lnTo>
+                    <a:pt x="4303377" y="1335437"/>
+                  </a:lnTo>
+                  <a:lnTo>
+                    <a:pt x="4373924" y="1348584"/>
+                  </a:lnTo>
+                  <a:lnTo>
+                    <a:pt x="4444471" y="1361531"/>
+                  </a:lnTo>
+                  <a:lnTo>
+                    <a:pt x="4515019" y="1374282"/>
+                  </a:lnTo>
+                  <a:lnTo>
+                    <a:pt x="4585566" y="1386840"/>
+                  </a:lnTo>
+                  <a:lnTo>
+                    <a:pt x="4656113" y="1399207"/>
+                  </a:lnTo>
+                  <a:lnTo>
+                    <a:pt x="4726660" y="1411387"/>
+                  </a:lnTo>
+                  <a:lnTo>
+                    <a:pt x="4797207" y="1423381"/>
+                  </a:lnTo>
+                  <a:lnTo>
+                    <a:pt x="4867754" y="1435194"/>
+                  </a:lnTo>
+                  <a:lnTo>
+                    <a:pt x="4938302" y="1446828"/>
+                  </a:lnTo>
+                  <a:lnTo>
+                    <a:pt x="5008849" y="1458285"/>
+                  </a:lnTo>
+                  <a:lnTo>
+                    <a:pt x="5079396" y="1469568"/>
+                  </a:lnTo>
+                  <a:lnTo>
+                    <a:pt x="5149943" y="1480680"/>
+                  </a:lnTo>
+                  <a:lnTo>
+                    <a:pt x="5220490" y="1491623"/>
+                  </a:lnTo>
+                  <a:lnTo>
+                    <a:pt x="5291037" y="1502400"/>
+                  </a:lnTo>
+                  <a:lnTo>
+                    <a:pt x="5361585" y="1513014"/>
+                  </a:lnTo>
+                  <a:lnTo>
+                    <a:pt x="5432132" y="1523467"/>
+                  </a:lnTo>
+                  <a:lnTo>
+                    <a:pt x="5502679" y="1533761"/>
+                  </a:lnTo>
+                  <a:lnTo>
+                    <a:pt x="5573226" y="1543899"/>
+                  </a:lnTo>
+                  <a:lnTo>
+                    <a:pt x="5643773" y="1553883"/>
+                  </a:lnTo>
+                  <a:lnTo>
+                    <a:pt x="5714320" y="1563715"/>
+                  </a:lnTo>
+                  <a:lnTo>
+                    <a:pt x="5784868" y="1573399"/>
+                  </a:lnTo>
+                  <a:lnTo>
+                    <a:pt x="5855415" y="1582935"/>
+                  </a:lnTo>
+                  <a:lnTo>
+                    <a:pt x="5925962" y="1592327"/>
+                  </a:lnTo>
+                  <a:lnTo>
+                    <a:pt x="5996509" y="1601576"/>
+                  </a:lnTo>
+                  <a:lnTo>
+                    <a:pt x="6067056" y="1610685"/>
+                  </a:lnTo>
+                  <a:lnTo>
+                    <a:pt x="6137604" y="1619656"/>
+                  </a:lnTo>
+                  <a:lnTo>
+                    <a:pt x="6208151" y="1628491"/>
+                  </a:lnTo>
+                  <a:lnTo>
+                    <a:pt x="6278698" y="1637191"/>
+                  </a:lnTo>
+                  <a:lnTo>
+                    <a:pt x="6349245" y="1645760"/>
+                  </a:lnTo>
+                  <a:lnTo>
+                    <a:pt x="6419792" y="1654198"/>
+                  </a:lnTo>
+                  <a:lnTo>
+                    <a:pt x="6490339" y="1662509"/>
+                  </a:lnTo>
+                  <a:lnTo>
+                    <a:pt x="6560887" y="1670693"/>
+                  </a:lnTo>
+                  <a:lnTo>
+                    <a:pt x="6631434" y="1678754"/>
+                  </a:lnTo>
+                  <a:lnTo>
+                    <a:pt x="6701981" y="1686692"/>
+                  </a:lnTo>
+                  <a:lnTo>
+                    <a:pt x="6772528" y="1694509"/>
+                  </a:lnTo>
+                  <a:lnTo>
+                    <a:pt x="6843075" y="1702208"/>
+                  </a:lnTo>
+                  <a:lnTo>
+                    <a:pt x="6913622" y="1709790"/>
+                  </a:lnTo>
+                  <a:lnTo>
+                    <a:pt x="6984170" y="1717257"/>
                   </a:lnTo>
                 </a:path>
               </a:pathLst>
@@ -4437,21 +4437,21 @@
           </p:nvSpPr>
           <p:spPr>
             <a:xfrm>
-              <a:off x="817517" y="4727786"/>
-              <a:ext cx="7799693" cy="0"/>
+              <a:off x="915645" y="4684908"/>
+              <a:ext cx="7682587" cy="0"/>
             </a:xfrm>
             <a:custGeom>
               <a:avLst/>
               <a:pathLst>
-                <a:path w="7799693" h="0">
+                <a:path w="7682587" h="0">
                   <a:moveTo>
                     <a:pt x="0" y="0"/>
                   </a:moveTo>
                   <a:lnTo>
-                    <a:pt x="7799693" y="0"/>
-                  </a:lnTo>
-                  <a:lnTo>
-                    <a:pt x="7799693" y="0"/>
+                    <a:pt x="7682587" y="0"/>
+                  </a:lnTo>
+                  <a:lnTo>
+                    <a:pt x="7682587" y="0"/>
                   </a:lnTo>
                 </a:path>
               </a:pathLst>
@@ -4480,15 +4480,15 @@
           </p:nvSpPr>
           <p:spPr>
             <a:xfrm>
-              <a:off x="6071765" y="2073503"/>
-              <a:ext cx="0" cy="3649639"/>
+              <a:off x="6091004" y="2209169"/>
+              <a:ext cx="0" cy="3404141"/>
             </a:xfrm>
             <a:custGeom>
               <a:avLst/>
               <a:pathLst>
-                <a:path w="0" h="3649639">
+                <a:path w="0" h="3404141">
                   <a:moveTo>
-                    <a:pt x="0" y="3649639"/>
+                    <a:pt x="0" y="3404141"/>
                   </a:moveTo>
                   <a:lnTo>
                     <a:pt x="0" y="0"/>
@@ -4523,15 +4523,15 @@
           </p:nvSpPr>
           <p:spPr>
             <a:xfrm>
-              <a:off x="5051213" y="2073503"/>
-              <a:ext cx="0" cy="3649639"/>
+              <a:off x="5085775" y="2209169"/>
+              <a:ext cx="0" cy="3404141"/>
             </a:xfrm>
             <a:custGeom>
               <a:avLst/>
               <a:pathLst>
-                <a:path w="0" h="3649639">
+                <a:path w="0" h="3404141">
                   <a:moveTo>
-                    <a:pt x="0" y="3649639"/>
+                    <a:pt x="0" y="3404141"/>
                   </a:moveTo>
                   <a:lnTo>
                     <a:pt x="0" y="0"/>
@@ -4566,15 +4566,15 @@
           </p:nvSpPr>
           <p:spPr>
             <a:xfrm>
-              <a:off x="6733531" y="2073503"/>
-              <a:ext cx="0" cy="3649639"/>
+              <a:off x="6742834" y="2209169"/>
+              <a:ext cx="0" cy="3404141"/>
             </a:xfrm>
             <a:custGeom>
               <a:avLst/>
               <a:pathLst>
-                <a:path w="0" h="3649639">
+                <a:path w="0" h="3404141">
                   <a:moveTo>
-                    <a:pt x="0" y="3649639"/>
+                    <a:pt x="0" y="3404141"/>
                   </a:moveTo>
                   <a:lnTo>
                     <a:pt x="0" y="0"/>
@@ -4609,8 +4609,8 @@
           </p:nvSpPr>
           <p:spPr>
             <a:xfrm>
-              <a:off x="692708" y="5517199"/>
-              <a:ext cx="62179" cy="80101"/>
+              <a:off x="756929" y="5407599"/>
+              <a:ext cx="79004" cy="101955"/>
             </a:xfrm>
             <a:prstGeom prst="rect">
               <a:avLst/>
@@ -4623,7 +4623,7 @@
             <a:p>
               <a:pPr algn="l" marL="0" marR="0" indent="0">
                 <a:lnSpc>
-                  <a:spcPts val="880"/>
+                  <a:spcPts val="1120"/>
                 </a:lnSpc>
                 <a:spcBef>
                   <a:spcPts val="0"/>
@@ -4633,7 +4633,7 @@
                 </a:spcAft>
               </a:pPr>
               <a:r>
-                <a:rPr sz="880">
+                <a:rPr sz="1120">
                   <a:solidFill>
                     <a:srgbClr val="4D4D4D">
                       <a:alpha val="100000"/>
@@ -4655,8 +4655,8 @@
           </p:nvSpPr>
           <p:spPr>
             <a:xfrm>
-              <a:off x="692708" y="4687735"/>
-              <a:ext cx="62179" cy="80101"/>
+              <a:off x="756929" y="4633931"/>
+              <a:ext cx="79004" cy="101955"/>
             </a:xfrm>
             <a:prstGeom prst="rect">
               <a:avLst/>
@@ -4669,7 +4669,7 @@
             <a:p>
               <a:pPr algn="l" marL="0" marR="0" indent="0">
                 <a:lnSpc>
-                  <a:spcPts val="880"/>
+                  <a:spcPts val="1120"/>
                 </a:lnSpc>
                 <a:spcBef>
                   <a:spcPts val="0"/>
@@ -4679,7 +4679,7 @@
                 </a:spcAft>
               </a:pPr>
               <a:r>
-                <a:rPr sz="880">
+                <a:rPr sz="1120">
                   <a:solidFill>
                     <a:srgbClr val="4D4D4D">
                       <a:alpha val="100000"/>
@@ -4701,8 +4701,8 @@
           </p:nvSpPr>
           <p:spPr>
             <a:xfrm>
-              <a:off x="692708" y="3858272"/>
-              <a:ext cx="62179" cy="80101"/>
+              <a:off x="756929" y="3860262"/>
+              <a:ext cx="79004" cy="101955"/>
             </a:xfrm>
             <a:prstGeom prst="rect">
               <a:avLst/>
@@ -4715,7 +4715,7 @@
             <a:p>
               <a:pPr algn="l" marL="0" marR="0" indent="0">
                 <a:lnSpc>
-                  <a:spcPts val="880"/>
+                  <a:spcPts val="1120"/>
                 </a:lnSpc>
                 <a:spcBef>
                   <a:spcPts val="0"/>
@@ -4725,7 +4725,7 @@
                 </a:spcAft>
               </a:pPr>
               <a:r>
-                <a:rPr sz="880">
+                <a:rPr sz="1120">
                   <a:solidFill>
                     <a:srgbClr val="4D4D4D">
                       <a:alpha val="100000"/>
@@ -4747,8 +4747,8 @@
           </p:nvSpPr>
           <p:spPr>
             <a:xfrm>
-              <a:off x="692708" y="3028808"/>
-              <a:ext cx="62179" cy="80101"/>
+              <a:off x="756929" y="3086593"/>
+              <a:ext cx="79004" cy="101955"/>
             </a:xfrm>
             <a:prstGeom prst="rect">
               <a:avLst/>
@@ -4761,7 +4761,7 @@
             <a:p>
               <a:pPr algn="l" marL="0" marR="0" indent="0">
                 <a:lnSpc>
-                  <a:spcPts val="880"/>
+                  <a:spcPts val="1120"/>
                 </a:lnSpc>
                 <a:spcBef>
                   <a:spcPts val="0"/>
@@ -4771,7 +4771,7 @@
                 </a:spcAft>
               </a:pPr>
               <a:r>
-                <a:rPr sz="880">
+                <a:rPr sz="1120">
                   <a:solidFill>
                     <a:srgbClr val="4D4D4D">
                       <a:alpha val="100000"/>
@@ -4793,8 +4793,8 @@
           </p:nvSpPr>
           <p:spPr>
             <a:xfrm>
-              <a:off x="692708" y="2199345"/>
-              <a:ext cx="62179" cy="80101"/>
+              <a:off x="756929" y="2312925"/>
+              <a:ext cx="79004" cy="101955"/>
             </a:xfrm>
             <a:prstGeom prst="rect">
               <a:avLst/>
@@ -4807,7 +4807,7 @@
             <a:p>
               <a:pPr algn="l" marL="0" marR="0" indent="0">
                 <a:lnSpc>
-                  <a:spcPts val="880"/>
+                  <a:spcPts val="1120"/>
                 </a:lnSpc>
                 <a:spcBef>
                   <a:spcPts val="0"/>
@@ -4817,7 +4817,7 @@
                 </a:spcAft>
               </a:pPr>
               <a:r>
-                <a:rPr sz="880">
+                <a:rPr sz="1120">
                   <a:solidFill>
                     <a:srgbClr val="4D4D4D">
                       <a:alpha val="100000"/>
@@ -4839,8 +4839,8 @@
           </p:nvSpPr>
           <p:spPr>
             <a:xfrm>
-              <a:off x="2331636" y="5785772"/>
-              <a:ext cx="161574" cy="80101"/>
+              <a:off x="2383963" y="5693022"/>
+              <a:ext cx="205282" cy="101955"/>
             </a:xfrm>
             <a:prstGeom prst="rect">
               <a:avLst/>
@@ -4853,7 +4853,7 @@
             <a:p>
               <a:pPr algn="l" marL="0" marR="0" indent="0">
                 <a:lnSpc>
-                  <a:spcPts val="880"/>
+                  <a:spcPts val="1120"/>
                 </a:lnSpc>
                 <a:spcBef>
                   <a:spcPts val="0"/>
@@ -4863,7 +4863,7 @@
                 </a:spcAft>
               </a:pPr>
               <a:r>
-                <a:rPr sz="880">
+                <a:rPr sz="1120">
                   <a:solidFill>
                     <a:srgbClr val="4D4D4D">
                       <a:alpha val="100000"/>
@@ -4885,8 +4885,8 @@
           </p:nvSpPr>
           <p:spPr>
             <a:xfrm>
-              <a:off x="4181509" y="5785772"/>
-              <a:ext cx="161574" cy="80101"/>
+              <a:off x="4206062" y="5693022"/>
+              <a:ext cx="205282" cy="101955"/>
             </a:xfrm>
             <a:prstGeom prst="rect">
               <a:avLst/>
@@ -4899,7 +4899,7 @@
             <a:p>
               <a:pPr algn="l" marL="0" marR="0" indent="0">
                 <a:lnSpc>
-                  <a:spcPts val="880"/>
+                  <a:spcPts val="1120"/>
                 </a:lnSpc>
                 <a:spcBef>
                   <a:spcPts val="0"/>
@@ -4909,7 +4909,7 @@
                 </a:spcAft>
               </a:pPr>
               <a:r>
-                <a:rPr sz="880">
+                <a:rPr sz="1120">
                   <a:solidFill>
                     <a:srgbClr val="4D4D4D">
                       <a:alpha val="100000"/>
@@ -4931,8 +4931,8 @@
           </p:nvSpPr>
           <p:spPr>
             <a:xfrm>
-              <a:off x="6081080" y="5785772"/>
-              <a:ext cx="62179" cy="80101"/>
+              <a:off x="6091300" y="5693022"/>
+              <a:ext cx="79004" cy="101955"/>
             </a:xfrm>
             <a:prstGeom prst="rect">
               <a:avLst/>
@@ -4945,7 +4945,7 @@
             <a:p>
               <a:pPr algn="l" marL="0" marR="0" indent="0">
                 <a:lnSpc>
-                  <a:spcPts val="880"/>
+                  <a:spcPts val="1120"/>
                 </a:lnSpc>
                 <a:spcBef>
                   <a:spcPts val="0"/>
@@ -4955,7 +4955,7 @@
                 </a:spcAft>
               </a:pPr>
               <a:r>
-                <a:rPr sz="880">
+                <a:rPr sz="1120">
                   <a:solidFill>
                     <a:srgbClr val="4D4D4D">
                       <a:alpha val="100000"/>
@@ -4977,8 +4977,8 @@
           </p:nvSpPr>
           <p:spPr>
             <a:xfrm>
-              <a:off x="7899863" y="5785772"/>
-              <a:ext cx="124358" cy="80101"/>
+              <a:off x="7873896" y="5693022"/>
+              <a:ext cx="158008" cy="101955"/>
             </a:xfrm>
             <a:prstGeom prst="rect">
               <a:avLst/>
@@ -4991,7 +4991,7 @@
             <a:p>
               <a:pPr algn="l" marL="0" marR="0" indent="0">
                 <a:lnSpc>
-                  <a:spcPts val="880"/>
+                  <a:spcPts val="1120"/>
                 </a:lnSpc>
                 <a:spcBef>
                   <a:spcPts val="0"/>
@@ -5001,7 +5001,7 @@
                 </a:spcAft>
               </a:pPr>
               <a:r>
-                <a:rPr sz="880">
+                <a:rPr sz="1120">
                   <a:solidFill>
                     <a:srgbClr val="4D4D4D">
                       <a:alpha val="100000"/>
@@ -5023,8 +5023,8 @@
           </p:nvSpPr>
           <p:spPr>
             <a:xfrm>
-              <a:off x="3832408" y="5925448"/>
-              <a:ext cx="1769912" cy="100218"/>
+              <a:off x="3630809" y="5870717"/>
+              <a:ext cx="2252258" cy="127558"/>
             </a:xfrm>
             <a:prstGeom prst="rect">
               <a:avLst/>
@@ -5037,7 +5037,7 @@
             <a:p>
               <a:pPr algn="l" marL="0" marR="0" indent="0">
                 <a:lnSpc>
-                  <a:spcPts val="1100"/>
+                  <a:spcPts val="1400"/>
                 </a:lnSpc>
                 <a:spcBef>
                   <a:spcPts val="0"/>
@@ -5047,7 +5047,7 @@
                 </a:spcAft>
               </a:pPr>
               <a:r>
-                <a:rPr sz="1100">
+                <a:rPr sz="1400">
                   <a:solidFill>
                     <a:srgbClr val="000000">
                       <a:alpha val="100000"/>
@@ -5069,8 +5069,8 @@
           </p:nvSpPr>
           <p:spPr>
             <a:xfrm rot="-5400000">
-              <a:off x="68446" y="3848213"/>
-              <a:ext cx="1016904" cy="100218"/>
+              <a:off x="-37527" y="3847460"/>
+              <a:ext cx="1294150" cy="127558"/>
             </a:xfrm>
             <a:prstGeom prst="rect">
               <a:avLst/>
@@ -5083,7 +5083,7 @@
             <a:p>
               <a:pPr algn="l" marL="0" marR="0" indent="0">
                 <a:lnSpc>
-                  <a:spcPts val="1100"/>
+                  <a:spcPts val="1400"/>
                 </a:lnSpc>
                 <a:spcBef>
                   <a:spcPts val="0"/>
@@ -5093,7 +5093,7 @@
                 </a:spcAft>
               </a:pPr>
               <a:r>
-                <a:rPr sz="1100">
+                <a:rPr sz="1400">
                   <a:solidFill>
                     <a:srgbClr val="000000">
                       <a:alpha val="100000"/>
@@ -5115,8 +5115,8 @@
           </p:nvSpPr>
           <p:spPr>
             <a:xfrm>
-              <a:off x="817517" y="1896563"/>
-              <a:ext cx="5413065" cy="82021"/>
+              <a:off x="915645" y="1977589"/>
+              <a:ext cx="7220102" cy="109362"/>
             </a:xfrm>
             <a:prstGeom prst="rect">
               <a:avLst/>
@@ -5129,7 +5129,7 @@
             <a:p>
               <a:pPr algn="l" marL="0" marR="0" indent="0">
                 <a:lnSpc>
-                  <a:spcPts val="900"/>
+                  <a:spcPts val="1200"/>
                 </a:lnSpc>
                 <a:spcBef>
                   <a:spcPts val="0"/>
@@ -5139,7 +5139,7 @@
                 </a:spcAft>
               </a:pPr>
               <a:r>
-                <a:rPr sz="900">
+                <a:rPr sz="1200">
                   <a:solidFill>
                     <a:srgbClr val="404040">
                       <a:alpha val="100000"/>
@@ -5161,8 +5161,8 @@
           </p:nvSpPr>
           <p:spPr>
             <a:xfrm>
-              <a:off x="817517" y="1669789"/>
-              <a:ext cx="2234793" cy="120152"/>
+              <a:off x="915645" y="1688767"/>
+              <a:ext cx="2845064" cy="153070"/>
             </a:xfrm>
             <a:prstGeom prst="rect">
               <a:avLst/>
@@ -5175,7 +5175,7 @@
             <a:p>
               <a:pPr algn="l" marL="0" marR="0" indent="0">
                 <a:lnSpc>
-                  <a:spcPts val="1320"/>
+                  <a:spcPts val="1680"/>
                 </a:lnSpc>
                 <a:spcBef>
                   <a:spcPts val="0"/>
@@ -5185,7 +5185,7 @@
                 </a:spcAft>
               </a:pPr>
               <a:r>
-                <a:rPr sz="1320">
+                <a:rPr sz="1680">
                   <a:solidFill>
                     <a:srgbClr val="000000">
                       <a:alpha val="100000"/>
